--- a/Презентация_Шифр-Связь.pptx
+++ b/Презентация_Шифр-Связь.pptx
@@ -800,7 +800,7 @@
   <p:cSld>
     <p:spTree>
       <p:nvGrpSpPr>
-        <p:cNvPr id="202" name="Shape 202"/>
+        <p:cNvPr id="216" name="Shape 216"/>
         <p:cNvGrpSpPr/>
         <p:nvPr/>
       </p:nvGrpSpPr>
@@ -814,7 +814,7 @@
       </p:grpSpPr>
       <p:sp>
         <p:nvSpPr>
-          <p:cNvPr id="203" name="Google Shape;203;h46d00c66c8b7babc_24_26:notes"/>
+          <p:cNvPr id="217" name="Google Shape;217;h46d00c66c8b7babc_24_26:notes"/>
           <p:cNvSpPr txBox="1"/>
           <p:nvPr>
             <p:ph idx="1" type="body"/>
@@ -853,7 +853,7 @@
       </p:sp>
       <p:sp>
         <p:nvSpPr>
-          <p:cNvPr id="204" name="Google Shape;204;h46d00c66c8b7babc_24_26:notes"/>
+          <p:cNvPr id="218" name="Google Shape;218;h46d00c66c8b7babc_24_26:notes"/>
           <p:cNvSpPr/>
           <p:nvPr>
             <p:ph idx="2" type="sldImg"/>
@@ -1610,7 +1610,7 @@
   <p:cSld>
     <p:spTree>
       <p:nvGrpSpPr>
-        <p:cNvPr id="196" name="Shape 196"/>
+        <p:cNvPr id="210" name="Shape 210"/>
         <p:cNvGrpSpPr/>
         <p:nvPr/>
       </p:nvGrpSpPr>
@@ -1624,7 +1624,7 @@
       </p:grpSpPr>
       <p:sp>
         <p:nvSpPr>
-          <p:cNvPr id="197" name="Google Shape;197;h46d00c66c8b7babc_24_19:notes"/>
+          <p:cNvPr id="211" name="Google Shape;211;h46d00c66c8b7babc_24_19:notes"/>
           <p:cNvSpPr txBox="1"/>
           <p:nvPr>
             <p:ph idx="1" type="body"/>
@@ -1663,7 +1663,7 @@
       </p:sp>
       <p:sp>
         <p:nvSpPr>
-          <p:cNvPr id="198" name="Google Shape;198;h46d00c66c8b7babc_24_19:notes"/>
+          <p:cNvPr id="212" name="Google Shape;212;h46d00c66c8b7babc_24_19:notes"/>
           <p:cNvSpPr/>
           <p:nvPr>
             <p:ph idx="2" type="sldImg"/>
@@ -20164,7 +20164,7 @@
     </p:bg>
     <p:spTree>
       <p:nvGrpSpPr>
-        <p:cNvPr id="205" name="Shape 205"/>
+        <p:cNvPr id="219" name="Shape 219"/>
         <p:cNvGrpSpPr/>
         <p:nvPr/>
       </p:nvGrpSpPr>
@@ -20178,7 +20178,7 @@
       </p:grpSpPr>
       <p:sp>
         <p:nvSpPr>
-          <p:cNvPr id="206" name="Google Shape;206;p34"/>
+          <p:cNvPr id="220" name="Google Shape;220;p34"/>
           <p:cNvSpPr txBox="1"/>
           <p:nvPr/>
         </p:nvSpPr>
@@ -20228,7 +20228,7 @@
       </p:sp>
       <p:sp>
         <p:nvSpPr>
-          <p:cNvPr id="207" name="Google Shape;207;p34"/>
+          <p:cNvPr id="221" name="Google Shape;221;p34"/>
           <p:cNvSpPr txBox="1"/>
           <p:nvPr/>
         </p:nvSpPr>
@@ -21148,7 +21148,7 @@
             <a:tbl>
               <a:tblPr>
                 <a:noFill/>
-                <a:tableStyleId>{DC0BBAE0-225E-48F2-A454-79BFA5DBE120}</a:tableStyleId>
+                <a:tableStyleId>{EAFA6D72-EFEA-4E15-A643-8ACE97BC5E85}</a:tableStyleId>
               </a:tblPr>
               <a:tblGrid>
                 <a:gridCol w="2222675"/>
@@ -23504,6 +23504,593 @@
           </a:p>
         </p:txBody>
       </p:sp>
+      <p:pic>
+        <p:nvPicPr>
+          <p:cNvPr id="196" name="Google Shape;196;p32"/>
+          <p:cNvPicPr preferRelativeResize="0"/>
+          <p:nvPr/>
+        </p:nvPicPr>
+        <p:blipFill>
+          <a:blip r:embed="rId4">
+            <a:alphaModFix/>
+          </a:blip>
+          <a:stretch>
+            <a:fillRect/>
+          </a:stretch>
+        </p:blipFill>
+        <p:spPr>
+          <a:xfrm>
+            <a:off x="152400" y="1931450"/>
+            <a:ext cx="571500" cy="571500"/>
+          </a:xfrm>
+          <a:prstGeom prst="rect">
+            <a:avLst/>
+          </a:prstGeom>
+          <a:noFill/>
+          <a:ln>
+            <a:noFill/>
+          </a:ln>
+        </p:spPr>
+      </p:pic>
+      <p:grpSp>
+        <p:nvGrpSpPr>
+          <p:cNvPr id="197" name="Google Shape;197;p32"/>
+          <p:cNvGrpSpPr/>
+          <p:nvPr/>
+        </p:nvGrpSpPr>
+        <p:grpSpPr>
+          <a:xfrm>
+            <a:off x="-170226" y="2381362"/>
+            <a:ext cx="1840189" cy="1035103"/>
+            <a:chOff x="-60800" y="2655338"/>
+            <a:chExt cx="2614277" cy="1470525"/>
+          </a:xfrm>
+        </p:grpSpPr>
+        <p:pic>
+          <p:nvPicPr>
+            <p:cNvPr id="198" name="Google Shape;198;p32" title="Untitled.png"/>
+            <p:cNvPicPr preferRelativeResize="0"/>
+            <p:nvPr/>
+          </p:nvPicPr>
+          <p:blipFill>
+            <a:blip r:embed="rId5">
+              <a:alphaModFix/>
+            </a:blip>
+            <a:stretch>
+              <a:fillRect/>
+            </a:stretch>
+          </p:blipFill>
+          <p:spPr>
+            <a:xfrm>
+              <a:off x="-60800" y="2655338"/>
+              <a:ext cx="2614277" cy="1470525"/>
+            </a:xfrm>
+            <a:prstGeom prst="rect">
+              <a:avLst/>
+            </a:prstGeom>
+            <a:noFill/>
+            <a:ln>
+              <a:noFill/>
+            </a:ln>
+          </p:spPr>
+        </p:pic>
+        <p:pic>
+          <p:nvPicPr>
+            <p:cNvPr id="199" name="Google Shape;199;p32"/>
+            <p:cNvPicPr preferRelativeResize="0"/>
+            <p:nvPr/>
+          </p:nvPicPr>
+          <p:blipFill>
+            <a:blip r:embed="rId6">
+              <a:alphaModFix/>
+            </a:blip>
+            <a:stretch>
+              <a:fillRect/>
+            </a:stretch>
+          </p:blipFill>
+          <p:spPr>
+            <a:xfrm>
+              <a:off x="459925" y="3017700"/>
+              <a:ext cx="1572825" cy="745800"/>
+            </a:xfrm>
+            <a:prstGeom prst="rect">
+              <a:avLst/>
+            </a:prstGeom>
+            <a:noFill/>
+            <a:ln>
+              <a:noFill/>
+            </a:ln>
+          </p:spPr>
+        </p:pic>
+      </p:grpSp>
+      <p:sp>
+        <p:nvSpPr>
+          <p:cNvPr id="200" name="Google Shape;200;p32"/>
+          <p:cNvSpPr txBox="1"/>
+          <p:nvPr/>
+        </p:nvSpPr>
+        <p:spPr>
+          <a:xfrm>
+            <a:off x="360050" y="1779050"/>
+            <a:ext cx="3814800" cy="461700"/>
+          </a:xfrm>
+          <a:prstGeom prst="rect">
+            <a:avLst/>
+          </a:prstGeom>
+          <a:noFill/>
+          <a:ln>
+            <a:noFill/>
+          </a:ln>
+        </p:spPr>
+        <p:txBody>
+          <a:bodyPr anchorCtr="0" anchor="t" bIns="91425" lIns="91425" spcFirstLastPara="1" rIns="91425" wrap="square" tIns="91425">
+            <a:spAutoFit/>
+          </a:bodyPr>
+          <a:lstStyle/>
+          <a:p>
+            <a:pPr indent="0" lvl="0" marL="0" rtl="0" algn="ctr">
+              <a:lnSpc>
+                <a:spcPct val="115000"/>
+              </a:lnSpc>
+              <a:spcBef>
+                <a:spcPts val="1800"/>
+              </a:spcBef>
+              <a:spcAft>
+                <a:spcPts val="400"/>
+              </a:spcAft>
+              <a:buNone/>
+            </a:pPr>
+            <a:r>
+              <a:rPr b="1" lang="ru" sz="1800">
+                <a:solidFill>
+                  <a:srgbClr val="D6EDFF"/>
+                </a:solidFill>
+              </a:rPr>
+              <a:t>InspIRC</a:t>
+            </a:r>
+            <a:r>
+              <a:rPr b="1" lang="ru" sz="1800">
+                <a:solidFill>
+                  <a:srgbClr val="D6EDFF"/>
+                </a:solidFill>
+              </a:rPr>
+              <a:t>d</a:t>
+            </a:r>
+            <a:endParaRPr sz="1900">
+              <a:solidFill>
+                <a:srgbClr val="D6EDFF"/>
+              </a:solidFill>
+            </a:endParaRPr>
+          </a:p>
+        </p:txBody>
+      </p:sp>
+      <p:sp>
+        <p:nvSpPr>
+          <p:cNvPr id="201" name="Google Shape;201;p32"/>
+          <p:cNvSpPr txBox="1"/>
+          <p:nvPr/>
+        </p:nvSpPr>
+        <p:spPr>
+          <a:xfrm>
+            <a:off x="723900" y="2010100"/>
+            <a:ext cx="3450900" cy="648000"/>
+          </a:xfrm>
+          <a:prstGeom prst="rect">
+            <a:avLst/>
+          </a:prstGeom>
+          <a:noFill/>
+          <a:ln>
+            <a:noFill/>
+          </a:ln>
+        </p:spPr>
+        <p:txBody>
+          <a:bodyPr anchorCtr="0" anchor="t" bIns="91425" lIns="91425" spcFirstLastPara="1" rIns="91425" wrap="square" tIns="91425">
+            <a:spAutoFit/>
+          </a:bodyPr>
+          <a:lstStyle/>
+          <a:p>
+            <a:pPr indent="0" lvl="0" marL="0" rtl="0" algn="l">
+              <a:lnSpc>
+                <a:spcPct val="115000"/>
+              </a:lnSpc>
+              <a:spcBef>
+                <a:spcPts val="1800"/>
+              </a:spcBef>
+              <a:spcAft>
+                <a:spcPts val="400"/>
+              </a:spcAft>
+              <a:buNone/>
+            </a:pPr>
+            <a:r>
+              <a:rPr lang="ru">
+                <a:solidFill>
+                  <a:srgbClr val="D6EDFF"/>
+                </a:solidFill>
+              </a:rPr>
+              <a:t>Модульный, легкий, современный IRC-сервер</a:t>
+            </a:r>
+            <a:endParaRPr>
+              <a:solidFill>
+                <a:srgbClr val="D6EDFF"/>
+              </a:solidFill>
+            </a:endParaRPr>
+          </a:p>
+        </p:txBody>
+      </p:sp>
+      <p:sp>
+        <p:nvSpPr>
+          <p:cNvPr id="202" name="Google Shape;202;p32"/>
+          <p:cNvSpPr txBox="1"/>
+          <p:nvPr/>
+        </p:nvSpPr>
+        <p:spPr>
+          <a:xfrm>
+            <a:off x="360050" y="2459388"/>
+            <a:ext cx="3814800" cy="461700"/>
+          </a:xfrm>
+          <a:prstGeom prst="rect">
+            <a:avLst/>
+          </a:prstGeom>
+          <a:noFill/>
+          <a:ln>
+            <a:noFill/>
+          </a:ln>
+        </p:spPr>
+        <p:txBody>
+          <a:bodyPr anchorCtr="0" anchor="t" bIns="91425" lIns="91425" spcFirstLastPara="1" rIns="91425" wrap="square" tIns="91425">
+            <a:spAutoFit/>
+          </a:bodyPr>
+          <a:lstStyle/>
+          <a:p>
+            <a:pPr indent="0" lvl="0" marL="0" rtl="0" algn="ctr">
+              <a:lnSpc>
+                <a:spcPct val="115000"/>
+              </a:lnSpc>
+              <a:spcBef>
+                <a:spcPts val="1800"/>
+              </a:spcBef>
+              <a:spcAft>
+                <a:spcPts val="400"/>
+              </a:spcAft>
+              <a:buNone/>
+            </a:pPr>
+            <a:r>
+              <a:rPr b="1" lang="ru" sz="1800">
+                <a:solidFill>
+                  <a:srgbClr val="D6EDFF"/>
+                </a:solidFill>
+              </a:rPr>
+              <a:t>SQLite</a:t>
+            </a:r>
+            <a:endParaRPr sz="1900">
+              <a:solidFill>
+                <a:srgbClr val="D6EDFF"/>
+              </a:solidFill>
+            </a:endParaRPr>
+          </a:p>
+        </p:txBody>
+      </p:sp>
+      <p:sp>
+        <p:nvSpPr>
+          <p:cNvPr id="203" name="Google Shape;203;p32"/>
+          <p:cNvSpPr txBox="1"/>
+          <p:nvPr/>
+        </p:nvSpPr>
+        <p:spPr>
+          <a:xfrm>
+            <a:off x="1280800" y="2690450"/>
+            <a:ext cx="2894100" cy="648000"/>
+          </a:xfrm>
+          <a:prstGeom prst="rect">
+            <a:avLst/>
+          </a:prstGeom>
+          <a:noFill/>
+          <a:ln>
+            <a:noFill/>
+          </a:ln>
+        </p:spPr>
+        <p:txBody>
+          <a:bodyPr anchorCtr="0" anchor="t" bIns="91425" lIns="91425" spcFirstLastPara="1" rIns="91425" wrap="square" tIns="91425">
+            <a:spAutoFit/>
+          </a:bodyPr>
+          <a:lstStyle/>
+          <a:p>
+            <a:pPr indent="0" lvl="0" marL="0" rtl="0" algn="l">
+              <a:lnSpc>
+                <a:spcPct val="115000"/>
+              </a:lnSpc>
+              <a:spcBef>
+                <a:spcPts val="1800"/>
+              </a:spcBef>
+              <a:spcAft>
+                <a:spcPts val="400"/>
+              </a:spcAft>
+              <a:buNone/>
+            </a:pPr>
+            <a:r>
+              <a:rPr lang="ru">
+                <a:solidFill>
+                  <a:srgbClr val="D6EDFF"/>
+                </a:solidFill>
+              </a:rPr>
+              <a:t>Надёжное и лёгкое решение для  DB</a:t>
+            </a:r>
+            <a:endParaRPr>
+              <a:solidFill>
+                <a:srgbClr val="D6EDFF"/>
+              </a:solidFill>
+            </a:endParaRPr>
+          </a:p>
+        </p:txBody>
+      </p:sp>
+      <p:pic>
+        <p:nvPicPr>
+          <p:cNvPr id="204" name="Google Shape;204;p32"/>
+          <p:cNvPicPr preferRelativeResize="0"/>
+          <p:nvPr/>
+        </p:nvPicPr>
+        <p:blipFill>
+          <a:blip r:embed="rId7">
+            <a:alphaModFix/>
+          </a:blip>
+          <a:stretch>
+            <a:fillRect/>
+          </a:stretch>
+        </p:blipFill>
+        <p:spPr>
+          <a:xfrm>
+            <a:off x="4208675" y="1853875"/>
+            <a:ext cx="726650" cy="726650"/>
+          </a:xfrm>
+          <a:prstGeom prst="rect">
+            <a:avLst/>
+          </a:prstGeom>
+          <a:noFill/>
+          <a:ln>
+            <a:noFill/>
+          </a:ln>
+        </p:spPr>
+      </p:pic>
+      <p:sp>
+        <p:nvSpPr>
+          <p:cNvPr id="205" name="Google Shape;205;p32"/>
+          <p:cNvSpPr txBox="1"/>
+          <p:nvPr/>
+        </p:nvSpPr>
+        <p:spPr>
+          <a:xfrm>
+            <a:off x="4572000" y="1777675"/>
+            <a:ext cx="3814800" cy="461700"/>
+          </a:xfrm>
+          <a:prstGeom prst="rect">
+            <a:avLst/>
+          </a:prstGeom>
+          <a:noFill/>
+          <a:ln>
+            <a:noFill/>
+          </a:ln>
+        </p:spPr>
+        <p:txBody>
+          <a:bodyPr anchorCtr="0" anchor="t" bIns="91425" lIns="91425" spcFirstLastPara="1" rIns="91425" wrap="square" tIns="91425">
+            <a:spAutoFit/>
+          </a:bodyPr>
+          <a:lstStyle/>
+          <a:p>
+            <a:pPr indent="0" lvl="0" marL="0" rtl="0" algn="ctr">
+              <a:lnSpc>
+                <a:spcPct val="115000"/>
+              </a:lnSpc>
+              <a:spcBef>
+                <a:spcPts val="1800"/>
+              </a:spcBef>
+              <a:spcAft>
+                <a:spcPts val="400"/>
+              </a:spcAft>
+              <a:buNone/>
+            </a:pPr>
+            <a:r>
+              <a:rPr b="1" lang="ru" sz="1800">
+                <a:solidFill>
+                  <a:srgbClr val="D6EDFF"/>
+                </a:solidFill>
+              </a:rPr>
+              <a:t>Next.js</a:t>
+            </a:r>
+            <a:endParaRPr sz="1900">
+              <a:solidFill>
+                <a:srgbClr val="D6EDFF"/>
+              </a:solidFill>
+            </a:endParaRPr>
+          </a:p>
+        </p:txBody>
+      </p:sp>
+      <p:sp>
+        <p:nvSpPr>
+          <p:cNvPr id="206" name="Google Shape;206;p32"/>
+          <p:cNvSpPr txBox="1"/>
+          <p:nvPr/>
+        </p:nvSpPr>
+        <p:spPr>
+          <a:xfrm>
+            <a:off x="4935850" y="2008725"/>
+            <a:ext cx="3450900" cy="648000"/>
+          </a:xfrm>
+          <a:prstGeom prst="rect">
+            <a:avLst/>
+          </a:prstGeom>
+          <a:noFill/>
+          <a:ln>
+            <a:noFill/>
+          </a:ln>
+        </p:spPr>
+        <p:txBody>
+          <a:bodyPr anchorCtr="0" anchor="t" bIns="91425" lIns="91425" spcFirstLastPara="1" rIns="91425" wrap="square" tIns="91425">
+            <a:spAutoFit/>
+          </a:bodyPr>
+          <a:lstStyle/>
+          <a:p>
+            <a:pPr indent="0" lvl="0" marL="0" rtl="0" algn="l">
+              <a:lnSpc>
+                <a:spcPct val="115000"/>
+              </a:lnSpc>
+              <a:spcBef>
+                <a:spcPts val="1800"/>
+              </a:spcBef>
+              <a:spcAft>
+                <a:spcPts val="400"/>
+              </a:spcAft>
+              <a:buNone/>
+            </a:pPr>
+            <a:r>
+              <a:rPr lang="ru">
+                <a:solidFill>
+                  <a:srgbClr val="D6EDFF"/>
+                </a:solidFill>
+              </a:rPr>
+              <a:t>Современный интерфейс с server-side рендерингом</a:t>
+            </a:r>
+            <a:endParaRPr>
+              <a:solidFill>
+                <a:srgbClr val="D6EDFF"/>
+              </a:solidFill>
+            </a:endParaRPr>
+          </a:p>
+        </p:txBody>
+      </p:sp>
+      <p:pic>
+        <p:nvPicPr>
+          <p:cNvPr id="207" name="Google Shape;207;p32"/>
+          <p:cNvPicPr preferRelativeResize="0"/>
+          <p:nvPr/>
+        </p:nvPicPr>
+        <p:blipFill>
+          <a:blip r:embed="rId8">
+            <a:alphaModFix/>
+          </a:blip>
+          <a:stretch>
+            <a:fillRect/>
+          </a:stretch>
+        </p:blipFill>
+        <p:spPr>
+          <a:xfrm>
+            <a:off x="152400" y="3459775"/>
+            <a:ext cx="585123" cy="461700"/>
+          </a:xfrm>
+          <a:prstGeom prst="rect">
+            <a:avLst/>
+          </a:prstGeom>
+          <a:noFill/>
+          <a:ln>
+            <a:noFill/>
+          </a:ln>
+        </p:spPr>
+      </p:pic>
+      <p:sp>
+        <p:nvSpPr>
+          <p:cNvPr id="208" name="Google Shape;208;p32"/>
+          <p:cNvSpPr txBox="1"/>
+          <p:nvPr/>
+        </p:nvSpPr>
+        <p:spPr>
+          <a:xfrm>
+            <a:off x="360050" y="3195250"/>
+            <a:ext cx="3814800" cy="461700"/>
+          </a:xfrm>
+          <a:prstGeom prst="rect">
+            <a:avLst/>
+          </a:prstGeom>
+          <a:noFill/>
+          <a:ln>
+            <a:noFill/>
+          </a:ln>
+        </p:spPr>
+        <p:txBody>
+          <a:bodyPr anchorCtr="0" anchor="t" bIns="91425" lIns="91425" spcFirstLastPara="1" rIns="91425" wrap="square" tIns="91425">
+            <a:spAutoFit/>
+          </a:bodyPr>
+          <a:lstStyle/>
+          <a:p>
+            <a:pPr indent="0" lvl="0" marL="0" rtl="0" algn="ctr">
+              <a:lnSpc>
+                <a:spcPct val="115000"/>
+              </a:lnSpc>
+              <a:spcBef>
+                <a:spcPts val="1800"/>
+              </a:spcBef>
+              <a:spcAft>
+                <a:spcPts val="400"/>
+              </a:spcAft>
+              <a:buNone/>
+            </a:pPr>
+            <a:r>
+              <a:rPr b="1" lang="ru" sz="1800">
+                <a:solidFill>
+                  <a:srgbClr val="D6EDFF"/>
+                </a:solidFill>
+              </a:rPr>
+              <a:t>Docker</a:t>
+            </a:r>
+            <a:endParaRPr sz="1900">
+              <a:solidFill>
+                <a:srgbClr val="D6EDFF"/>
+              </a:solidFill>
+            </a:endParaRPr>
+          </a:p>
+        </p:txBody>
+      </p:sp>
+      <p:sp>
+        <p:nvSpPr>
+          <p:cNvPr id="209" name="Google Shape;209;p32"/>
+          <p:cNvSpPr txBox="1"/>
+          <p:nvPr/>
+        </p:nvSpPr>
+        <p:spPr>
+          <a:xfrm>
+            <a:off x="723900" y="3426300"/>
+            <a:ext cx="3450900" cy="400200"/>
+          </a:xfrm>
+          <a:prstGeom prst="rect">
+            <a:avLst/>
+          </a:prstGeom>
+          <a:noFill/>
+          <a:ln>
+            <a:noFill/>
+          </a:ln>
+        </p:spPr>
+        <p:txBody>
+          <a:bodyPr anchorCtr="0" anchor="t" bIns="91425" lIns="91425" spcFirstLastPara="1" rIns="91425" wrap="square" tIns="91425">
+            <a:spAutoFit/>
+          </a:bodyPr>
+          <a:lstStyle/>
+          <a:p>
+            <a:pPr indent="0" lvl="0" marL="0" rtl="0" algn="l">
+              <a:lnSpc>
+                <a:spcPct val="115000"/>
+              </a:lnSpc>
+              <a:spcBef>
+                <a:spcPts val="1800"/>
+              </a:spcBef>
+              <a:spcAft>
+                <a:spcPts val="400"/>
+              </a:spcAft>
+              <a:buNone/>
+            </a:pPr>
+            <a:r>
+              <a:rPr lang="ru">
+                <a:solidFill>
+                  <a:srgbClr val="D6EDFF"/>
+                </a:solidFill>
+              </a:rPr>
+              <a:t>Безопасная контейнеризация сервисов</a:t>
+            </a:r>
+            <a:endParaRPr>
+              <a:solidFill>
+                <a:srgbClr val="D6EDFF"/>
+              </a:solidFill>
+            </a:endParaRPr>
+          </a:p>
+        </p:txBody>
+      </p:sp>
     </p:spTree>
   </p:cSld>
   <p:clrMapOvr>
@@ -23529,7 +24116,7 @@
     </p:bg>
     <p:spTree>
       <p:nvGrpSpPr>
-        <p:cNvPr id="199" name="Shape 199"/>
+        <p:cNvPr id="213" name="Shape 213"/>
         <p:cNvGrpSpPr/>
         <p:nvPr/>
       </p:nvGrpSpPr>
@@ -23543,7 +24130,7 @@
       </p:grpSpPr>
       <p:sp>
         <p:nvSpPr>
-          <p:cNvPr id="200" name="Google Shape;200;p33"/>
+          <p:cNvPr id="214" name="Google Shape;214;p33"/>
           <p:cNvSpPr txBox="1"/>
           <p:nvPr/>
         </p:nvSpPr>
@@ -23593,7 +24180,7 @@
       </p:sp>
       <p:sp>
         <p:nvSpPr>
-          <p:cNvPr id="201" name="Google Shape;201;p33"/>
+          <p:cNvPr id="215" name="Google Shape;215;p33"/>
           <p:cNvSpPr txBox="1"/>
           <p:nvPr/>
         </p:nvSpPr>
@@ -23929,6 +24516,285 @@
 </file>
 
 <file path=ppt/theme/theme2.xml><?xml version="1.0" encoding="utf-8"?>
+<a:theme xmlns:a="http://schemas.openxmlformats.org/drawingml/2006/main" xmlns:r="http://schemas.openxmlformats.org/officeDocument/2006/relationships">
+  <a:themeElements>
+    <a:clrScheme name="Default">
+      <a:dk1>
+        <a:srgbClr val="000000"/>
+      </a:dk1>
+      <a:lt1>
+        <a:srgbClr val="FFFFFF"/>
+      </a:lt1>
+      <a:dk2>
+        <a:srgbClr val="158158"/>
+      </a:dk2>
+      <a:lt2>
+        <a:srgbClr val="F3F3F3"/>
+      </a:lt2>
+      <a:accent1>
+        <a:srgbClr val="058DC7"/>
+      </a:accent1>
+      <a:accent2>
+        <a:srgbClr val="50B432"/>
+      </a:accent2>
+      <a:accent3>
+        <a:srgbClr val="ED561B"/>
+      </a:accent3>
+      <a:accent4>
+        <a:srgbClr val="EDEF00"/>
+      </a:accent4>
+      <a:accent5>
+        <a:srgbClr val="24CBE5"/>
+      </a:accent5>
+      <a:accent6>
+        <a:srgbClr val="64E572"/>
+      </a:accent6>
+      <a:hlink>
+        <a:srgbClr val="2200CC"/>
+      </a:hlink>
+      <a:folHlink>
+        <a:srgbClr val="551A8B"/>
+      </a:folHlink>
+    </a:clrScheme>
+    <a:fontScheme name="Office">
+      <a:majorFont>
+        <a:latin typeface="Arial"/>
+        <a:ea typeface=""/>
+        <a:cs typeface=""/>
+        <a:font script="Jpan" typeface="ＭＳ Ｐゴシック"/>
+        <a:font script="Hang" typeface="맑은 고딕"/>
+        <a:font script="Hans" typeface="宋体"/>
+        <a:font script="Hant" typeface="新細明體"/>
+        <a:font script="Arab" typeface="Times New Roman"/>
+        <a:font script="Hebr" typeface="Times New Roman"/>
+        <a:font script="Thai" typeface="Angsana New"/>
+        <a:font script="Ethi" typeface="Nyala"/>
+        <a:font script="Beng" typeface="Vrinda"/>
+        <a:font script="Gujr" typeface="Shruti"/>
+        <a:font script="Khmr" typeface="MoolBoran"/>
+        <a:font script="Knda" typeface="Tunga"/>
+        <a:font script="Guru" typeface="Raavi"/>
+        <a:font script="Cans" typeface="Euphemia"/>
+        <a:font script="Cher" typeface="Plantagenet Cherokee"/>
+        <a:font script="Yiii" typeface="Microsoft Yi Baiti"/>
+        <a:font script="Tibt" typeface="Microsoft Himalaya"/>
+        <a:font script="Thaa" typeface="MV Boli"/>
+        <a:font script="Deva" typeface="Mangal"/>
+        <a:font script="Telu" typeface="Gautami"/>
+        <a:font script="Taml" typeface="Latha"/>
+        <a:font script="Syrc" typeface="Estrangelo Edessa"/>
+        <a:font script="Orya" typeface="Kalinga"/>
+        <a:font script="Mlym" typeface="Kartika"/>
+        <a:font script="Laoo" typeface="DokChampa"/>
+        <a:font script="Sinh" typeface="Iskoola Pota"/>
+        <a:font script="Mong" typeface="Mongolian Baiti"/>
+        <a:font script="Viet" typeface="Times New Roman"/>
+        <a:font script="Uigh" typeface="Microsoft Uighur"/>
+        <a:font script="Geor" typeface="Sylfaen"/>
+      </a:majorFont>
+      <a:minorFont>
+        <a:latin typeface="Arial"/>
+        <a:ea typeface=""/>
+        <a:cs typeface=""/>
+        <a:font script="Jpan" typeface="ＭＳ Ｐゴシック"/>
+        <a:font script="Hang" typeface="맑은 고딕"/>
+        <a:font script="Hans" typeface="宋体"/>
+        <a:font script="Hant" typeface="新細明體"/>
+        <a:font script="Arab" typeface="Arial"/>
+        <a:font script="Hebr" typeface="Arial"/>
+        <a:font script="Thai" typeface="Cordia New"/>
+        <a:font script="Ethi" typeface="Nyala"/>
+        <a:font script="Beng" typeface="Vrinda"/>
+        <a:font script="Gujr" typeface="Shruti"/>
+        <a:font script="Khmr" typeface="DaunPenh"/>
+        <a:font script="Knda" typeface="Tunga"/>
+        <a:font script="Guru" typeface="Raavi"/>
+        <a:font script="Cans" typeface="Euphemia"/>
+        <a:font script="Cher" typeface="Plantagenet Cherokee"/>
+        <a:font script="Yiii" typeface="Microsoft Yi Baiti"/>
+        <a:font script="Tibt" typeface="Microsoft Himalaya"/>
+        <a:font script="Thaa" typeface="MV Boli"/>
+        <a:font script="Deva" typeface="Mangal"/>
+        <a:font script="Telu" typeface="Gautami"/>
+        <a:font script="Taml" typeface="Latha"/>
+        <a:font script="Syrc" typeface="Estrangelo Edessa"/>
+        <a:font script="Orya" typeface="Kalinga"/>
+        <a:font script="Mlym" typeface="Kartika"/>
+        <a:font script="Laoo" typeface="DokChampa"/>
+        <a:font script="Sinh" typeface="Iskoola Pota"/>
+        <a:font script="Mong" typeface="Mongolian Baiti"/>
+        <a:font script="Viet" typeface="Arial"/>
+        <a:font script="Uigh" typeface="Microsoft Uighur"/>
+        <a:font script="Geor" typeface="Sylfaen"/>
+      </a:minorFont>
+    </a:fontScheme>
+    <a:fmtScheme name="Office">
+      <a:fillStyleLst>
+        <a:solidFill>
+          <a:schemeClr val="phClr"/>
+        </a:solidFill>
+        <a:gradFill rotWithShape="1">
+          <a:gsLst>
+            <a:gs pos="0">
+              <a:schemeClr val="phClr">
+                <a:tint val="50000"/>
+                <a:satMod val="300000"/>
+              </a:schemeClr>
+            </a:gs>
+            <a:gs pos="35000">
+              <a:schemeClr val="phClr">
+                <a:tint val="37000"/>
+                <a:satMod val="300000"/>
+              </a:schemeClr>
+            </a:gs>
+            <a:gs pos="100000">
+              <a:schemeClr val="phClr">
+                <a:tint val="15000"/>
+                <a:satMod val="350000"/>
+              </a:schemeClr>
+            </a:gs>
+          </a:gsLst>
+          <a:lin ang="16200000" scaled="1"/>
+        </a:gradFill>
+        <a:gradFill rotWithShape="1">
+          <a:gsLst>
+            <a:gs pos="0">
+              <a:schemeClr val="phClr">
+                <a:tint val="100000"/>
+                <a:shade val="100000"/>
+                <a:satMod val="130000"/>
+              </a:schemeClr>
+            </a:gs>
+            <a:gs pos="100000">
+              <a:schemeClr val="phClr">
+                <a:tint val="50000"/>
+                <a:shade val="100000"/>
+                <a:satMod val="350000"/>
+              </a:schemeClr>
+            </a:gs>
+          </a:gsLst>
+          <a:lin ang="16200000" scaled="0"/>
+        </a:gradFill>
+      </a:fillStyleLst>
+      <a:lnStyleLst>
+        <a:ln w="9525" cap="flat" cmpd="sng" algn="ctr">
+          <a:solidFill>
+            <a:schemeClr val="phClr">
+              <a:shade val="95000"/>
+              <a:satMod val="105000"/>
+            </a:schemeClr>
+          </a:solidFill>
+          <a:prstDash val="solid"/>
+        </a:ln>
+        <a:ln w="25400" cap="flat" cmpd="sng" algn="ctr">
+          <a:solidFill>
+            <a:schemeClr val="phClr"/>
+          </a:solidFill>
+          <a:prstDash val="solid"/>
+        </a:ln>
+        <a:ln w="38100" cap="flat" cmpd="sng" algn="ctr">
+          <a:solidFill>
+            <a:schemeClr val="phClr"/>
+          </a:solidFill>
+          <a:prstDash val="solid"/>
+        </a:ln>
+      </a:lnStyleLst>
+      <a:effectStyleLst>
+        <a:effectStyle>
+          <a:effectLst>
+            <a:outerShdw blurRad="40000" dist="20000" dir="5400000" rotWithShape="0">
+              <a:srgbClr val="000000">
+                <a:alpha val="38000"/>
+              </a:srgbClr>
+            </a:outerShdw>
+          </a:effectLst>
+        </a:effectStyle>
+        <a:effectStyle>
+          <a:effectLst>
+            <a:outerShdw blurRad="40000" dist="23000" dir="5400000" rotWithShape="0">
+              <a:srgbClr val="000000">
+                <a:alpha val="35000"/>
+              </a:srgbClr>
+            </a:outerShdw>
+          </a:effectLst>
+        </a:effectStyle>
+        <a:effectStyle>
+          <a:effectLst>
+            <a:outerShdw blurRad="40000" dist="23000" dir="5400000" rotWithShape="0">
+              <a:srgbClr val="000000">
+                <a:alpha val="35000"/>
+              </a:srgbClr>
+            </a:outerShdw>
+          </a:effectLst>
+          <a:scene3d>
+            <a:camera prst="orthographicFront">
+              <a:rot lat="0" lon="0" rev="0"/>
+            </a:camera>
+            <a:lightRig rig="threePt" dir="t">
+              <a:rot lat="0" lon="0" rev="1200000"/>
+            </a:lightRig>
+          </a:scene3d>
+          <a:sp3d>
+            <a:bevelT w="63500" h="25400"/>
+          </a:sp3d>
+        </a:effectStyle>
+      </a:effectStyleLst>
+      <a:bgFillStyleLst>
+        <a:solidFill>
+          <a:schemeClr val="phClr"/>
+        </a:solidFill>
+        <a:gradFill rotWithShape="1">
+          <a:gsLst>
+            <a:gs pos="0">
+              <a:schemeClr val="phClr">
+                <a:tint val="40000"/>
+                <a:satMod val="350000"/>
+              </a:schemeClr>
+            </a:gs>
+            <a:gs pos="40000">
+              <a:schemeClr val="phClr">
+                <a:tint val="45000"/>
+                <a:shade val="99000"/>
+                <a:satMod val="350000"/>
+              </a:schemeClr>
+            </a:gs>
+            <a:gs pos="100000">
+              <a:schemeClr val="phClr">
+                <a:shade val="20000"/>
+                <a:satMod val="255000"/>
+              </a:schemeClr>
+            </a:gs>
+          </a:gsLst>
+          <a:path path="circle">
+            <a:fillToRect l="50000" t="-80000" r="50000" b="180000"/>
+          </a:path>
+        </a:gradFill>
+        <a:gradFill rotWithShape="1">
+          <a:gsLst>
+            <a:gs pos="0">
+              <a:schemeClr val="phClr">
+                <a:tint val="80000"/>
+                <a:satMod val="300000"/>
+              </a:schemeClr>
+            </a:gs>
+            <a:gs pos="100000">
+              <a:schemeClr val="phClr">
+                <a:shade val="30000"/>
+                <a:satMod val="200000"/>
+              </a:schemeClr>
+            </a:gs>
+          </a:gsLst>
+          <a:path path="circle">
+            <a:fillToRect l="50000" t="50000" r="50000" b="50000"/>
+          </a:path>
+        </a:gradFill>
+      </a:bgFillStyleLst>
+    </a:fmtScheme>
+  </a:themeElements>
+</a:theme>
+</file>
+
+<file path=ppt/theme/theme3.xml><?xml version="1.0" encoding="utf-8"?>
 <a:theme xmlns:a="http://schemas.openxmlformats.org/drawingml/2006/main" xmlns:r="http://schemas.openxmlformats.org/officeDocument/2006/relationships" name="Тема Office">
   <a:themeElements>
     <a:clrScheme name="Стандартная">
@@ -24205,283 +25071,4 @@
     </a:fmtScheme>
   </a:themeElements>
 </a:theme>
-</file>
-
-<file path=ppt/theme/theme3.xml><?xml version="1.0" encoding="utf-8"?>
-<a:theme xmlns:a="http://schemas.openxmlformats.org/drawingml/2006/main" xmlns:r="http://schemas.openxmlformats.org/officeDocument/2006/relationships">
-  <a:themeElements>
-    <a:clrScheme name="Default">
-      <a:dk1>
-        <a:srgbClr val="000000"/>
-      </a:dk1>
-      <a:lt1>
-        <a:srgbClr val="FFFFFF"/>
-      </a:lt1>
-      <a:dk2>
-        <a:srgbClr val="158158"/>
-      </a:dk2>
-      <a:lt2>
-        <a:srgbClr val="F3F3F3"/>
-      </a:lt2>
-      <a:accent1>
-        <a:srgbClr val="058DC7"/>
-      </a:accent1>
-      <a:accent2>
-        <a:srgbClr val="50B432"/>
-      </a:accent2>
-      <a:accent3>
-        <a:srgbClr val="ED561B"/>
-      </a:accent3>
-      <a:accent4>
-        <a:srgbClr val="EDEF00"/>
-      </a:accent4>
-      <a:accent5>
-        <a:srgbClr val="24CBE5"/>
-      </a:accent5>
-      <a:accent6>
-        <a:srgbClr val="64E572"/>
-      </a:accent6>
-      <a:hlink>
-        <a:srgbClr val="2200CC"/>
-      </a:hlink>
-      <a:folHlink>
-        <a:srgbClr val="551A8B"/>
-      </a:folHlink>
-    </a:clrScheme>
-    <a:fontScheme name="Office">
-      <a:majorFont>
-        <a:latin typeface="Arial"/>
-        <a:ea typeface=""/>
-        <a:cs typeface=""/>
-        <a:font script="Jpan" typeface="ＭＳ Ｐゴシック"/>
-        <a:font script="Hang" typeface="맑은 고딕"/>
-        <a:font script="Hans" typeface="宋体"/>
-        <a:font script="Hant" typeface="新細明體"/>
-        <a:font script="Arab" typeface="Times New Roman"/>
-        <a:font script="Hebr" typeface="Times New Roman"/>
-        <a:font script="Thai" typeface="Angsana New"/>
-        <a:font script="Ethi" typeface="Nyala"/>
-        <a:font script="Beng" typeface="Vrinda"/>
-        <a:font script="Gujr" typeface="Shruti"/>
-        <a:font script="Khmr" typeface="MoolBoran"/>
-        <a:font script="Knda" typeface="Tunga"/>
-        <a:font script="Guru" typeface="Raavi"/>
-        <a:font script="Cans" typeface="Euphemia"/>
-        <a:font script="Cher" typeface="Plantagenet Cherokee"/>
-        <a:font script="Yiii" typeface="Microsoft Yi Baiti"/>
-        <a:font script="Tibt" typeface="Microsoft Himalaya"/>
-        <a:font script="Thaa" typeface="MV Boli"/>
-        <a:font script="Deva" typeface="Mangal"/>
-        <a:font script="Telu" typeface="Gautami"/>
-        <a:font script="Taml" typeface="Latha"/>
-        <a:font script="Syrc" typeface="Estrangelo Edessa"/>
-        <a:font script="Orya" typeface="Kalinga"/>
-        <a:font script="Mlym" typeface="Kartika"/>
-        <a:font script="Laoo" typeface="DokChampa"/>
-        <a:font script="Sinh" typeface="Iskoola Pota"/>
-        <a:font script="Mong" typeface="Mongolian Baiti"/>
-        <a:font script="Viet" typeface="Times New Roman"/>
-        <a:font script="Uigh" typeface="Microsoft Uighur"/>
-        <a:font script="Geor" typeface="Sylfaen"/>
-      </a:majorFont>
-      <a:minorFont>
-        <a:latin typeface="Arial"/>
-        <a:ea typeface=""/>
-        <a:cs typeface=""/>
-        <a:font script="Jpan" typeface="ＭＳ Ｐゴシック"/>
-        <a:font script="Hang" typeface="맑은 고딕"/>
-        <a:font script="Hans" typeface="宋体"/>
-        <a:font script="Hant" typeface="新細明體"/>
-        <a:font script="Arab" typeface="Arial"/>
-        <a:font script="Hebr" typeface="Arial"/>
-        <a:font script="Thai" typeface="Cordia New"/>
-        <a:font script="Ethi" typeface="Nyala"/>
-        <a:font script="Beng" typeface="Vrinda"/>
-        <a:font script="Gujr" typeface="Shruti"/>
-        <a:font script="Khmr" typeface="DaunPenh"/>
-        <a:font script="Knda" typeface="Tunga"/>
-        <a:font script="Guru" typeface="Raavi"/>
-        <a:font script="Cans" typeface="Euphemia"/>
-        <a:font script="Cher" typeface="Plantagenet Cherokee"/>
-        <a:font script="Yiii" typeface="Microsoft Yi Baiti"/>
-        <a:font script="Tibt" typeface="Microsoft Himalaya"/>
-        <a:font script="Thaa" typeface="MV Boli"/>
-        <a:font script="Deva" typeface="Mangal"/>
-        <a:font script="Telu" typeface="Gautami"/>
-        <a:font script="Taml" typeface="Latha"/>
-        <a:font script="Syrc" typeface="Estrangelo Edessa"/>
-        <a:font script="Orya" typeface="Kalinga"/>
-        <a:font script="Mlym" typeface="Kartika"/>
-        <a:font script="Laoo" typeface="DokChampa"/>
-        <a:font script="Sinh" typeface="Iskoola Pota"/>
-        <a:font script="Mong" typeface="Mongolian Baiti"/>
-        <a:font script="Viet" typeface="Arial"/>
-        <a:font script="Uigh" typeface="Microsoft Uighur"/>
-        <a:font script="Geor" typeface="Sylfaen"/>
-      </a:minorFont>
-    </a:fontScheme>
-    <a:fmtScheme name="Office">
-      <a:fillStyleLst>
-        <a:solidFill>
-          <a:schemeClr val="phClr"/>
-        </a:solidFill>
-        <a:gradFill rotWithShape="1">
-          <a:gsLst>
-            <a:gs pos="0">
-              <a:schemeClr val="phClr">
-                <a:tint val="50000"/>
-                <a:satMod val="300000"/>
-              </a:schemeClr>
-            </a:gs>
-            <a:gs pos="35000">
-              <a:schemeClr val="phClr">
-                <a:tint val="37000"/>
-                <a:satMod val="300000"/>
-              </a:schemeClr>
-            </a:gs>
-            <a:gs pos="100000">
-              <a:schemeClr val="phClr">
-                <a:tint val="15000"/>
-                <a:satMod val="350000"/>
-              </a:schemeClr>
-            </a:gs>
-          </a:gsLst>
-          <a:lin ang="16200000" scaled="1"/>
-        </a:gradFill>
-        <a:gradFill rotWithShape="1">
-          <a:gsLst>
-            <a:gs pos="0">
-              <a:schemeClr val="phClr">
-                <a:tint val="100000"/>
-                <a:shade val="100000"/>
-                <a:satMod val="130000"/>
-              </a:schemeClr>
-            </a:gs>
-            <a:gs pos="100000">
-              <a:schemeClr val="phClr">
-                <a:tint val="50000"/>
-                <a:shade val="100000"/>
-                <a:satMod val="350000"/>
-              </a:schemeClr>
-            </a:gs>
-          </a:gsLst>
-          <a:lin ang="16200000" scaled="0"/>
-        </a:gradFill>
-      </a:fillStyleLst>
-      <a:lnStyleLst>
-        <a:ln w="9525" cap="flat" cmpd="sng" algn="ctr">
-          <a:solidFill>
-            <a:schemeClr val="phClr">
-              <a:shade val="95000"/>
-              <a:satMod val="105000"/>
-            </a:schemeClr>
-          </a:solidFill>
-          <a:prstDash val="solid"/>
-        </a:ln>
-        <a:ln w="25400" cap="flat" cmpd="sng" algn="ctr">
-          <a:solidFill>
-            <a:schemeClr val="phClr"/>
-          </a:solidFill>
-          <a:prstDash val="solid"/>
-        </a:ln>
-        <a:ln w="38100" cap="flat" cmpd="sng" algn="ctr">
-          <a:solidFill>
-            <a:schemeClr val="phClr"/>
-          </a:solidFill>
-          <a:prstDash val="solid"/>
-        </a:ln>
-      </a:lnStyleLst>
-      <a:effectStyleLst>
-        <a:effectStyle>
-          <a:effectLst>
-            <a:outerShdw blurRad="40000" dist="20000" dir="5400000" rotWithShape="0">
-              <a:srgbClr val="000000">
-                <a:alpha val="38000"/>
-              </a:srgbClr>
-            </a:outerShdw>
-          </a:effectLst>
-        </a:effectStyle>
-        <a:effectStyle>
-          <a:effectLst>
-            <a:outerShdw blurRad="40000" dist="23000" dir="5400000" rotWithShape="0">
-              <a:srgbClr val="000000">
-                <a:alpha val="35000"/>
-              </a:srgbClr>
-            </a:outerShdw>
-          </a:effectLst>
-        </a:effectStyle>
-        <a:effectStyle>
-          <a:effectLst>
-            <a:outerShdw blurRad="40000" dist="23000" dir="5400000" rotWithShape="0">
-              <a:srgbClr val="000000">
-                <a:alpha val="35000"/>
-              </a:srgbClr>
-            </a:outerShdw>
-          </a:effectLst>
-          <a:scene3d>
-            <a:camera prst="orthographicFront">
-              <a:rot lat="0" lon="0" rev="0"/>
-            </a:camera>
-            <a:lightRig rig="threePt" dir="t">
-              <a:rot lat="0" lon="0" rev="1200000"/>
-            </a:lightRig>
-          </a:scene3d>
-          <a:sp3d>
-            <a:bevelT w="63500" h="25400"/>
-          </a:sp3d>
-        </a:effectStyle>
-      </a:effectStyleLst>
-      <a:bgFillStyleLst>
-        <a:solidFill>
-          <a:schemeClr val="phClr"/>
-        </a:solidFill>
-        <a:gradFill rotWithShape="1">
-          <a:gsLst>
-            <a:gs pos="0">
-              <a:schemeClr val="phClr">
-                <a:tint val="40000"/>
-                <a:satMod val="350000"/>
-              </a:schemeClr>
-            </a:gs>
-            <a:gs pos="40000">
-              <a:schemeClr val="phClr">
-                <a:tint val="45000"/>
-                <a:shade val="99000"/>
-                <a:satMod val="350000"/>
-              </a:schemeClr>
-            </a:gs>
-            <a:gs pos="100000">
-              <a:schemeClr val="phClr">
-                <a:shade val="20000"/>
-                <a:satMod val="255000"/>
-              </a:schemeClr>
-            </a:gs>
-          </a:gsLst>
-          <a:path path="circle">
-            <a:fillToRect l="50000" t="-80000" r="50000" b="180000"/>
-          </a:path>
-        </a:gradFill>
-        <a:gradFill rotWithShape="1">
-          <a:gsLst>
-            <a:gs pos="0">
-              <a:schemeClr val="phClr">
-                <a:tint val="80000"/>
-                <a:satMod val="300000"/>
-              </a:schemeClr>
-            </a:gs>
-            <a:gs pos="100000">
-              <a:schemeClr val="phClr">
-                <a:shade val="30000"/>
-                <a:satMod val="200000"/>
-              </a:schemeClr>
-            </a:gs>
-          </a:gsLst>
-          <a:path path="circle">
-            <a:fillToRect l="50000" t="50000" r="50000" b="50000"/>
-          </a:path>
-        </a:gradFill>
-      </a:bgFillStyleLst>
-    </a:fmtScheme>
-  </a:themeElements>
-</a:theme>
 </file>
--- a/Презентация_Шифр-Связь.pptx
+++ b/Презентация_Шифр-Связь.pptx
@@ -1,35 +1,131 @@
 
 <file path=ppt/presentation.xml><?xml version="1.0" encoding="utf-8"?>
-<p:presentation xmlns:a="http://schemas.openxmlformats.org/drawingml/2006/main" xmlns:p="http://schemas.openxmlformats.org/presentationml/2006/main" xmlns:r="http://schemas.openxmlformats.org/officeDocument/2006/relationships" xmlns:p14="http://schemas.microsoft.com/office/powerpoint/2010/main" xmlns:p15="http://schemas.microsoft.com/office/powerpoint/2012/main" xmlns:mc="http://schemas.openxmlformats.org/markup-compatibility/2006">
+<p:presentation xmlns:a="http://schemas.openxmlformats.org/drawingml/2006/main" xmlns:r="http://schemas.openxmlformats.org/officeDocument/2006/relationships" xmlns:p="http://schemas.openxmlformats.org/presentationml/2006/main">
   <p:sldMasterIdLst>
-    <p:sldMasterId id="2147483648" r:id="rId2"/>
-    <p:sldMasterId id="2147483660" r:id="rId3"/>
+    <p:sldMasterId id="2147483648" r:id="rId1"/>
+    <p:sldMasterId id="2147483660" r:id="rId2"/>
   </p:sldMasterIdLst>
   <p:sldIdLst>
-    <p:sldId id="256" r:id="rId4"/>
-    <p:sldId id="257" r:id="rId5"/>
-    <p:sldId id="258" r:id="rId6"/>
-    <p:sldId id="259" r:id="rId7"/>
-    <p:sldId id="260" r:id="rId8"/>
-    <p:sldId id="261" r:id="rId9"/>
-    <p:sldId id="262" r:id="rId10"/>
-    <p:sldId id="263" r:id="rId11"/>
-    <p:sldId id="264" r:id="rId12"/>
-    <p:sldId id="265" r:id="rId13"/>
+    <p:sldId id="256" r:id="rId3"/>
+    <p:sldId id="257" r:id="rId4"/>
+    <p:sldId id="258" r:id="rId5"/>
+    <p:sldId id="259" r:id="rId6"/>
+    <p:sldId id="260" r:id="rId7"/>
+    <p:sldId id="261" r:id="rId8"/>
+    <p:sldId id="262" r:id="rId9"/>
+    <p:sldId id="263" r:id="rId10"/>
+    <p:sldId id="264" r:id="rId11"/>
+    <p:sldId id="265" r:id="rId12"/>
   </p:sldIdLst>
-  <p:sldSz cx="9144000" cy="5143500"/>
+  <p:sldSz cx="9144000" cy="5143500" type="screen16x9"/>
   <p:notesSz cx="6858000" cy="9144000"/>
+  <p:defaultTextStyle>
+    <a:defPPr>
+      <a:defRPr lang="ru-RU"/>
+    </a:defPPr>
+    <a:lvl1pPr marL="0" algn="l" defTabSz="914400" rtl="0" eaLnBrk="1" latinLnBrk="0" hangingPunct="1">
+      <a:defRPr sz="1800" kern="1200">
+        <a:solidFill>
+          <a:schemeClr val="tx1"/>
+        </a:solidFill>
+        <a:latin typeface="+mn-lt"/>
+        <a:ea typeface="+mn-ea"/>
+        <a:cs typeface="+mn-cs"/>
+      </a:defRPr>
+    </a:lvl1pPr>
+    <a:lvl2pPr marL="457200" algn="l" defTabSz="914400" rtl="0" eaLnBrk="1" latinLnBrk="0" hangingPunct="1">
+      <a:defRPr sz="1800" kern="1200">
+        <a:solidFill>
+          <a:schemeClr val="tx1"/>
+        </a:solidFill>
+        <a:latin typeface="+mn-lt"/>
+        <a:ea typeface="+mn-ea"/>
+        <a:cs typeface="+mn-cs"/>
+      </a:defRPr>
+    </a:lvl2pPr>
+    <a:lvl3pPr marL="914400" algn="l" defTabSz="914400" rtl="0" eaLnBrk="1" latinLnBrk="0" hangingPunct="1">
+      <a:defRPr sz="1800" kern="1200">
+        <a:solidFill>
+          <a:schemeClr val="tx1"/>
+        </a:solidFill>
+        <a:latin typeface="+mn-lt"/>
+        <a:ea typeface="+mn-ea"/>
+        <a:cs typeface="+mn-cs"/>
+      </a:defRPr>
+    </a:lvl3pPr>
+    <a:lvl4pPr marL="1371600" algn="l" defTabSz="914400" rtl="0" eaLnBrk="1" latinLnBrk="0" hangingPunct="1">
+      <a:defRPr sz="1800" kern="1200">
+        <a:solidFill>
+          <a:schemeClr val="tx1"/>
+        </a:solidFill>
+        <a:latin typeface="+mn-lt"/>
+        <a:ea typeface="+mn-ea"/>
+        <a:cs typeface="+mn-cs"/>
+      </a:defRPr>
+    </a:lvl4pPr>
+    <a:lvl5pPr marL="1828800" algn="l" defTabSz="914400" rtl="0" eaLnBrk="1" latinLnBrk="0" hangingPunct="1">
+      <a:defRPr sz="1800" kern="1200">
+        <a:solidFill>
+          <a:schemeClr val="tx1"/>
+        </a:solidFill>
+        <a:latin typeface="+mn-lt"/>
+        <a:ea typeface="+mn-ea"/>
+        <a:cs typeface="+mn-cs"/>
+      </a:defRPr>
+    </a:lvl5pPr>
+    <a:lvl6pPr marL="2286000" algn="l" defTabSz="914400" rtl="0" eaLnBrk="1" latinLnBrk="0" hangingPunct="1">
+      <a:defRPr sz="1800" kern="1200">
+        <a:solidFill>
+          <a:schemeClr val="tx1"/>
+        </a:solidFill>
+        <a:latin typeface="+mn-lt"/>
+        <a:ea typeface="+mn-ea"/>
+        <a:cs typeface="+mn-cs"/>
+      </a:defRPr>
+    </a:lvl6pPr>
+    <a:lvl7pPr marL="2743200" algn="l" defTabSz="914400" rtl="0" eaLnBrk="1" latinLnBrk="0" hangingPunct="1">
+      <a:defRPr sz="1800" kern="1200">
+        <a:solidFill>
+          <a:schemeClr val="tx1"/>
+        </a:solidFill>
+        <a:latin typeface="+mn-lt"/>
+        <a:ea typeface="+mn-ea"/>
+        <a:cs typeface="+mn-cs"/>
+      </a:defRPr>
+    </a:lvl7pPr>
+    <a:lvl8pPr marL="3200400" algn="l" defTabSz="914400" rtl="0" eaLnBrk="1" latinLnBrk="0" hangingPunct="1">
+      <a:defRPr sz="1800" kern="1200">
+        <a:solidFill>
+          <a:schemeClr val="tx1"/>
+        </a:solidFill>
+        <a:latin typeface="+mn-lt"/>
+        <a:ea typeface="+mn-ea"/>
+        <a:cs typeface="+mn-cs"/>
+      </a:defRPr>
+    </a:lvl8pPr>
+    <a:lvl9pPr marL="3657600" algn="l" defTabSz="914400" rtl="0" eaLnBrk="1" latinLnBrk="0" hangingPunct="1">
+      <a:defRPr sz="1800" kern="1200">
+        <a:solidFill>
+          <a:schemeClr val="tx1"/>
+        </a:solidFill>
+        <a:latin typeface="+mn-lt"/>
+        <a:ea typeface="+mn-ea"/>
+        <a:cs typeface="+mn-cs"/>
+      </a:defRPr>
+    </a:lvl9pPr>
+  </p:defaultTextStyle>
 </p:presentation>
 </file>
 
 <file path=ppt/slideLayouts/slideLayout1.xml><?xml version="1.0" encoding="utf-8"?>
-<p:sldLayout xmlns:a="http://schemas.openxmlformats.org/drawingml/2006/main" xmlns:p="http://schemas.openxmlformats.org/presentationml/2006/main" xmlns:r="http://schemas.openxmlformats.org/officeDocument/2006/relationships" xmlns:p14="http://schemas.microsoft.com/office/powerpoint/2010/main" xmlns:p15="http://schemas.microsoft.com/office/powerpoint/2012/main" xmlns:mc="http://schemas.openxmlformats.org/markup-compatibility/2006" type="title" preserve="1">
+<p:sldLayout xmlns:a="http://schemas.openxmlformats.org/drawingml/2006/main" xmlns:r="http://schemas.openxmlformats.org/officeDocument/2006/relationships" xmlns:p="http://schemas.openxmlformats.org/presentationml/2006/main" type="title" preserve="1">
   <p:cSld name="TITLE">
     <p:bg>
       <p:bgPr>
         <a:solidFill>
           <a:schemeClr val="lt1"/>
         </a:solidFill>
+        <a:effectLst/>
       </p:bgPr>
     </p:bg>
     <p:spTree>
@@ -101,14 +197,6 @@
               </a:rPr>
               <a:t>Для правки текста заглавия щёлкните мышью</a:t>
             </a:r>
-            <a:endParaRPr lang="ru-RU" sz="5200" b="0" u="none" strike="noStrike">
-              <a:solidFill>
-                <a:srgbClr val="000000"/>
-              </a:solidFill>
-              <a:effectLst/>
-              <a:uFillTx/>
-              <a:latin typeface="Arial"/>
-            </a:endParaRPr>
           </a:p>
         </p:txBody>
       </p:sp>
@@ -179,7 +267,7 @@
                 <a:latin typeface="Arial"/>
                 <a:ea typeface="Arial"/>
               </a:rPr>
-              <a:t>&lt;номер&gt;</a:t>
+              <a:t>‹#›</a:t>
             </a:fld>
             <a:endParaRPr lang="ru-RU" sz="1000" b="0" u="none" strike="noStrike">
               <a:solidFill>
@@ -201,13 +289,14 @@
 </file>
 
 <file path=ppt/slideLayouts/slideLayout10.xml><?xml version="1.0" encoding="utf-8"?>
-<p:sldLayout xmlns:a="http://schemas.openxmlformats.org/drawingml/2006/main" xmlns:p="http://schemas.openxmlformats.org/presentationml/2006/main" xmlns:r="http://schemas.openxmlformats.org/officeDocument/2006/relationships" xmlns:p14="http://schemas.microsoft.com/office/powerpoint/2010/main" xmlns:p15="http://schemas.microsoft.com/office/powerpoint/2012/main" xmlns:mc="http://schemas.openxmlformats.org/markup-compatibility/2006" type="blank" preserve="1">
+<p:sldLayout xmlns:a="http://schemas.openxmlformats.org/drawingml/2006/main" xmlns:r="http://schemas.openxmlformats.org/officeDocument/2006/relationships" xmlns:p="http://schemas.openxmlformats.org/presentationml/2006/main" type="blank" preserve="1">
   <p:cSld name="SECTION_TITLE_AND_DESCRIPTION">
     <p:bg>
       <p:bgPr>
         <a:solidFill>
           <a:schemeClr val="lt1"/>
         </a:solidFill>
+        <a:effectLst/>
       </p:bgPr>
     </p:bg>
     <p:spTree>
@@ -246,17 +335,23 @@
           </a:ln>
         </p:spPr>
         <p:style>
-          <a:lnRef idx="0"/>
-          <a:fillRef idx="0"/>
-          <a:effectRef idx="0"/>
+          <a:lnRef idx="0">
+            <a:scrgbClr r="0" g="0" b="0"/>
+          </a:lnRef>
+          <a:fillRef idx="0">
+            <a:scrgbClr r="0" g="0" b="0"/>
+          </a:fillRef>
+          <a:effectRef idx="0">
+            <a:scrgbClr r="0" g="0" b="0"/>
+          </a:effectRef>
           <a:fontRef idx="minor"/>
         </p:style>
         <p:txBody>
           <a:bodyPr tIns="91440" bIns="91440" anchor="ctr">
             <a:noAutofit/>
           </a:bodyPr>
-          <a:p>
-            <a:pPr/>
+          <a:lstStyle/>
+          <a:p>
             <a:endParaRPr lang="ru-RU" sz="1400" b="0" u="none" strike="noStrike">
               <a:solidFill>
                 <a:srgbClr val="000000"/>
@@ -323,14 +418,6 @@
               </a:rPr>
               <a:t>Для правки текста заглавия щёлкните мышью</a:t>
             </a:r>
-            <a:endParaRPr lang="ru-RU" sz="4200" b="0" u="none" strike="noStrike">
-              <a:solidFill>
-                <a:srgbClr val="000000"/>
-              </a:solidFill>
-              <a:effectLst/>
-              <a:uFillTx/>
-              <a:latin typeface="Arial"/>
-            </a:endParaRPr>
           </a:p>
         </p:txBody>
       </p:sp>
@@ -519,14 +606,6 @@
               </a:rPr>
               <a:t>Для правки структуры щёлкните мышью</a:t>
             </a:r>
-            <a:endParaRPr lang="ru-RU" sz="1800" b="0" u="none" strike="noStrike">
-              <a:solidFill>
-                <a:srgbClr val="000000"/>
-              </a:solidFill>
-              <a:effectLst/>
-              <a:uFillTx/>
-              <a:latin typeface="Arial"/>
-            </a:endParaRPr>
           </a:p>
           <a:p>
             <a:pPr marL="914400" lvl="1" indent="-317520" algn="l">
@@ -551,14 +630,6 @@
               </a:rPr>
               <a:t>Второй уровень структуры</a:t>
             </a:r>
-            <a:endParaRPr lang="ru-RU" sz="1800" b="0" u="none" strike="noStrike">
-              <a:solidFill>
-                <a:srgbClr val="000000"/>
-              </a:solidFill>
-              <a:effectLst/>
-              <a:uFillTx/>
-              <a:latin typeface="Arial"/>
-            </a:endParaRPr>
           </a:p>
           <a:p>
             <a:pPr marL="1371600" lvl="2" indent="-317520" algn="l">
@@ -583,14 +654,6 @@
               </a:rPr>
               <a:t>Третий уровень структуры</a:t>
             </a:r>
-            <a:endParaRPr lang="ru-RU" sz="1800" b="0" u="none" strike="noStrike">
-              <a:solidFill>
-                <a:srgbClr val="000000"/>
-              </a:solidFill>
-              <a:effectLst/>
-              <a:uFillTx/>
-              <a:latin typeface="Arial"/>
-            </a:endParaRPr>
           </a:p>
           <a:p>
             <a:pPr marL="1828800" lvl="3" indent="-317520" algn="l">
@@ -615,14 +678,6 @@
               </a:rPr>
               <a:t>Четвёртый уровень структуры</a:t>
             </a:r>
-            <a:endParaRPr lang="ru-RU" sz="1800" b="0" u="none" strike="noStrike">
-              <a:solidFill>
-                <a:srgbClr val="000000"/>
-              </a:solidFill>
-              <a:effectLst/>
-              <a:uFillTx/>
-              <a:latin typeface="Arial"/>
-            </a:endParaRPr>
           </a:p>
           <a:p>
             <a:pPr marL="2286000" lvl="4" indent="-317520" algn="l">
@@ -647,14 +702,6 @@
               </a:rPr>
               <a:t>Пятый уровень структуры</a:t>
             </a:r>
-            <a:endParaRPr lang="ru-RU" sz="1800" b="0" u="none" strike="noStrike">
-              <a:solidFill>
-                <a:srgbClr val="000000"/>
-              </a:solidFill>
-              <a:effectLst/>
-              <a:uFillTx/>
-              <a:latin typeface="Arial"/>
-            </a:endParaRPr>
           </a:p>
           <a:p>
             <a:pPr marL="2743200" lvl="5" indent="-317520" algn="l">
@@ -679,14 +726,6 @@
               </a:rPr>
               <a:t>Шестой уровень структуры</a:t>
             </a:r>
-            <a:endParaRPr lang="ru-RU" sz="1800" b="0" u="none" strike="noStrike">
-              <a:solidFill>
-                <a:srgbClr val="000000"/>
-              </a:solidFill>
-              <a:effectLst/>
-              <a:uFillTx/>
-              <a:latin typeface="Arial"/>
-            </a:endParaRPr>
           </a:p>
           <a:p>
             <a:pPr marL="3200400" lvl="6" indent="-317520" algn="l">
@@ -711,14 +750,6 @@
               </a:rPr>
               <a:t>Седьмой уровень структуры</a:t>
             </a:r>
-            <a:endParaRPr lang="ru-RU" sz="1800" b="0" u="none" strike="noStrike">
-              <a:solidFill>
-                <a:srgbClr val="000000"/>
-              </a:solidFill>
-              <a:effectLst/>
-              <a:uFillTx/>
-              <a:latin typeface="Arial"/>
-            </a:endParaRPr>
           </a:p>
         </p:txBody>
       </p:sp>
@@ -789,7 +820,7 @@
                 <a:latin typeface="Arial"/>
                 <a:ea typeface="Arial"/>
               </a:rPr>
-              <a:t>&lt;номер&gt;</a:t>
+              <a:t>‹#›</a:t>
             </a:fld>
             <a:endParaRPr lang="ru-RU" sz="1000" b="0" u="none" strike="noStrike">
               <a:solidFill>
@@ -811,13 +842,14 @@
 </file>
 
 <file path=ppt/slideLayouts/slideLayout11.xml><?xml version="1.0" encoding="utf-8"?>
-<p:sldLayout xmlns:a="http://schemas.openxmlformats.org/drawingml/2006/main" xmlns:p="http://schemas.openxmlformats.org/presentationml/2006/main" xmlns:r="http://schemas.openxmlformats.org/officeDocument/2006/relationships" xmlns:p14="http://schemas.microsoft.com/office/powerpoint/2010/main" xmlns:p15="http://schemas.microsoft.com/office/powerpoint/2012/main" xmlns:mc="http://schemas.openxmlformats.org/markup-compatibility/2006" type="blank" preserve="1">
+<p:sldLayout xmlns:a="http://schemas.openxmlformats.org/drawingml/2006/main" xmlns:r="http://schemas.openxmlformats.org/officeDocument/2006/relationships" xmlns:p="http://schemas.openxmlformats.org/presentationml/2006/main" type="blank" preserve="1">
   <p:cSld name="CAPTION_ONLY">
     <p:bg>
       <p:bgPr>
         <a:solidFill>
           <a:schemeClr val="lt1"/>
         </a:solidFill>
+        <a:effectLst/>
       </p:bgPr>
     </p:bg>
     <p:spTree>
@@ -1019,14 +1051,6 @@
               </a:rPr>
               <a:t>Для правки структуры щёлкните мышью</a:t>
             </a:r>
-            <a:endParaRPr lang="ru-RU" sz="1800" b="0" u="none" strike="noStrike">
-              <a:solidFill>
-                <a:srgbClr val="000000"/>
-              </a:solidFill>
-              <a:effectLst/>
-              <a:uFillTx/>
-              <a:latin typeface="Arial"/>
-            </a:endParaRPr>
           </a:p>
           <a:p>
             <a:pPr marL="914400" lvl="1" indent="-317520" algn="l">
@@ -1051,14 +1075,6 @@
               </a:rPr>
               <a:t>Второй уровень структуры</a:t>
             </a:r>
-            <a:endParaRPr lang="ru-RU" sz="1800" b="0" u="none" strike="noStrike">
-              <a:solidFill>
-                <a:srgbClr val="000000"/>
-              </a:solidFill>
-              <a:effectLst/>
-              <a:uFillTx/>
-              <a:latin typeface="Arial"/>
-            </a:endParaRPr>
           </a:p>
           <a:p>
             <a:pPr marL="1371600" lvl="2" indent="-317520" algn="l">
@@ -1083,14 +1099,6 @@
               </a:rPr>
               <a:t>Третий уровень структуры</a:t>
             </a:r>
-            <a:endParaRPr lang="ru-RU" sz="1800" b="0" u="none" strike="noStrike">
-              <a:solidFill>
-                <a:srgbClr val="000000"/>
-              </a:solidFill>
-              <a:effectLst/>
-              <a:uFillTx/>
-              <a:latin typeface="Arial"/>
-            </a:endParaRPr>
           </a:p>
           <a:p>
             <a:pPr marL="1828800" lvl="3" indent="-317520" algn="l">
@@ -1115,14 +1123,6 @@
               </a:rPr>
               <a:t>Четвёртый уровень структуры</a:t>
             </a:r>
-            <a:endParaRPr lang="ru-RU" sz="1800" b="0" u="none" strike="noStrike">
-              <a:solidFill>
-                <a:srgbClr val="000000"/>
-              </a:solidFill>
-              <a:effectLst/>
-              <a:uFillTx/>
-              <a:latin typeface="Arial"/>
-            </a:endParaRPr>
           </a:p>
           <a:p>
             <a:pPr marL="2286000" lvl="4" indent="-317520" algn="l">
@@ -1147,14 +1147,6 @@
               </a:rPr>
               <a:t>Пятый уровень структуры</a:t>
             </a:r>
-            <a:endParaRPr lang="ru-RU" sz="1800" b="0" u="none" strike="noStrike">
-              <a:solidFill>
-                <a:srgbClr val="000000"/>
-              </a:solidFill>
-              <a:effectLst/>
-              <a:uFillTx/>
-              <a:latin typeface="Arial"/>
-            </a:endParaRPr>
           </a:p>
           <a:p>
             <a:pPr marL="2743200" lvl="5" indent="-317520" algn="l">
@@ -1179,14 +1171,6 @@
               </a:rPr>
               <a:t>Шестой уровень структуры</a:t>
             </a:r>
-            <a:endParaRPr lang="ru-RU" sz="1800" b="0" u="none" strike="noStrike">
-              <a:solidFill>
-                <a:srgbClr val="000000"/>
-              </a:solidFill>
-              <a:effectLst/>
-              <a:uFillTx/>
-              <a:latin typeface="Arial"/>
-            </a:endParaRPr>
           </a:p>
           <a:p>
             <a:pPr marL="3200400" lvl="6" indent="-317520" algn="l">
@@ -1211,14 +1195,6 @@
               </a:rPr>
               <a:t>Седьмой уровень структуры</a:t>
             </a:r>
-            <a:endParaRPr lang="ru-RU" sz="1800" b="0" u="none" strike="noStrike">
-              <a:solidFill>
-                <a:srgbClr val="000000"/>
-              </a:solidFill>
-              <a:effectLst/>
-              <a:uFillTx/>
-              <a:latin typeface="Arial"/>
-            </a:endParaRPr>
           </a:p>
         </p:txBody>
       </p:sp>
@@ -1289,7 +1265,7 @@
                 <a:latin typeface="Arial"/>
                 <a:ea typeface="Arial"/>
               </a:rPr>
-              <a:t>&lt;номер&gt;</a:t>
+              <a:t>‹#›</a:t>
             </a:fld>
             <a:endParaRPr lang="ru-RU" sz="1000" b="0" u="none" strike="noStrike">
               <a:solidFill>
@@ -1311,13 +1287,14 @@
 </file>
 
 <file path=ppt/slideLayouts/slideLayout12.xml><?xml version="1.0" encoding="utf-8"?>
-<p:sldLayout xmlns:a="http://schemas.openxmlformats.org/drawingml/2006/main" xmlns:p="http://schemas.openxmlformats.org/presentationml/2006/main" xmlns:r="http://schemas.openxmlformats.org/officeDocument/2006/relationships" xmlns:p14="http://schemas.microsoft.com/office/powerpoint/2010/main" xmlns:p15="http://schemas.microsoft.com/office/powerpoint/2012/main" xmlns:mc="http://schemas.openxmlformats.org/markup-compatibility/2006" type="blank" preserve="1">
+<p:sldLayout xmlns:a="http://schemas.openxmlformats.org/drawingml/2006/main" xmlns:r="http://schemas.openxmlformats.org/officeDocument/2006/relationships" xmlns:p="http://schemas.openxmlformats.org/presentationml/2006/main" type="blank" preserve="1">
   <p:cSld name="Обычный">
     <p:bg>
       <p:bgPr>
         <a:solidFill>
           <a:schemeClr val="lt1"/>
         </a:solidFill>
+        <a:effectLst/>
       </p:bgPr>
     </p:bg>
     <p:spTree>
@@ -1389,14 +1366,6 @@
               </a:rPr>
               <a:t>&lt;дата/время&gt;</a:t>
             </a:r>
-            <a:endParaRPr lang="ru-RU" sz="1400" b="0" u="none" strike="noStrike">
-              <a:solidFill>
-                <a:srgbClr val="000000"/>
-              </a:solidFill>
-              <a:effectLst/>
-              <a:uFillTx/>
-              <a:latin typeface="Times New Roman"/>
-            </a:endParaRPr>
           </a:p>
         </p:txBody>
       </p:sp>
@@ -1455,14 +1424,6 @@
               </a:rPr>
               <a:t>&lt;нижний колонтитул&gt;</a:t>
             </a:r>
-            <a:endParaRPr lang="ru-RU" sz="1400" b="0" u="none" strike="noStrike">
-              <a:solidFill>
-                <a:srgbClr val="000000"/>
-              </a:solidFill>
-              <a:effectLst/>
-              <a:uFillTx/>
-              <a:latin typeface="Times New Roman"/>
-            </a:endParaRPr>
           </a:p>
         </p:txBody>
       </p:sp>
@@ -1533,7 +1494,7 @@
                 <a:latin typeface="Calibri"/>
                 <a:ea typeface="Calibri"/>
               </a:rPr>
-              <a:t>&lt;номер&gt;</a:t>
+              <a:t>‹#›</a:t>
             </a:fld>
             <a:endParaRPr lang="ru-RU" sz="900" b="0" u="none" strike="noStrike">
               <a:solidFill>
@@ -1601,14 +1562,6 @@
               </a:rPr>
               <a:t>Для правки текста заглавия щёлкните мышью</a:t>
             </a:r>
-            <a:endParaRPr lang="ru-RU" sz="1400" b="0" u="none" strike="noStrike">
-              <a:solidFill>
-                <a:srgbClr val="000000"/>
-              </a:solidFill>
-              <a:effectLst/>
-              <a:uFillTx/>
-              <a:latin typeface="Arial"/>
-            </a:endParaRPr>
           </a:p>
         </p:txBody>
       </p:sp>
@@ -1797,14 +1750,6 @@
               </a:rPr>
               <a:t>Для правки структуры щёлкните мышью</a:t>
             </a:r>
-            <a:endParaRPr lang="ru-RU" sz="1400" b="0" u="none" strike="noStrike">
-              <a:solidFill>
-                <a:srgbClr val="000000"/>
-              </a:solidFill>
-              <a:effectLst/>
-              <a:uFillTx/>
-              <a:latin typeface="Arial"/>
-            </a:endParaRPr>
           </a:p>
           <a:p>
             <a:pPr marL="864000" lvl="1" indent="-324000" algn="l">
@@ -1829,14 +1774,6 @@
               </a:rPr>
               <a:t>Второй уровень структуры</a:t>
             </a:r>
-            <a:endParaRPr lang="ru-RU" sz="1400" b="0" u="none" strike="noStrike">
-              <a:solidFill>
-                <a:srgbClr val="000000"/>
-              </a:solidFill>
-              <a:effectLst/>
-              <a:uFillTx/>
-              <a:latin typeface="Arial"/>
-            </a:endParaRPr>
           </a:p>
           <a:p>
             <a:pPr marL="1296000" lvl="2" indent="-288000" algn="l">
@@ -1861,14 +1798,6 @@
               </a:rPr>
               <a:t>Третий уровень структуры</a:t>
             </a:r>
-            <a:endParaRPr lang="ru-RU" sz="1400" b="0" u="none" strike="noStrike">
-              <a:solidFill>
-                <a:srgbClr val="000000"/>
-              </a:solidFill>
-              <a:effectLst/>
-              <a:uFillTx/>
-              <a:latin typeface="Arial"/>
-            </a:endParaRPr>
           </a:p>
           <a:p>
             <a:pPr marL="1728000" lvl="3" indent="-216000" algn="l">
@@ -1893,14 +1822,6 @@
               </a:rPr>
               <a:t>Четвёртый уровень структуры</a:t>
             </a:r>
-            <a:endParaRPr lang="ru-RU" sz="1400" b="0" u="none" strike="noStrike">
-              <a:solidFill>
-                <a:srgbClr val="000000"/>
-              </a:solidFill>
-              <a:effectLst/>
-              <a:uFillTx/>
-              <a:latin typeface="Arial"/>
-            </a:endParaRPr>
           </a:p>
           <a:p>
             <a:pPr marL="2160000" lvl="4" indent="-216000" algn="l">
@@ -1925,14 +1846,6 @@
               </a:rPr>
               <a:t>Пятый уровень структуры</a:t>
             </a:r>
-            <a:endParaRPr lang="ru-RU" sz="2000" b="0" u="none" strike="noStrike">
-              <a:solidFill>
-                <a:srgbClr val="000000"/>
-              </a:solidFill>
-              <a:effectLst/>
-              <a:uFillTx/>
-              <a:latin typeface="Arial"/>
-            </a:endParaRPr>
           </a:p>
           <a:p>
             <a:pPr marL="2592000" lvl="5" indent="-216000" algn="l">
@@ -1957,14 +1870,6 @@
               </a:rPr>
               <a:t>Шестой уровень структуры</a:t>
             </a:r>
-            <a:endParaRPr lang="ru-RU" sz="2000" b="0" u="none" strike="noStrike">
-              <a:solidFill>
-                <a:srgbClr val="000000"/>
-              </a:solidFill>
-              <a:effectLst/>
-              <a:uFillTx/>
-              <a:latin typeface="Arial"/>
-            </a:endParaRPr>
           </a:p>
           <a:p>
             <a:pPr marL="3024000" lvl="6" indent="-216000" algn="l">
@@ -1989,14 +1894,6 @@
               </a:rPr>
               <a:t>Седьмой уровень структуры</a:t>
             </a:r>
-            <a:endParaRPr lang="ru-RU" sz="2000" b="0" u="none" strike="noStrike">
-              <a:solidFill>
-                <a:srgbClr val="000000"/>
-              </a:solidFill>
-              <a:effectLst/>
-              <a:uFillTx/>
-              <a:latin typeface="Arial"/>
-            </a:endParaRPr>
           </a:p>
         </p:txBody>
       </p:sp>
@@ -2009,13 +1906,14 @@
 </file>
 
 <file path=ppt/slideLayouts/slideLayout13.xml><?xml version="1.0" encoding="utf-8"?>
-<p:sldLayout xmlns:a="http://schemas.openxmlformats.org/drawingml/2006/main" xmlns:p="http://schemas.openxmlformats.org/presentationml/2006/main" xmlns:r="http://schemas.openxmlformats.org/officeDocument/2006/relationships" xmlns:p14="http://schemas.microsoft.com/office/powerpoint/2010/main" xmlns:p15="http://schemas.microsoft.com/office/powerpoint/2012/main" xmlns:mc="http://schemas.openxmlformats.org/markup-compatibility/2006" type="vertTx" preserve="1">
+<p:sldLayout xmlns:a="http://schemas.openxmlformats.org/drawingml/2006/main" xmlns:r="http://schemas.openxmlformats.org/officeDocument/2006/relationships" xmlns:p="http://schemas.openxmlformats.org/presentationml/2006/main" type="vertTx" preserve="1">
   <p:cSld name="VERTICAL_TEXT">
     <p:bg>
       <p:bgPr>
         <a:solidFill>
           <a:schemeClr val="lt1"/>
         </a:solidFill>
+        <a:effectLst/>
       </p:bgPr>
     </p:bg>
     <p:spTree>
@@ -2087,14 +1985,6 @@
               </a:rPr>
               <a:t>Для правки текста заглавия щёлкните мышью</a:t>
             </a:r>
-            <a:endParaRPr lang="ru-RU" sz="3300" b="0" u="none" strike="noStrike">
-              <a:solidFill>
-                <a:srgbClr val="000000"/>
-              </a:solidFill>
-              <a:effectLst/>
-              <a:uFillTx/>
-              <a:latin typeface="Arial"/>
-            </a:endParaRPr>
           </a:p>
         </p:txBody>
       </p:sp>
@@ -2283,14 +2173,6 @@
               </a:rPr>
               <a:t>Для правки структуры щёлкните мышью</a:t>
             </a:r>
-            <a:endParaRPr lang="ru-RU" sz="2100" b="0" u="none" strike="noStrike">
-              <a:solidFill>
-                <a:srgbClr val="000000"/>
-              </a:solidFill>
-              <a:effectLst/>
-              <a:uFillTx/>
-              <a:latin typeface="Arial"/>
-            </a:endParaRPr>
           </a:p>
           <a:p>
             <a:pPr marL="914400" lvl="1" indent="-317520" algn="l">
@@ -2315,14 +2197,6 @@
               </a:rPr>
               <a:t>Второй уровень структуры</a:t>
             </a:r>
-            <a:endParaRPr lang="ru-RU" sz="2100" b="0" u="none" strike="noStrike">
-              <a:solidFill>
-                <a:srgbClr val="000000"/>
-              </a:solidFill>
-              <a:effectLst/>
-              <a:uFillTx/>
-              <a:latin typeface="Arial"/>
-            </a:endParaRPr>
           </a:p>
           <a:p>
             <a:pPr marL="1371600" lvl="2" indent="-317520" algn="l">
@@ -2347,14 +2221,6 @@
               </a:rPr>
               <a:t>Третий уровень структуры</a:t>
             </a:r>
-            <a:endParaRPr lang="ru-RU" sz="2100" b="0" u="none" strike="noStrike">
-              <a:solidFill>
-                <a:srgbClr val="000000"/>
-              </a:solidFill>
-              <a:effectLst/>
-              <a:uFillTx/>
-              <a:latin typeface="Arial"/>
-            </a:endParaRPr>
           </a:p>
           <a:p>
             <a:pPr marL="1828800" lvl="3" indent="-317520" algn="l">
@@ -2379,14 +2245,6 @@
               </a:rPr>
               <a:t>Четвёртый уровень структуры</a:t>
             </a:r>
-            <a:endParaRPr lang="ru-RU" sz="2100" b="0" u="none" strike="noStrike">
-              <a:solidFill>
-                <a:srgbClr val="000000"/>
-              </a:solidFill>
-              <a:effectLst/>
-              <a:uFillTx/>
-              <a:latin typeface="Arial"/>
-            </a:endParaRPr>
           </a:p>
           <a:p>
             <a:pPr marL="2286000" lvl="4" indent="-317520" algn="l">
@@ -2411,14 +2269,6 @@
               </a:rPr>
               <a:t>Пятый уровень структуры</a:t>
             </a:r>
-            <a:endParaRPr lang="ru-RU" sz="2100" b="0" u="none" strike="noStrike">
-              <a:solidFill>
-                <a:srgbClr val="000000"/>
-              </a:solidFill>
-              <a:effectLst/>
-              <a:uFillTx/>
-              <a:latin typeface="Arial"/>
-            </a:endParaRPr>
           </a:p>
           <a:p>
             <a:pPr marL="2743200" lvl="5" indent="-317520" algn="l">
@@ -2443,14 +2293,6 @@
               </a:rPr>
               <a:t>Шестой уровень структуры</a:t>
             </a:r>
-            <a:endParaRPr lang="ru-RU" sz="2100" b="0" u="none" strike="noStrike">
-              <a:solidFill>
-                <a:srgbClr val="000000"/>
-              </a:solidFill>
-              <a:effectLst/>
-              <a:uFillTx/>
-              <a:latin typeface="Arial"/>
-            </a:endParaRPr>
           </a:p>
           <a:p>
             <a:pPr marL="3200400" lvl="6" indent="-317520" algn="l">
@@ -2475,14 +2317,6 @@
               </a:rPr>
               <a:t>Седьмой уровень структуры</a:t>
             </a:r>
-            <a:endParaRPr lang="ru-RU" sz="2100" b="0" u="none" strike="noStrike">
-              <a:solidFill>
-                <a:srgbClr val="000000"/>
-              </a:solidFill>
-              <a:effectLst/>
-              <a:uFillTx/>
-              <a:latin typeface="Arial"/>
-            </a:endParaRPr>
           </a:p>
         </p:txBody>
       </p:sp>
@@ -2541,14 +2375,6 @@
               </a:rPr>
               <a:t>&lt;дата/время&gt;</a:t>
             </a:r>
-            <a:endParaRPr lang="ru-RU" sz="1400" b="0" u="none" strike="noStrike">
-              <a:solidFill>
-                <a:srgbClr val="000000"/>
-              </a:solidFill>
-              <a:effectLst/>
-              <a:uFillTx/>
-              <a:latin typeface="Times New Roman"/>
-            </a:endParaRPr>
           </a:p>
         </p:txBody>
       </p:sp>
@@ -2607,14 +2433,6 @@
               </a:rPr>
               <a:t>&lt;нижний колонтитул&gt;</a:t>
             </a:r>
-            <a:endParaRPr lang="ru-RU" sz="1400" b="0" u="none" strike="noStrike">
-              <a:solidFill>
-                <a:srgbClr val="000000"/>
-              </a:solidFill>
-              <a:effectLst/>
-              <a:uFillTx/>
-              <a:latin typeface="Times New Roman"/>
-            </a:endParaRPr>
           </a:p>
         </p:txBody>
       </p:sp>
@@ -2685,7 +2503,7 @@
                 <a:latin typeface="Calibri"/>
                 <a:ea typeface="Calibri"/>
               </a:rPr>
-              <a:t>&lt;номер&gt;</a:t>
+              <a:t>‹#›</a:t>
             </a:fld>
             <a:endParaRPr lang="ru-RU" sz="900" b="0" u="none" strike="noStrike">
               <a:solidFill>
@@ -2707,13 +2525,14 @@
 </file>
 
 <file path=ppt/slideLayouts/slideLayout14.xml><?xml version="1.0" encoding="utf-8"?>
-<p:sldLayout xmlns:a="http://schemas.openxmlformats.org/drawingml/2006/main" xmlns:p="http://schemas.openxmlformats.org/presentationml/2006/main" xmlns:r="http://schemas.openxmlformats.org/officeDocument/2006/relationships" xmlns:p14="http://schemas.microsoft.com/office/powerpoint/2010/main" xmlns:p15="http://schemas.microsoft.com/office/powerpoint/2012/main" xmlns:mc="http://schemas.openxmlformats.org/markup-compatibility/2006" type="vertTitleAndTx" preserve="1">
+<p:sldLayout xmlns:a="http://schemas.openxmlformats.org/drawingml/2006/main" xmlns:r="http://schemas.openxmlformats.org/officeDocument/2006/relationships" xmlns:p="http://schemas.openxmlformats.org/presentationml/2006/main" type="vertTitleAndTx" preserve="1">
   <p:cSld name="VERTICAL_TITLE_AND_VERTICAL_TEXT">
     <p:bg>
       <p:bgPr>
         <a:solidFill>
           <a:schemeClr val="lt1"/>
         </a:solidFill>
+        <a:effectLst/>
       </p:bgPr>
     </p:bg>
     <p:spTree>
@@ -2785,14 +2604,6 @@
               </a:rPr>
               <a:t>Для правки текста заглавия щёлкните мышью</a:t>
             </a:r>
-            <a:endParaRPr lang="ru-RU" sz="3300" b="0" u="none" strike="noStrike">
-              <a:solidFill>
-                <a:srgbClr val="000000"/>
-              </a:solidFill>
-              <a:effectLst/>
-              <a:uFillTx/>
-              <a:latin typeface="Arial"/>
-            </a:endParaRPr>
           </a:p>
         </p:txBody>
       </p:sp>
@@ -2981,14 +2792,6 @@
               </a:rPr>
               <a:t>Для правки структуры щёлкните мышью</a:t>
             </a:r>
-            <a:endParaRPr lang="ru-RU" sz="2100" b="0" u="none" strike="noStrike">
-              <a:solidFill>
-                <a:srgbClr val="000000"/>
-              </a:solidFill>
-              <a:effectLst/>
-              <a:uFillTx/>
-              <a:latin typeface="Arial"/>
-            </a:endParaRPr>
           </a:p>
           <a:p>
             <a:pPr marL="914400" lvl="1" indent="-317520" algn="l">
@@ -3013,14 +2816,6 @@
               </a:rPr>
               <a:t>Второй уровень структуры</a:t>
             </a:r>
-            <a:endParaRPr lang="ru-RU" sz="2100" b="0" u="none" strike="noStrike">
-              <a:solidFill>
-                <a:srgbClr val="000000"/>
-              </a:solidFill>
-              <a:effectLst/>
-              <a:uFillTx/>
-              <a:latin typeface="Arial"/>
-            </a:endParaRPr>
           </a:p>
           <a:p>
             <a:pPr marL="1371600" lvl="2" indent="-317520" algn="l">
@@ -3045,14 +2840,6 @@
               </a:rPr>
               <a:t>Третий уровень структуры</a:t>
             </a:r>
-            <a:endParaRPr lang="ru-RU" sz="2100" b="0" u="none" strike="noStrike">
-              <a:solidFill>
-                <a:srgbClr val="000000"/>
-              </a:solidFill>
-              <a:effectLst/>
-              <a:uFillTx/>
-              <a:latin typeface="Arial"/>
-            </a:endParaRPr>
           </a:p>
           <a:p>
             <a:pPr marL="1828800" lvl="3" indent="-317520" algn="l">
@@ -3077,14 +2864,6 @@
               </a:rPr>
               <a:t>Четвёртый уровень структуры</a:t>
             </a:r>
-            <a:endParaRPr lang="ru-RU" sz="2100" b="0" u="none" strike="noStrike">
-              <a:solidFill>
-                <a:srgbClr val="000000"/>
-              </a:solidFill>
-              <a:effectLst/>
-              <a:uFillTx/>
-              <a:latin typeface="Arial"/>
-            </a:endParaRPr>
           </a:p>
           <a:p>
             <a:pPr marL="2286000" lvl="4" indent="-317520" algn="l">
@@ -3109,14 +2888,6 @@
               </a:rPr>
               <a:t>Пятый уровень структуры</a:t>
             </a:r>
-            <a:endParaRPr lang="ru-RU" sz="2100" b="0" u="none" strike="noStrike">
-              <a:solidFill>
-                <a:srgbClr val="000000"/>
-              </a:solidFill>
-              <a:effectLst/>
-              <a:uFillTx/>
-              <a:latin typeface="Arial"/>
-            </a:endParaRPr>
           </a:p>
           <a:p>
             <a:pPr marL="2743200" lvl="5" indent="-317520" algn="l">
@@ -3141,14 +2912,6 @@
               </a:rPr>
               <a:t>Шестой уровень структуры</a:t>
             </a:r>
-            <a:endParaRPr lang="ru-RU" sz="2100" b="0" u="none" strike="noStrike">
-              <a:solidFill>
-                <a:srgbClr val="000000"/>
-              </a:solidFill>
-              <a:effectLst/>
-              <a:uFillTx/>
-              <a:latin typeface="Arial"/>
-            </a:endParaRPr>
           </a:p>
           <a:p>
             <a:pPr marL="3200400" lvl="6" indent="-317520" algn="l">
@@ -3173,14 +2936,6 @@
               </a:rPr>
               <a:t>Седьмой уровень структуры</a:t>
             </a:r>
-            <a:endParaRPr lang="ru-RU" sz="2100" b="0" u="none" strike="noStrike">
-              <a:solidFill>
-                <a:srgbClr val="000000"/>
-              </a:solidFill>
-              <a:effectLst/>
-              <a:uFillTx/>
-              <a:latin typeface="Arial"/>
-            </a:endParaRPr>
           </a:p>
         </p:txBody>
       </p:sp>
@@ -3239,14 +2994,6 @@
               </a:rPr>
               <a:t>&lt;дата/время&gt;</a:t>
             </a:r>
-            <a:endParaRPr lang="ru-RU" sz="1400" b="0" u="none" strike="noStrike">
-              <a:solidFill>
-                <a:srgbClr val="000000"/>
-              </a:solidFill>
-              <a:effectLst/>
-              <a:uFillTx/>
-              <a:latin typeface="Times New Roman"/>
-            </a:endParaRPr>
           </a:p>
         </p:txBody>
       </p:sp>
@@ -3305,14 +3052,6 @@
               </a:rPr>
               <a:t>&lt;нижний колонтитул&gt;</a:t>
             </a:r>
-            <a:endParaRPr lang="ru-RU" sz="1400" b="0" u="none" strike="noStrike">
-              <a:solidFill>
-                <a:srgbClr val="000000"/>
-              </a:solidFill>
-              <a:effectLst/>
-              <a:uFillTx/>
-              <a:latin typeface="Times New Roman"/>
-            </a:endParaRPr>
           </a:p>
         </p:txBody>
       </p:sp>
@@ -3383,7 +3122,7 @@
                 <a:latin typeface="Calibri"/>
                 <a:ea typeface="Calibri"/>
               </a:rPr>
-              <a:t>&lt;номер&gt;</a:t>
+              <a:t>‹#›</a:t>
             </a:fld>
             <a:endParaRPr lang="ru-RU" sz="900" b="0" u="none" strike="noStrike">
               <a:solidFill>
@@ -3405,13 +3144,14 @@
 </file>
 
 <file path=ppt/slideLayouts/slideLayout15.xml><?xml version="1.0" encoding="utf-8"?>
-<p:sldLayout xmlns:a="http://schemas.openxmlformats.org/drawingml/2006/main" xmlns:p="http://schemas.openxmlformats.org/presentationml/2006/main" xmlns:r="http://schemas.openxmlformats.org/officeDocument/2006/relationships" xmlns:p14="http://schemas.microsoft.com/office/powerpoint/2010/main" xmlns:p15="http://schemas.microsoft.com/office/powerpoint/2012/main" xmlns:mc="http://schemas.openxmlformats.org/markup-compatibility/2006" type="title" preserve="1">
+<p:sldLayout xmlns:a="http://schemas.openxmlformats.org/drawingml/2006/main" xmlns:r="http://schemas.openxmlformats.org/officeDocument/2006/relationships" xmlns:p="http://schemas.openxmlformats.org/presentationml/2006/main" type="title" preserve="1">
   <p:cSld name="Обычный 1">
     <p:bg>
       <p:bgPr>
         <a:solidFill>
           <a:schemeClr val="lt1"/>
         </a:solidFill>
+        <a:effectLst/>
       </p:bgPr>
     </p:bg>
     <p:spTree>
@@ -3483,14 +3223,6 @@
               </a:rPr>
               <a:t>Для правки текста заглавия щёлкните мышью</a:t>
             </a:r>
-            <a:endParaRPr lang="ru-RU" sz="4500" b="0" u="none" strike="noStrike">
-              <a:solidFill>
-                <a:srgbClr val="000000"/>
-              </a:solidFill>
-              <a:effectLst/>
-              <a:uFillTx/>
-              <a:latin typeface="Arial"/>
-            </a:endParaRPr>
           </a:p>
         </p:txBody>
       </p:sp>
@@ -3549,14 +3281,6 @@
               </a:rPr>
               <a:t>&lt;дата/время&gt;</a:t>
             </a:r>
-            <a:endParaRPr lang="ru-RU" sz="1400" b="0" u="none" strike="noStrike">
-              <a:solidFill>
-                <a:srgbClr val="000000"/>
-              </a:solidFill>
-              <a:effectLst/>
-              <a:uFillTx/>
-              <a:latin typeface="Times New Roman"/>
-            </a:endParaRPr>
           </a:p>
         </p:txBody>
       </p:sp>
@@ -3615,14 +3339,6 @@
               </a:rPr>
               <a:t>&lt;нижний колонтитул&gt;</a:t>
             </a:r>
-            <a:endParaRPr lang="ru-RU" sz="1400" b="0" u="none" strike="noStrike">
-              <a:solidFill>
-                <a:srgbClr val="000000"/>
-              </a:solidFill>
-              <a:effectLst/>
-              <a:uFillTx/>
-              <a:latin typeface="Times New Roman"/>
-            </a:endParaRPr>
           </a:p>
         </p:txBody>
       </p:sp>
@@ -3693,7 +3409,7 @@
                 <a:latin typeface="Calibri"/>
                 <a:ea typeface="Calibri"/>
               </a:rPr>
-              <a:t>&lt;номер&gt;</a:t>
+              <a:t>‹#›</a:t>
             </a:fld>
             <a:endParaRPr lang="ru-RU" sz="900" b="0" u="none" strike="noStrike">
               <a:solidFill>
@@ -3715,13 +3431,14 @@
 </file>
 
 <file path=ppt/slideLayouts/slideLayout16.xml><?xml version="1.0" encoding="utf-8"?>
-<p:sldLayout xmlns:a="http://schemas.openxmlformats.org/drawingml/2006/main" xmlns:p="http://schemas.openxmlformats.org/presentationml/2006/main" xmlns:r="http://schemas.openxmlformats.org/officeDocument/2006/relationships" xmlns:p14="http://schemas.microsoft.com/office/powerpoint/2010/main" xmlns:p15="http://schemas.microsoft.com/office/powerpoint/2012/main" xmlns:mc="http://schemas.openxmlformats.org/markup-compatibility/2006" type="obj" preserve="1">
+<p:sldLayout xmlns:a="http://schemas.openxmlformats.org/drawingml/2006/main" xmlns:r="http://schemas.openxmlformats.org/officeDocument/2006/relationships" xmlns:p="http://schemas.openxmlformats.org/presentationml/2006/main" type="obj" preserve="1">
   <p:cSld name="OBJECT">
     <p:bg>
       <p:bgPr>
         <a:solidFill>
           <a:schemeClr val="lt1"/>
         </a:solidFill>
+        <a:effectLst/>
       </p:bgPr>
     </p:bg>
     <p:spTree>
@@ -3793,14 +3510,6 @@
               </a:rPr>
               <a:t>Для правки текста заглавия щёлкните мышью</a:t>
             </a:r>
-            <a:endParaRPr lang="ru-RU" sz="3300" b="0" u="none" strike="noStrike">
-              <a:solidFill>
-                <a:srgbClr val="000000"/>
-              </a:solidFill>
-              <a:effectLst/>
-              <a:uFillTx/>
-              <a:latin typeface="Arial"/>
-            </a:endParaRPr>
           </a:p>
         </p:txBody>
       </p:sp>
@@ -3989,14 +3698,6 @@
               </a:rPr>
               <a:t>Для правки структуры щёлкните мышью</a:t>
             </a:r>
-            <a:endParaRPr lang="ru-RU" sz="2100" b="0" u="none" strike="noStrike">
-              <a:solidFill>
-                <a:srgbClr val="000000"/>
-              </a:solidFill>
-              <a:effectLst/>
-              <a:uFillTx/>
-              <a:latin typeface="Arial"/>
-            </a:endParaRPr>
           </a:p>
           <a:p>
             <a:pPr marL="914400" lvl="1" indent="-317520" algn="l">
@@ -4021,14 +3722,6 @@
               </a:rPr>
               <a:t>Второй уровень структуры</a:t>
             </a:r>
-            <a:endParaRPr lang="ru-RU" sz="2100" b="0" u="none" strike="noStrike">
-              <a:solidFill>
-                <a:srgbClr val="000000"/>
-              </a:solidFill>
-              <a:effectLst/>
-              <a:uFillTx/>
-              <a:latin typeface="Arial"/>
-            </a:endParaRPr>
           </a:p>
           <a:p>
             <a:pPr marL="1371600" lvl="2" indent="-317520" algn="l">
@@ -4053,14 +3746,6 @@
               </a:rPr>
               <a:t>Третий уровень структуры</a:t>
             </a:r>
-            <a:endParaRPr lang="ru-RU" sz="2100" b="0" u="none" strike="noStrike">
-              <a:solidFill>
-                <a:srgbClr val="000000"/>
-              </a:solidFill>
-              <a:effectLst/>
-              <a:uFillTx/>
-              <a:latin typeface="Arial"/>
-            </a:endParaRPr>
           </a:p>
           <a:p>
             <a:pPr marL="1828800" lvl="3" indent="-317520" algn="l">
@@ -4085,14 +3770,6 @@
               </a:rPr>
               <a:t>Четвёртый уровень структуры</a:t>
             </a:r>
-            <a:endParaRPr lang="ru-RU" sz="2100" b="0" u="none" strike="noStrike">
-              <a:solidFill>
-                <a:srgbClr val="000000"/>
-              </a:solidFill>
-              <a:effectLst/>
-              <a:uFillTx/>
-              <a:latin typeface="Arial"/>
-            </a:endParaRPr>
           </a:p>
           <a:p>
             <a:pPr marL="2286000" lvl="4" indent="-317520" algn="l">
@@ -4117,14 +3794,6 @@
               </a:rPr>
               <a:t>Пятый уровень структуры</a:t>
             </a:r>
-            <a:endParaRPr lang="ru-RU" sz="2100" b="0" u="none" strike="noStrike">
-              <a:solidFill>
-                <a:srgbClr val="000000"/>
-              </a:solidFill>
-              <a:effectLst/>
-              <a:uFillTx/>
-              <a:latin typeface="Arial"/>
-            </a:endParaRPr>
           </a:p>
           <a:p>
             <a:pPr marL="2743200" lvl="5" indent="-317520" algn="l">
@@ -4149,14 +3818,6 @@
               </a:rPr>
               <a:t>Шестой уровень структуры</a:t>
             </a:r>
-            <a:endParaRPr lang="ru-RU" sz="2100" b="0" u="none" strike="noStrike">
-              <a:solidFill>
-                <a:srgbClr val="000000"/>
-              </a:solidFill>
-              <a:effectLst/>
-              <a:uFillTx/>
-              <a:latin typeface="Arial"/>
-            </a:endParaRPr>
           </a:p>
           <a:p>
             <a:pPr marL="3200400" lvl="6" indent="-317520" algn="l">
@@ -4181,14 +3842,6 @@
               </a:rPr>
               <a:t>Седьмой уровень структуры</a:t>
             </a:r>
-            <a:endParaRPr lang="ru-RU" sz="2100" b="0" u="none" strike="noStrike">
-              <a:solidFill>
-                <a:srgbClr val="000000"/>
-              </a:solidFill>
-              <a:effectLst/>
-              <a:uFillTx/>
-              <a:latin typeface="Arial"/>
-            </a:endParaRPr>
           </a:p>
         </p:txBody>
       </p:sp>
@@ -4247,14 +3900,6 @@
               </a:rPr>
               <a:t>&lt;дата/время&gt;</a:t>
             </a:r>
-            <a:endParaRPr lang="ru-RU" sz="1400" b="0" u="none" strike="noStrike">
-              <a:solidFill>
-                <a:srgbClr val="000000"/>
-              </a:solidFill>
-              <a:effectLst/>
-              <a:uFillTx/>
-              <a:latin typeface="Times New Roman"/>
-            </a:endParaRPr>
           </a:p>
         </p:txBody>
       </p:sp>
@@ -4313,14 +3958,6 @@
               </a:rPr>
               <a:t>&lt;нижний колонтитул&gt;</a:t>
             </a:r>
-            <a:endParaRPr lang="ru-RU" sz="1400" b="0" u="none" strike="noStrike">
-              <a:solidFill>
-                <a:srgbClr val="000000"/>
-              </a:solidFill>
-              <a:effectLst/>
-              <a:uFillTx/>
-              <a:latin typeface="Times New Roman"/>
-            </a:endParaRPr>
           </a:p>
         </p:txBody>
       </p:sp>
@@ -4391,7 +4028,7 @@
                 <a:latin typeface="Calibri"/>
                 <a:ea typeface="Calibri"/>
               </a:rPr>
-              <a:t>&lt;номер&gt;</a:t>
+              <a:t>‹#›</a:t>
             </a:fld>
             <a:endParaRPr lang="ru-RU" sz="900" b="0" u="none" strike="noStrike">
               <a:solidFill>
@@ -4413,13 +4050,14 @@
 </file>
 
 <file path=ppt/slideLayouts/slideLayout17.xml><?xml version="1.0" encoding="utf-8"?>
-<p:sldLayout xmlns:a="http://schemas.openxmlformats.org/drawingml/2006/main" xmlns:p="http://schemas.openxmlformats.org/presentationml/2006/main" xmlns:r="http://schemas.openxmlformats.org/officeDocument/2006/relationships" xmlns:p14="http://schemas.microsoft.com/office/powerpoint/2010/main" xmlns:p15="http://schemas.microsoft.com/office/powerpoint/2012/main" xmlns:mc="http://schemas.openxmlformats.org/markup-compatibility/2006" type="blank" preserve="1">
+<p:sldLayout xmlns:a="http://schemas.openxmlformats.org/drawingml/2006/main" xmlns:r="http://schemas.openxmlformats.org/officeDocument/2006/relationships" xmlns:p="http://schemas.openxmlformats.org/presentationml/2006/main" type="blank" preserve="1">
   <p:cSld name="Обычный 2">
     <p:bg>
       <p:bgPr>
         <a:solidFill>
           <a:schemeClr val="lt1"/>
         </a:solidFill>
+        <a:effectLst/>
       </p:bgPr>
     </p:bg>
     <p:spTree>
@@ -4491,14 +4129,6 @@
               </a:rPr>
               <a:t>Для правки текста заглавия щёлкните мышью</a:t>
             </a:r>
-            <a:endParaRPr lang="ru-RU" sz="4500" b="0" u="none" strike="noStrike">
-              <a:solidFill>
-                <a:srgbClr val="000000"/>
-              </a:solidFill>
-              <a:effectLst/>
-              <a:uFillTx/>
-              <a:latin typeface="Arial"/>
-            </a:endParaRPr>
           </a:p>
         </p:txBody>
       </p:sp>
@@ -4687,14 +4317,6 @@
               </a:rPr>
               <a:t>Для правки структуры щёлкните мышью</a:t>
             </a:r>
-            <a:endParaRPr lang="ru-RU" sz="1800" b="0" u="none" strike="noStrike">
-              <a:solidFill>
-                <a:srgbClr val="000000"/>
-              </a:solidFill>
-              <a:effectLst/>
-              <a:uFillTx/>
-              <a:latin typeface="Arial"/>
-            </a:endParaRPr>
           </a:p>
           <a:p>
             <a:pPr marL="914400" lvl="1" indent="-228600" algn="l">
@@ -4719,14 +4341,6 @@
               </a:rPr>
               <a:t>Второй уровень структуры</a:t>
             </a:r>
-            <a:endParaRPr lang="ru-RU" sz="1800" b="0" u="none" strike="noStrike">
-              <a:solidFill>
-                <a:srgbClr val="000000"/>
-              </a:solidFill>
-              <a:effectLst/>
-              <a:uFillTx/>
-              <a:latin typeface="Arial"/>
-            </a:endParaRPr>
           </a:p>
           <a:p>
             <a:pPr marL="1371600" lvl="2" indent="-228600" algn="l">
@@ -4751,14 +4365,6 @@
               </a:rPr>
               <a:t>Третий уровень структуры</a:t>
             </a:r>
-            <a:endParaRPr lang="ru-RU" sz="1800" b="0" u="none" strike="noStrike">
-              <a:solidFill>
-                <a:srgbClr val="000000"/>
-              </a:solidFill>
-              <a:effectLst/>
-              <a:uFillTx/>
-              <a:latin typeface="Arial"/>
-            </a:endParaRPr>
           </a:p>
           <a:p>
             <a:pPr marL="1828800" lvl="3" indent="-228600" algn="l">
@@ -4783,14 +4389,6 @@
               </a:rPr>
               <a:t>Четвёртый уровень структуры</a:t>
             </a:r>
-            <a:endParaRPr lang="ru-RU" sz="1800" b="0" u="none" strike="noStrike">
-              <a:solidFill>
-                <a:srgbClr val="000000"/>
-              </a:solidFill>
-              <a:effectLst/>
-              <a:uFillTx/>
-              <a:latin typeface="Arial"/>
-            </a:endParaRPr>
           </a:p>
           <a:p>
             <a:pPr marL="2286000" lvl="4" indent="-228600" algn="l">
@@ -4815,14 +4413,6 @@
               </a:rPr>
               <a:t>Пятый уровень структуры</a:t>
             </a:r>
-            <a:endParaRPr lang="ru-RU" sz="1800" b="0" u="none" strike="noStrike">
-              <a:solidFill>
-                <a:srgbClr val="000000"/>
-              </a:solidFill>
-              <a:effectLst/>
-              <a:uFillTx/>
-              <a:latin typeface="Arial"/>
-            </a:endParaRPr>
           </a:p>
           <a:p>
             <a:pPr marL="2743200" lvl="5" indent="-228600" algn="l">
@@ -4847,14 +4437,6 @@
               </a:rPr>
               <a:t>Шестой уровень структуры</a:t>
             </a:r>
-            <a:endParaRPr lang="ru-RU" sz="1800" b="0" u="none" strike="noStrike">
-              <a:solidFill>
-                <a:srgbClr val="000000"/>
-              </a:solidFill>
-              <a:effectLst/>
-              <a:uFillTx/>
-              <a:latin typeface="Arial"/>
-            </a:endParaRPr>
           </a:p>
           <a:p>
             <a:pPr marL="3200400" lvl="6" indent="-228600" algn="l">
@@ -4879,14 +4461,6 @@
               </a:rPr>
               <a:t>Седьмой уровень структуры</a:t>
             </a:r>
-            <a:endParaRPr lang="ru-RU" sz="1800" b="0" u="none" strike="noStrike">
-              <a:solidFill>
-                <a:srgbClr val="000000"/>
-              </a:solidFill>
-              <a:effectLst/>
-              <a:uFillTx/>
-              <a:latin typeface="Arial"/>
-            </a:endParaRPr>
           </a:p>
         </p:txBody>
       </p:sp>
@@ -4945,14 +4519,6 @@
               </a:rPr>
               <a:t>&lt;дата/время&gt;</a:t>
             </a:r>
-            <a:endParaRPr lang="ru-RU" sz="1400" b="0" u="none" strike="noStrike">
-              <a:solidFill>
-                <a:srgbClr val="000000"/>
-              </a:solidFill>
-              <a:effectLst/>
-              <a:uFillTx/>
-              <a:latin typeface="Times New Roman"/>
-            </a:endParaRPr>
           </a:p>
         </p:txBody>
       </p:sp>
@@ -5011,14 +4577,6 @@
               </a:rPr>
               <a:t>&lt;нижний колонтитул&gt;</a:t>
             </a:r>
-            <a:endParaRPr lang="ru-RU" sz="1400" b="0" u="none" strike="noStrike">
-              <a:solidFill>
-                <a:srgbClr val="000000"/>
-              </a:solidFill>
-              <a:effectLst/>
-              <a:uFillTx/>
-              <a:latin typeface="Times New Roman"/>
-            </a:endParaRPr>
           </a:p>
         </p:txBody>
       </p:sp>
@@ -5089,7 +4647,7 @@
                 <a:latin typeface="Calibri"/>
                 <a:ea typeface="Calibri"/>
               </a:rPr>
-              <a:t>&lt;номер&gt;</a:t>
+              <a:t>‹#›</a:t>
             </a:fld>
             <a:endParaRPr lang="ru-RU" sz="900" b="0" u="none" strike="noStrike">
               <a:solidFill>
@@ -5111,13 +4669,14 @@
 </file>
 
 <file path=ppt/slideLayouts/slideLayout18.xml><?xml version="1.0" encoding="utf-8"?>
-<p:sldLayout xmlns:a="http://schemas.openxmlformats.org/drawingml/2006/main" xmlns:p="http://schemas.openxmlformats.org/presentationml/2006/main" xmlns:r="http://schemas.openxmlformats.org/officeDocument/2006/relationships" xmlns:p14="http://schemas.microsoft.com/office/powerpoint/2010/main" xmlns:p15="http://schemas.microsoft.com/office/powerpoint/2012/main" xmlns:mc="http://schemas.openxmlformats.org/markup-compatibility/2006" type="twoObj" preserve="1">
+<p:sldLayout xmlns:a="http://schemas.openxmlformats.org/drawingml/2006/main" xmlns:r="http://schemas.openxmlformats.org/officeDocument/2006/relationships" xmlns:p="http://schemas.openxmlformats.org/presentationml/2006/main" type="twoObj" preserve="1">
   <p:cSld name="TWO_OBJECTS">
     <p:bg>
       <p:bgPr>
         <a:solidFill>
           <a:schemeClr val="lt1"/>
         </a:solidFill>
+        <a:effectLst/>
       </p:bgPr>
     </p:bg>
     <p:spTree>
@@ -5189,14 +4748,6 @@
               </a:rPr>
               <a:t>Для правки текста заглавия щёлкните мышью</a:t>
             </a:r>
-            <a:endParaRPr lang="ru-RU" sz="3300" b="0" u="none" strike="noStrike">
-              <a:solidFill>
-                <a:srgbClr val="000000"/>
-              </a:solidFill>
-              <a:effectLst/>
-              <a:uFillTx/>
-              <a:latin typeface="Arial"/>
-            </a:endParaRPr>
           </a:p>
         </p:txBody>
       </p:sp>
@@ -5385,14 +4936,6 @@
               </a:rPr>
               <a:t>Для правки структуры щёлкните мышью</a:t>
             </a:r>
-            <a:endParaRPr lang="ru-RU" sz="2100" b="0" u="none" strike="noStrike">
-              <a:solidFill>
-                <a:srgbClr val="000000"/>
-              </a:solidFill>
-              <a:effectLst/>
-              <a:uFillTx/>
-              <a:latin typeface="Arial"/>
-            </a:endParaRPr>
           </a:p>
           <a:p>
             <a:pPr marL="914400" lvl="1" indent="-317520" algn="l">
@@ -5417,14 +4960,6 @@
               </a:rPr>
               <a:t>Второй уровень структуры</a:t>
             </a:r>
-            <a:endParaRPr lang="ru-RU" sz="2100" b="0" u="none" strike="noStrike">
-              <a:solidFill>
-                <a:srgbClr val="000000"/>
-              </a:solidFill>
-              <a:effectLst/>
-              <a:uFillTx/>
-              <a:latin typeface="Arial"/>
-            </a:endParaRPr>
           </a:p>
           <a:p>
             <a:pPr marL="1371600" lvl="2" indent="-317520" algn="l">
@@ -5449,14 +4984,6 @@
               </a:rPr>
               <a:t>Третий уровень структуры</a:t>
             </a:r>
-            <a:endParaRPr lang="ru-RU" sz="2100" b="0" u="none" strike="noStrike">
-              <a:solidFill>
-                <a:srgbClr val="000000"/>
-              </a:solidFill>
-              <a:effectLst/>
-              <a:uFillTx/>
-              <a:latin typeface="Arial"/>
-            </a:endParaRPr>
           </a:p>
           <a:p>
             <a:pPr marL="1828800" lvl="3" indent="-317520" algn="l">
@@ -5481,14 +5008,6 @@
               </a:rPr>
               <a:t>Четвёртый уровень структуры</a:t>
             </a:r>
-            <a:endParaRPr lang="ru-RU" sz="2100" b="0" u="none" strike="noStrike">
-              <a:solidFill>
-                <a:srgbClr val="000000"/>
-              </a:solidFill>
-              <a:effectLst/>
-              <a:uFillTx/>
-              <a:latin typeface="Arial"/>
-            </a:endParaRPr>
           </a:p>
           <a:p>
             <a:pPr marL="2286000" lvl="4" indent="-317520" algn="l">
@@ -5513,14 +5032,6 @@
               </a:rPr>
               <a:t>Пятый уровень структуры</a:t>
             </a:r>
-            <a:endParaRPr lang="ru-RU" sz="2100" b="0" u="none" strike="noStrike">
-              <a:solidFill>
-                <a:srgbClr val="000000"/>
-              </a:solidFill>
-              <a:effectLst/>
-              <a:uFillTx/>
-              <a:latin typeface="Arial"/>
-            </a:endParaRPr>
           </a:p>
           <a:p>
             <a:pPr marL="2743200" lvl="5" indent="-317520" algn="l">
@@ -5545,14 +5056,6 @@
               </a:rPr>
               <a:t>Шестой уровень структуры</a:t>
             </a:r>
-            <a:endParaRPr lang="ru-RU" sz="2100" b="0" u="none" strike="noStrike">
-              <a:solidFill>
-                <a:srgbClr val="000000"/>
-              </a:solidFill>
-              <a:effectLst/>
-              <a:uFillTx/>
-              <a:latin typeface="Arial"/>
-            </a:endParaRPr>
           </a:p>
           <a:p>
             <a:pPr marL="3200400" lvl="6" indent="-317520" algn="l">
@@ -5577,14 +5080,6 @@
               </a:rPr>
               <a:t>Седьмой уровень структуры</a:t>
             </a:r>
-            <a:endParaRPr lang="ru-RU" sz="2100" b="0" u="none" strike="noStrike">
-              <a:solidFill>
-                <a:srgbClr val="000000"/>
-              </a:solidFill>
-              <a:effectLst/>
-              <a:uFillTx/>
-              <a:latin typeface="Arial"/>
-            </a:endParaRPr>
           </a:p>
         </p:txBody>
       </p:sp>
@@ -5773,14 +5268,6 @@
               </a:rPr>
               <a:t>Для правки структуры щёлкните мышью</a:t>
             </a:r>
-            <a:endParaRPr lang="ru-RU" sz="2100" b="0" u="none" strike="noStrike">
-              <a:solidFill>
-                <a:srgbClr val="000000"/>
-              </a:solidFill>
-              <a:effectLst/>
-              <a:uFillTx/>
-              <a:latin typeface="Arial"/>
-            </a:endParaRPr>
           </a:p>
           <a:p>
             <a:pPr marL="914400" lvl="1" indent="-317520" algn="l">
@@ -5805,14 +5292,6 @@
               </a:rPr>
               <a:t>Второй уровень структуры</a:t>
             </a:r>
-            <a:endParaRPr lang="ru-RU" sz="2100" b="0" u="none" strike="noStrike">
-              <a:solidFill>
-                <a:srgbClr val="000000"/>
-              </a:solidFill>
-              <a:effectLst/>
-              <a:uFillTx/>
-              <a:latin typeface="Arial"/>
-            </a:endParaRPr>
           </a:p>
           <a:p>
             <a:pPr marL="1371600" lvl="2" indent="-317520" algn="l">
@@ -5837,14 +5316,6 @@
               </a:rPr>
               <a:t>Третий уровень структуры</a:t>
             </a:r>
-            <a:endParaRPr lang="ru-RU" sz="2100" b="0" u="none" strike="noStrike">
-              <a:solidFill>
-                <a:srgbClr val="000000"/>
-              </a:solidFill>
-              <a:effectLst/>
-              <a:uFillTx/>
-              <a:latin typeface="Arial"/>
-            </a:endParaRPr>
           </a:p>
           <a:p>
             <a:pPr marL="1828800" lvl="3" indent="-317520" algn="l">
@@ -5869,14 +5340,6 @@
               </a:rPr>
               <a:t>Четвёртый уровень структуры</a:t>
             </a:r>
-            <a:endParaRPr lang="ru-RU" sz="2100" b="0" u="none" strike="noStrike">
-              <a:solidFill>
-                <a:srgbClr val="000000"/>
-              </a:solidFill>
-              <a:effectLst/>
-              <a:uFillTx/>
-              <a:latin typeface="Arial"/>
-            </a:endParaRPr>
           </a:p>
           <a:p>
             <a:pPr marL="2286000" lvl="4" indent="-317520" algn="l">
@@ -5901,14 +5364,6 @@
               </a:rPr>
               <a:t>Пятый уровень структуры</a:t>
             </a:r>
-            <a:endParaRPr lang="ru-RU" sz="2100" b="0" u="none" strike="noStrike">
-              <a:solidFill>
-                <a:srgbClr val="000000"/>
-              </a:solidFill>
-              <a:effectLst/>
-              <a:uFillTx/>
-              <a:latin typeface="Arial"/>
-            </a:endParaRPr>
           </a:p>
           <a:p>
             <a:pPr marL="2743200" lvl="5" indent="-317520" algn="l">
@@ -5933,14 +5388,6 @@
               </a:rPr>
               <a:t>Шестой уровень структуры</a:t>
             </a:r>
-            <a:endParaRPr lang="ru-RU" sz="2100" b="0" u="none" strike="noStrike">
-              <a:solidFill>
-                <a:srgbClr val="000000"/>
-              </a:solidFill>
-              <a:effectLst/>
-              <a:uFillTx/>
-              <a:latin typeface="Arial"/>
-            </a:endParaRPr>
           </a:p>
           <a:p>
             <a:pPr marL="3200400" lvl="6" indent="-317520" algn="l">
@@ -5965,14 +5412,6 @@
               </a:rPr>
               <a:t>Седьмой уровень структуры</a:t>
             </a:r>
-            <a:endParaRPr lang="ru-RU" sz="2100" b="0" u="none" strike="noStrike">
-              <a:solidFill>
-                <a:srgbClr val="000000"/>
-              </a:solidFill>
-              <a:effectLst/>
-              <a:uFillTx/>
-              <a:latin typeface="Arial"/>
-            </a:endParaRPr>
           </a:p>
         </p:txBody>
       </p:sp>
@@ -6031,14 +5470,6 @@
               </a:rPr>
               <a:t>&lt;дата/время&gt;</a:t>
             </a:r>
-            <a:endParaRPr lang="ru-RU" sz="1400" b="0" u="none" strike="noStrike">
-              <a:solidFill>
-                <a:srgbClr val="000000"/>
-              </a:solidFill>
-              <a:effectLst/>
-              <a:uFillTx/>
-              <a:latin typeface="Times New Roman"/>
-            </a:endParaRPr>
           </a:p>
         </p:txBody>
       </p:sp>
@@ -6097,14 +5528,6 @@
               </a:rPr>
               <a:t>&lt;нижний колонтитул&gt;</a:t>
             </a:r>
-            <a:endParaRPr lang="ru-RU" sz="1400" b="0" u="none" strike="noStrike">
-              <a:solidFill>
-                <a:srgbClr val="000000"/>
-              </a:solidFill>
-              <a:effectLst/>
-              <a:uFillTx/>
-              <a:latin typeface="Times New Roman"/>
-            </a:endParaRPr>
           </a:p>
         </p:txBody>
       </p:sp>
@@ -6175,7 +5598,7 @@
                 <a:latin typeface="Calibri"/>
                 <a:ea typeface="Calibri"/>
               </a:rPr>
-              <a:t>&lt;номер&gt;</a:t>
+              <a:t>‹#›</a:t>
             </a:fld>
             <a:endParaRPr lang="ru-RU" sz="900" b="0" u="none" strike="noStrike">
               <a:solidFill>
@@ -6197,13 +5620,14 @@
 </file>
 
 <file path=ppt/slideLayouts/slideLayout19.xml><?xml version="1.0" encoding="utf-8"?>
-<p:sldLayout xmlns:a="http://schemas.openxmlformats.org/drawingml/2006/main" xmlns:p="http://schemas.openxmlformats.org/presentationml/2006/main" xmlns:r="http://schemas.openxmlformats.org/officeDocument/2006/relationships" xmlns:p14="http://schemas.microsoft.com/office/powerpoint/2010/main" xmlns:p15="http://schemas.microsoft.com/office/powerpoint/2012/main" xmlns:mc="http://schemas.openxmlformats.org/markup-compatibility/2006" type="blank" preserve="1">
+<p:sldLayout xmlns:a="http://schemas.openxmlformats.org/drawingml/2006/main" xmlns:r="http://schemas.openxmlformats.org/officeDocument/2006/relationships" xmlns:p="http://schemas.openxmlformats.org/presentationml/2006/main" type="blank" preserve="1">
   <p:cSld name="TWO_OBJECTS_WITH_TEXT">
     <p:bg>
       <p:bgPr>
         <a:solidFill>
           <a:schemeClr val="lt1"/>
         </a:solidFill>
+        <a:effectLst/>
       </p:bgPr>
     </p:bg>
     <p:spTree>
@@ -6275,14 +5699,6 @@
               </a:rPr>
               <a:t>Для правки текста заглавия щёлкните мышью</a:t>
             </a:r>
-            <a:endParaRPr lang="ru-RU" sz="3300" b="0" u="none" strike="noStrike">
-              <a:solidFill>
-                <a:srgbClr val="000000"/>
-              </a:solidFill>
-              <a:effectLst/>
-              <a:uFillTx/>
-              <a:latin typeface="Arial"/>
-            </a:endParaRPr>
           </a:p>
         </p:txBody>
       </p:sp>
@@ -6471,14 +5887,6 @@
               </a:rPr>
               <a:t>Для правки структуры щёлкните мышью</a:t>
             </a:r>
-            <a:endParaRPr lang="ru-RU" sz="1800" b="0" u="none" strike="noStrike">
-              <a:solidFill>
-                <a:srgbClr val="000000"/>
-              </a:solidFill>
-              <a:effectLst/>
-              <a:uFillTx/>
-              <a:latin typeface="Arial"/>
-            </a:endParaRPr>
           </a:p>
           <a:p>
             <a:pPr marL="914400" lvl="1" indent="-228600" algn="l">
@@ -6503,14 +5911,6 @@
               </a:rPr>
               <a:t>Второй уровень структуры</a:t>
             </a:r>
-            <a:endParaRPr lang="ru-RU" sz="1800" b="0" u="none" strike="noStrike">
-              <a:solidFill>
-                <a:srgbClr val="000000"/>
-              </a:solidFill>
-              <a:effectLst/>
-              <a:uFillTx/>
-              <a:latin typeface="Arial"/>
-            </a:endParaRPr>
           </a:p>
           <a:p>
             <a:pPr marL="1371600" lvl="2" indent="-228600" algn="l">
@@ -6535,14 +5935,6 @@
               </a:rPr>
               <a:t>Третий уровень структуры</a:t>
             </a:r>
-            <a:endParaRPr lang="ru-RU" sz="1800" b="0" u="none" strike="noStrike">
-              <a:solidFill>
-                <a:srgbClr val="000000"/>
-              </a:solidFill>
-              <a:effectLst/>
-              <a:uFillTx/>
-              <a:latin typeface="Arial"/>
-            </a:endParaRPr>
           </a:p>
           <a:p>
             <a:pPr marL="1828800" lvl="3" indent="-228600" algn="l">
@@ -6567,14 +5959,6 @@
               </a:rPr>
               <a:t>Четвёртый уровень структуры</a:t>
             </a:r>
-            <a:endParaRPr lang="ru-RU" sz="1800" b="0" u="none" strike="noStrike">
-              <a:solidFill>
-                <a:srgbClr val="000000"/>
-              </a:solidFill>
-              <a:effectLst/>
-              <a:uFillTx/>
-              <a:latin typeface="Arial"/>
-            </a:endParaRPr>
           </a:p>
           <a:p>
             <a:pPr marL="2286000" lvl="4" indent="-228600" algn="l">
@@ -6599,14 +5983,6 @@
               </a:rPr>
               <a:t>Пятый уровень структуры</a:t>
             </a:r>
-            <a:endParaRPr lang="ru-RU" sz="1800" b="0" u="none" strike="noStrike">
-              <a:solidFill>
-                <a:srgbClr val="000000"/>
-              </a:solidFill>
-              <a:effectLst/>
-              <a:uFillTx/>
-              <a:latin typeface="Arial"/>
-            </a:endParaRPr>
           </a:p>
           <a:p>
             <a:pPr marL="2743200" lvl="5" indent="-228600" algn="l">
@@ -6631,14 +6007,6 @@
               </a:rPr>
               <a:t>Шестой уровень структуры</a:t>
             </a:r>
-            <a:endParaRPr lang="ru-RU" sz="1800" b="0" u="none" strike="noStrike">
-              <a:solidFill>
-                <a:srgbClr val="000000"/>
-              </a:solidFill>
-              <a:effectLst/>
-              <a:uFillTx/>
-              <a:latin typeface="Arial"/>
-            </a:endParaRPr>
           </a:p>
           <a:p>
             <a:pPr marL="3200400" lvl="6" indent="-228600" algn="l">
@@ -6663,14 +6031,6 @@
               </a:rPr>
               <a:t>Седьмой уровень структуры</a:t>
             </a:r>
-            <a:endParaRPr lang="ru-RU" sz="1800" b="0" u="none" strike="noStrike">
-              <a:solidFill>
-                <a:srgbClr val="000000"/>
-              </a:solidFill>
-              <a:effectLst/>
-              <a:uFillTx/>
-              <a:latin typeface="Arial"/>
-            </a:endParaRPr>
           </a:p>
         </p:txBody>
       </p:sp>
@@ -6859,14 +6219,6 @@
               </a:rPr>
               <a:t>Для правки структуры щёлкните мышью</a:t>
             </a:r>
-            <a:endParaRPr lang="ru-RU" sz="2100" b="0" u="none" strike="noStrike">
-              <a:solidFill>
-                <a:srgbClr val="000000"/>
-              </a:solidFill>
-              <a:effectLst/>
-              <a:uFillTx/>
-              <a:latin typeface="Arial"/>
-            </a:endParaRPr>
           </a:p>
           <a:p>
             <a:pPr marL="914400" lvl="1" indent="-317520" algn="l">
@@ -6891,14 +6243,6 @@
               </a:rPr>
               <a:t>Второй уровень структуры</a:t>
             </a:r>
-            <a:endParaRPr lang="ru-RU" sz="2100" b="0" u="none" strike="noStrike">
-              <a:solidFill>
-                <a:srgbClr val="000000"/>
-              </a:solidFill>
-              <a:effectLst/>
-              <a:uFillTx/>
-              <a:latin typeface="Arial"/>
-            </a:endParaRPr>
           </a:p>
           <a:p>
             <a:pPr marL="1371600" lvl="2" indent="-317520" algn="l">
@@ -6923,14 +6267,6 @@
               </a:rPr>
               <a:t>Третий уровень структуры</a:t>
             </a:r>
-            <a:endParaRPr lang="ru-RU" sz="2100" b="0" u="none" strike="noStrike">
-              <a:solidFill>
-                <a:srgbClr val="000000"/>
-              </a:solidFill>
-              <a:effectLst/>
-              <a:uFillTx/>
-              <a:latin typeface="Arial"/>
-            </a:endParaRPr>
           </a:p>
           <a:p>
             <a:pPr marL="1828800" lvl="3" indent="-317520" algn="l">
@@ -6955,14 +6291,6 @@
               </a:rPr>
               <a:t>Четвёртый уровень структуры</a:t>
             </a:r>
-            <a:endParaRPr lang="ru-RU" sz="2100" b="0" u="none" strike="noStrike">
-              <a:solidFill>
-                <a:srgbClr val="000000"/>
-              </a:solidFill>
-              <a:effectLst/>
-              <a:uFillTx/>
-              <a:latin typeface="Arial"/>
-            </a:endParaRPr>
           </a:p>
           <a:p>
             <a:pPr marL="2286000" lvl="4" indent="-317520" algn="l">
@@ -6987,14 +6315,6 @@
               </a:rPr>
               <a:t>Пятый уровень структуры</a:t>
             </a:r>
-            <a:endParaRPr lang="ru-RU" sz="2100" b="0" u="none" strike="noStrike">
-              <a:solidFill>
-                <a:srgbClr val="000000"/>
-              </a:solidFill>
-              <a:effectLst/>
-              <a:uFillTx/>
-              <a:latin typeface="Arial"/>
-            </a:endParaRPr>
           </a:p>
           <a:p>
             <a:pPr marL="2743200" lvl="5" indent="-317520" algn="l">
@@ -7019,14 +6339,6 @@
               </a:rPr>
               <a:t>Шестой уровень структуры</a:t>
             </a:r>
-            <a:endParaRPr lang="ru-RU" sz="2100" b="0" u="none" strike="noStrike">
-              <a:solidFill>
-                <a:srgbClr val="000000"/>
-              </a:solidFill>
-              <a:effectLst/>
-              <a:uFillTx/>
-              <a:latin typeface="Arial"/>
-            </a:endParaRPr>
           </a:p>
           <a:p>
             <a:pPr marL="3200400" lvl="6" indent="-317520" algn="l">
@@ -7051,14 +6363,6 @@
               </a:rPr>
               <a:t>Седьмой уровень структуры</a:t>
             </a:r>
-            <a:endParaRPr lang="ru-RU" sz="2100" b="0" u="none" strike="noStrike">
-              <a:solidFill>
-                <a:srgbClr val="000000"/>
-              </a:solidFill>
-              <a:effectLst/>
-              <a:uFillTx/>
-              <a:latin typeface="Arial"/>
-            </a:endParaRPr>
           </a:p>
         </p:txBody>
       </p:sp>
@@ -7247,14 +6551,6 @@
               </a:rPr>
               <a:t>Для правки структуры щёлкните мышью</a:t>
             </a:r>
-            <a:endParaRPr lang="ru-RU" sz="1800" b="0" u="none" strike="noStrike">
-              <a:solidFill>
-                <a:srgbClr val="000000"/>
-              </a:solidFill>
-              <a:effectLst/>
-              <a:uFillTx/>
-              <a:latin typeface="Arial"/>
-            </a:endParaRPr>
           </a:p>
           <a:p>
             <a:pPr marL="914400" lvl="1" indent="-228600" algn="l">
@@ -7279,14 +6575,6 @@
               </a:rPr>
               <a:t>Второй уровень структуры</a:t>
             </a:r>
-            <a:endParaRPr lang="ru-RU" sz="1800" b="0" u="none" strike="noStrike">
-              <a:solidFill>
-                <a:srgbClr val="000000"/>
-              </a:solidFill>
-              <a:effectLst/>
-              <a:uFillTx/>
-              <a:latin typeface="Arial"/>
-            </a:endParaRPr>
           </a:p>
           <a:p>
             <a:pPr marL="1371600" lvl="2" indent="-228600" algn="l">
@@ -7311,14 +6599,6 @@
               </a:rPr>
               <a:t>Третий уровень структуры</a:t>
             </a:r>
-            <a:endParaRPr lang="ru-RU" sz="1800" b="0" u="none" strike="noStrike">
-              <a:solidFill>
-                <a:srgbClr val="000000"/>
-              </a:solidFill>
-              <a:effectLst/>
-              <a:uFillTx/>
-              <a:latin typeface="Arial"/>
-            </a:endParaRPr>
           </a:p>
           <a:p>
             <a:pPr marL="1828800" lvl="3" indent="-228600" algn="l">
@@ -7343,14 +6623,6 @@
               </a:rPr>
               <a:t>Четвёртый уровень структуры</a:t>
             </a:r>
-            <a:endParaRPr lang="ru-RU" sz="1800" b="0" u="none" strike="noStrike">
-              <a:solidFill>
-                <a:srgbClr val="000000"/>
-              </a:solidFill>
-              <a:effectLst/>
-              <a:uFillTx/>
-              <a:latin typeface="Arial"/>
-            </a:endParaRPr>
           </a:p>
           <a:p>
             <a:pPr marL="2286000" lvl="4" indent="-228600" algn="l">
@@ -7375,14 +6647,6 @@
               </a:rPr>
               <a:t>Пятый уровень структуры</a:t>
             </a:r>
-            <a:endParaRPr lang="ru-RU" sz="1800" b="0" u="none" strike="noStrike">
-              <a:solidFill>
-                <a:srgbClr val="000000"/>
-              </a:solidFill>
-              <a:effectLst/>
-              <a:uFillTx/>
-              <a:latin typeface="Arial"/>
-            </a:endParaRPr>
           </a:p>
           <a:p>
             <a:pPr marL="2743200" lvl="5" indent="-228600" algn="l">
@@ -7407,14 +6671,6 @@
               </a:rPr>
               <a:t>Шестой уровень структуры</a:t>
             </a:r>
-            <a:endParaRPr lang="ru-RU" sz="1800" b="0" u="none" strike="noStrike">
-              <a:solidFill>
-                <a:srgbClr val="000000"/>
-              </a:solidFill>
-              <a:effectLst/>
-              <a:uFillTx/>
-              <a:latin typeface="Arial"/>
-            </a:endParaRPr>
           </a:p>
           <a:p>
             <a:pPr marL="3200400" lvl="6" indent="-228600" algn="l">
@@ -7439,14 +6695,6 @@
               </a:rPr>
               <a:t>Седьмой уровень структуры</a:t>
             </a:r>
-            <a:endParaRPr lang="ru-RU" sz="1800" b="0" u="none" strike="noStrike">
-              <a:solidFill>
-                <a:srgbClr val="000000"/>
-              </a:solidFill>
-              <a:effectLst/>
-              <a:uFillTx/>
-              <a:latin typeface="Arial"/>
-            </a:endParaRPr>
           </a:p>
         </p:txBody>
       </p:sp>
@@ -7635,14 +6883,6 @@
               </a:rPr>
               <a:t>Для правки структуры щёлкните мышью</a:t>
             </a:r>
-            <a:endParaRPr lang="ru-RU" sz="2100" b="0" u="none" strike="noStrike">
-              <a:solidFill>
-                <a:srgbClr val="000000"/>
-              </a:solidFill>
-              <a:effectLst/>
-              <a:uFillTx/>
-              <a:latin typeface="Arial"/>
-            </a:endParaRPr>
           </a:p>
           <a:p>
             <a:pPr marL="914400" lvl="1" indent="-317520" algn="l">
@@ -7667,14 +6907,6 @@
               </a:rPr>
               <a:t>Второй уровень структуры</a:t>
             </a:r>
-            <a:endParaRPr lang="ru-RU" sz="2100" b="0" u="none" strike="noStrike">
-              <a:solidFill>
-                <a:srgbClr val="000000"/>
-              </a:solidFill>
-              <a:effectLst/>
-              <a:uFillTx/>
-              <a:latin typeface="Arial"/>
-            </a:endParaRPr>
           </a:p>
           <a:p>
             <a:pPr marL="1371600" lvl="2" indent="-317520" algn="l">
@@ -7699,14 +6931,6 @@
               </a:rPr>
               <a:t>Третий уровень структуры</a:t>
             </a:r>
-            <a:endParaRPr lang="ru-RU" sz="2100" b="0" u="none" strike="noStrike">
-              <a:solidFill>
-                <a:srgbClr val="000000"/>
-              </a:solidFill>
-              <a:effectLst/>
-              <a:uFillTx/>
-              <a:latin typeface="Arial"/>
-            </a:endParaRPr>
           </a:p>
           <a:p>
             <a:pPr marL="1828800" lvl="3" indent="-317520" algn="l">
@@ -7731,14 +6955,6 @@
               </a:rPr>
               <a:t>Четвёртый уровень структуры</a:t>
             </a:r>
-            <a:endParaRPr lang="ru-RU" sz="2100" b="0" u="none" strike="noStrike">
-              <a:solidFill>
-                <a:srgbClr val="000000"/>
-              </a:solidFill>
-              <a:effectLst/>
-              <a:uFillTx/>
-              <a:latin typeface="Arial"/>
-            </a:endParaRPr>
           </a:p>
           <a:p>
             <a:pPr marL="2286000" lvl="4" indent="-317520" algn="l">
@@ -7763,14 +6979,6 @@
               </a:rPr>
               <a:t>Пятый уровень структуры</a:t>
             </a:r>
-            <a:endParaRPr lang="ru-RU" sz="2100" b="0" u="none" strike="noStrike">
-              <a:solidFill>
-                <a:srgbClr val="000000"/>
-              </a:solidFill>
-              <a:effectLst/>
-              <a:uFillTx/>
-              <a:latin typeface="Arial"/>
-            </a:endParaRPr>
           </a:p>
           <a:p>
             <a:pPr marL="2743200" lvl="5" indent="-317520" algn="l">
@@ -7795,14 +7003,6 @@
               </a:rPr>
               <a:t>Шестой уровень структуры</a:t>
             </a:r>
-            <a:endParaRPr lang="ru-RU" sz="2100" b="0" u="none" strike="noStrike">
-              <a:solidFill>
-                <a:srgbClr val="000000"/>
-              </a:solidFill>
-              <a:effectLst/>
-              <a:uFillTx/>
-              <a:latin typeface="Arial"/>
-            </a:endParaRPr>
           </a:p>
           <a:p>
             <a:pPr marL="3200400" lvl="6" indent="-317520" algn="l">
@@ -7827,14 +7027,6 @@
               </a:rPr>
               <a:t>Седьмой уровень структуры</a:t>
             </a:r>
-            <a:endParaRPr lang="ru-RU" sz="2100" b="0" u="none" strike="noStrike">
-              <a:solidFill>
-                <a:srgbClr val="000000"/>
-              </a:solidFill>
-              <a:effectLst/>
-              <a:uFillTx/>
-              <a:latin typeface="Arial"/>
-            </a:endParaRPr>
           </a:p>
         </p:txBody>
       </p:sp>
@@ -7893,14 +7085,6 @@
               </a:rPr>
               <a:t>&lt;дата/время&gt;</a:t>
             </a:r>
-            <a:endParaRPr lang="ru-RU" sz="1400" b="0" u="none" strike="noStrike">
-              <a:solidFill>
-                <a:srgbClr val="000000"/>
-              </a:solidFill>
-              <a:effectLst/>
-              <a:uFillTx/>
-              <a:latin typeface="Times New Roman"/>
-            </a:endParaRPr>
           </a:p>
         </p:txBody>
       </p:sp>
@@ -7959,14 +7143,6 @@
               </a:rPr>
               <a:t>&lt;нижний колонтитул&gt;</a:t>
             </a:r>
-            <a:endParaRPr lang="ru-RU" sz="1400" b="0" u="none" strike="noStrike">
-              <a:solidFill>
-                <a:srgbClr val="000000"/>
-              </a:solidFill>
-              <a:effectLst/>
-              <a:uFillTx/>
-              <a:latin typeface="Times New Roman"/>
-            </a:endParaRPr>
           </a:p>
         </p:txBody>
       </p:sp>
@@ -8037,7 +7213,7 @@
                 <a:latin typeface="Calibri"/>
                 <a:ea typeface="Calibri"/>
               </a:rPr>
-              <a:t>&lt;номер&gt;</a:t>
+              <a:t>‹#›</a:t>
             </a:fld>
             <a:endParaRPr lang="ru-RU" sz="900" b="0" u="none" strike="noStrike">
               <a:solidFill>
@@ -8059,13 +7235,14 @@
 </file>
 
 <file path=ppt/slideLayouts/slideLayout2.xml><?xml version="1.0" encoding="utf-8"?>
-<p:sldLayout xmlns:a="http://schemas.openxmlformats.org/drawingml/2006/main" xmlns:p="http://schemas.openxmlformats.org/presentationml/2006/main" xmlns:r="http://schemas.openxmlformats.org/officeDocument/2006/relationships" xmlns:p14="http://schemas.microsoft.com/office/powerpoint/2010/main" xmlns:p15="http://schemas.microsoft.com/office/powerpoint/2012/main" xmlns:mc="http://schemas.openxmlformats.org/markup-compatibility/2006" type="blank" preserve="1">
+<p:sldLayout xmlns:a="http://schemas.openxmlformats.org/drawingml/2006/main" xmlns:r="http://schemas.openxmlformats.org/officeDocument/2006/relationships" xmlns:p="http://schemas.openxmlformats.org/presentationml/2006/main" type="blank" preserve="1">
   <p:cSld name="BIG_NUMBER">
     <p:bg>
       <p:bgPr>
         <a:solidFill>
           <a:schemeClr val="lt1"/>
         </a:solidFill>
+        <a:effectLst/>
       </p:bgPr>
     </p:bg>
     <p:spTree>
@@ -8341,14 +7518,6 @@
               </a:rPr>
               <a:t>Для правки структуры щёлкните мышью</a:t>
             </a:r>
-            <a:endParaRPr lang="ru-RU" sz="1800" b="0" u="none" strike="noStrike">
-              <a:solidFill>
-                <a:srgbClr val="000000"/>
-              </a:solidFill>
-              <a:effectLst/>
-              <a:uFillTx/>
-              <a:latin typeface="Arial"/>
-            </a:endParaRPr>
           </a:p>
           <a:p>
             <a:pPr marL="914400" lvl="1" indent="-317520" algn="l">
@@ -8373,14 +7542,6 @@
               </a:rPr>
               <a:t>Второй уровень структуры</a:t>
             </a:r>
-            <a:endParaRPr lang="ru-RU" sz="1800" b="0" u="none" strike="noStrike">
-              <a:solidFill>
-                <a:srgbClr val="000000"/>
-              </a:solidFill>
-              <a:effectLst/>
-              <a:uFillTx/>
-              <a:latin typeface="Arial"/>
-            </a:endParaRPr>
           </a:p>
           <a:p>
             <a:pPr marL="1371600" lvl="2" indent="-317520" algn="l">
@@ -8405,14 +7566,6 @@
               </a:rPr>
               <a:t>Третий уровень структуры</a:t>
             </a:r>
-            <a:endParaRPr lang="ru-RU" sz="1800" b="0" u="none" strike="noStrike">
-              <a:solidFill>
-                <a:srgbClr val="000000"/>
-              </a:solidFill>
-              <a:effectLst/>
-              <a:uFillTx/>
-              <a:latin typeface="Arial"/>
-            </a:endParaRPr>
           </a:p>
           <a:p>
             <a:pPr marL="1828800" lvl="3" indent="-317520" algn="l">
@@ -8437,14 +7590,6 @@
               </a:rPr>
               <a:t>Четвёртый уровень структуры</a:t>
             </a:r>
-            <a:endParaRPr lang="ru-RU" sz="1800" b="0" u="none" strike="noStrike">
-              <a:solidFill>
-                <a:srgbClr val="000000"/>
-              </a:solidFill>
-              <a:effectLst/>
-              <a:uFillTx/>
-              <a:latin typeface="Arial"/>
-            </a:endParaRPr>
           </a:p>
           <a:p>
             <a:pPr marL="2286000" lvl="4" indent="-317520" algn="l">
@@ -8469,14 +7614,6 @@
               </a:rPr>
               <a:t>Пятый уровень структуры</a:t>
             </a:r>
-            <a:endParaRPr lang="ru-RU" sz="1800" b="0" u="none" strike="noStrike">
-              <a:solidFill>
-                <a:srgbClr val="000000"/>
-              </a:solidFill>
-              <a:effectLst/>
-              <a:uFillTx/>
-              <a:latin typeface="Arial"/>
-            </a:endParaRPr>
           </a:p>
           <a:p>
             <a:pPr marL="2743200" lvl="5" indent="-317520" algn="l">
@@ -8501,14 +7638,6 @@
               </a:rPr>
               <a:t>Шестой уровень структуры</a:t>
             </a:r>
-            <a:endParaRPr lang="ru-RU" sz="1800" b="0" u="none" strike="noStrike">
-              <a:solidFill>
-                <a:srgbClr val="000000"/>
-              </a:solidFill>
-              <a:effectLst/>
-              <a:uFillTx/>
-              <a:latin typeface="Arial"/>
-            </a:endParaRPr>
           </a:p>
           <a:p>
             <a:pPr marL="3200400" lvl="6" indent="-317520" algn="l">
@@ -8533,14 +7662,6 @@
               </a:rPr>
               <a:t>Седьмой уровень структуры</a:t>
             </a:r>
-            <a:endParaRPr lang="ru-RU" sz="1800" b="0" u="none" strike="noStrike">
-              <a:solidFill>
-                <a:srgbClr val="000000"/>
-              </a:solidFill>
-              <a:effectLst/>
-              <a:uFillTx/>
-              <a:latin typeface="Arial"/>
-            </a:endParaRPr>
           </a:p>
         </p:txBody>
       </p:sp>
@@ -8611,7 +7732,7 @@
                 <a:latin typeface="Arial"/>
                 <a:ea typeface="Arial"/>
               </a:rPr>
-              <a:t>&lt;номер&gt;</a:t>
+              <a:t>‹#›</a:t>
             </a:fld>
             <a:endParaRPr lang="ru-RU" sz="1000" b="0" u="none" strike="noStrike">
               <a:solidFill>
@@ -8633,13 +7754,14 @@
 </file>
 
 <file path=ppt/slideLayouts/slideLayout20.xml><?xml version="1.0" encoding="utf-8"?>
-<p:sldLayout xmlns:a="http://schemas.openxmlformats.org/drawingml/2006/main" xmlns:p="http://schemas.openxmlformats.org/presentationml/2006/main" xmlns:r="http://schemas.openxmlformats.org/officeDocument/2006/relationships" xmlns:p14="http://schemas.microsoft.com/office/powerpoint/2010/main" xmlns:p15="http://schemas.microsoft.com/office/powerpoint/2012/main" xmlns:mc="http://schemas.openxmlformats.org/markup-compatibility/2006" type="titleOnly" preserve="1">
+<p:sldLayout xmlns:a="http://schemas.openxmlformats.org/drawingml/2006/main" xmlns:r="http://schemas.openxmlformats.org/officeDocument/2006/relationships" xmlns:p="http://schemas.openxmlformats.org/presentationml/2006/main" type="titleOnly" preserve="1">
   <p:cSld name="Обычный 3">
     <p:bg>
       <p:bgPr>
         <a:solidFill>
           <a:schemeClr val="lt1"/>
         </a:solidFill>
+        <a:effectLst/>
       </p:bgPr>
     </p:bg>
     <p:spTree>
@@ -8711,14 +7833,6 @@
               </a:rPr>
               <a:t>Для правки текста заглавия щёлкните мышью</a:t>
             </a:r>
-            <a:endParaRPr lang="ru-RU" sz="3300" b="0" u="none" strike="noStrike">
-              <a:solidFill>
-                <a:srgbClr val="000000"/>
-              </a:solidFill>
-              <a:effectLst/>
-              <a:uFillTx/>
-              <a:latin typeface="Arial"/>
-            </a:endParaRPr>
           </a:p>
         </p:txBody>
       </p:sp>
@@ -8777,14 +7891,6 @@
               </a:rPr>
               <a:t>&lt;дата/время&gt;</a:t>
             </a:r>
-            <a:endParaRPr lang="ru-RU" sz="1400" b="0" u="none" strike="noStrike">
-              <a:solidFill>
-                <a:srgbClr val="000000"/>
-              </a:solidFill>
-              <a:effectLst/>
-              <a:uFillTx/>
-              <a:latin typeface="Times New Roman"/>
-            </a:endParaRPr>
           </a:p>
         </p:txBody>
       </p:sp>
@@ -8843,14 +7949,6 @@
               </a:rPr>
               <a:t>&lt;нижний колонтитул&gt;</a:t>
             </a:r>
-            <a:endParaRPr lang="ru-RU" sz="1400" b="0" u="none" strike="noStrike">
-              <a:solidFill>
-                <a:srgbClr val="000000"/>
-              </a:solidFill>
-              <a:effectLst/>
-              <a:uFillTx/>
-              <a:latin typeface="Times New Roman"/>
-            </a:endParaRPr>
           </a:p>
         </p:txBody>
       </p:sp>
@@ -8921,7 +8019,7 @@
                 <a:latin typeface="Calibri"/>
                 <a:ea typeface="Calibri"/>
               </a:rPr>
-              <a:t>&lt;номер&gt;</a:t>
+              <a:t>‹#›</a:t>
             </a:fld>
             <a:endParaRPr lang="ru-RU" sz="900" b="0" u="none" strike="noStrike">
               <a:solidFill>
@@ -8943,13 +8041,14 @@
 </file>
 
 <file path=ppt/slideLayouts/slideLayout21.xml><?xml version="1.0" encoding="utf-8"?>
-<p:sldLayout xmlns:a="http://schemas.openxmlformats.org/drawingml/2006/main" xmlns:p="http://schemas.openxmlformats.org/presentationml/2006/main" xmlns:r="http://schemas.openxmlformats.org/officeDocument/2006/relationships" xmlns:p14="http://schemas.microsoft.com/office/powerpoint/2010/main" xmlns:p15="http://schemas.microsoft.com/office/powerpoint/2012/main" xmlns:mc="http://schemas.openxmlformats.org/markup-compatibility/2006" type="blank" preserve="1">
+<p:sldLayout xmlns:a="http://schemas.openxmlformats.org/drawingml/2006/main" xmlns:r="http://schemas.openxmlformats.org/officeDocument/2006/relationships" xmlns:p="http://schemas.openxmlformats.org/presentationml/2006/main" type="blank" preserve="1">
   <p:cSld name="OBJECT_WITH_CAPTION_TEXT">
     <p:bg>
       <p:bgPr>
         <a:solidFill>
           <a:schemeClr val="lt1"/>
         </a:solidFill>
+        <a:effectLst/>
       </p:bgPr>
     </p:bg>
     <p:spTree>
@@ -9021,14 +8120,6 @@
               </a:rPr>
               <a:t>Для правки текста заглавия щёлкните мышью</a:t>
             </a:r>
-            <a:endParaRPr lang="ru-RU" sz="2400" b="0" u="none" strike="noStrike">
-              <a:solidFill>
-                <a:srgbClr val="000000"/>
-              </a:solidFill>
-              <a:effectLst/>
-              <a:uFillTx/>
-              <a:latin typeface="Arial"/>
-            </a:endParaRPr>
           </a:p>
         </p:txBody>
       </p:sp>
@@ -9217,14 +8308,6 @@
               </a:rPr>
               <a:t>Для правки структуры щёлкните мышью</a:t>
             </a:r>
-            <a:endParaRPr lang="ru-RU" sz="2400" b="0" u="none" strike="noStrike">
-              <a:solidFill>
-                <a:srgbClr val="000000"/>
-              </a:solidFill>
-              <a:effectLst/>
-              <a:uFillTx/>
-              <a:latin typeface="Arial"/>
-            </a:endParaRPr>
           </a:p>
           <a:p>
             <a:pPr marL="914400" lvl="1" indent="-361800" algn="l">
@@ -9249,14 +8332,6 @@
               </a:rPr>
               <a:t>Второй уровень структуры</a:t>
             </a:r>
-            <a:endParaRPr lang="ru-RU" sz="2400" b="0" u="none" strike="noStrike">
-              <a:solidFill>
-                <a:srgbClr val="000000"/>
-              </a:solidFill>
-              <a:effectLst/>
-              <a:uFillTx/>
-              <a:latin typeface="Arial"/>
-            </a:endParaRPr>
           </a:p>
           <a:p>
             <a:pPr marL="1371600" lvl="2" indent="-343080" algn="l">
@@ -9281,14 +8356,6 @@
               </a:rPr>
               <a:t>Третий уровень структуры</a:t>
             </a:r>
-            <a:endParaRPr lang="ru-RU" sz="2400" b="0" u="none" strike="noStrike">
-              <a:solidFill>
-                <a:srgbClr val="000000"/>
-              </a:solidFill>
-              <a:effectLst/>
-              <a:uFillTx/>
-              <a:latin typeface="Arial"/>
-            </a:endParaRPr>
           </a:p>
           <a:p>
             <a:pPr marL="1828800" lvl="3" indent="-324000" algn="l">
@@ -9313,14 +8380,6 @@
               </a:rPr>
               <a:t>Четвёртый уровень структуры</a:t>
             </a:r>
-            <a:endParaRPr lang="ru-RU" sz="2400" b="0" u="none" strike="noStrike">
-              <a:solidFill>
-                <a:srgbClr val="000000"/>
-              </a:solidFill>
-              <a:effectLst/>
-              <a:uFillTx/>
-              <a:latin typeface="Arial"/>
-            </a:endParaRPr>
           </a:p>
           <a:p>
             <a:pPr marL="2286000" lvl="4" indent="-324000" algn="l">
@@ -9345,14 +8404,6 @@
               </a:rPr>
               <a:t>Пятый уровень структуры</a:t>
             </a:r>
-            <a:endParaRPr lang="ru-RU" sz="2400" b="0" u="none" strike="noStrike">
-              <a:solidFill>
-                <a:srgbClr val="000000"/>
-              </a:solidFill>
-              <a:effectLst/>
-              <a:uFillTx/>
-              <a:latin typeface="Arial"/>
-            </a:endParaRPr>
           </a:p>
           <a:p>
             <a:pPr marL="2743200" lvl="5" indent="-324000" algn="l">
@@ -9377,14 +8428,6 @@
               </a:rPr>
               <a:t>Шестой уровень структуры</a:t>
             </a:r>
-            <a:endParaRPr lang="ru-RU" sz="2400" b="0" u="none" strike="noStrike">
-              <a:solidFill>
-                <a:srgbClr val="000000"/>
-              </a:solidFill>
-              <a:effectLst/>
-              <a:uFillTx/>
-              <a:latin typeface="Arial"/>
-            </a:endParaRPr>
           </a:p>
           <a:p>
             <a:pPr marL="3200400" lvl="6" indent="-324000" algn="l">
@@ -9409,14 +8452,6 @@
               </a:rPr>
               <a:t>Седьмой уровень структуры</a:t>
             </a:r>
-            <a:endParaRPr lang="ru-RU" sz="2400" b="0" u="none" strike="noStrike">
-              <a:solidFill>
-                <a:srgbClr val="000000"/>
-              </a:solidFill>
-              <a:effectLst/>
-              <a:uFillTx/>
-              <a:latin typeface="Arial"/>
-            </a:endParaRPr>
           </a:p>
         </p:txBody>
       </p:sp>
@@ -9605,14 +8640,6 @@
               </a:rPr>
               <a:t>Для правки структуры щёлкните мышью</a:t>
             </a:r>
-            <a:endParaRPr lang="ru-RU" sz="1200" b="0" u="none" strike="noStrike">
-              <a:solidFill>
-                <a:srgbClr val="000000"/>
-              </a:solidFill>
-              <a:effectLst/>
-              <a:uFillTx/>
-              <a:latin typeface="Arial"/>
-            </a:endParaRPr>
           </a:p>
           <a:p>
             <a:pPr marL="914400" lvl="1" indent="-228600" algn="l">
@@ -9637,14 +8664,6 @@
               </a:rPr>
               <a:t>Второй уровень структуры</a:t>
             </a:r>
-            <a:endParaRPr lang="ru-RU" sz="1200" b="0" u="none" strike="noStrike">
-              <a:solidFill>
-                <a:srgbClr val="000000"/>
-              </a:solidFill>
-              <a:effectLst/>
-              <a:uFillTx/>
-              <a:latin typeface="Arial"/>
-            </a:endParaRPr>
           </a:p>
           <a:p>
             <a:pPr marL="1371600" lvl="2" indent="-228600" algn="l">
@@ -9669,14 +8688,6 @@
               </a:rPr>
               <a:t>Третий уровень структуры</a:t>
             </a:r>
-            <a:endParaRPr lang="ru-RU" sz="1200" b="0" u="none" strike="noStrike">
-              <a:solidFill>
-                <a:srgbClr val="000000"/>
-              </a:solidFill>
-              <a:effectLst/>
-              <a:uFillTx/>
-              <a:latin typeface="Arial"/>
-            </a:endParaRPr>
           </a:p>
           <a:p>
             <a:pPr marL="1828800" lvl="3" indent="-228600" algn="l">
@@ -9701,14 +8712,6 @@
               </a:rPr>
               <a:t>Четвёртый уровень структуры</a:t>
             </a:r>
-            <a:endParaRPr lang="ru-RU" sz="1200" b="0" u="none" strike="noStrike">
-              <a:solidFill>
-                <a:srgbClr val="000000"/>
-              </a:solidFill>
-              <a:effectLst/>
-              <a:uFillTx/>
-              <a:latin typeface="Arial"/>
-            </a:endParaRPr>
           </a:p>
           <a:p>
             <a:pPr marL="2286000" lvl="4" indent="-228600" algn="l">
@@ -9733,14 +8736,6 @@
               </a:rPr>
               <a:t>Пятый уровень структуры</a:t>
             </a:r>
-            <a:endParaRPr lang="ru-RU" sz="1200" b="0" u="none" strike="noStrike">
-              <a:solidFill>
-                <a:srgbClr val="000000"/>
-              </a:solidFill>
-              <a:effectLst/>
-              <a:uFillTx/>
-              <a:latin typeface="Arial"/>
-            </a:endParaRPr>
           </a:p>
           <a:p>
             <a:pPr marL="2743200" lvl="5" indent="-228600" algn="l">
@@ -9765,14 +8760,6 @@
               </a:rPr>
               <a:t>Шестой уровень структуры</a:t>
             </a:r>
-            <a:endParaRPr lang="ru-RU" sz="1200" b="0" u="none" strike="noStrike">
-              <a:solidFill>
-                <a:srgbClr val="000000"/>
-              </a:solidFill>
-              <a:effectLst/>
-              <a:uFillTx/>
-              <a:latin typeface="Arial"/>
-            </a:endParaRPr>
           </a:p>
           <a:p>
             <a:pPr marL="3200400" lvl="6" indent="-228600" algn="l">
@@ -9797,14 +8784,6 @@
               </a:rPr>
               <a:t>Седьмой уровень структуры</a:t>
             </a:r>
-            <a:endParaRPr lang="ru-RU" sz="1200" b="0" u="none" strike="noStrike">
-              <a:solidFill>
-                <a:srgbClr val="000000"/>
-              </a:solidFill>
-              <a:effectLst/>
-              <a:uFillTx/>
-              <a:latin typeface="Arial"/>
-            </a:endParaRPr>
           </a:p>
         </p:txBody>
       </p:sp>
@@ -9863,14 +8842,6 @@
               </a:rPr>
               <a:t>&lt;дата/время&gt;</a:t>
             </a:r>
-            <a:endParaRPr lang="ru-RU" sz="1400" b="0" u="none" strike="noStrike">
-              <a:solidFill>
-                <a:srgbClr val="000000"/>
-              </a:solidFill>
-              <a:effectLst/>
-              <a:uFillTx/>
-              <a:latin typeface="Times New Roman"/>
-            </a:endParaRPr>
           </a:p>
         </p:txBody>
       </p:sp>
@@ -9929,14 +8900,6 @@
               </a:rPr>
               <a:t>&lt;нижний колонтитул&gt;</a:t>
             </a:r>
-            <a:endParaRPr lang="ru-RU" sz="1400" b="0" u="none" strike="noStrike">
-              <a:solidFill>
-                <a:srgbClr val="000000"/>
-              </a:solidFill>
-              <a:effectLst/>
-              <a:uFillTx/>
-              <a:latin typeface="Times New Roman"/>
-            </a:endParaRPr>
           </a:p>
         </p:txBody>
       </p:sp>
@@ -10007,7 +8970,7 @@
                 <a:latin typeface="Calibri"/>
                 <a:ea typeface="Calibri"/>
               </a:rPr>
-              <a:t>&lt;номер&gt;</a:t>
+              <a:t>‹#›</a:t>
             </a:fld>
             <a:endParaRPr lang="ru-RU" sz="900" b="0" u="none" strike="noStrike">
               <a:solidFill>
@@ -10029,13 +8992,14 @@
 </file>
 
 <file path=ppt/slideLayouts/slideLayout22.xml><?xml version="1.0" encoding="utf-8"?>
-<p:sldLayout xmlns:a="http://schemas.openxmlformats.org/drawingml/2006/main" xmlns:p="http://schemas.openxmlformats.org/presentationml/2006/main" xmlns:r="http://schemas.openxmlformats.org/officeDocument/2006/relationships" xmlns:p14="http://schemas.microsoft.com/office/powerpoint/2010/main" xmlns:p15="http://schemas.microsoft.com/office/powerpoint/2012/main" xmlns:mc="http://schemas.openxmlformats.org/markup-compatibility/2006" type="blank" preserve="1">
+<p:sldLayout xmlns:a="http://schemas.openxmlformats.org/drawingml/2006/main" xmlns:r="http://schemas.openxmlformats.org/officeDocument/2006/relationships" xmlns:p="http://schemas.openxmlformats.org/presentationml/2006/main" type="blank" preserve="1">
   <p:cSld name="PICTURE_WITH_CAPTION_TEXT">
     <p:bg>
       <p:bgPr>
         <a:solidFill>
           <a:schemeClr val="lt1"/>
         </a:solidFill>
+        <a:effectLst/>
       </p:bgPr>
     </p:bg>
     <p:spTree>
@@ -10107,14 +9071,6 @@
               </a:rPr>
               <a:t>Для правки текста заглавия щёлкните мышью</a:t>
             </a:r>
-            <a:endParaRPr lang="ru-RU" sz="2400" b="0" u="none" strike="noStrike">
-              <a:solidFill>
-                <a:srgbClr val="000000"/>
-              </a:solidFill>
-              <a:effectLst/>
-              <a:uFillTx/>
-              <a:latin typeface="Arial"/>
-            </a:endParaRPr>
           </a:p>
         </p:txBody>
       </p:sp>
@@ -10145,6 +9101,7 @@
           <a:bodyPr lIns="90000" tIns="45000" rIns="90000" bIns="45000" anchor="t" anchorCtr="1">
             <a:noAutofit/>
           </a:bodyPr>
+          <a:lstStyle/>
           <a:p>
             <a:pPr indent="0" algn="l">
               <a:buNone/>
@@ -10160,14 +9117,6 @@
               </a:rPr>
               <a:t>Добавьте изображение двойным щелчком мыши</a:t>
             </a:r>
-            <a:endParaRPr lang="ru-RU" sz="1800" b="0" u="none" strike="noStrike">
-              <a:solidFill>
-                <a:srgbClr val="000000"/>
-              </a:solidFill>
-              <a:effectLst/>
-              <a:uFillTx/>
-              <a:latin typeface="Arial"/>
-            </a:endParaRPr>
           </a:p>
         </p:txBody>
       </p:sp>
@@ -10356,14 +9305,6 @@
               </a:rPr>
               <a:t>Для правки структуры щёлкните мышью</a:t>
             </a:r>
-            <a:endParaRPr lang="ru-RU" sz="1200" b="0" u="none" strike="noStrike">
-              <a:solidFill>
-                <a:srgbClr val="000000"/>
-              </a:solidFill>
-              <a:effectLst/>
-              <a:uFillTx/>
-              <a:latin typeface="Arial"/>
-            </a:endParaRPr>
           </a:p>
           <a:p>
             <a:pPr marL="914400" lvl="1" indent="-228600" algn="l">
@@ -10388,14 +9329,6 @@
               </a:rPr>
               <a:t>Второй уровень структуры</a:t>
             </a:r>
-            <a:endParaRPr lang="ru-RU" sz="1200" b="0" u="none" strike="noStrike">
-              <a:solidFill>
-                <a:srgbClr val="000000"/>
-              </a:solidFill>
-              <a:effectLst/>
-              <a:uFillTx/>
-              <a:latin typeface="Arial"/>
-            </a:endParaRPr>
           </a:p>
           <a:p>
             <a:pPr marL="1371600" lvl="2" indent="-228600" algn="l">
@@ -10420,14 +9353,6 @@
               </a:rPr>
               <a:t>Третий уровень структуры</a:t>
             </a:r>
-            <a:endParaRPr lang="ru-RU" sz="1200" b="0" u="none" strike="noStrike">
-              <a:solidFill>
-                <a:srgbClr val="000000"/>
-              </a:solidFill>
-              <a:effectLst/>
-              <a:uFillTx/>
-              <a:latin typeface="Arial"/>
-            </a:endParaRPr>
           </a:p>
           <a:p>
             <a:pPr marL="1828800" lvl="3" indent="-228600" algn="l">
@@ -10452,14 +9377,6 @@
               </a:rPr>
               <a:t>Четвёртый уровень структуры</a:t>
             </a:r>
-            <a:endParaRPr lang="ru-RU" sz="1200" b="0" u="none" strike="noStrike">
-              <a:solidFill>
-                <a:srgbClr val="000000"/>
-              </a:solidFill>
-              <a:effectLst/>
-              <a:uFillTx/>
-              <a:latin typeface="Arial"/>
-            </a:endParaRPr>
           </a:p>
           <a:p>
             <a:pPr marL="2286000" lvl="4" indent="-228600" algn="l">
@@ -10484,14 +9401,6 @@
               </a:rPr>
               <a:t>Пятый уровень структуры</a:t>
             </a:r>
-            <a:endParaRPr lang="ru-RU" sz="1200" b="0" u="none" strike="noStrike">
-              <a:solidFill>
-                <a:srgbClr val="000000"/>
-              </a:solidFill>
-              <a:effectLst/>
-              <a:uFillTx/>
-              <a:latin typeface="Arial"/>
-            </a:endParaRPr>
           </a:p>
           <a:p>
             <a:pPr marL="2743200" lvl="5" indent="-228600" algn="l">
@@ -10516,14 +9425,6 @@
               </a:rPr>
               <a:t>Шестой уровень структуры</a:t>
             </a:r>
-            <a:endParaRPr lang="ru-RU" sz="1200" b="0" u="none" strike="noStrike">
-              <a:solidFill>
-                <a:srgbClr val="000000"/>
-              </a:solidFill>
-              <a:effectLst/>
-              <a:uFillTx/>
-              <a:latin typeface="Arial"/>
-            </a:endParaRPr>
           </a:p>
           <a:p>
             <a:pPr marL="3200400" lvl="6" indent="-228600" algn="l">
@@ -10548,14 +9449,6 @@
               </a:rPr>
               <a:t>Седьмой уровень структуры</a:t>
             </a:r>
-            <a:endParaRPr lang="ru-RU" sz="1200" b="0" u="none" strike="noStrike">
-              <a:solidFill>
-                <a:srgbClr val="000000"/>
-              </a:solidFill>
-              <a:effectLst/>
-              <a:uFillTx/>
-              <a:latin typeface="Arial"/>
-            </a:endParaRPr>
           </a:p>
         </p:txBody>
       </p:sp>
@@ -10614,14 +9507,6 @@
               </a:rPr>
               <a:t>&lt;дата/время&gt;</a:t>
             </a:r>
-            <a:endParaRPr lang="ru-RU" sz="1400" b="0" u="none" strike="noStrike">
-              <a:solidFill>
-                <a:srgbClr val="000000"/>
-              </a:solidFill>
-              <a:effectLst/>
-              <a:uFillTx/>
-              <a:latin typeface="Times New Roman"/>
-            </a:endParaRPr>
           </a:p>
         </p:txBody>
       </p:sp>
@@ -10680,14 +9565,6 @@
               </a:rPr>
               <a:t>&lt;нижний колонтитул&gt;</a:t>
             </a:r>
-            <a:endParaRPr lang="ru-RU" sz="1400" b="0" u="none" strike="noStrike">
-              <a:solidFill>
-                <a:srgbClr val="000000"/>
-              </a:solidFill>
-              <a:effectLst/>
-              <a:uFillTx/>
-              <a:latin typeface="Times New Roman"/>
-            </a:endParaRPr>
           </a:p>
         </p:txBody>
       </p:sp>
@@ -10758,7 +9635,7 @@
                 <a:latin typeface="Calibri"/>
                 <a:ea typeface="Calibri"/>
               </a:rPr>
-              <a:t>&lt;номер&gt;</a:t>
+              <a:t>‹#›</a:t>
             </a:fld>
             <a:endParaRPr lang="ru-RU" sz="900" b="0" u="none" strike="noStrike">
               <a:solidFill>
@@ -10780,13 +9657,14 @@
 </file>
 
 <file path=ppt/slideLayouts/slideLayout3.xml><?xml version="1.0" encoding="utf-8"?>
-<p:sldLayout xmlns:a="http://schemas.openxmlformats.org/drawingml/2006/main" xmlns:p="http://schemas.openxmlformats.org/presentationml/2006/main" xmlns:r="http://schemas.openxmlformats.org/officeDocument/2006/relationships" xmlns:p14="http://schemas.microsoft.com/office/powerpoint/2010/main" xmlns:p15="http://schemas.microsoft.com/office/powerpoint/2012/main" xmlns:mc="http://schemas.openxmlformats.org/markup-compatibility/2006" type="blank" preserve="1">
+<p:sldLayout xmlns:a="http://schemas.openxmlformats.org/drawingml/2006/main" xmlns:r="http://schemas.openxmlformats.org/officeDocument/2006/relationships" xmlns:p="http://schemas.openxmlformats.org/presentationml/2006/main" type="blank" preserve="1">
   <p:cSld name="BLANK">
     <p:bg>
       <p:bgPr>
         <a:solidFill>
           <a:schemeClr val="lt1"/>
         </a:solidFill>
+        <a:effectLst/>
       </p:bgPr>
     </p:bg>
     <p:spTree>
@@ -10870,7 +9748,7 @@
                 <a:latin typeface="Arial"/>
                 <a:ea typeface="Arial"/>
               </a:rPr>
-              <a:t>&lt;номер&gt;</a:t>
+              <a:t>‹#›</a:t>
             </a:fld>
             <a:endParaRPr lang="ru-RU" sz="1000" b="0" u="none" strike="noStrike">
               <a:solidFill>
@@ -10892,13 +9770,14 @@
 </file>
 
 <file path=ppt/slideLayouts/slideLayout4.xml><?xml version="1.0" encoding="utf-8"?>
-<p:sldLayout xmlns:a="http://schemas.openxmlformats.org/drawingml/2006/main" xmlns:p="http://schemas.openxmlformats.org/presentationml/2006/main" xmlns:r="http://schemas.openxmlformats.org/officeDocument/2006/relationships" xmlns:p14="http://schemas.microsoft.com/office/powerpoint/2010/main" xmlns:p15="http://schemas.microsoft.com/office/powerpoint/2012/main" xmlns:mc="http://schemas.openxmlformats.org/markup-compatibility/2006" type="blank" preserve="1">
+<p:sldLayout xmlns:a="http://schemas.openxmlformats.org/drawingml/2006/main" xmlns:r="http://schemas.openxmlformats.org/officeDocument/2006/relationships" xmlns:p="http://schemas.openxmlformats.org/presentationml/2006/main" type="blank" preserve="1">
   <p:cSld name="SECTION_HEADER">
     <p:bg>
       <p:bgPr>
         <a:solidFill>
           <a:schemeClr val="lt1"/>
         </a:solidFill>
+        <a:effectLst/>
       </p:bgPr>
     </p:bg>
     <p:spTree>
@@ -10970,14 +9849,6 @@
               </a:rPr>
               <a:t>Для правки текста заглавия щёлкните мышью</a:t>
             </a:r>
-            <a:endParaRPr lang="ru-RU" sz="3600" b="0" u="none" strike="noStrike">
-              <a:solidFill>
-                <a:srgbClr val="000000"/>
-              </a:solidFill>
-              <a:effectLst/>
-              <a:uFillTx/>
-              <a:latin typeface="Arial"/>
-            </a:endParaRPr>
           </a:p>
         </p:txBody>
       </p:sp>
@@ -11048,7 +9919,7 @@
                 <a:latin typeface="Arial"/>
                 <a:ea typeface="Arial"/>
               </a:rPr>
-              <a:t>&lt;номер&gt;</a:t>
+              <a:t>‹#›</a:t>
             </a:fld>
             <a:endParaRPr lang="ru-RU" sz="1000" b="0" u="none" strike="noStrike">
               <a:solidFill>
@@ -11070,13 +9941,14 @@
 </file>
 
 <file path=ppt/slideLayouts/slideLayout5.xml><?xml version="1.0" encoding="utf-8"?>
-<p:sldLayout xmlns:a="http://schemas.openxmlformats.org/drawingml/2006/main" xmlns:p="http://schemas.openxmlformats.org/presentationml/2006/main" xmlns:r="http://schemas.openxmlformats.org/officeDocument/2006/relationships" xmlns:p14="http://schemas.microsoft.com/office/powerpoint/2010/main" xmlns:p15="http://schemas.microsoft.com/office/powerpoint/2012/main" xmlns:mc="http://schemas.openxmlformats.org/markup-compatibility/2006" type="tx" preserve="1">
+<p:sldLayout xmlns:a="http://schemas.openxmlformats.org/drawingml/2006/main" xmlns:r="http://schemas.openxmlformats.org/officeDocument/2006/relationships" xmlns:p="http://schemas.openxmlformats.org/presentationml/2006/main" type="tx" preserve="1">
   <p:cSld name="TITLE_AND_BODY">
     <p:bg>
       <p:bgPr>
         <a:solidFill>
           <a:schemeClr val="lt1"/>
         </a:solidFill>
+        <a:effectLst/>
       </p:bgPr>
     </p:bg>
     <p:spTree>
@@ -11148,14 +10020,6 @@
               </a:rPr>
               <a:t>Для правки текста заглавия щёлкните мышью</a:t>
             </a:r>
-            <a:endParaRPr lang="ru-RU" sz="2800" b="0" u="none" strike="noStrike">
-              <a:solidFill>
-                <a:srgbClr val="000000"/>
-              </a:solidFill>
-              <a:effectLst/>
-              <a:uFillTx/>
-              <a:latin typeface="Arial"/>
-            </a:endParaRPr>
           </a:p>
         </p:txBody>
       </p:sp>
@@ -11344,14 +10208,6 @@
               </a:rPr>
               <a:t>Для правки структуры щёлкните мышью</a:t>
             </a:r>
-            <a:endParaRPr lang="ru-RU" sz="1800" b="0" u="none" strike="noStrike">
-              <a:solidFill>
-                <a:srgbClr val="000000"/>
-              </a:solidFill>
-              <a:effectLst/>
-              <a:uFillTx/>
-              <a:latin typeface="Arial"/>
-            </a:endParaRPr>
           </a:p>
           <a:p>
             <a:pPr marL="914400" lvl="1" indent="-317520" algn="l">
@@ -11376,14 +10232,6 @@
               </a:rPr>
               <a:t>Второй уровень структуры</a:t>
             </a:r>
-            <a:endParaRPr lang="ru-RU" sz="1800" b="0" u="none" strike="noStrike">
-              <a:solidFill>
-                <a:srgbClr val="000000"/>
-              </a:solidFill>
-              <a:effectLst/>
-              <a:uFillTx/>
-              <a:latin typeface="Arial"/>
-            </a:endParaRPr>
           </a:p>
           <a:p>
             <a:pPr marL="1371600" lvl="2" indent="-317520" algn="l">
@@ -11408,14 +10256,6 @@
               </a:rPr>
               <a:t>Третий уровень структуры</a:t>
             </a:r>
-            <a:endParaRPr lang="ru-RU" sz="1800" b="0" u="none" strike="noStrike">
-              <a:solidFill>
-                <a:srgbClr val="000000"/>
-              </a:solidFill>
-              <a:effectLst/>
-              <a:uFillTx/>
-              <a:latin typeface="Arial"/>
-            </a:endParaRPr>
           </a:p>
           <a:p>
             <a:pPr marL="1828800" lvl="3" indent="-317520" algn="l">
@@ -11440,14 +10280,6 @@
               </a:rPr>
               <a:t>Четвёртый уровень структуры</a:t>
             </a:r>
-            <a:endParaRPr lang="ru-RU" sz="1800" b="0" u="none" strike="noStrike">
-              <a:solidFill>
-                <a:srgbClr val="000000"/>
-              </a:solidFill>
-              <a:effectLst/>
-              <a:uFillTx/>
-              <a:latin typeface="Arial"/>
-            </a:endParaRPr>
           </a:p>
           <a:p>
             <a:pPr marL="2286000" lvl="4" indent="-317520" algn="l">
@@ -11472,14 +10304,6 @@
               </a:rPr>
               <a:t>Пятый уровень структуры</a:t>
             </a:r>
-            <a:endParaRPr lang="ru-RU" sz="1800" b="0" u="none" strike="noStrike">
-              <a:solidFill>
-                <a:srgbClr val="000000"/>
-              </a:solidFill>
-              <a:effectLst/>
-              <a:uFillTx/>
-              <a:latin typeface="Arial"/>
-            </a:endParaRPr>
           </a:p>
           <a:p>
             <a:pPr marL="2743200" lvl="5" indent="-317520" algn="l">
@@ -11504,14 +10328,6 @@
               </a:rPr>
               <a:t>Шестой уровень структуры</a:t>
             </a:r>
-            <a:endParaRPr lang="ru-RU" sz="1800" b="0" u="none" strike="noStrike">
-              <a:solidFill>
-                <a:srgbClr val="000000"/>
-              </a:solidFill>
-              <a:effectLst/>
-              <a:uFillTx/>
-              <a:latin typeface="Arial"/>
-            </a:endParaRPr>
           </a:p>
           <a:p>
             <a:pPr marL="3200400" lvl="6" indent="-317520" algn="l">
@@ -11536,14 +10352,6 @@
               </a:rPr>
               <a:t>Седьмой уровень структуры</a:t>
             </a:r>
-            <a:endParaRPr lang="ru-RU" sz="1800" b="0" u="none" strike="noStrike">
-              <a:solidFill>
-                <a:srgbClr val="000000"/>
-              </a:solidFill>
-              <a:effectLst/>
-              <a:uFillTx/>
-              <a:latin typeface="Arial"/>
-            </a:endParaRPr>
           </a:p>
         </p:txBody>
       </p:sp>
@@ -11614,7 +10422,7 @@
                 <a:latin typeface="Arial"/>
                 <a:ea typeface="Arial"/>
               </a:rPr>
-              <a:t>&lt;номер&gt;</a:t>
+              <a:t>‹#›</a:t>
             </a:fld>
             <a:endParaRPr lang="ru-RU" sz="1000" b="0" u="none" strike="noStrike">
               <a:solidFill>
@@ -11636,13 +10444,14 @@
 </file>
 
 <file path=ppt/slideLayouts/slideLayout6.xml><?xml version="1.0" encoding="utf-8"?>
-<p:sldLayout xmlns:a="http://schemas.openxmlformats.org/drawingml/2006/main" xmlns:p="http://schemas.openxmlformats.org/presentationml/2006/main" xmlns:r="http://schemas.openxmlformats.org/officeDocument/2006/relationships" xmlns:p14="http://schemas.microsoft.com/office/powerpoint/2010/main" xmlns:p15="http://schemas.microsoft.com/office/powerpoint/2012/main" xmlns:mc="http://schemas.openxmlformats.org/markup-compatibility/2006" type="twoObj" preserve="1">
+<p:sldLayout xmlns:a="http://schemas.openxmlformats.org/drawingml/2006/main" xmlns:r="http://schemas.openxmlformats.org/officeDocument/2006/relationships" xmlns:p="http://schemas.openxmlformats.org/presentationml/2006/main" type="twoObj" preserve="1">
   <p:cSld name="TITLE_AND_TWO_COLUMNS">
     <p:bg>
       <p:bgPr>
         <a:solidFill>
           <a:schemeClr val="lt1"/>
         </a:solidFill>
+        <a:effectLst/>
       </p:bgPr>
     </p:bg>
     <p:spTree>
@@ -11714,14 +10523,6 @@
               </a:rPr>
               <a:t>Для правки текста заглавия щёлкните мышью</a:t>
             </a:r>
-            <a:endParaRPr lang="ru-RU" sz="2800" b="0" u="none" strike="noStrike">
-              <a:solidFill>
-                <a:srgbClr val="000000"/>
-              </a:solidFill>
-              <a:effectLst/>
-              <a:uFillTx/>
-              <a:latin typeface="Arial"/>
-            </a:endParaRPr>
           </a:p>
         </p:txBody>
       </p:sp>
@@ -11910,14 +10711,6 @@
               </a:rPr>
               <a:t>Для правки структуры щёлкните мышью</a:t>
             </a:r>
-            <a:endParaRPr lang="ru-RU" sz="1400" b="0" u="none" strike="noStrike">
-              <a:solidFill>
-                <a:srgbClr val="000000"/>
-              </a:solidFill>
-              <a:effectLst/>
-              <a:uFillTx/>
-              <a:latin typeface="Arial"/>
-            </a:endParaRPr>
           </a:p>
           <a:p>
             <a:pPr marL="914400" lvl="1" indent="-304920" algn="l">
@@ -11942,14 +10735,6 @@
               </a:rPr>
               <a:t>Второй уровень структуры</a:t>
             </a:r>
-            <a:endParaRPr lang="ru-RU" sz="1400" b="0" u="none" strike="noStrike">
-              <a:solidFill>
-                <a:srgbClr val="000000"/>
-              </a:solidFill>
-              <a:effectLst/>
-              <a:uFillTx/>
-              <a:latin typeface="Arial"/>
-            </a:endParaRPr>
           </a:p>
           <a:p>
             <a:pPr marL="1371600" lvl="2" indent="-304920" algn="l">
@@ -11974,14 +10759,6 @@
               </a:rPr>
               <a:t>Третий уровень структуры</a:t>
             </a:r>
-            <a:endParaRPr lang="ru-RU" sz="1400" b="0" u="none" strike="noStrike">
-              <a:solidFill>
-                <a:srgbClr val="000000"/>
-              </a:solidFill>
-              <a:effectLst/>
-              <a:uFillTx/>
-              <a:latin typeface="Arial"/>
-            </a:endParaRPr>
           </a:p>
           <a:p>
             <a:pPr marL="1828800" lvl="3" indent="-304920" algn="l">
@@ -12006,14 +10783,6 @@
               </a:rPr>
               <a:t>Четвёртый уровень структуры</a:t>
             </a:r>
-            <a:endParaRPr lang="ru-RU" sz="1400" b="0" u="none" strike="noStrike">
-              <a:solidFill>
-                <a:srgbClr val="000000"/>
-              </a:solidFill>
-              <a:effectLst/>
-              <a:uFillTx/>
-              <a:latin typeface="Arial"/>
-            </a:endParaRPr>
           </a:p>
           <a:p>
             <a:pPr marL="2286000" lvl="4" indent="-304920" algn="l">
@@ -12038,14 +10807,6 @@
               </a:rPr>
               <a:t>Пятый уровень структуры</a:t>
             </a:r>
-            <a:endParaRPr lang="ru-RU" sz="1400" b="0" u="none" strike="noStrike">
-              <a:solidFill>
-                <a:srgbClr val="000000"/>
-              </a:solidFill>
-              <a:effectLst/>
-              <a:uFillTx/>
-              <a:latin typeface="Arial"/>
-            </a:endParaRPr>
           </a:p>
           <a:p>
             <a:pPr marL="2743200" lvl="5" indent="-304920" algn="l">
@@ -12070,14 +10831,6 @@
               </a:rPr>
               <a:t>Шестой уровень структуры</a:t>
             </a:r>
-            <a:endParaRPr lang="ru-RU" sz="1400" b="0" u="none" strike="noStrike">
-              <a:solidFill>
-                <a:srgbClr val="000000"/>
-              </a:solidFill>
-              <a:effectLst/>
-              <a:uFillTx/>
-              <a:latin typeface="Arial"/>
-            </a:endParaRPr>
           </a:p>
           <a:p>
             <a:pPr marL="3200400" lvl="6" indent="-304920" algn="l">
@@ -12102,14 +10855,6 @@
               </a:rPr>
               <a:t>Седьмой уровень структуры</a:t>
             </a:r>
-            <a:endParaRPr lang="ru-RU" sz="1400" b="0" u="none" strike="noStrike">
-              <a:solidFill>
-                <a:srgbClr val="000000"/>
-              </a:solidFill>
-              <a:effectLst/>
-              <a:uFillTx/>
-              <a:latin typeface="Arial"/>
-            </a:endParaRPr>
           </a:p>
         </p:txBody>
       </p:sp>
@@ -12298,14 +11043,6 @@
               </a:rPr>
               <a:t>Для правки структуры щёлкните мышью</a:t>
             </a:r>
-            <a:endParaRPr lang="ru-RU" sz="1400" b="0" u="none" strike="noStrike">
-              <a:solidFill>
-                <a:srgbClr val="000000"/>
-              </a:solidFill>
-              <a:effectLst/>
-              <a:uFillTx/>
-              <a:latin typeface="Arial"/>
-            </a:endParaRPr>
           </a:p>
           <a:p>
             <a:pPr marL="914400" lvl="1" indent="-304920" algn="l">
@@ -12330,14 +11067,6 @@
               </a:rPr>
               <a:t>Второй уровень структуры</a:t>
             </a:r>
-            <a:endParaRPr lang="ru-RU" sz="1400" b="0" u="none" strike="noStrike">
-              <a:solidFill>
-                <a:srgbClr val="000000"/>
-              </a:solidFill>
-              <a:effectLst/>
-              <a:uFillTx/>
-              <a:latin typeface="Arial"/>
-            </a:endParaRPr>
           </a:p>
           <a:p>
             <a:pPr marL="1371600" lvl="2" indent="-304920" algn="l">
@@ -12362,14 +11091,6 @@
               </a:rPr>
               <a:t>Третий уровень структуры</a:t>
             </a:r>
-            <a:endParaRPr lang="ru-RU" sz="1400" b="0" u="none" strike="noStrike">
-              <a:solidFill>
-                <a:srgbClr val="000000"/>
-              </a:solidFill>
-              <a:effectLst/>
-              <a:uFillTx/>
-              <a:latin typeface="Arial"/>
-            </a:endParaRPr>
           </a:p>
           <a:p>
             <a:pPr marL="1828800" lvl="3" indent="-304920" algn="l">
@@ -12394,14 +11115,6 @@
               </a:rPr>
               <a:t>Четвёртый уровень структуры</a:t>
             </a:r>
-            <a:endParaRPr lang="ru-RU" sz="1400" b="0" u="none" strike="noStrike">
-              <a:solidFill>
-                <a:srgbClr val="000000"/>
-              </a:solidFill>
-              <a:effectLst/>
-              <a:uFillTx/>
-              <a:latin typeface="Arial"/>
-            </a:endParaRPr>
           </a:p>
           <a:p>
             <a:pPr marL="2286000" lvl="4" indent="-304920" algn="l">
@@ -12426,14 +11139,6 @@
               </a:rPr>
               <a:t>Пятый уровень структуры</a:t>
             </a:r>
-            <a:endParaRPr lang="ru-RU" sz="1400" b="0" u="none" strike="noStrike">
-              <a:solidFill>
-                <a:srgbClr val="000000"/>
-              </a:solidFill>
-              <a:effectLst/>
-              <a:uFillTx/>
-              <a:latin typeface="Arial"/>
-            </a:endParaRPr>
           </a:p>
           <a:p>
             <a:pPr marL="2743200" lvl="5" indent="-304920" algn="l">
@@ -12458,14 +11163,6 @@
               </a:rPr>
               <a:t>Шестой уровень структуры</a:t>
             </a:r>
-            <a:endParaRPr lang="ru-RU" sz="1400" b="0" u="none" strike="noStrike">
-              <a:solidFill>
-                <a:srgbClr val="000000"/>
-              </a:solidFill>
-              <a:effectLst/>
-              <a:uFillTx/>
-              <a:latin typeface="Arial"/>
-            </a:endParaRPr>
           </a:p>
           <a:p>
             <a:pPr marL="3200400" lvl="6" indent="-304920" algn="l">
@@ -12490,14 +11187,6 @@
               </a:rPr>
               <a:t>Седьмой уровень структуры</a:t>
             </a:r>
-            <a:endParaRPr lang="ru-RU" sz="1400" b="0" u="none" strike="noStrike">
-              <a:solidFill>
-                <a:srgbClr val="000000"/>
-              </a:solidFill>
-              <a:effectLst/>
-              <a:uFillTx/>
-              <a:latin typeface="Arial"/>
-            </a:endParaRPr>
           </a:p>
         </p:txBody>
       </p:sp>
@@ -12568,7 +11257,7 @@
                 <a:latin typeface="Arial"/>
                 <a:ea typeface="Arial"/>
               </a:rPr>
-              <a:t>&lt;номер&gt;</a:t>
+              <a:t>‹#›</a:t>
             </a:fld>
             <a:endParaRPr lang="ru-RU" sz="1000" b="0" u="none" strike="noStrike">
               <a:solidFill>
@@ -12590,13 +11279,14 @@
 </file>
 
 <file path=ppt/slideLayouts/slideLayout7.xml><?xml version="1.0" encoding="utf-8"?>
-<p:sldLayout xmlns:a="http://schemas.openxmlformats.org/drawingml/2006/main" xmlns:p="http://schemas.openxmlformats.org/presentationml/2006/main" xmlns:r="http://schemas.openxmlformats.org/officeDocument/2006/relationships" xmlns:p14="http://schemas.microsoft.com/office/powerpoint/2010/main" xmlns:p15="http://schemas.microsoft.com/office/powerpoint/2012/main" xmlns:mc="http://schemas.openxmlformats.org/markup-compatibility/2006" type="titleOnly" preserve="1">
+<p:sldLayout xmlns:a="http://schemas.openxmlformats.org/drawingml/2006/main" xmlns:r="http://schemas.openxmlformats.org/officeDocument/2006/relationships" xmlns:p="http://schemas.openxmlformats.org/presentationml/2006/main" type="titleOnly" preserve="1">
   <p:cSld name="TITLE_ONLY">
     <p:bg>
       <p:bgPr>
         <a:solidFill>
           <a:schemeClr val="lt1"/>
         </a:solidFill>
+        <a:effectLst/>
       </p:bgPr>
     </p:bg>
     <p:spTree>
@@ -12668,14 +11358,6 @@
               </a:rPr>
               <a:t>Для правки текста заглавия щёлкните мышью</a:t>
             </a:r>
-            <a:endParaRPr lang="ru-RU" sz="2800" b="0" u="none" strike="noStrike">
-              <a:solidFill>
-                <a:srgbClr val="000000"/>
-              </a:solidFill>
-              <a:effectLst/>
-              <a:uFillTx/>
-              <a:latin typeface="Arial"/>
-            </a:endParaRPr>
           </a:p>
         </p:txBody>
       </p:sp>
@@ -12746,7 +11428,7 @@
                 <a:latin typeface="Arial"/>
                 <a:ea typeface="Arial"/>
               </a:rPr>
-              <a:t>&lt;номер&gt;</a:t>
+              <a:t>‹#›</a:t>
             </a:fld>
             <a:endParaRPr lang="ru-RU" sz="1000" b="0" u="none" strike="noStrike">
               <a:solidFill>
@@ -12768,13 +11450,14 @@
 </file>
 
 <file path=ppt/slideLayouts/slideLayout8.xml><?xml version="1.0" encoding="utf-8"?>
-<p:sldLayout xmlns:a="http://schemas.openxmlformats.org/drawingml/2006/main" xmlns:p="http://schemas.openxmlformats.org/presentationml/2006/main" xmlns:r="http://schemas.openxmlformats.org/officeDocument/2006/relationships" xmlns:p14="http://schemas.microsoft.com/office/powerpoint/2010/main" xmlns:p15="http://schemas.microsoft.com/office/powerpoint/2012/main" xmlns:mc="http://schemas.openxmlformats.org/markup-compatibility/2006" type="blank" preserve="1">
+<p:sldLayout xmlns:a="http://schemas.openxmlformats.org/drawingml/2006/main" xmlns:r="http://schemas.openxmlformats.org/officeDocument/2006/relationships" xmlns:p="http://schemas.openxmlformats.org/presentationml/2006/main" type="blank" preserve="1">
   <p:cSld name="ONE_COLUMN_TEXT">
     <p:bg>
       <p:bgPr>
         <a:solidFill>
           <a:schemeClr val="lt1"/>
         </a:solidFill>
+        <a:effectLst/>
       </p:bgPr>
     </p:bg>
     <p:spTree>
@@ -12846,14 +11529,6 @@
               </a:rPr>
               <a:t>Для правки текста заглавия щёлкните мышью</a:t>
             </a:r>
-            <a:endParaRPr lang="ru-RU" sz="2400" b="0" u="none" strike="noStrike">
-              <a:solidFill>
-                <a:srgbClr val="000000"/>
-              </a:solidFill>
-              <a:effectLst/>
-              <a:uFillTx/>
-              <a:latin typeface="Arial"/>
-            </a:endParaRPr>
           </a:p>
         </p:txBody>
       </p:sp>
@@ -13042,14 +11717,6 @@
               </a:rPr>
               <a:t>Для правки структуры щёлкните мышью</a:t>
             </a:r>
-            <a:endParaRPr lang="ru-RU" sz="1200" b="0" u="none" strike="noStrike">
-              <a:solidFill>
-                <a:srgbClr val="000000"/>
-              </a:solidFill>
-              <a:effectLst/>
-              <a:uFillTx/>
-              <a:latin typeface="Arial"/>
-            </a:endParaRPr>
           </a:p>
           <a:p>
             <a:pPr marL="914400" lvl="1" indent="-304920" algn="l">
@@ -13074,14 +11741,6 @@
               </a:rPr>
               <a:t>Второй уровень структуры</a:t>
             </a:r>
-            <a:endParaRPr lang="ru-RU" sz="1200" b="0" u="none" strike="noStrike">
-              <a:solidFill>
-                <a:srgbClr val="000000"/>
-              </a:solidFill>
-              <a:effectLst/>
-              <a:uFillTx/>
-              <a:latin typeface="Arial"/>
-            </a:endParaRPr>
           </a:p>
           <a:p>
             <a:pPr marL="1371600" lvl="2" indent="-304920" algn="l">
@@ -13106,14 +11765,6 @@
               </a:rPr>
               <a:t>Третий уровень структуры</a:t>
             </a:r>
-            <a:endParaRPr lang="ru-RU" sz="1200" b="0" u="none" strike="noStrike">
-              <a:solidFill>
-                <a:srgbClr val="000000"/>
-              </a:solidFill>
-              <a:effectLst/>
-              <a:uFillTx/>
-              <a:latin typeface="Arial"/>
-            </a:endParaRPr>
           </a:p>
           <a:p>
             <a:pPr marL="1828800" lvl="3" indent="-304920" algn="l">
@@ -13138,14 +11789,6 @@
               </a:rPr>
               <a:t>Четвёртый уровень структуры</a:t>
             </a:r>
-            <a:endParaRPr lang="ru-RU" sz="1200" b="0" u="none" strike="noStrike">
-              <a:solidFill>
-                <a:srgbClr val="000000"/>
-              </a:solidFill>
-              <a:effectLst/>
-              <a:uFillTx/>
-              <a:latin typeface="Arial"/>
-            </a:endParaRPr>
           </a:p>
           <a:p>
             <a:pPr marL="2286000" lvl="4" indent="-304920" algn="l">
@@ -13170,14 +11813,6 @@
               </a:rPr>
               <a:t>Пятый уровень структуры</a:t>
             </a:r>
-            <a:endParaRPr lang="ru-RU" sz="1200" b="0" u="none" strike="noStrike">
-              <a:solidFill>
-                <a:srgbClr val="000000"/>
-              </a:solidFill>
-              <a:effectLst/>
-              <a:uFillTx/>
-              <a:latin typeface="Arial"/>
-            </a:endParaRPr>
           </a:p>
           <a:p>
             <a:pPr marL="2743200" lvl="5" indent="-304920" algn="l">
@@ -13202,14 +11837,6 @@
               </a:rPr>
               <a:t>Шестой уровень структуры</a:t>
             </a:r>
-            <a:endParaRPr lang="ru-RU" sz="1200" b="0" u="none" strike="noStrike">
-              <a:solidFill>
-                <a:srgbClr val="000000"/>
-              </a:solidFill>
-              <a:effectLst/>
-              <a:uFillTx/>
-              <a:latin typeface="Arial"/>
-            </a:endParaRPr>
           </a:p>
           <a:p>
             <a:pPr marL="3200400" lvl="6" indent="-304920" algn="l">
@@ -13234,14 +11861,6 @@
               </a:rPr>
               <a:t>Седьмой уровень структуры</a:t>
             </a:r>
-            <a:endParaRPr lang="ru-RU" sz="1200" b="0" u="none" strike="noStrike">
-              <a:solidFill>
-                <a:srgbClr val="000000"/>
-              </a:solidFill>
-              <a:effectLst/>
-              <a:uFillTx/>
-              <a:latin typeface="Arial"/>
-            </a:endParaRPr>
           </a:p>
         </p:txBody>
       </p:sp>
@@ -13312,7 +11931,7 @@
                 <a:latin typeface="Arial"/>
                 <a:ea typeface="Arial"/>
               </a:rPr>
-              <a:t>&lt;номер&gt;</a:t>
+              <a:t>‹#›</a:t>
             </a:fld>
             <a:endParaRPr lang="ru-RU" sz="1000" b="0" u="none" strike="noStrike">
               <a:solidFill>
@@ -13334,13 +11953,14 @@
 </file>
 
 <file path=ppt/slideLayouts/slideLayout9.xml><?xml version="1.0" encoding="utf-8"?>
-<p:sldLayout xmlns:a="http://schemas.openxmlformats.org/drawingml/2006/main" xmlns:p="http://schemas.openxmlformats.org/presentationml/2006/main" xmlns:r="http://schemas.openxmlformats.org/officeDocument/2006/relationships" xmlns:p14="http://schemas.microsoft.com/office/powerpoint/2010/main" xmlns:p15="http://schemas.microsoft.com/office/powerpoint/2012/main" xmlns:mc="http://schemas.openxmlformats.org/markup-compatibility/2006" type="blank" preserve="1">
+<p:sldLayout xmlns:a="http://schemas.openxmlformats.org/drawingml/2006/main" xmlns:r="http://schemas.openxmlformats.org/officeDocument/2006/relationships" xmlns:p="http://schemas.openxmlformats.org/presentationml/2006/main" type="blank" preserve="1">
   <p:cSld name="MAIN_POINT">
     <p:bg>
       <p:bgPr>
         <a:solidFill>
           <a:schemeClr val="lt1"/>
         </a:solidFill>
+        <a:effectLst/>
       </p:bgPr>
     </p:bg>
     <p:spTree>
@@ -13412,14 +12032,6 @@
               </a:rPr>
               <a:t>Для правки текста заглавия щёлкните мышью</a:t>
             </a:r>
-            <a:endParaRPr lang="ru-RU" sz="4800" b="0" u="none" strike="noStrike">
-              <a:solidFill>
-                <a:srgbClr val="000000"/>
-              </a:solidFill>
-              <a:effectLst/>
-              <a:uFillTx/>
-              <a:latin typeface="Arial"/>
-            </a:endParaRPr>
           </a:p>
         </p:txBody>
       </p:sp>
@@ -13490,7 +12102,7 @@
                 <a:latin typeface="Arial"/>
                 <a:ea typeface="Arial"/>
               </a:rPr>
-              <a:t>&lt;номер&gt;</a:t>
+              <a:t>‹#›</a:t>
             </a:fld>
             <a:endParaRPr lang="ru-RU" sz="1000" b="0" u="none" strike="noStrike">
               <a:solidFill>
@@ -13512,8 +12124,13 @@
 </file>
 
 <file path=ppt/slideMasters/slideMaster1.xml><?xml version="1.0" encoding="utf-8"?>
-<p:sldMaster xmlns:a="http://schemas.openxmlformats.org/drawingml/2006/main" xmlns:p="http://schemas.openxmlformats.org/presentationml/2006/main" xmlns:r="http://schemas.openxmlformats.org/officeDocument/2006/relationships" xmlns:p14="http://schemas.microsoft.com/office/powerpoint/2010/main" xmlns:p15="http://schemas.microsoft.com/office/powerpoint/2012/main" xmlns:mc="http://schemas.openxmlformats.org/markup-compatibility/2006">
+<p:sldMaster xmlns:a="http://schemas.openxmlformats.org/drawingml/2006/main" xmlns:r="http://schemas.openxmlformats.org/officeDocument/2006/relationships" xmlns:p="http://schemas.openxmlformats.org/presentationml/2006/main">
   <p:cSld>
+    <p:bg>
+      <p:bgRef idx="1001">
+        <a:schemeClr val="bg1"/>
+      </p:bgRef>
+    </p:bg>
     <p:spTree>
       <p:nvGrpSpPr>
         <p:cNvPr id="1" name=""/>
@@ -13532,24 +12149,309 @@
   </p:cSld>
   <p:clrMap bg1="lt1" tx1="dk1" bg2="dk2" tx2="lt2" accent1="accent1" accent2="accent2" accent3="accent3" accent4="accent4" accent5="accent5" accent6="accent6" hlink="hlink" folHlink="folHlink"/>
   <p:sldLayoutIdLst>
-    <p:sldLayoutId id="2147483649" r:id="rId2"/>
-    <p:sldLayoutId id="2147483650" r:id="rId3"/>
-    <p:sldLayoutId id="2147483651" r:id="rId4"/>
-    <p:sldLayoutId id="2147483652" r:id="rId5"/>
-    <p:sldLayoutId id="2147483653" r:id="rId6"/>
-    <p:sldLayoutId id="2147483654" r:id="rId7"/>
-    <p:sldLayoutId id="2147483655" r:id="rId8"/>
-    <p:sldLayoutId id="2147483656" r:id="rId9"/>
-    <p:sldLayoutId id="2147483657" r:id="rId10"/>
-    <p:sldLayoutId id="2147483658" r:id="rId11"/>
-    <p:sldLayoutId id="2147483659" r:id="rId12"/>
+    <p:sldLayoutId id="2147483649" r:id="rId1"/>
+    <p:sldLayoutId id="2147483650" r:id="rId2"/>
+    <p:sldLayoutId id="2147483651" r:id="rId3"/>
+    <p:sldLayoutId id="2147483652" r:id="rId4"/>
+    <p:sldLayoutId id="2147483653" r:id="rId5"/>
+    <p:sldLayoutId id="2147483654" r:id="rId6"/>
+    <p:sldLayoutId id="2147483655" r:id="rId7"/>
+    <p:sldLayoutId id="2147483656" r:id="rId8"/>
+    <p:sldLayoutId id="2147483657" r:id="rId9"/>
+    <p:sldLayoutId id="2147483658" r:id="rId10"/>
+    <p:sldLayoutId id="2147483659" r:id="rId11"/>
   </p:sldLayoutIdLst>
+  <p:txStyles>
+    <p:titleStyle>
+      <a:lvl1pPr algn="l" defTabSz="914400" rtl="0" eaLnBrk="1" latinLnBrk="0" hangingPunct="1">
+        <a:lnSpc>
+          <a:spcPct val="90000"/>
+        </a:lnSpc>
+        <a:spcBef>
+          <a:spcPct val="0"/>
+        </a:spcBef>
+        <a:buNone/>
+        <a:defRPr sz="4400" kern="1200">
+          <a:solidFill>
+            <a:schemeClr val="tx1"/>
+          </a:solidFill>
+          <a:latin typeface="+mj-lt"/>
+          <a:ea typeface="+mj-ea"/>
+          <a:cs typeface="+mj-cs"/>
+        </a:defRPr>
+      </a:lvl1pPr>
+    </p:titleStyle>
+    <p:bodyStyle>
+      <a:lvl1pPr marL="228600" indent="-228600" algn="l" defTabSz="914400" rtl="0" eaLnBrk="1" latinLnBrk="0" hangingPunct="1">
+        <a:lnSpc>
+          <a:spcPct val="90000"/>
+        </a:lnSpc>
+        <a:spcBef>
+          <a:spcPts val="1000"/>
+        </a:spcBef>
+        <a:buFont typeface="Arial" panose="020B0604020202020204" pitchFamily="34" charset="0"/>
+        <a:buChar char="•"/>
+        <a:defRPr sz="2800" kern="1200">
+          <a:solidFill>
+            <a:schemeClr val="tx1"/>
+          </a:solidFill>
+          <a:latin typeface="+mn-lt"/>
+          <a:ea typeface="+mn-ea"/>
+          <a:cs typeface="+mn-cs"/>
+        </a:defRPr>
+      </a:lvl1pPr>
+      <a:lvl2pPr marL="685800" indent="-228600" algn="l" defTabSz="914400" rtl="0" eaLnBrk="1" latinLnBrk="0" hangingPunct="1">
+        <a:lnSpc>
+          <a:spcPct val="90000"/>
+        </a:lnSpc>
+        <a:spcBef>
+          <a:spcPts val="500"/>
+        </a:spcBef>
+        <a:buFont typeface="Arial" panose="020B0604020202020204" pitchFamily="34" charset="0"/>
+        <a:buChar char="•"/>
+        <a:defRPr sz="2400" kern="1200">
+          <a:solidFill>
+            <a:schemeClr val="tx1"/>
+          </a:solidFill>
+          <a:latin typeface="+mn-lt"/>
+          <a:ea typeface="+mn-ea"/>
+          <a:cs typeface="+mn-cs"/>
+        </a:defRPr>
+      </a:lvl2pPr>
+      <a:lvl3pPr marL="1143000" indent="-228600" algn="l" defTabSz="914400" rtl="0" eaLnBrk="1" latinLnBrk="0" hangingPunct="1">
+        <a:lnSpc>
+          <a:spcPct val="90000"/>
+        </a:lnSpc>
+        <a:spcBef>
+          <a:spcPts val="500"/>
+        </a:spcBef>
+        <a:buFont typeface="Arial" panose="020B0604020202020204" pitchFamily="34" charset="0"/>
+        <a:buChar char="•"/>
+        <a:defRPr sz="2000" kern="1200">
+          <a:solidFill>
+            <a:schemeClr val="tx1"/>
+          </a:solidFill>
+          <a:latin typeface="+mn-lt"/>
+          <a:ea typeface="+mn-ea"/>
+          <a:cs typeface="+mn-cs"/>
+        </a:defRPr>
+      </a:lvl3pPr>
+      <a:lvl4pPr marL="1600200" indent="-228600" algn="l" defTabSz="914400" rtl="0" eaLnBrk="1" latinLnBrk="0" hangingPunct="1">
+        <a:lnSpc>
+          <a:spcPct val="90000"/>
+        </a:lnSpc>
+        <a:spcBef>
+          <a:spcPts val="500"/>
+        </a:spcBef>
+        <a:buFont typeface="Arial" panose="020B0604020202020204" pitchFamily="34" charset="0"/>
+        <a:buChar char="•"/>
+        <a:defRPr sz="1800" kern="1200">
+          <a:solidFill>
+            <a:schemeClr val="tx1"/>
+          </a:solidFill>
+          <a:latin typeface="+mn-lt"/>
+          <a:ea typeface="+mn-ea"/>
+          <a:cs typeface="+mn-cs"/>
+        </a:defRPr>
+      </a:lvl4pPr>
+      <a:lvl5pPr marL="2057400" indent="-228600" algn="l" defTabSz="914400" rtl="0" eaLnBrk="1" latinLnBrk="0" hangingPunct="1">
+        <a:lnSpc>
+          <a:spcPct val="90000"/>
+        </a:lnSpc>
+        <a:spcBef>
+          <a:spcPts val="500"/>
+        </a:spcBef>
+        <a:buFont typeface="Arial" panose="020B0604020202020204" pitchFamily="34" charset="0"/>
+        <a:buChar char="•"/>
+        <a:defRPr sz="1800" kern="1200">
+          <a:solidFill>
+            <a:schemeClr val="tx1"/>
+          </a:solidFill>
+          <a:latin typeface="+mn-lt"/>
+          <a:ea typeface="+mn-ea"/>
+          <a:cs typeface="+mn-cs"/>
+        </a:defRPr>
+      </a:lvl5pPr>
+      <a:lvl6pPr marL="2514600" indent="-228600" algn="l" defTabSz="914400" rtl="0" eaLnBrk="1" latinLnBrk="0" hangingPunct="1">
+        <a:lnSpc>
+          <a:spcPct val="90000"/>
+        </a:lnSpc>
+        <a:spcBef>
+          <a:spcPts val="500"/>
+        </a:spcBef>
+        <a:buFont typeface="Arial" panose="020B0604020202020204" pitchFamily="34" charset="0"/>
+        <a:buChar char="•"/>
+        <a:defRPr sz="1800" kern="1200">
+          <a:solidFill>
+            <a:schemeClr val="tx1"/>
+          </a:solidFill>
+          <a:latin typeface="+mn-lt"/>
+          <a:ea typeface="+mn-ea"/>
+          <a:cs typeface="+mn-cs"/>
+        </a:defRPr>
+      </a:lvl6pPr>
+      <a:lvl7pPr marL="2971800" indent="-228600" algn="l" defTabSz="914400" rtl="0" eaLnBrk="1" latinLnBrk="0" hangingPunct="1">
+        <a:lnSpc>
+          <a:spcPct val="90000"/>
+        </a:lnSpc>
+        <a:spcBef>
+          <a:spcPts val="500"/>
+        </a:spcBef>
+        <a:buFont typeface="Arial" panose="020B0604020202020204" pitchFamily="34" charset="0"/>
+        <a:buChar char="•"/>
+        <a:defRPr sz="1800" kern="1200">
+          <a:solidFill>
+            <a:schemeClr val="tx1"/>
+          </a:solidFill>
+          <a:latin typeface="+mn-lt"/>
+          <a:ea typeface="+mn-ea"/>
+          <a:cs typeface="+mn-cs"/>
+        </a:defRPr>
+      </a:lvl7pPr>
+      <a:lvl8pPr marL="3429000" indent="-228600" algn="l" defTabSz="914400" rtl="0" eaLnBrk="1" latinLnBrk="0" hangingPunct="1">
+        <a:lnSpc>
+          <a:spcPct val="90000"/>
+        </a:lnSpc>
+        <a:spcBef>
+          <a:spcPts val="500"/>
+        </a:spcBef>
+        <a:buFont typeface="Arial" panose="020B0604020202020204" pitchFamily="34" charset="0"/>
+        <a:buChar char="•"/>
+        <a:defRPr sz="1800" kern="1200">
+          <a:solidFill>
+            <a:schemeClr val="tx1"/>
+          </a:solidFill>
+          <a:latin typeface="+mn-lt"/>
+          <a:ea typeface="+mn-ea"/>
+          <a:cs typeface="+mn-cs"/>
+        </a:defRPr>
+      </a:lvl8pPr>
+      <a:lvl9pPr marL="3886200" indent="-228600" algn="l" defTabSz="914400" rtl="0" eaLnBrk="1" latinLnBrk="0" hangingPunct="1">
+        <a:lnSpc>
+          <a:spcPct val="90000"/>
+        </a:lnSpc>
+        <a:spcBef>
+          <a:spcPts val="500"/>
+        </a:spcBef>
+        <a:buFont typeface="Arial" panose="020B0604020202020204" pitchFamily="34" charset="0"/>
+        <a:buChar char="•"/>
+        <a:defRPr sz="1800" kern="1200">
+          <a:solidFill>
+            <a:schemeClr val="tx1"/>
+          </a:solidFill>
+          <a:latin typeface="+mn-lt"/>
+          <a:ea typeface="+mn-ea"/>
+          <a:cs typeface="+mn-cs"/>
+        </a:defRPr>
+      </a:lvl9pPr>
+    </p:bodyStyle>
+    <p:otherStyle>
+      <a:defPPr>
+        <a:defRPr lang="ru-RU"/>
+      </a:defPPr>
+      <a:lvl1pPr marL="0" algn="l" defTabSz="914400" rtl="0" eaLnBrk="1" latinLnBrk="0" hangingPunct="1">
+        <a:defRPr sz="1800" kern="1200">
+          <a:solidFill>
+            <a:schemeClr val="tx1"/>
+          </a:solidFill>
+          <a:latin typeface="+mn-lt"/>
+          <a:ea typeface="+mn-ea"/>
+          <a:cs typeface="+mn-cs"/>
+        </a:defRPr>
+      </a:lvl1pPr>
+      <a:lvl2pPr marL="457200" algn="l" defTabSz="914400" rtl="0" eaLnBrk="1" latinLnBrk="0" hangingPunct="1">
+        <a:defRPr sz="1800" kern="1200">
+          <a:solidFill>
+            <a:schemeClr val="tx1"/>
+          </a:solidFill>
+          <a:latin typeface="+mn-lt"/>
+          <a:ea typeface="+mn-ea"/>
+          <a:cs typeface="+mn-cs"/>
+        </a:defRPr>
+      </a:lvl2pPr>
+      <a:lvl3pPr marL="914400" algn="l" defTabSz="914400" rtl="0" eaLnBrk="1" latinLnBrk="0" hangingPunct="1">
+        <a:defRPr sz="1800" kern="1200">
+          <a:solidFill>
+            <a:schemeClr val="tx1"/>
+          </a:solidFill>
+          <a:latin typeface="+mn-lt"/>
+          <a:ea typeface="+mn-ea"/>
+          <a:cs typeface="+mn-cs"/>
+        </a:defRPr>
+      </a:lvl3pPr>
+      <a:lvl4pPr marL="1371600" algn="l" defTabSz="914400" rtl="0" eaLnBrk="1" latinLnBrk="0" hangingPunct="1">
+        <a:defRPr sz="1800" kern="1200">
+          <a:solidFill>
+            <a:schemeClr val="tx1"/>
+          </a:solidFill>
+          <a:latin typeface="+mn-lt"/>
+          <a:ea typeface="+mn-ea"/>
+          <a:cs typeface="+mn-cs"/>
+        </a:defRPr>
+      </a:lvl4pPr>
+      <a:lvl5pPr marL="1828800" algn="l" defTabSz="914400" rtl="0" eaLnBrk="1" latinLnBrk="0" hangingPunct="1">
+        <a:defRPr sz="1800" kern="1200">
+          <a:solidFill>
+            <a:schemeClr val="tx1"/>
+          </a:solidFill>
+          <a:latin typeface="+mn-lt"/>
+          <a:ea typeface="+mn-ea"/>
+          <a:cs typeface="+mn-cs"/>
+        </a:defRPr>
+      </a:lvl5pPr>
+      <a:lvl6pPr marL="2286000" algn="l" defTabSz="914400" rtl="0" eaLnBrk="1" latinLnBrk="0" hangingPunct="1">
+        <a:defRPr sz="1800" kern="1200">
+          <a:solidFill>
+            <a:schemeClr val="tx1"/>
+          </a:solidFill>
+          <a:latin typeface="+mn-lt"/>
+          <a:ea typeface="+mn-ea"/>
+          <a:cs typeface="+mn-cs"/>
+        </a:defRPr>
+      </a:lvl6pPr>
+      <a:lvl7pPr marL="2743200" algn="l" defTabSz="914400" rtl="0" eaLnBrk="1" latinLnBrk="0" hangingPunct="1">
+        <a:defRPr sz="1800" kern="1200">
+          <a:solidFill>
+            <a:schemeClr val="tx1"/>
+          </a:solidFill>
+          <a:latin typeface="+mn-lt"/>
+          <a:ea typeface="+mn-ea"/>
+          <a:cs typeface="+mn-cs"/>
+        </a:defRPr>
+      </a:lvl7pPr>
+      <a:lvl8pPr marL="3200400" algn="l" defTabSz="914400" rtl="0" eaLnBrk="1" latinLnBrk="0" hangingPunct="1">
+        <a:defRPr sz="1800" kern="1200">
+          <a:solidFill>
+            <a:schemeClr val="tx1"/>
+          </a:solidFill>
+          <a:latin typeface="+mn-lt"/>
+          <a:ea typeface="+mn-ea"/>
+          <a:cs typeface="+mn-cs"/>
+        </a:defRPr>
+      </a:lvl8pPr>
+      <a:lvl9pPr marL="3657600" algn="l" defTabSz="914400" rtl="0" eaLnBrk="1" latinLnBrk="0" hangingPunct="1">
+        <a:defRPr sz="1800" kern="1200">
+          <a:solidFill>
+            <a:schemeClr val="tx1"/>
+          </a:solidFill>
+          <a:latin typeface="+mn-lt"/>
+          <a:ea typeface="+mn-ea"/>
+          <a:cs typeface="+mn-cs"/>
+        </a:defRPr>
+      </a:lvl9pPr>
+    </p:otherStyle>
+  </p:txStyles>
 </p:sldMaster>
 </file>
 
-<file path=ppt/slideMasters/slideMaster12.xml><?xml version="1.0" encoding="utf-8"?>
-<p:sldMaster xmlns:a="http://schemas.openxmlformats.org/drawingml/2006/main" xmlns:p="http://schemas.openxmlformats.org/presentationml/2006/main" xmlns:r="http://schemas.openxmlformats.org/officeDocument/2006/relationships" xmlns:p14="http://schemas.microsoft.com/office/powerpoint/2010/main" xmlns:p15="http://schemas.microsoft.com/office/powerpoint/2012/main" xmlns:mc="http://schemas.openxmlformats.org/markup-compatibility/2006">
+<file path=ppt/slideMasters/slideMaster2.xml><?xml version="1.0" encoding="utf-8"?>
+<p:sldMaster xmlns:a="http://schemas.openxmlformats.org/drawingml/2006/main" xmlns:r="http://schemas.openxmlformats.org/officeDocument/2006/relationships" xmlns:p="http://schemas.openxmlformats.org/presentationml/2006/main">
   <p:cSld>
+    <p:bg>
+      <p:bgRef idx="1001">
+        <a:schemeClr val="bg1"/>
+      </p:bgRef>
+    </p:bg>
     <p:spTree>
       <p:nvGrpSpPr>
         <p:cNvPr id="1" name=""/>
@@ -13568,30 +12470,311 @@
   </p:cSld>
   <p:clrMap bg1="lt1" tx1="dk1" bg2="dk2" tx2="lt2" accent1="accent1" accent2="accent2" accent3="accent3" accent4="accent4" accent5="accent5" accent6="accent6" hlink="hlink" folHlink="folHlink"/>
   <p:sldLayoutIdLst>
-    <p:sldLayoutId id="2147483661" r:id="rId2"/>
-    <p:sldLayoutId id="2147483662" r:id="rId3"/>
-    <p:sldLayoutId id="2147483663" r:id="rId4"/>
-    <p:sldLayoutId id="2147483664" r:id="rId5"/>
-    <p:sldLayoutId id="2147483665" r:id="rId6"/>
-    <p:sldLayoutId id="2147483666" r:id="rId7"/>
-    <p:sldLayoutId id="2147483667" r:id="rId8"/>
-    <p:sldLayoutId id="2147483668" r:id="rId9"/>
-    <p:sldLayoutId id="2147483669" r:id="rId10"/>
-    <p:sldLayoutId id="2147483670" r:id="rId11"/>
-    <p:sldLayoutId id="2147483671" r:id="rId12"/>
+    <p:sldLayoutId id="2147483661" r:id="rId1"/>
+    <p:sldLayoutId id="2147483662" r:id="rId2"/>
+    <p:sldLayoutId id="2147483663" r:id="rId3"/>
+    <p:sldLayoutId id="2147483664" r:id="rId4"/>
+    <p:sldLayoutId id="2147483665" r:id="rId5"/>
+    <p:sldLayoutId id="2147483666" r:id="rId6"/>
+    <p:sldLayoutId id="2147483667" r:id="rId7"/>
+    <p:sldLayoutId id="2147483668" r:id="rId8"/>
+    <p:sldLayoutId id="2147483669" r:id="rId9"/>
+    <p:sldLayoutId id="2147483670" r:id="rId10"/>
+    <p:sldLayoutId id="2147483671" r:id="rId11"/>
   </p:sldLayoutIdLst>
+  <p:txStyles>
+    <p:titleStyle>
+      <a:lvl1pPr algn="l" defTabSz="914400" rtl="0" eaLnBrk="1" latinLnBrk="0" hangingPunct="1">
+        <a:lnSpc>
+          <a:spcPct val="90000"/>
+        </a:lnSpc>
+        <a:spcBef>
+          <a:spcPct val="0"/>
+        </a:spcBef>
+        <a:buNone/>
+        <a:defRPr sz="4400" kern="1200">
+          <a:solidFill>
+            <a:schemeClr val="tx1"/>
+          </a:solidFill>
+          <a:latin typeface="+mj-lt"/>
+          <a:ea typeface="+mj-ea"/>
+          <a:cs typeface="+mj-cs"/>
+        </a:defRPr>
+      </a:lvl1pPr>
+    </p:titleStyle>
+    <p:bodyStyle>
+      <a:lvl1pPr marL="228600" indent="-228600" algn="l" defTabSz="914400" rtl="0" eaLnBrk="1" latinLnBrk="0" hangingPunct="1">
+        <a:lnSpc>
+          <a:spcPct val="90000"/>
+        </a:lnSpc>
+        <a:spcBef>
+          <a:spcPts val="1000"/>
+        </a:spcBef>
+        <a:buFont typeface="Arial" panose="020B0604020202020204" pitchFamily="34" charset="0"/>
+        <a:buChar char="•"/>
+        <a:defRPr sz="2800" kern="1200">
+          <a:solidFill>
+            <a:schemeClr val="tx1"/>
+          </a:solidFill>
+          <a:latin typeface="+mn-lt"/>
+          <a:ea typeface="+mn-ea"/>
+          <a:cs typeface="+mn-cs"/>
+        </a:defRPr>
+      </a:lvl1pPr>
+      <a:lvl2pPr marL="685800" indent="-228600" algn="l" defTabSz="914400" rtl="0" eaLnBrk="1" latinLnBrk="0" hangingPunct="1">
+        <a:lnSpc>
+          <a:spcPct val="90000"/>
+        </a:lnSpc>
+        <a:spcBef>
+          <a:spcPts val="500"/>
+        </a:spcBef>
+        <a:buFont typeface="Arial" panose="020B0604020202020204" pitchFamily="34" charset="0"/>
+        <a:buChar char="•"/>
+        <a:defRPr sz="2400" kern="1200">
+          <a:solidFill>
+            <a:schemeClr val="tx1"/>
+          </a:solidFill>
+          <a:latin typeface="+mn-lt"/>
+          <a:ea typeface="+mn-ea"/>
+          <a:cs typeface="+mn-cs"/>
+        </a:defRPr>
+      </a:lvl2pPr>
+      <a:lvl3pPr marL="1143000" indent="-228600" algn="l" defTabSz="914400" rtl="0" eaLnBrk="1" latinLnBrk="0" hangingPunct="1">
+        <a:lnSpc>
+          <a:spcPct val="90000"/>
+        </a:lnSpc>
+        <a:spcBef>
+          <a:spcPts val="500"/>
+        </a:spcBef>
+        <a:buFont typeface="Arial" panose="020B0604020202020204" pitchFamily="34" charset="0"/>
+        <a:buChar char="•"/>
+        <a:defRPr sz="2000" kern="1200">
+          <a:solidFill>
+            <a:schemeClr val="tx1"/>
+          </a:solidFill>
+          <a:latin typeface="+mn-lt"/>
+          <a:ea typeface="+mn-ea"/>
+          <a:cs typeface="+mn-cs"/>
+        </a:defRPr>
+      </a:lvl3pPr>
+      <a:lvl4pPr marL="1600200" indent="-228600" algn="l" defTabSz="914400" rtl="0" eaLnBrk="1" latinLnBrk="0" hangingPunct="1">
+        <a:lnSpc>
+          <a:spcPct val="90000"/>
+        </a:lnSpc>
+        <a:spcBef>
+          <a:spcPts val="500"/>
+        </a:spcBef>
+        <a:buFont typeface="Arial" panose="020B0604020202020204" pitchFamily="34" charset="0"/>
+        <a:buChar char="•"/>
+        <a:defRPr sz="1800" kern="1200">
+          <a:solidFill>
+            <a:schemeClr val="tx1"/>
+          </a:solidFill>
+          <a:latin typeface="+mn-lt"/>
+          <a:ea typeface="+mn-ea"/>
+          <a:cs typeface="+mn-cs"/>
+        </a:defRPr>
+      </a:lvl4pPr>
+      <a:lvl5pPr marL="2057400" indent="-228600" algn="l" defTabSz="914400" rtl="0" eaLnBrk="1" latinLnBrk="0" hangingPunct="1">
+        <a:lnSpc>
+          <a:spcPct val="90000"/>
+        </a:lnSpc>
+        <a:spcBef>
+          <a:spcPts val="500"/>
+        </a:spcBef>
+        <a:buFont typeface="Arial" panose="020B0604020202020204" pitchFamily="34" charset="0"/>
+        <a:buChar char="•"/>
+        <a:defRPr sz="1800" kern="1200">
+          <a:solidFill>
+            <a:schemeClr val="tx1"/>
+          </a:solidFill>
+          <a:latin typeface="+mn-lt"/>
+          <a:ea typeface="+mn-ea"/>
+          <a:cs typeface="+mn-cs"/>
+        </a:defRPr>
+      </a:lvl5pPr>
+      <a:lvl6pPr marL="2514600" indent="-228600" algn="l" defTabSz="914400" rtl="0" eaLnBrk="1" latinLnBrk="0" hangingPunct="1">
+        <a:lnSpc>
+          <a:spcPct val="90000"/>
+        </a:lnSpc>
+        <a:spcBef>
+          <a:spcPts val="500"/>
+        </a:spcBef>
+        <a:buFont typeface="Arial" panose="020B0604020202020204" pitchFamily="34" charset="0"/>
+        <a:buChar char="•"/>
+        <a:defRPr sz="1800" kern="1200">
+          <a:solidFill>
+            <a:schemeClr val="tx1"/>
+          </a:solidFill>
+          <a:latin typeface="+mn-lt"/>
+          <a:ea typeface="+mn-ea"/>
+          <a:cs typeface="+mn-cs"/>
+        </a:defRPr>
+      </a:lvl6pPr>
+      <a:lvl7pPr marL="2971800" indent="-228600" algn="l" defTabSz="914400" rtl="0" eaLnBrk="1" latinLnBrk="0" hangingPunct="1">
+        <a:lnSpc>
+          <a:spcPct val="90000"/>
+        </a:lnSpc>
+        <a:spcBef>
+          <a:spcPts val="500"/>
+        </a:spcBef>
+        <a:buFont typeface="Arial" panose="020B0604020202020204" pitchFamily="34" charset="0"/>
+        <a:buChar char="•"/>
+        <a:defRPr sz="1800" kern="1200">
+          <a:solidFill>
+            <a:schemeClr val="tx1"/>
+          </a:solidFill>
+          <a:latin typeface="+mn-lt"/>
+          <a:ea typeface="+mn-ea"/>
+          <a:cs typeface="+mn-cs"/>
+        </a:defRPr>
+      </a:lvl7pPr>
+      <a:lvl8pPr marL="3429000" indent="-228600" algn="l" defTabSz="914400" rtl="0" eaLnBrk="1" latinLnBrk="0" hangingPunct="1">
+        <a:lnSpc>
+          <a:spcPct val="90000"/>
+        </a:lnSpc>
+        <a:spcBef>
+          <a:spcPts val="500"/>
+        </a:spcBef>
+        <a:buFont typeface="Arial" panose="020B0604020202020204" pitchFamily="34" charset="0"/>
+        <a:buChar char="•"/>
+        <a:defRPr sz="1800" kern="1200">
+          <a:solidFill>
+            <a:schemeClr val="tx1"/>
+          </a:solidFill>
+          <a:latin typeface="+mn-lt"/>
+          <a:ea typeface="+mn-ea"/>
+          <a:cs typeface="+mn-cs"/>
+        </a:defRPr>
+      </a:lvl8pPr>
+      <a:lvl9pPr marL="3886200" indent="-228600" algn="l" defTabSz="914400" rtl="0" eaLnBrk="1" latinLnBrk="0" hangingPunct="1">
+        <a:lnSpc>
+          <a:spcPct val="90000"/>
+        </a:lnSpc>
+        <a:spcBef>
+          <a:spcPts val="500"/>
+        </a:spcBef>
+        <a:buFont typeface="Arial" panose="020B0604020202020204" pitchFamily="34" charset="0"/>
+        <a:buChar char="•"/>
+        <a:defRPr sz="1800" kern="1200">
+          <a:solidFill>
+            <a:schemeClr val="tx1"/>
+          </a:solidFill>
+          <a:latin typeface="+mn-lt"/>
+          <a:ea typeface="+mn-ea"/>
+          <a:cs typeface="+mn-cs"/>
+        </a:defRPr>
+      </a:lvl9pPr>
+    </p:bodyStyle>
+    <p:otherStyle>
+      <a:defPPr>
+        <a:defRPr lang="ru-RU"/>
+      </a:defPPr>
+      <a:lvl1pPr marL="0" algn="l" defTabSz="914400" rtl="0" eaLnBrk="1" latinLnBrk="0" hangingPunct="1">
+        <a:defRPr sz="1800" kern="1200">
+          <a:solidFill>
+            <a:schemeClr val="tx1"/>
+          </a:solidFill>
+          <a:latin typeface="+mn-lt"/>
+          <a:ea typeface="+mn-ea"/>
+          <a:cs typeface="+mn-cs"/>
+        </a:defRPr>
+      </a:lvl1pPr>
+      <a:lvl2pPr marL="457200" algn="l" defTabSz="914400" rtl="0" eaLnBrk="1" latinLnBrk="0" hangingPunct="1">
+        <a:defRPr sz="1800" kern="1200">
+          <a:solidFill>
+            <a:schemeClr val="tx1"/>
+          </a:solidFill>
+          <a:latin typeface="+mn-lt"/>
+          <a:ea typeface="+mn-ea"/>
+          <a:cs typeface="+mn-cs"/>
+        </a:defRPr>
+      </a:lvl2pPr>
+      <a:lvl3pPr marL="914400" algn="l" defTabSz="914400" rtl="0" eaLnBrk="1" latinLnBrk="0" hangingPunct="1">
+        <a:defRPr sz="1800" kern="1200">
+          <a:solidFill>
+            <a:schemeClr val="tx1"/>
+          </a:solidFill>
+          <a:latin typeface="+mn-lt"/>
+          <a:ea typeface="+mn-ea"/>
+          <a:cs typeface="+mn-cs"/>
+        </a:defRPr>
+      </a:lvl3pPr>
+      <a:lvl4pPr marL="1371600" algn="l" defTabSz="914400" rtl="0" eaLnBrk="1" latinLnBrk="0" hangingPunct="1">
+        <a:defRPr sz="1800" kern="1200">
+          <a:solidFill>
+            <a:schemeClr val="tx1"/>
+          </a:solidFill>
+          <a:latin typeface="+mn-lt"/>
+          <a:ea typeface="+mn-ea"/>
+          <a:cs typeface="+mn-cs"/>
+        </a:defRPr>
+      </a:lvl4pPr>
+      <a:lvl5pPr marL="1828800" algn="l" defTabSz="914400" rtl="0" eaLnBrk="1" latinLnBrk="0" hangingPunct="1">
+        <a:defRPr sz="1800" kern="1200">
+          <a:solidFill>
+            <a:schemeClr val="tx1"/>
+          </a:solidFill>
+          <a:latin typeface="+mn-lt"/>
+          <a:ea typeface="+mn-ea"/>
+          <a:cs typeface="+mn-cs"/>
+        </a:defRPr>
+      </a:lvl5pPr>
+      <a:lvl6pPr marL="2286000" algn="l" defTabSz="914400" rtl="0" eaLnBrk="1" latinLnBrk="0" hangingPunct="1">
+        <a:defRPr sz="1800" kern="1200">
+          <a:solidFill>
+            <a:schemeClr val="tx1"/>
+          </a:solidFill>
+          <a:latin typeface="+mn-lt"/>
+          <a:ea typeface="+mn-ea"/>
+          <a:cs typeface="+mn-cs"/>
+        </a:defRPr>
+      </a:lvl6pPr>
+      <a:lvl7pPr marL="2743200" algn="l" defTabSz="914400" rtl="0" eaLnBrk="1" latinLnBrk="0" hangingPunct="1">
+        <a:defRPr sz="1800" kern="1200">
+          <a:solidFill>
+            <a:schemeClr val="tx1"/>
+          </a:solidFill>
+          <a:latin typeface="+mn-lt"/>
+          <a:ea typeface="+mn-ea"/>
+          <a:cs typeface="+mn-cs"/>
+        </a:defRPr>
+      </a:lvl7pPr>
+      <a:lvl8pPr marL="3200400" algn="l" defTabSz="914400" rtl="0" eaLnBrk="1" latinLnBrk="0" hangingPunct="1">
+        <a:defRPr sz="1800" kern="1200">
+          <a:solidFill>
+            <a:schemeClr val="tx1"/>
+          </a:solidFill>
+          <a:latin typeface="+mn-lt"/>
+          <a:ea typeface="+mn-ea"/>
+          <a:cs typeface="+mn-cs"/>
+        </a:defRPr>
+      </a:lvl8pPr>
+      <a:lvl9pPr marL="3657600" algn="l" defTabSz="914400" rtl="0" eaLnBrk="1" latinLnBrk="0" hangingPunct="1">
+        <a:defRPr sz="1800" kern="1200">
+          <a:solidFill>
+            <a:schemeClr val="tx1"/>
+          </a:solidFill>
+          <a:latin typeface="+mn-lt"/>
+          <a:ea typeface="+mn-ea"/>
+          <a:cs typeface="+mn-cs"/>
+        </a:defRPr>
+      </a:lvl9pPr>
+    </p:otherStyle>
+  </p:txStyles>
 </p:sldMaster>
 </file>
 
 <file path=ppt/slides/slide1.xml><?xml version="1.0" encoding="utf-8"?>
-<p:sld xmlns:a="http://schemas.openxmlformats.org/drawingml/2006/main" xmlns:p="http://schemas.openxmlformats.org/presentationml/2006/main" xmlns:r="http://schemas.openxmlformats.org/officeDocument/2006/relationships" xmlns:p14="http://schemas.microsoft.com/office/powerpoint/2010/main" xmlns:p15="http://schemas.microsoft.com/office/powerpoint/2012/main" xmlns:mc="http://schemas.openxmlformats.org/markup-compatibility/2006">
+<p:sld xmlns:a="http://schemas.openxmlformats.org/drawingml/2006/main" xmlns:r="http://schemas.openxmlformats.org/officeDocument/2006/relationships" xmlns:p="http://schemas.openxmlformats.org/presentationml/2006/main">
   <p:cSld>
     <p:bg>
       <p:bgPr>
         <a:blipFill rotWithShape="0">
-          <a:blip r:embed="rId1"/>
+          <a:blip r:embed="rId2"/>
           <a:stretch/>
         </a:blipFill>
+        <a:effectLst/>
       </p:bgPr>
     </p:bg>
     <p:spTree>
@@ -13628,15 +12811,22 @@
           </a:ln>
         </p:spPr>
         <p:style>
-          <a:lnRef idx="0"/>
-          <a:fillRef idx="0"/>
-          <a:effectRef idx="0"/>
+          <a:lnRef idx="0">
+            <a:scrgbClr r="0" g="0" b="0"/>
+          </a:lnRef>
+          <a:fillRef idx="0">
+            <a:scrgbClr r="0" g="0" b="0"/>
+          </a:fillRef>
+          <a:effectRef idx="0">
+            <a:scrgbClr r="0" g="0" b="0"/>
+          </a:effectRef>
           <a:fontRef idx="minor"/>
         </p:style>
         <p:txBody>
           <a:bodyPr lIns="68400" tIns="34200" rIns="68400" bIns="34200" anchor="t">
             <a:spAutoFit/>
           </a:bodyPr>
+          <a:lstStyle/>
           <a:p>
             <a:pPr>
               <a:lnSpc>
@@ -13689,15 +12879,22 @@
           </a:ln>
         </p:spPr>
         <p:style>
-          <a:lnRef idx="0"/>
-          <a:fillRef idx="0"/>
-          <a:effectRef idx="0"/>
+          <a:lnRef idx="0">
+            <a:scrgbClr r="0" g="0" b="0"/>
+          </a:lnRef>
+          <a:fillRef idx="0">
+            <a:scrgbClr r="0" g="0" b="0"/>
+          </a:fillRef>
+          <a:effectRef idx="0">
+            <a:scrgbClr r="0" g="0" b="0"/>
+          </a:effectRef>
           <a:fontRef idx="minor"/>
         </p:style>
         <p:txBody>
           <a:bodyPr lIns="68400" tIns="34200" rIns="68400" bIns="34200" anchor="t">
             <a:spAutoFit/>
           </a:bodyPr>
+          <a:lstStyle/>
           <a:p>
             <a:pPr>
               <a:lnSpc>
@@ -13750,15 +12947,22 @@
           </a:ln>
         </p:spPr>
         <p:style>
-          <a:lnRef idx="0"/>
-          <a:fillRef idx="0"/>
-          <a:effectRef idx="0"/>
+          <a:lnRef idx="0">
+            <a:scrgbClr r="0" g="0" b="0"/>
+          </a:lnRef>
+          <a:fillRef idx="0">
+            <a:scrgbClr r="0" g="0" b="0"/>
+          </a:fillRef>
+          <a:effectRef idx="0">
+            <a:scrgbClr r="0" g="0" b="0"/>
+          </a:effectRef>
           <a:fontRef idx="minor"/>
         </p:style>
         <p:txBody>
           <a:bodyPr lIns="68400" tIns="34200" rIns="68400" bIns="34200" anchor="t">
             <a:spAutoFit/>
           </a:bodyPr>
+          <a:lstStyle/>
           <a:p>
             <a:pPr>
               <a:lnSpc>
@@ -13811,15 +13015,22 @@
           </a:ln>
         </p:spPr>
         <p:style>
-          <a:lnRef idx="0"/>
-          <a:fillRef idx="0"/>
-          <a:effectRef idx="0"/>
+          <a:lnRef idx="0">
+            <a:scrgbClr r="0" g="0" b="0"/>
+          </a:lnRef>
+          <a:fillRef idx="0">
+            <a:scrgbClr r="0" g="0" b="0"/>
+          </a:fillRef>
+          <a:effectRef idx="0">
+            <a:scrgbClr r="0" g="0" b="0"/>
+          </a:effectRef>
           <a:fontRef idx="minor"/>
         </p:style>
         <p:txBody>
           <a:bodyPr lIns="68400" tIns="34200" rIns="68400" bIns="34200" anchor="t">
             <a:spAutoFit/>
           </a:bodyPr>
+          <a:lstStyle/>
           <a:p>
             <a:pPr>
               <a:lnSpc>
@@ -13932,15 +13143,22 @@
           </a:ln>
         </p:spPr>
         <p:style>
-          <a:lnRef idx="0"/>
-          <a:fillRef idx="0"/>
-          <a:effectRef idx="0"/>
+          <a:lnRef idx="0">
+            <a:scrgbClr r="0" g="0" b="0"/>
+          </a:lnRef>
+          <a:fillRef idx="0">
+            <a:scrgbClr r="0" g="0" b="0"/>
+          </a:fillRef>
+          <a:effectRef idx="0">
+            <a:scrgbClr r="0" g="0" b="0"/>
+          </a:effectRef>
           <a:fontRef idx="minor"/>
         </p:style>
         <p:txBody>
           <a:bodyPr lIns="68400" tIns="34200" rIns="68400" bIns="34200" anchor="t">
             <a:noAutofit/>
           </a:bodyPr>
+          <a:lstStyle/>
           <a:p>
             <a:pPr>
               <a:lnSpc>
@@ -14011,15 +13229,22 @@
           </a:ln>
         </p:spPr>
         <p:style>
-          <a:lnRef idx="0"/>
-          <a:fillRef idx="0"/>
-          <a:effectRef idx="0"/>
+          <a:lnRef idx="0">
+            <a:scrgbClr r="0" g="0" b="0"/>
+          </a:lnRef>
+          <a:fillRef idx="0">
+            <a:scrgbClr r="0" g="0" b="0"/>
+          </a:fillRef>
+          <a:effectRef idx="0">
+            <a:scrgbClr r="0" g="0" b="0"/>
+          </a:effectRef>
           <a:fontRef idx="minor"/>
         </p:style>
         <p:txBody>
           <a:bodyPr lIns="68400" tIns="34200" rIns="68400" bIns="34200" anchor="t">
             <a:noAutofit/>
           </a:bodyPr>
+          <a:lstStyle/>
           <a:p>
             <a:pPr>
               <a:lnSpc>
@@ -14072,15 +13297,22 @@
           </a:ln>
         </p:spPr>
         <p:style>
-          <a:lnRef idx="0"/>
-          <a:fillRef idx="0"/>
-          <a:effectRef idx="0"/>
+          <a:lnRef idx="0">
+            <a:scrgbClr r="0" g="0" b="0"/>
+          </a:lnRef>
+          <a:fillRef idx="0">
+            <a:scrgbClr r="0" g="0" b="0"/>
+          </a:fillRef>
+          <a:effectRef idx="0">
+            <a:scrgbClr r="0" g="0" b="0"/>
+          </a:effectRef>
           <a:fontRef idx="minor"/>
         </p:style>
         <p:txBody>
           <a:bodyPr lIns="68400" tIns="34200" rIns="68400" bIns="34200" anchor="t">
             <a:noAutofit/>
           </a:bodyPr>
+          <a:lstStyle/>
           <a:p>
             <a:pPr>
               <a:lnSpc>
@@ -14274,26 +13506,22 @@
       </p:sp>
     </p:spTree>
   </p:cSld>
-  <mc:AlternateContent>
-    <mc:Choice Requires="p14">
-      <p:transition spd="slow" p14:dur="2000"/>
-    </mc:Choice>
-    <mc:Fallback>
-      <p:transition spd="slow"/>
-    </mc:Fallback>
-  </mc:AlternateContent>
+  <p:clrMapOvr>
+    <a:masterClrMapping/>
+  </p:clrMapOvr>
 </p:sld>
 </file>
 
 <file path=ppt/slides/slide10.xml><?xml version="1.0" encoding="utf-8"?>
-<p:sld xmlns:a="http://schemas.openxmlformats.org/drawingml/2006/main" xmlns:p="http://schemas.openxmlformats.org/presentationml/2006/main" xmlns:r="http://schemas.openxmlformats.org/officeDocument/2006/relationships" xmlns:p14="http://schemas.microsoft.com/office/powerpoint/2010/main" xmlns:p15="http://schemas.microsoft.com/office/powerpoint/2012/main" xmlns:mc="http://schemas.openxmlformats.org/markup-compatibility/2006">
+<p:sld xmlns:a="http://schemas.openxmlformats.org/drawingml/2006/main" xmlns:r="http://schemas.openxmlformats.org/officeDocument/2006/relationships" xmlns:p="http://schemas.openxmlformats.org/presentationml/2006/main">
   <p:cSld>
     <p:bg>
       <p:bgPr>
         <a:blipFill rotWithShape="0">
-          <a:blip r:embed="rId1"/>
+          <a:blip r:embed="rId2"/>
           <a:stretch/>
         </a:blipFill>
+        <a:effectLst/>
       </p:bgPr>
     </p:bg>
     <p:spTree>
@@ -14330,15 +13558,22 @@
           </a:ln>
         </p:spPr>
         <p:style>
-          <a:lnRef idx="0"/>
-          <a:fillRef idx="0"/>
-          <a:effectRef idx="0"/>
+          <a:lnRef idx="0">
+            <a:scrgbClr r="0" g="0" b="0"/>
+          </a:lnRef>
+          <a:fillRef idx="0">
+            <a:scrgbClr r="0" g="0" b="0"/>
+          </a:fillRef>
+          <a:effectRef idx="0">
+            <a:scrgbClr r="0" g="0" b="0"/>
+          </a:effectRef>
           <a:fontRef idx="minor"/>
         </p:style>
         <p:txBody>
           <a:bodyPr lIns="68400" tIns="34200" rIns="68400" bIns="34200" anchor="t">
             <a:spAutoFit/>
           </a:bodyPr>
+          <a:lstStyle/>
           <a:p>
             <a:pPr>
               <a:lnSpc>
@@ -14373,87 +13608,345 @@
       </p:sp>
       <p:sp>
         <p:nvSpPr>
-          <p:cNvPr id="147" name="Google Shape;221;p34"/>
-          <p:cNvSpPr/>
+          <p:cNvPr id="4" name="TextBox 3">
+            <a:extLst>
+              <a:ext uri="{FF2B5EF4-FFF2-40B4-BE49-F238E27FC236}">
+                <a16:creationId xmlns:a16="http://schemas.microsoft.com/office/drawing/2014/main" id="{2F5F545D-ABCD-3E32-2E05-529BCB351209}"/>
+              </a:ext>
+            </a:extLst>
+          </p:cNvPr>
+          <p:cNvSpPr txBox="1"/>
           <p:nvPr/>
         </p:nvSpPr>
         <p:spPr>
           <a:xfrm>
-            <a:off x="360000" y="740160"/>
-            <a:ext cx="7851240" cy="345960"/>
+            <a:off x="360000" y="1261706"/>
+            <a:ext cx="7363313" cy="2862322"/>
           </a:xfrm>
           <a:prstGeom prst="rect">
             <a:avLst/>
           </a:prstGeom>
           <a:noFill/>
-          <a:ln w="0">
-            <a:noFill/>
-          </a:ln>
         </p:spPr>
-        <p:style>
-          <a:lnRef idx="0"/>
-          <a:fillRef idx="0"/>
-          <a:effectRef idx="0"/>
-          <a:fontRef idx="minor"/>
-        </p:style>
         <p:txBody>
-          <a:bodyPr lIns="68400" tIns="34200" rIns="68400" bIns="34200" anchor="t">
+          <a:bodyPr wrap="square">
             <a:spAutoFit/>
           </a:bodyPr>
-          <a:p>
-            <a:pPr>
-              <a:lnSpc>
-                <a:spcPct val="100000"/>
-              </a:lnSpc>
-              <a:tabLst>
-                <a:tab pos="0" algn="l"/>
-              </a:tabLst>
-            </a:pPr>
-            <a:r>
-              <a:rPr lang="ru" sz="1800" b="0" u="none" strike="noStrike">
-                <a:solidFill>
-                  <a:srgbClr val="D6EDFF"/>
-                </a:solidFill>
-                <a:effectLst/>
-                <a:uFillTx/>
-                <a:latin typeface="Arial"/>
-                <a:ea typeface="Arial"/>
-              </a:rPr>
-              <a:t>А нужно ли?</a:t>
-            </a:r>
-            <a:endParaRPr lang="ru-RU" sz="1800" b="0" u="none" strike="noStrike">
+          <a:lstStyle/>
+          <a:p>
+            <a:pPr algn="l"/>
+            <a:r>
+              <a:rPr lang="ru-RU" b="1" i="0" dirty="0">
+                <a:solidFill>
+                  <a:srgbClr val="EEF1FF"/>
+                </a:solidFill>
+                <a:effectLst/>
+                <a:latin typeface="Exo 2"/>
+              </a:rPr>
+              <a:t>Дмитрий Митрофанов</a:t>
+            </a:r>
+            <a:endParaRPr lang="ru-RU" b="0" i="0" dirty="0">
               <a:solidFill>
-                <a:srgbClr val="FFFFFF"/>
+                <a:srgbClr val="EEF1FF"/>
               </a:solidFill>
               <a:effectLst/>
-              <a:uFillTx/>
-              <a:latin typeface="Arial"/>
+              <a:latin typeface="Exo 2"/>
+            </a:endParaRPr>
+          </a:p>
+          <a:p>
+            <a:pPr algn="l">
+              <a:buFont typeface="Arial" panose="020B0604020202020204" pitchFamily="34" charset="0"/>
+              <a:buChar char="•"/>
+            </a:pPr>
+            <a:r>
+              <a:rPr lang="ru-RU" b="1" i="0" dirty="0">
+                <a:solidFill>
+                  <a:srgbClr val="EEF1FF"/>
+                </a:solidFill>
+                <a:effectLst/>
+                <a:latin typeface="Exo 2"/>
+              </a:rPr>
+              <a:t>Лидер проекта</a:t>
+            </a:r>
+            <a:endParaRPr lang="ru-RU" b="0" i="0" dirty="0">
+              <a:solidFill>
+                <a:srgbClr val="EEF1FF"/>
+              </a:solidFill>
+              <a:effectLst/>
+              <a:latin typeface="Exo 2"/>
+            </a:endParaRPr>
+          </a:p>
+          <a:p>
+            <a:pPr algn="l"/>
+            <a:r>
+              <a:rPr lang="ru-RU" b="1" i="0" dirty="0">
+                <a:solidFill>
+                  <a:srgbClr val="EEF1FF"/>
+                </a:solidFill>
+                <a:effectLst/>
+                <a:latin typeface="Exo 2"/>
+              </a:rPr>
+              <a:t>Климентий Воронин</a:t>
+            </a:r>
+            <a:endParaRPr lang="ru-RU" b="0" i="0" dirty="0">
+              <a:solidFill>
+                <a:srgbClr val="EEF1FF"/>
+              </a:solidFill>
+              <a:effectLst/>
+              <a:latin typeface="Exo 2"/>
+            </a:endParaRPr>
+          </a:p>
+          <a:p>
+            <a:pPr algn="l">
+              <a:buFont typeface="Arial" panose="020B0604020202020204" pitchFamily="34" charset="0"/>
+              <a:buChar char="•"/>
+            </a:pPr>
+            <a:r>
+              <a:rPr lang="ru-RU" b="1" i="0" dirty="0">
+                <a:solidFill>
+                  <a:srgbClr val="EEF1FF"/>
+                </a:solidFill>
+                <a:effectLst/>
+                <a:latin typeface="Exo 2"/>
+              </a:rPr>
+              <a:t>Разработчик</a:t>
+            </a:r>
+            <a:r>
+              <a:rPr lang="en-US" b="1" i="0" dirty="0">
+                <a:solidFill>
+                  <a:srgbClr val="EEF1FF"/>
+                </a:solidFill>
+                <a:effectLst/>
+                <a:latin typeface="Exo 2"/>
+              </a:rPr>
+              <a:t> ( </a:t>
+            </a:r>
+            <a:r>
+              <a:rPr lang="ru-RU" b="1" i="0" dirty="0">
+                <a:solidFill>
+                  <a:srgbClr val="EEF1FF"/>
+                </a:solidFill>
+                <a:effectLst/>
+                <a:latin typeface="Exo 2"/>
+              </a:rPr>
+              <a:t>ответственный за реализацию</a:t>
+            </a:r>
+            <a:r>
+              <a:rPr lang="en-US" b="1" i="0" dirty="0">
+                <a:solidFill>
+                  <a:srgbClr val="EEF1FF"/>
+                </a:solidFill>
+                <a:effectLst/>
+                <a:latin typeface="Exo 2"/>
+              </a:rPr>
+              <a:t> </a:t>
+            </a:r>
+            <a:r>
+              <a:rPr lang="en-US" b="1" dirty="0">
+                <a:solidFill>
+                  <a:srgbClr val="EEF1FF"/>
+                </a:solidFill>
+                <a:latin typeface="Exo 2"/>
+              </a:rPr>
+              <a:t>UI )</a:t>
+            </a:r>
+            <a:endParaRPr lang="ru-RU" b="0" i="0" dirty="0">
+              <a:solidFill>
+                <a:srgbClr val="EEF1FF"/>
+              </a:solidFill>
+              <a:effectLst/>
+              <a:latin typeface="Exo 2"/>
+            </a:endParaRPr>
+          </a:p>
+          <a:p>
+            <a:pPr algn="l"/>
+            <a:r>
+              <a:rPr lang="ru-RU" b="1" i="0" dirty="0">
+                <a:solidFill>
+                  <a:srgbClr val="EEF1FF"/>
+                </a:solidFill>
+                <a:effectLst/>
+                <a:latin typeface="Exo 2"/>
+              </a:rPr>
+              <a:t>Ульяна Грекова</a:t>
+            </a:r>
+            <a:endParaRPr lang="en-US" b="1" i="0" dirty="0">
+              <a:solidFill>
+                <a:srgbClr val="EEF1FF"/>
+              </a:solidFill>
+              <a:effectLst/>
+              <a:latin typeface="Exo 2"/>
+            </a:endParaRPr>
+          </a:p>
+          <a:p>
+            <a:pPr algn="l">
+              <a:buFont typeface="Arial" panose="020B0604020202020204" pitchFamily="34" charset="0"/>
+              <a:buChar char="•"/>
+            </a:pPr>
+            <a:r>
+              <a:rPr lang="ru-RU" b="1" i="0" dirty="0">
+                <a:solidFill>
+                  <a:srgbClr val="EEF1FF"/>
+                </a:solidFill>
+                <a:effectLst/>
+                <a:latin typeface="Exo 2"/>
+              </a:rPr>
+              <a:t>Ответственная за презентацию и дизайн</a:t>
+            </a:r>
+            <a:endParaRPr lang="ru-RU" b="0" i="0" dirty="0">
+              <a:solidFill>
+                <a:srgbClr val="EEF1FF"/>
+              </a:solidFill>
+              <a:effectLst/>
+              <a:latin typeface="Exo 2"/>
+            </a:endParaRPr>
+          </a:p>
+          <a:p>
+            <a:pPr algn="l"/>
+            <a:r>
+              <a:rPr lang="ru-RU" b="1" i="0" dirty="0">
+                <a:solidFill>
+                  <a:srgbClr val="EEF1FF"/>
+                </a:solidFill>
+                <a:effectLst/>
+                <a:latin typeface="Exo 2"/>
+              </a:rPr>
+              <a:t>Даниил </a:t>
+            </a:r>
+            <a:r>
+              <a:rPr lang="ru-RU" b="1" i="0" dirty="0" err="1">
+                <a:solidFill>
+                  <a:srgbClr val="EEF1FF"/>
+                </a:solidFill>
+                <a:effectLst/>
+                <a:latin typeface="Exo 2"/>
+              </a:rPr>
+              <a:t>Дороднев</a:t>
+            </a:r>
+            <a:endParaRPr lang="ru-RU" b="0" i="0" dirty="0">
+              <a:solidFill>
+                <a:srgbClr val="EEF1FF"/>
+              </a:solidFill>
+              <a:effectLst/>
+              <a:latin typeface="Exo 2"/>
+            </a:endParaRPr>
+          </a:p>
+          <a:p>
+            <a:pPr algn="l">
+              <a:buFont typeface="Arial" panose="020B0604020202020204" pitchFamily="34" charset="0"/>
+              <a:buChar char="•"/>
+            </a:pPr>
+            <a:r>
+              <a:rPr lang="ru-RU" b="1" i="0" dirty="0">
+                <a:solidFill>
+                  <a:srgbClr val="EEF1FF"/>
+                </a:solidFill>
+                <a:effectLst/>
+                <a:latin typeface="Exo 2"/>
+              </a:rPr>
+              <a:t>Разработчик</a:t>
+            </a:r>
+            <a:r>
+              <a:rPr lang="en-US" b="1" i="0" dirty="0">
+                <a:solidFill>
+                  <a:srgbClr val="EEF1FF"/>
+                </a:solidFill>
+                <a:effectLst/>
+                <a:latin typeface="Exo 2"/>
+              </a:rPr>
+              <a:t> ( </a:t>
+            </a:r>
+            <a:r>
+              <a:rPr lang="ru-RU" b="1" i="0" dirty="0">
+                <a:solidFill>
+                  <a:srgbClr val="EEF1FF"/>
+                </a:solidFill>
+                <a:effectLst/>
+                <a:latin typeface="Exo 2"/>
+              </a:rPr>
+              <a:t>ответственный за серверную часть )</a:t>
+            </a:r>
+            <a:endParaRPr lang="ru-RU" b="0" i="0" dirty="0">
+              <a:solidFill>
+                <a:srgbClr val="EEF1FF"/>
+              </a:solidFill>
+              <a:effectLst/>
+              <a:latin typeface="Exo 2"/>
+            </a:endParaRPr>
+          </a:p>
+          <a:p>
+            <a:pPr algn="l"/>
+            <a:r>
+              <a:rPr lang="ru-RU" b="1" i="0" dirty="0">
+                <a:solidFill>
+                  <a:srgbClr val="EEF1FF"/>
+                </a:solidFill>
+                <a:effectLst/>
+                <a:latin typeface="Exo 2"/>
+              </a:rPr>
+              <a:t>Александр </a:t>
+            </a:r>
+            <a:r>
+              <a:rPr lang="ru-RU" b="1" i="0" dirty="0" err="1">
+                <a:solidFill>
+                  <a:srgbClr val="EEF1FF"/>
+                </a:solidFill>
+                <a:effectLst/>
+                <a:latin typeface="Exo 2"/>
+              </a:rPr>
+              <a:t>Ташкаев</a:t>
+            </a:r>
+            <a:endParaRPr lang="ru-RU" b="0" i="0" dirty="0">
+              <a:solidFill>
+                <a:srgbClr val="EEF1FF"/>
+              </a:solidFill>
+              <a:effectLst/>
+              <a:latin typeface="Exo 2"/>
+            </a:endParaRPr>
+          </a:p>
+          <a:p>
+            <a:pPr algn="l">
+              <a:buFont typeface="Arial" panose="020B0604020202020204" pitchFamily="34" charset="0"/>
+              <a:buChar char="•"/>
+            </a:pPr>
+            <a:r>
+              <a:rPr lang="ru-RU" b="1" i="0" dirty="0">
+                <a:solidFill>
+                  <a:srgbClr val="EEF1FF"/>
+                </a:solidFill>
+                <a:effectLst/>
+                <a:latin typeface="Exo 2"/>
+              </a:rPr>
+              <a:t>Аналитик и технический писатель</a:t>
+            </a:r>
+            <a:endParaRPr lang="ru-RU" b="0" i="0" dirty="0">
+              <a:solidFill>
+                <a:srgbClr val="EEF1FF"/>
+              </a:solidFill>
+              <a:effectLst/>
+              <a:latin typeface="Exo 2"/>
             </a:endParaRPr>
           </a:p>
         </p:txBody>
       </p:sp>
     </p:spTree>
   </p:cSld>
-  <mc:AlternateContent>
-    <mc:Choice Requires="p14">
-      <p:transition spd="slow" p14:dur="2000"/>
-    </mc:Choice>
-    <mc:Fallback>
-      <p:transition spd="slow"/>
-    </mc:Fallback>
-  </mc:AlternateContent>
+  <p:clrMapOvr>
+    <a:masterClrMapping/>
+  </p:clrMapOvr>
 </p:sld>
 </file>
 
 <file path=ppt/slides/slide2.xml><?xml version="1.0" encoding="utf-8"?>
-<p:sld xmlns:a="http://schemas.openxmlformats.org/drawingml/2006/main" xmlns:p="http://schemas.openxmlformats.org/presentationml/2006/main" xmlns:r="http://schemas.openxmlformats.org/officeDocument/2006/relationships" xmlns:p14="http://schemas.microsoft.com/office/powerpoint/2010/main" xmlns:p15="http://schemas.microsoft.com/office/powerpoint/2012/main" xmlns:mc="http://schemas.openxmlformats.org/markup-compatibility/2006">
+<p:sld xmlns:a="http://schemas.openxmlformats.org/drawingml/2006/main" xmlns:r="http://schemas.openxmlformats.org/officeDocument/2006/relationships" xmlns:p="http://schemas.openxmlformats.org/presentationml/2006/main">
   <p:cSld>
     <p:bg>
       <p:bgPr>
         <a:blipFill rotWithShape="0">
-          <a:blip r:embed="rId1"/>
+          <a:blip r:embed="rId2"/>
           <a:stretch/>
         </a:blipFill>
+        <a:effectLst/>
       </p:bgPr>
     </p:bg>
     <p:spTree>
@@ -14490,15 +13983,22 @@
           </a:ln>
         </p:spPr>
         <p:style>
-          <a:lnRef idx="0"/>
-          <a:fillRef idx="0"/>
-          <a:effectRef idx="0"/>
+          <a:lnRef idx="0">
+            <a:scrgbClr r="0" g="0" b="0"/>
+          </a:lnRef>
+          <a:fillRef idx="0">
+            <a:scrgbClr r="0" g="0" b="0"/>
+          </a:fillRef>
+          <a:effectRef idx="0">
+            <a:scrgbClr r="0" g="0" b="0"/>
+          </a:effectRef>
           <a:fontRef idx="minor"/>
         </p:style>
         <p:txBody>
           <a:bodyPr lIns="68400" tIns="34200" rIns="68400" bIns="34200" anchor="t">
             <a:spAutoFit/>
           </a:bodyPr>
+          <a:lstStyle/>
           <a:p>
             <a:pPr>
               <a:lnSpc>
@@ -14551,15 +14051,22 @@
           </a:ln>
         </p:spPr>
         <p:style>
-          <a:lnRef idx="0"/>
-          <a:fillRef idx="0"/>
-          <a:effectRef idx="0"/>
+          <a:lnRef idx="0">
+            <a:scrgbClr r="0" g="0" b="0"/>
+          </a:lnRef>
+          <a:fillRef idx="0">
+            <a:scrgbClr r="0" g="0" b="0"/>
+          </a:fillRef>
+          <a:effectRef idx="0">
+            <a:scrgbClr r="0" g="0" b="0"/>
+          </a:effectRef>
           <a:fontRef idx="minor"/>
         </p:style>
         <p:txBody>
           <a:bodyPr lIns="68400" tIns="34200" rIns="68400" bIns="34200" anchor="t">
             <a:spAutoFit/>
           </a:bodyPr>
+          <a:lstStyle/>
           <a:p>
             <a:pPr>
               <a:lnSpc>
@@ -14570,7 +14077,7 @@
               </a:tabLst>
             </a:pPr>
             <a:r>
-              <a:rPr lang="ru" sz="1800" b="0" u="none" strike="noStrike">
+              <a:rPr lang="ru" sz="1800" b="0" u="none" strike="noStrike" dirty="0">
                 <a:solidFill>
                   <a:srgbClr val="D6EDFF"/>
                 </a:solidFill>
@@ -14581,7 +14088,7 @@
               </a:rPr>
               <a:t>Диспетчерам необходимо быстро и оперативно обмениваться данными в процессе работы.</a:t>
             </a:r>
-            <a:endParaRPr lang="ru-RU" sz="1800" b="0" u="none" strike="noStrike">
+            <a:endParaRPr lang="ru-RU" sz="1800" b="0" u="none" strike="noStrike" dirty="0">
               <a:solidFill>
                 <a:srgbClr val="FFFFFF"/>
               </a:solidFill>
@@ -14612,15 +14119,22 @@
           </a:ln>
         </p:spPr>
         <p:style>
-          <a:lnRef idx="0"/>
-          <a:fillRef idx="0"/>
-          <a:effectRef idx="0"/>
+          <a:lnRef idx="0">
+            <a:scrgbClr r="0" g="0" b="0"/>
+          </a:lnRef>
+          <a:fillRef idx="0">
+            <a:scrgbClr r="0" g="0" b="0"/>
+          </a:fillRef>
+          <a:effectRef idx="0">
+            <a:scrgbClr r="0" g="0" b="0"/>
+          </a:effectRef>
           <a:fontRef idx="minor"/>
         </p:style>
         <p:txBody>
           <a:bodyPr tIns="91440" bIns="91440" anchor="t">
             <a:spAutoFit/>
           </a:bodyPr>
+          <a:lstStyle/>
           <a:p>
             <a:pPr>
               <a:lnSpc>
@@ -14631,7 +14145,7 @@
               </a:tabLst>
             </a:pPr>
             <a:r>
-              <a:rPr lang="ru" sz="1800" b="1" u="none" strike="noStrike">
+              <a:rPr lang="ru" sz="1800" b="1" u="none" strike="noStrike" dirty="0">
                 <a:solidFill>
                   <a:srgbClr val="D6EDFF"/>
                 </a:solidFill>
@@ -14643,7 +14157,7 @@
               <a:t>Проблема:</a:t>
             </a:r>
             <a:r>
-              <a:rPr lang="ru" sz="1800" b="0" u="none" strike="noStrike">
+              <a:rPr lang="ru" sz="1800" b="0" u="none" strike="noStrike" dirty="0">
                 <a:solidFill>
                   <a:srgbClr val="D6EDFF"/>
                 </a:solidFill>
@@ -14654,7 +14168,7 @@
               </a:rPr>
               <a:t> У диспетчеров на данный момент отсутствует безопасный, удобный и быстрый способ обменом информации</a:t>
             </a:r>
-            <a:endParaRPr lang="ru-RU" sz="1800" b="0" u="none" strike="noStrike">
+            <a:endParaRPr lang="ru-RU" sz="1800" b="0" u="none" strike="noStrike" dirty="0">
               <a:solidFill>
                 <a:srgbClr val="FFFFFF"/>
               </a:solidFill>
@@ -14685,15 +14199,22 @@
           </a:ln>
         </p:spPr>
         <p:style>
-          <a:lnRef idx="0"/>
-          <a:fillRef idx="0"/>
-          <a:effectRef idx="0"/>
+          <a:lnRef idx="0">
+            <a:scrgbClr r="0" g="0" b="0"/>
+          </a:lnRef>
+          <a:fillRef idx="0">
+            <a:scrgbClr r="0" g="0" b="0"/>
+          </a:fillRef>
+          <a:effectRef idx="0">
+            <a:scrgbClr r="0" g="0" b="0"/>
+          </a:effectRef>
           <a:fontRef idx="minor"/>
         </p:style>
         <p:txBody>
           <a:bodyPr tIns="91440" bIns="91440" anchor="t">
             <a:spAutoFit/>
           </a:bodyPr>
+          <a:lstStyle/>
           <a:p>
             <a:pPr>
               <a:lnSpc>
@@ -14704,7 +14225,7 @@
               </a:tabLst>
             </a:pPr>
             <a:r>
-              <a:rPr lang="ru" sz="1800" b="1" u="none" strike="noStrike">
+              <a:rPr lang="ru" sz="1800" b="1" u="none" strike="noStrike" dirty="0">
                 <a:solidFill>
                   <a:srgbClr val="D6EDFF"/>
                 </a:solidFill>
@@ -14716,7 +14237,7 @@
               <a:t>Барьеры нынешних решений:</a:t>
             </a:r>
             <a:r>
-              <a:rPr lang="ru" sz="1800" b="0" u="none" strike="noStrike">
+              <a:rPr lang="ru" sz="1800" b="0" u="none" strike="noStrike" dirty="0">
                 <a:solidFill>
                   <a:srgbClr val="D6EDFF"/>
                 </a:solidFill>
@@ -14727,7 +14248,7 @@
               </a:rPr>
               <a:t> Использование публичных сервисов создаёт риски перехвата сообщений третьими лицами, даже при использовании отечественных сервисов. Кроме того, работа публичных мессенджеров требует подключения к интернету, что невозможно или нежелательно в закрытой и изолированной локальной сети предприятия.</a:t>
             </a:r>
-            <a:endParaRPr lang="ru-RU" sz="1800" b="0" u="none" strike="noStrike">
+            <a:endParaRPr lang="ru-RU" sz="1800" b="0" u="none" strike="noStrike" dirty="0">
               <a:solidFill>
                 <a:srgbClr val="FFFFFF"/>
               </a:solidFill>
@@ -14740,26 +14261,22 @@
       </p:sp>
     </p:spTree>
   </p:cSld>
-  <mc:AlternateContent>
-    <mc:Choice Requires="p14">
-      <p:transition spd="slow" p14:dur="2000"/>
-    </mc:Choice>
-    <mc:Fallback>
-      <p:transition spd="slow"/>
-    </mc:Fallback>
-  </mc:AlternateContent>
+  <p:clrMapOvr>
+    <a:masterClrMapping/>
+  </p:clrMapOvr>
 </p:sld>
 </file>
 
 <file path=ppt/slides/slide3.xml><?xml version="1.0" encoding="utf-8"?>
-<p:sld xmlns:a="http://schemas.openxmlformats.org/drawingml/2006/main" xmlns:p="http://schemas.openxmlformats.org/presentationml/2006/main" xmlns:r="http://schemas.openxmlformats.org/officeDocument/2006/relationships" xmlns:p14="http://schemas.microsoft.com/office/powerpoint/2010/main" xmlns:p15="http://schemas.microsoft.com/office/powerpoint/2012/main" xmlns:mc="http://schemas.openxmlformats.org/markup-compatibility/2006">
+<p:sld xmlns:a="http://schemas.openxmlformats.org/drawingml/2006/main" xmlns:r="http://schemas.openxmlformats.org/officeDocument/2006/relationships" xmlns:p="http://schemas.openxmlformats.org/presentationml/2006/main">
   <p:cSld>
     <p:bg>
       <p:bgPr>
         <a:blipFill rotWithShape="0">
-          <a:blip r:embed="rId1"/>
+          <a:blip r:embed="rId2"/>
           <a:stretch/>
         </a:blipFill>
+        <a:effectLst/>
       </p:bgPr>
     </p:bg>
     <p:spTree>
@@ -14796,15 +14313,22 @@
           </a:ln>
         </p:spPr>
         <p:style>
-          <a:lnRef idx="0"/>
-          <a:fillRef idx="0"/>
-          <a:effectRef idx="0"/>
+          <a:lnRef idx="0">
+            <a:scrgbClr r="0" g="0" b="0"/>
+          </a:lnRef>
+          <a:fillRef idx="0">
+            <a:scrgbClr r="0" g="0" b="0"/>
+          </a:fillRef>
+          <a:effectRef idx="0">
+            <a:scrgbClr r="0" g="0" b="0"/>
+          </a:effectRef>
           <a:fontRef idx="minor"/>
         </p:style>
         <p:txBody>
           <a:bodyPr lIns="68400" tIns="34200" rIns="68400" bIns="34200" anchor="t">
             <a:spAutoFit/>
           </a:bodyPr>
+          <a:lstStyle/>
           <a:p>
             <a:pPr>
               <a:lnSpc>
@@ -14857,15 +14381,22 @@
           </a:ln>
         </p:spPr>
         <p:style>
-          <a:lnRef idx="0"/>
-          <a:fillRef idx="0"/>
-          <a:effectRef idx="0"/>
+          <a:lnRef idx="0">
+            <a:scrgbClr r="0" g="0" b="0"/>
+          </a:lnRef>
+          <a:fillRef idx="0">
+            <a:scrgbClr r="0" g="0" b="0"/>
+          </a:fillRef>
+          <a:effectRef idx="0">
+            <a:scrgbClr r="0" g="0" b="0"/>
+          </a:effectRef>
           <a:fontRef idx="minor"/>
         </p:style>
         <p:txBody>
           <a:bodyPr lIns="68400" tIns="34200" rIns="68400" bIns="34200" anchor="t">
             <a:spAutoFit/>
           </a:bodyPr>
+          <a:lstStyle/>
           <a:p>
             <a:pPr algn="ctr">
               <a:lnSpc>
@@ -14905,7 +14436,7 @@
           <p:nvPr/>
         </p:nvPicPr>
         <p:blipFill>
-          <a:blip r:embed="rId2"/>
+          <a:blip r:embed="rId3"/>
           <a:stretch/>
         </p:blipFill>
         <p:spPr>
@@ -14945,15 +14476,22 @@
           </a:ln>
         </p:spPr>
         <p:style>
-          <a:lnRef idx="0"/>
-          <a:fillRef idx="0"/>
-          <a:effectRef idx="0"/>
+          <a:lnRef idx="0">
+            <a:scrgbClr r="0" g="0" b="0"/>
+          </a:lnRef>
+          <a:fillRef idx="0">
+            <a:scrgbClr r="0" g="0" b="0"/>
+          </a:fillRef>
+          <a:effectRef idx="0">
+            <a:scrgbClr r="0" g="0" b="0"/>
+          </a:effectRef>
           <a:fontRef idx="minor"/>
         </p:style>
         <p:txBody>
           <a:bodyPr lIns="68400" tIns="34200" rIns="68400" bIns="34200" anchor="t">
             <a:spAutoFit/>
           </a:bodyPr>
+          <a:lstStyle/>
           <a:p>
             <a:pPr algn="ctr">
               <a:lnSpc>
@@ -15006,15 +14544,22 @@
           </a:ln>
         </p:spPr>
         <p:style>
-          <a:lnRef idx="0"/>
-          <a:fillRef idx="0"/>
-          <a:effectRef idx="0"/>
+          <a:lnRef idx="0">
+            <a:scrgbClr r="0" g="0" b="0"/>
+          </a:lnRef>
+          <a:fillRef idx="0">
+            <a:scrgbClr r="0" g="0" b="0"/>
+          </a:fillRef>
+          <a:effectRef idx="0">
+            <a:scrgbClr r="0" g="0" b="0"/>
+          </a:effectRef>
           <a:fontRef idx="minor"/>
         </p:style>
         <p:txBody>
           <a:bodyPr tIns="91440" bIns="91440" anchor="t">
             <a:spAutoFit/>
           </a:bodyPr>
+          <a:lstStyle/>
           <a:p>
             <a:pPr marL="457200" indent="-330120">
               <a:lnSpc>
@@ -15027,7 +14572,7 @@
               <a:buAutoNum type="arabicPeriod"/>
             </a:pPr>
             <a:r>
-              <a:rPr lang="ru" sz="1600" b="0" u="none" strike="noStrike">
+              <a:rPr lang="ru" sz="1600" b="0" u="none" strike="noStrike" dirty="0">
                 <a:solidFill>
                   <a:srgbClr val="D6EDFF"/>
                 </a:solidFill>
@@ -15038,7 +14583,7 @@
               </a:rPr>
               <a:t>Скорость обмена данными критична для операционной работы и экстренных ситуаций.</a:t>
             </a:r>
-            <a:endParaRPr lang="ru-RU" sz="1600" b="0" u="none" strike="noStrike">
+            <a:endParaRPr lang="ru-RU" sz="1600" b="0" u="none" strike="noStrike" dirty="0">
               <a:solidFill>
                 <a:srgbClr val="FFFFFF"/>
               </a:solidFill>
@@ -15059,7 +14604,7 @@
               <a:buAutoNum type="arabicPeriod"/>
             </a:pPr>
             <a:r>
-              <a:rPr lang="ru" sz="1600" b="0" u="none" strike="noStrike">
+              <a:rPr lang="ru" sz="1600" b="0" u="none" strike="noStrike" dirty="0">
                 <a:solidFill>
                   <a:srgbClr val="D6EDFF"/>
                 </a:solidFill>
@@ -15070,7 +14615,7 @@
               </a:rPr>
               <a:t>Внутренняя почта не подходит для оперативного (синхронного) общения.</a:t>
             </a:r>
-            <a:endParaRPr lang="ru-RU" sz="1600" b="0" u="none" strike="noStrike">
+            <a:endParaRPr lang="ru-RU" sz="1600" b="0" u="none" strike="noStrike" dirty="0">
               <a:solidFill>
                 <a:srgbClr val="FFFFFF"/>
               </a:solidFill>
@@ -15091,7 +14636,7 @@
               <a:buAutoNum type="arabicPeriod"/>
             </a:pPr>
             <a:r>
-              <a:rPr lang="ru" sz="1600" b="0" u="none" strike="noStrike">
+              <a:rPr lang="ru" sz="1600" b="0" u="none" strike="noStrike" dirty="0">
                 <a:solidFill>
                   <a:srgbClr val="D6EDFF"/>
                 </a:solidFill>
@@ -15102,7 +14647,7 @@
               </a:rPr>
               <a:t>Пользователям важен привычный UX (возможность отправлять файлы, фото, создавать групповые чаты).</a:t>
             </a:r>
-            <a:endParaRPr lang="ru-RU" sz="1600" b="0" u="none" strike="noStrike">
+            <a:endParaRPr lang="ru-RU" sz="1600" b="0" u="none" strike="noStrike" dirty="0">
               <a:solidFill>
                 <a:srgbClr val="FFFFFF"/>
               </a:solidFill>
@@ -15123,7 +14668,7 @@
               <a:buAutoNum type="arabicPeriod"/>
             </a:pPr>
             <a:r>
-              <a:rPr lang="ru" sz="1600" b="0" u="none" strike="noStrike">
+              <a:rPr lang="ru" sz="1600" b="0" u="none" strike="noStrike" dirty="0">
                 <a:solidFill>
                   <a:srgbClr val="D6EDFF"/>
                 </a:solidFill>
@@ -15134,7 +14679,7 @@
               </a:rPr>
               <a:t>Трафик не должен покидать периметр локальной сети.</a:t>
             </a:r>
-            <a:endParaRPr lang="ru-RU" sz="1600" b="0" u="none" strike="noStrike">
+            <a:endParaRPr lang="ru-RU" sz="1600" b="0" u="none" strike="noStrike" dirty="0">
               <a:solidFill>
                 <a:srgbClr val="FFFFFF"/>
               </a:solidFill>
@@ -15155,7 +14700,7 @@
               <a:buAutoNum type="arabicPeriod"/>
             </a:pPr>
             <a:r>
-              <a:rPr lang="ru" sz="1600" b="0" u="none" strike="noStrike">
+              <a:rPr lang="ru" sz="1600" b="0" u="none" strike="noStrike" dirty="0">
                 <a:solidFill>
                   <a:srgbClr val="D6EDFF"/>
                 </a:solidFill>
@@ -15166,7 +14711,7 @@
               </a:rPr>
               <a:t>Требуется возможность аудита и контроля.</a:t>
             </a:r>
-            <a:endParaRPr lang="ru-RU" sz="1600" b="0" u="none" strike="noStrike">
+            <a:endParaRPr lang="ru-RU" sz="1600" b="0" u="none" strike="noStrike" dirty="0">
               <a:solidFill>
                 <a:srgbClr val="FFFFFF"/>
               </a:solidFill>
@@ -15187,7 +14732,7 @@
               <a:buAutoNum type="arabicPeriod"/>
             </a:pPr>
             <a:r>
-              <a:rPr lang="ru" sz="1600" b="0" u="none" strike="noStrike">
+              <a:rPr lang="ru" sz="1600" b="0" u="none" strike="noStrike" dirty="0">
                 <a:solidFill>
                   <a:srgbClr val="D6EDFF"/>
                 </a:solidFill>
@@ -15198,7 +14743,7 @@
               </a:rPr>
               <a:t>Полное отсутствие зависимости от внешнего интернета.</a:t>
             </a:r>
-            <a:endParaRPr lang="ru-RU" sz="1600" b="0" u="none" strike="noStrike">
+            <a:endParaRPr lang="ru-RU" sz="1600" b="0" u="none" strike="noStrike" dirty="0">
               <a:solidFill>
                 <a:srgbClr val="FFFFFF"/>
               </a:solidFill>
@@ -15211,26 +14756,22 @@
       </p:sp>
     </p:spTree>
   </p:cSld>
-  <mc:AlternateContent>
-    <mc:Choice Requires="p14">
-      <p:transition spd="slow" p14:dur="2000"/>
-    </mc:Choice>
-    <mc:Fallback>
-      <p:transition spd="slow"/>
-    </mc:Fallback>
-  </mc:AlternateContent>
+  <p:clrMapOvr>
+    <a:masterClrMapping/>
+  </p:clrMapOvr>
 </p:sld>
 </file>
 
 <file path=ppt/slides/slide4.xml><?xml version="1.0" encoding="utf-8"?>
-<p:sld xmlns:a="http://schemas.openxmlformats.org/drawingml/2006/main" xmlns:p="http://schemas.openxmlformats.org/presentationml/2006/main" xmlns:r="http://schemas.openxmlformats.org/officeDocument/2006/relationships" xmlns:p14="http://schemas.microsoft.com/office/powerpoint/2010/main" xmlns:p15="http://schemas.microsoft.com/office/powerpoint/2012/main" xmlns:mc="http://schemas.openxmlformats.org/markup-compatibility/2006">
+<p:sld xmlns:a="http://schemas.openxmlformats.org/drawingml/2006/main" xmlns:r="http://schemas.openxmlformats.org/officeDocument/2006/relationships" xmlns:p="http://schemas.openxmlformats.org/presentationml/2006/main">
   <p:cSld>
     <p:bg>
       <p:bgPr>
         <a:blipFill rotWithShape="0">
-          <a:blip r:embed="rId1"/>
+          <a:blip r:embed="rId2"/>
           <a:stretch/>
         </a:blipFill>
+        <a:effectLst/>
       </p:bgPr>
     </p:bg>
     <p:spTree>
@@ -15267,15 +14808,22 @@
           </a:ln>
         </p:spPr>
         <p:style>
-          <a:lnRef idx="0"/>
-          <a:fillRef idx="0"/>
-          <a:effectRef idx="0"/>
+          <a:lnRef idx="0">
+            <a:scrgbClr r="0" g="0" b="0"/>
+          </a:lnRef>
+          <a:fillRef idx="0">
+            <a:scrgbClr r="0" g="0" b="0"/>
+          </a:fillRef>
+          <a:effectRef idx="0">
+            <a:scrgbClr r="0" g="0" b="0"/>
+          </a:effectRef>
           <a:fontRef idx="minor"/>
         </p:style>
         <p:txBody>
           <a:bodyPr lIns="68400" tIns="34200" rIns="68400" bIns="34200" anchor="t">
             <a:spAutoFit/>
           </a:bodyPr>
+          <a:lstStyle/>
           <a:p>
             <a:pPr>
               <a:lnSpc>
@@ -15328,15 +14876,22 @@
           </a:ln>
         </p:spPr>
         <p:style>
-          <a:lnRef idx="0"/>
-          <a:fillRef idx="0"/>
-          <a:effectRef idx="0"/>
+          <a:lnRef idx="0">
+            <a:scrgbClr r="0" g="0" b="0"/>
+          </a:lnRef>
+          <a:fillRef idx="0">
+            <a:scrgbClr r="0" g="0" b="0"/>
+          </a:fillRef>
+          <a:effectRef idx="0">
+            <a:scrgbClr r="0" g="0" b="0"/>
+          </a:effectRef>
           <a:fontRef idx="minor"/>
         </p:style>
         <p:txBody>
           <a:bodyPr lIns="68400" tIns="34200" rIns="68400" bIns="34200" anchor="t">
             <a:spAutoFit/>
           </a:bodyPr>
+          <a:lstStyle/>
           <a:p>
             <a:pPr>
               <a:lnSpc>
@@ -15377,22 +14932,33 @@
         </p:nvGraphicFramePr>
         <p:xfrm>
           <a:off x="366480" y="1043640"/>
-          <a:ext cx="8410680" cy="3937320"/>
+          <a:ext cx="8411040" cy="3936240"/>
         </p:xfrm>
         <a:graphic>
           <a:graphicData uri="http://schemas.openxmlformats.org/drawingml/2006/table">
             <a:tbl>
               <a:tblPr/>
               <a:tblGrid>
-                <a:gridCol w="2222640"/>
-                <a:gridCol w="6188400"/>
+                <a:gridCol w="2222640">
+                  <a:extLst>
+                    <a:ext uri="{9D8B030D-6E8A-4147-A177-3AD203B41FA5}">
+                      <a16:colId xmlns:a16="http://schemas.microsoft.com/office/drawing/2014/main" val="20000"/>
+                    </a:ext>
+                  </a:extLst>
+                </a:gridCol>
+                <a:gridCol w="6188400">
+                  <a:extLst>
+                    <a:ext uri="{9D8B030D-6E8A-4147-A177-3AD203B41FA5}">
+                      <a16:colId xmlns:a16="http://schemas.microsoft.com/office/drawing/2014/main" val="20001"/>
+                    </a:ext>
+                  </a:extLst>
+                </a:gridCol>
               </a:tblGrid>
               <a:tr h="650520">
                 <a:tc>
                   <a:txBody>
-                    <a:bodyPr lIns="91080" tIns="91080" rIns="91080" bIns="91080" anchor="ctr">
-                      <a:noAutofit/>
-                    </a:bodyPr>
+                    <a:bodyPr/>
+                    <a:lstStyle/>
                     <a:p>
                       <a:pPr algn="ctr">
                         <a:lnSpc>
@@ -15430,7 +14996,7 @@
                       </a:endParaRPr>
                     </a:p>
                   </a:txBody>
-                  <a:tcPr anchor="ctr" marL="91080" marR="91080" marT="91080" marB="91080">
+                  <a:tcPr marL="91080" marR="91080" marT="91080" marB="91080" anchor="ctr">
                     <a:lnL w="38160">
                       <a:solidFill>
                         <a:srgbClr val="0C343D"/>
@@ -15462,9 +15028,8 @@
                 </a:tc>
                 <a:tc>
                   <a:txBody>
-                    <a:bodyPr lIns="91080" tIns="91080" rIns="91080" bIns="91080" anchor="t">
-                      <a:noAutofit/>
-                    </a:bodyPr>
+                    <a:bodyPr/>
+                    <a:lstStyle/>
                     <a:p>
                       <a:pPr>
                         <a:lnSpc>
@@ -15496,7 +15061,7 @@
                       </a:endParaRPr>
                     </a:p>
                   </a:txBody>
-                  <a:tcPr anchor="t" marL="91080" marR="91080" marT="91080" marB="91080">
+                  <a:tcPr marL="91080" marR="91080" marT="91080" marB="91080">
                     <a:lnL w="38160">
                       <a:solidFill>
                         <a:srgbClr val="0C343D"/>
@@ -15526,13 +15091,17 @@
                     </a:solidFill>
                   </a:tcPr>
                 </a:tc>
+                <a:extLst>
+                  <a:ext uri="{0D108BD9-81ED-4DB2-BD59-A6C34878D82A}">
+                    <a16:rowId xmlns:a16="http://schemas.microsoft.com/office/drawing/2014/main" val="10000"/>
+                  </a:ext>
+                </a:extLst>
               </a:tr>
               <a:tr h="650520">
                 <a:tc>
                   <a:txBody>
-                    <a:bodyPr lIns="91080" tIns="91080" rIns="91080" bIns="91080" anchor="ctr">
-                      <a:noAutofit/>
-                    </a:bodyPr>
+                    <a:bodyPr/>
+                    <a:lstStyle/>
                     <a:p>
                       <a:pPr algn="ctr">
                         <a:lnSpc>
@@ -15564,7 +15133,7 @@
                       </a:endParaRPr>
                     </a:p>
                   </a:txBody>
-                  <a:tcPr anchor="ctr" marL="91080" marR="91080" marT="91080" marB="91080">
+                  <a:tcPr marL="91080" marR="91080" marT="91080" marB="91080" anchor="ctr">
                     <a:lnL w="38160">
                       <a:solidFill>
                         <a:srgbClr val="0C343D"/>
@@ -15596,9 +15165,8 @@
                 </a:tc>
                 <a:tc>
                   <a:txBody>
-                    <a:bodyPr lIns="91080" tIns="91080" rIns="91080" bIns="91080" anchor="t">
-                      <a:noAutofit/>
-                    </a:bodyPr>
+                    <a:bodyPr/>
+                    <a:lstStyle/>
                     <a:p>
                       <a:pPr>
                         <a:lnSpc>
@@ -15630,7 +15198,7 @@
                       </a:endParaRPr>
                     </a:p>
                   </a:txBody>
-                  <a:tcPr anchor="t" marL="91080" marR="91080" marT="91080" marB="91080">
+                  <a:tcPr marL="91080" marR="91080" marT="91080" marB="91080">
                     <a:lnL w="38160">
                       <a:solidFill>
                         <a:srgbClr val="0C343D"/>
@@ -15660,13 +15228,17 @@
                     </a:solidFill>
                   </a:tcPr>
                 </a:tc>
+                <a:extLst>
+                  <a:ext uri="{0D108BD9-81ED-4DB2-BD59-A6C34878D82A}">
+                    <a16:rowId xmlns:a16="http://schemas.microsoft.com/office/drawing/2014/main" val="10001"/>
+                  </a:ext>
+                </a:extLst>
               </a:tr>
               <a:tr h="650520">
                 <a:tc>
                   <a:txBody>
-                    <a:bodyPr lIns="91080" tIns="91080" rIns="91080" bIns="91080" anchor="ctr">
-                      <a:noAutofit/>
-                    </a:bodyPr>
+                    <a:bodyPr/>
+                    <a:lstStyle/>
                     <a:p>
                       <a:pPr algn="ctr">
                         <a:lnSpc>
@@ -15698,7 +15270,7 @@
                       </a:endParaRPr>
                     </a:p>
                   </a:txBody>
-                  <a:tcPr anchor="ctr" marL="91080" marR="91080" marT="91080" marB="91080">
+                  <a:tcPr marL="91080" marR="91080" marT="91080" marB="91080" anchor="ctr">
                     <a:lnL w="38160">
                       <a:solidFill>
                         <a:srgbClr val="0C343D"/>
@@ -15730,9 +15302,8 @@
                 </a:tc>
                 <a:tc>
                   <a:txBody>
-                    <a:bodyPr lIns="91080" tIns="91080" rIns="91080" bIns="91080" anchor="t">
-                      <a:noAutofit/>
-                    </a:bodyPr>
+                    <a:bodyPr/>
+                    <a:lstStyle/>
                     <a:p>
                       <a:pPr>
                         <a:lnSpc>
@@ -15764,7 +15335,7 @@
                       </a:endParaRPr>
                     </a:p>
                   </a:txBody>
-                  <a:tcPr anchor="t" marL="91080" marR="91080" marT="91080" marB="91080">
+                  <a:tcPr marL="91080" marR="91080" marT="91080" marB="91080">
                     <a:lnL w="38160">
                       <a:solidFill>
                         <a:srgbClr val="0C343D"/>
@@ -15794,13 +15365,17 @@
                     </a:solidFill>
                   </a:tcPr>
                 </a:tc>
+                <a:extLst>
+                  <a:ext uri="{0D108BD9-81ED-4DB2-BD59-A6C34878D82A}">
+                    <a16:rowId xmlns:a16="http://schemas.microsoft.com/office/drawing/2014/main" val="10002"/>
+                  </a:ext>
+                </a:extLst>
               </a:tr>
               <a:tr h="1106280">
                 <a:tc>
                   <a:txBody>
-                    <a:bodyPr lIns="91080" tIns="91080" rIns="91080" bIns="91080" anchor="ctr">
-                      <a:noAutofit/>
-                    </a:bodyPr>
+                    <a:bodyPr/>
+                    <a:lstStyle/>
                     <a:p>
                       <a:pPr algn="ctr">
                         <a:lnSpc>
@@ -15832,7 +15407,7 @@
                       </a:endParaRPr>
                     </a:p>
                   </a:txBody>
-                  <a:tcPr anchor="ctr" marL="91080" marR="91080" marT="91080" marB="91080">
+                  <a:tcPr marL="91080" marR="91080" marT="91080" marB="91080" anchor="ctr">
                     <a:lnL w="38160">
                       <a:solidFill>
                         <a:srgbClr val="0C343D"/>
@@ -15864,9 +15439,8 @@
                 </a:tc>
                 <a:tc>
                   <a:txBody>
-                    <a:bodyPr lIns="91080" tIns="91080" rIns="91080" bIns="91080" anchor="t">
-                      <a:noAutofit/>
-                    </a:bodyPr>
+                    <a:bodyPr/>
+                    <a:lstStyle/>
                     <a:p>
                       <a:pPr>
                         <a:lnSpc>
@@ -15898,7 +15472,7 @@
                       </a:endParaRPr>
                     </a:p>
                   </a:txBody>
-                  <a:tcPr anchor="t" marL="91080" marR="91080" marT="91080" marB="91080">
+                  <a:tcPr marL="91080" marR="91080" marT="91080" marB="91080">
                     <a:lnL w="38160">
                       <a:solidFill>
                         <a:srgbClr val="0C343D"/>
@@ -15928,13 +15502,17 @@
                     </a:solidFill>
                   </a:tcPr>
                 </a:tc>
+                <a:extLst>
+                  <a:ext uri="{0D108BD9-81ED-4DB2-BD59-A6C34878D82A}">
+                    <a16:rowId xmlns:a16="http://schemas.microsoft.com/office/drawing/2014/main" val="10003"/>
+                  </a:ext>
+                </a:extLst>
               </a:tr>
               <a:tr h="878400">
                 <a:tc>
                   <a:txBody>
-                    <a:bodyPr lIns="91080" tIns="91080" rIns="91080" bIns="91080" anchor="ctr">
-                      <a:noAutofit/>
-                    </a:bodyPr>
+                    <a:bodyPr/>
+                    <a:lstStyle/>
                     <a:p>
                       <a:pPr algn="ctr">
                         <a:lnSpc>
@@ -15966,7 +15544,7 @@
                       </a:endParaRPr>
                     </a:p>
                   </a:txBody>
-                  <a:tcPr anchor="ctr" marL="91080" marR="91080" marT="91080" marB="91080">
+                  <a:tcPr marL="91080" marR="91080" marT="91080" marB="91080" anchor="ctr">
                     <a:lnL w="38160">
                       <a:solidFill>
                         <a:srgbClr val="0C343D"/>
@@ -15998,9 +15576,8 @@
                 </a:tc>
                 <a:tc>
                   <a:txBody>
-                    <a:bodyPr lIns="91080" tIns="91080" rIns="91080" bIns="91080" anchor="t">
-                      <a:noAutofit/>
-                    </a:bodyPr>
+                    <a:bodyPr/>
+                    <a:lstStyle/>
                     <a:p>
                       <a:pPr>
                         <a:lnSpc>
@@ -16032,7 +15609,7 @@
                       </a:endParaRPr>
                     </a:p>
                   </a:txBody>
-                  <a:tcPr anchor="t" marL="91080" marR="91080" marT="91080" marB="91080">
+                  <a:tcPr marL="91080" marR="91080" marT="91080" marB="91080">
                     <a:lnL w="38160">
                       <a:solidFill>
                         <a:srgbClr val="0C343D"/>
@@ -16062,6 +15639,11 @@
                     </a:solidFill>
                   </a:tcPr>
                 </a:tc>
+                <a:extLst>
+                  <a:ext uri="{0D108BD9-81ED-4DB2-BD59-A6C34878D82A}">
+                    <a16:rowId xmlns:a16="http://schemas.microsoft.com/office/drawing/2014/main" val="10004"/>
+                  </a:ext>
+                </a:extLst>
               </a:tr>
             </a:tbl>
           </a:graphicData>
@@ -16069,26 +15651,22 @@
       </p:graphicFrame>
     </p:spTree>
   </p:cSld>
-  <mc:AlternateContent>
-    <mc:Choice Requires="p14">
-      <p:transition spd="slow" p14:dur="2000"/>
-    </mc:Choice>
-    <mc:Fallback>
-      <p:transition spd="slow"/>
-    </mc:Fallback>
-  </mc:AlternateContent>
+  <p:clrMapOvr>
+    <a:masterClrMapping/>
+  </p:clrMapOvr>
 </p:sld>
 </file>
 
 <file path=ppt/slides/slide5.xml><?xml version="1.0" encoding="utf-8"?>
-<p:sld xmlns:a="http://schemas.openxmlformats.org/drawingml/2006/main" xmlns:p="http://schemas.openxmlformats.org/presentationml/2006/main" xmlns:r="http://schemas.openxmlformats.org/officeDocument/2006/relationships" xmlns:p14="http://schemas.microsoft.com/office/powerpoint/2010/main" xmlns:p15="http://schemas.microsoft.com/office/powerpoint/2012/main" xmlns:mc="http://schemas.openxmlformats.org/markup-compatibility/2006">
+<p:sld xmlns:a="http://schemas.openxmlformats.org/drawingml/2006/main" xmlns:r="http://schemas.openxmlformats.org/officeDocument/2006/relationships" xmlns:p="http://schemas.openxmlformats.org/presentationml/2006/main">
   <p:cSld>
     <p:bg>
       <p:bgPr>
         <a:blipFill rotWithShape="0">
-          <a:blip r:embed="rId1"/>
+          <a:blip r:embed="rId2"/>
           <a:stretch/>
         </a:blipFill>
+        <a:effectLst/>
       </p:bgPr>
     </p:bg>
     <p:spTree>
@@ -16125,15 +15703,22 @@
           </a:ln>
         </p:spPr>
         <p:style>
-          <a:lnRef idx="0"/>
-          <a:fillRef idx="0"/>
-          <a:effectRef idx="0"/>
+          <a:lnRef idx="0">
+            <a:scrgbClr r="0" g="0" b="0"/>
+          </a:lnRef>
+          <a:fillRef idx="0">
+            <a:scrgbClr r="0" g="0" b="0"/>
+          </a:fillRef>
+          <a:effectRef idx="0">
+            <a:scrgbClr r="0" g="0" b="0"/>
+          </a:effectRef>
           <a:fontRef idx="minor"/>
         </p:style>
         <p:txBody>
           <a:bodyPr lIns="68400" tIns="34200" rIns="68400" bIns="34200" anchor="t">
             <a:spAutoFit/>
           </a:bodyPr>
+          <a:lstStyle/>
           <a:p>
             <a:pPr>
               <a:lnSpc>
@@ -16186,17 +15771,23 @@
           </a:ln>
         </p:spPr>
         <p:style>
-          <a:lnRef idx="0"/>
-          <a:fillRef idx="0"/>
-          <a:effectRef idx="0"/>
+          <a:lnRef idx="0">
+            <a:scrgbClr r="0" g="0" b="0"/>
+          </a:lnRef>
+          <a:fillRef idx="0">
+            <a:scrgbClr r="0" g="0" b="0"/>
+          </a:fillRef>
+          <a:effectRef idx="0">
+            <a:scrgbClr r="0" g="0" b="0"/>
+          </a:effectRef>
           <a:fontRef idx="minor"/>
         </p:style>
         <p:txBody>
           <a:bodyPr lIns="68400" tIns="34200" rIns="68400" bIns="34200" anchor="t">
             <a:spAutoFit/>
           </a:bodyPr>
-          <a:p>
-            <a:pPr/>
+          <a:lstStyle/>
+          <a:p>
             <a:endParaRPr lang="ru-RU" sz="1400" b="0" u="none" strike="noStrike">
               <a:solidFill>
                 <a:srgbClr val="FFFFFF"/>
@@ -16235,15 +15826,22 @@
           </a:ln>
         </p:spPr>
         <p:style>
-          <a:lnRef idx="0"/>
-          <a:fillRef idx="0"/>
-          <a:effectRef idx="0"/>
+          <a:lnRef idx="0">
+            <a:scrgbClr r="0" g="0" b="0"/>
+          </a:lnRef>
+          <a:fillRef idx="0">
+            <a:scrgbClr r="0" g="0" b="0"/>
+          </a:fillRef>
+          <a:effectRef idx="0">
+            <a:scrgbClr r="0" g="0" b="0"/>
+          </a:effectRef>
           <a:fontRef idx="minor"/>
         </p:style>
         <p:txBody>
           <a:bodyPr lIns="68400" tIns="68400" rIns="68400" bIns="68400" anchor="ctr">
             <a:noAutofit/>
           </a:bodyPr>
+          <a:lstStyle/>
           <a:p>
             <a:pPr algn="ctr">
               <a:lnSpc>
@@ -16254,7 +15852,7 @@
               </a:tabLst>
             </a:pPr>
             <a:r>
-              <a:rPr lang="ru" sz="1600" b="0" u="none" strike="noStrike">
+              <a:rPr lang="ru" sz="1600" b="0" u="none" strike="noStrike" dirty="0">
                 <a:solidFill>
                   <a:srgbClr val="073763"/>
                 </a:solidFill>
@@ -16263,9 +15861,9 @@
                 <a:latin typeface="Arial"/>
                 <a:ea typeface="Arial"/>
               </a:rPr>
-              <a:t>У кого-то</a:t>
-            </a:r>
-            <a:endParaRPr lang="ru-RU" sz="1600" b="0" u="none" strike="noStrike">
+              <a:t>У кого</a:t>
+            </a:r>
+            <a:endParaRPr lang="ru-RU" sz="1600" b="0" u="none" strike="noStrike" dirty="0">
               <a:solidFill>
                 <a:srgbClr val="000000"/>
               </a:solidFill>
@@ -16303,15 +15901,22 @@
           </a:ln>
         </p:spPr>
         <p:style>
-          <a:lnRef idx="0"/>
-          <a:fillRef idx="0"/>
-          <a:effectRef idx="0"/>
+          <a:lnRef idx="0">
+            <a:scrgbClr r="0" g="0" b="0"/>
+          </a:lnRef>
+          <a:fillRef idx="0">
+            <a:scrgbClr r="0" g="0" b="0"/>
+          </a:fillRef>
+          <a:effectRef idx="0">
+            <a:scrgbClr r="0" g="0" b="0"/>
+          </a:effectRef>
           <a:fontRef idx="minor"/>
         </p:style>
         <p:txBody>
           <a:bodyPr lIns="68400" tIns="68400" rIns="68400" bIns="68400" anchor="ctr">
             <a:noAutofit/>
           </a:bodyPr>
+          <a:lstStyle/>
           <a:p>
             <a:pPr algn="ctr">
               <a:lnSpc>
@@ -16371,15 +15976,22 @@
           </a:ln>
         </p:spPr>
         <p:style>
-          <a:lnRef idx="0"/>
-          <a:fillRef idx="0"/>
-          <a:effectRef idx="0"/>
+          <a:lnRef idx="0">
+            <a:scrgbClr r="0" g="0" b="0"/>
+          </a:lnRef>
+          <a:fillRef idx="0">
+            <a:scrgbClr r="0" g="0" b="0"/>
+          </a:fillRef>
+          <a:effectRef idx="0">
+            <a:scrgbClr r="0" g="0" b="0"/>
+          </a:effectRef>
           <a:fontRef idx="minor"/>
         </p:style>
         <p:txBody>
           <a:bodyPr lIns="68400" tIns="68400" rIns="68400" bIns="68400" anchor="ctr">
             <a:noAutofit/>
           </a:bodyPr>
+          <a:lstStyle/>
           <a:p>
             <a:pPr algn="ctr">
               <a:lnSpc>
@@ -16439,15 +16051,22 @@
           </a:ln>
         </p:spPr>
         <p:style>
-          <a:lnRef idx="0"/>
-          <a:fillRef idx="0"/>
-          <a:effectRef idx="0"/>
+          <a:lnRef idx="0">
+            <a:scrgbClr r="0" g="0" b="0"/>
+          </a:lnRef>
+          <a:fillRef idx="0">
+            <a:scrgbClr r="0" g="0" b="0"/>
+          </a:fillRef>
+          <a:effectRef idx="0">
+            <a:scrgbClr r="0" g="0" b="0"/>
+          </a:effectRef>
           <a:fontRef idx="minor"/>
         </p:style>
         <p:txBody>
           <a:bodyPr lIns="68400" tIns="68400" rIns="68400" bIns="68400" anchor="ctr">
             <a:noAutofit/>
           </a:bodyPr>
+          <a:lstStyle/>
           <a:p>
             <a:pPr algn="ctr">
               <a:lnSpc>
@@ -16507,15 +16126,22 @@
           </a:ln>
         </p:spPr>
         <p:style>
-          <a:lnRef idx="0"/>
-          <a:fillRef idx="0"/>
-          <a:effectRef idx="0"/>
+          <a:lnRef idx="0">
+            <a:scrgbClr r="0" g="0" b="0"/>
+          </a:lnRef>
+          <a:fillRef idx="0">
+            <a:scrgbClr r="0" g="0" b="0"/>
+          </a:fillRef>
+          <a:effectRef idx="0">
+            <a:scrgbClr r="0" g="0" b="0"/>
+          </a:effectRef>
           <a:fontRef idx="minor"/>
         </p:style>
         <p:txBody>
           <a:bodyPr lIns="68400" tIns="68400" rIns="68400" bIns="68400" anchor="ctr">
             <a:noAutofit/>
           </a:bodyPr>
+          <a:lstStyle/>
           <a:p>
             <a:pPr>
               <a:lnSpc>
@@ -16575,15 +16201,22 @@
           </a:ln>
         </p:spPr>
         <p:style>
-          <a:lnRef idx="0"/>
-          <a:fillRef idx="0"/>
-          <a:effectRef idx="0"/>
+          <a:lnRef idx="0">
+            <a:scrgbClr r="0" g="0" b="0"/>
+          </a:lnRef>
+          <a:fillRef idx="0">
+            <a:scrgbClr r="0" g="0" b="0"/>
+          </a:fillRef>
+          <a:effectRef idx="0">
+            <a:scrgbClr r="0" g="0" b="0"/>
+          </a:effectRef>
           <a:fontRef idx="minor"/>
         </p:style>
         <p:txBody>
           <a:bodyPr lIns="68400" tIns="68400" rIns="68400" bIns="68400" anchor="ctr">
             <a:noAutofit/>
           </a:bodyPr>
+          <a:lstStyle/>
           <a:p>
             <a:pPr>
               <a:lnSpc>
@@ -16643,15 +16276,22 @@
           </a:ln>
         </p:spPr>
         <p:style>
-          <a:lnRef idx="0"/>
-          <a:fillRef idx="0"/>
-          <a:effectRef idx="0"/>
+          <a:lnRef idx="0">
+            <a:scrgbClr r="0" g="0" b="0"/>
+          </a:lnRef>
+          <a:fillRef idx="0">
+            <a:scrgbClr r="0" g="0" b="0"/>
+          </a:fillRef>
+          <a:effectRef idx="0">
+            <a:scrgbClr r="0" g="0" b="0"/>
+          </a:effectRef>
           <a:fontRef idx="minor"/>
         </p:style>
         <p:txBody>
           <a:bodyPr lIns="68400" tIns="68400" rIns="68400" bIns="68400" anchor="ctr">
             <a:noAutofit/>
           </a:bodyPr>
+          <a:lstStyle/>
           <a:p>
             <a:pPr>
               <a:lnSpc>
@@ -16711,15 +16351,22 @@
           </a:ln>
         </p:spPr>
         <p:style>
-          <a:lnRef idx="0"/>
-          <a:fillRef idx="0"/>
-          <a:effectRef idx="0"/>
+          <a:lnRef idx="0">
+            <a:scrgbClr r="0" g="0" b="0"/>
+          </a:lnRef>
+          <a:fillRef idx="0">
+            <a:scrgbClr r="0" g="0" b="0"/>
+          </a:fillRef>
+          <a:effectRef idx="0">
+            <a:scrgbClr r="0" g="0" b="0"/>
+          </a:effectRef>
           <a:fontRef idx="minor"/>
         </p:style>
         <p:txBody>
           <a:bodyPr lIns="68400" tIns="68400" rIns="68400" bIns="68400" anchor="ctr">
             <a:noAutofit/>
           </a:bodyPr>
+          <a:lstStyle/>
           <a:p>
             <a:pPr>
               <a:lnSpc>
@@ -16754,26 +16401,22 @@
       </p:sp>
     </p:spTree>
   </p:cSld>
-  <mc:AlternateContent>
-    <mc:Choice Requires="p14">
-      <p:transition spd="slow" p14:dur="2000"/>
-    </mc:Choice>
-    <mc:Fallback>
-      <p:transition spd="slow"/>
-    </mc:Fallback>
-  </mc:AlternateContent>
+  <p:clrMapOvr>
+    <a:masterClrMapping/>
+  </p:clrMapOvr>
 </p:sld>
 </file>
 
 <file path=ppt/slides/slide6.xml><?xml version="1.0" encoding="utf-8"?>
-<p:sld xmlns:a="http://schemas.openxmlformats.org/drawingml/2006/main" xmlns:p="http://schemas.openxmlformats.org/presentationml/2006/main" xmlns:r="http://schemas.openxmlformats.org/officeDocument/2006/relationships" xmlns:p14="http://schemas.microsoft.com/office/powerpoint/2010/main" xmlns:p15="http://schemas.microsoft.com/office/powerpoint/2012/main" xmlns:mc="http://schemas.openxmlformats.org/markup-compatibility/2006">
+<p:sld xmlns:a="http://schemas.openxmlformats.org/drawingml/2006/main" xmlns:r="http://schemas.openxmlformats.org/officeDocument/2006/relationships" xmlns:p="http://schemas.openxmlformats.org/presentationml/2006/main">
   <p:cSld>
     <p:bg>
       <p:bgPr>
         <a:blipFill rotWithShape="0">
-          <a:blip r:embed="rId1"/>
+          <a:blip r:embed="rId2"/>
           <a:stretch/>
         </a:blipFill>
+        <a:effectLst/>
       </p:bgPr>
     </p:bg>
     <p:spTree>
@@ -16810,15 +16453,22 @@
           </a:ln>
         </p:spPr>
         <p:style>
-          <a:lnRef idx="0"/>
-          <a:fillRef idx="0"/>
-          <a:effectRef idx="0"/>
+          <a:lnRef idx="0">
+            <a:scrgbClr r="0" g="0" b="0"/>
+          </a:lnRef>
+          <a:fillRef idx="0">
+            <a:scrgbClr r="0" g="0" b="0"/>
+          </a:fillRef>
+          <a:effectRef idx="0">
+            <a:scrgbClr r="0" g="0" b="0"/>
+          </a:effectRef>
           <a:fontRef idx="minor"/>
         </p:style>
         <p:txBody>
           <a:bodyPr lIns="68400" tIns="34200" rIns="68400" bIns="34200" anchor="t">
             <a:spAutoFit/>
           </a:bodyPr>
+          <a:lstStyle/>
           <a:p>
             <a:pPr>
               <a:lnSpc>
@@ -16871,15 +16521,22 @@
           </a:ln>
         </p:spPr>
         <p:style>
-          <a:lnRef idx="0"/>
-          <a:fillRef idx="0"/>
-          <a:effectRef idx="0"/>
+          <a:lnRef idx="0">
+            <a:scrgbClr r="0" g="0" b="0"/>
+          </a:lnRef>
+          <a:fillRef idx="0">
+            <a:scrgbClr r="0" g="0" b="0"/>
+          </a:fillRef>
+          <a:effectRef idx="0">
+            <a:scrgbClr r="0" g="0" b="0"/>
+          </a:effectRef>
           <a:fontRef idx="minor"/>
         </p:style>
         <p:txBody>
           <a:bodyPr lIns="68400" tIns="34200" rIns="68400" bIns="34200" anchor="t">
             <a:spAutoFit/>
           </a:bodyPr>
+          <a:lstStyle/>
           <a:p>
             <a:pPr>
               <a:lnSpc>
@@ -16944,15 +16601,22 @@
           </a:ln>
         </p:spPr>
         <p:style>
-          <a:lnRef idx="0"/>
-          <a:fillRef idx="0"/>
-          <a:effectRef idx="0"/>
+          <a:lnRef idx="0">
+            <a:scrgbClr r="0" g="0" b="0"/>
+          </a:lnRef>
+          <a:fillRef idx="0">
+            <a:scrgbClr r="0" g="0" b="0"/>
+          </a:fillRef>
+          <a:effectRef idx="0">
+            <a:scrgbClr r="0" g="0" b="0"/>
+          </a:effectRef>
           <a:fontRef idx="minor"/>
         </p:style>
         <p:txBody>
           <a:bodyPr tIns="91440" bIns="91440" anchor="t">
             <a:spAutoFit/>
           </a:bodyPr>
+          <a:lstStyle/>
           <a:p>
             <a:pPr>
               <a:lnSpc>
@@ -17077,26 +16741,22 @@
       </p:sp>
     </p:spTree>
   </p:cSld>
-  <mc:AlternateContent>
-    <mc:Choice Requires="p14">
-      <p:transition spd="slow" p14:dur="2000"/>
-    </mc:Choice>
-    <mc:Fallback>
-      <p:transition spd="slow"/>
-    </mc:Fallback>
-  </mc:AlternateContent>
+  <p:clrMapOvr>
+    <a:masterClrMapping/>
+  </p:clrMapOvr>
 </p:sld>
 </file>
 
 <file path=ppt/slides/slide7.xml><?xml version="1.0" encoding="utf-8"?>
-<p:sld xmlns:a="http://schemas.openxmlformats.org/drawingml/2006/main" xmlns:p="http://schemas.openxmlformats.org/presentationml/2006/main" xmlns:r="http://schemas.openxmlformats.org/officeDocument/2006/relationships" xmlns:p14="http://schemas.microsoft.com/office/powerpoint/2010/main" xmlns:p15="http://schemas.microsoft.com/office/powerpoint/2012/main" xmlns:mc="http://schemas.openxmlformats.org/markup-compatibility/2006">
+<p:sld xmlns:a="http://schemas.openxmlformats.org/drawingml/2006/main" xmlns:r="http://schemas.openxmlformats.org/officeDocument/2006/relationships" xmlns:p="http://schemas.openxmlformats.org/presentationml/2006/main">
   <p:cSld>
     <p:bg>
       <p:bgPr>
         <a:blipFill rotWithShape="0">
-          <a:blip r:embed="rId1"/>
+          <a:blip r:embed="rId2"/>
           <a:stretch/>
         </a:blipFill>
+        <a:effectLst/>
       </p:bgPr>
     </p:bg>
     <p:spTree>
@@ -17133,15 +16793,22 @@
           </a:ln>
         </p:spPr>
         <p:style>
-          <a:lnRef idx="0"/>
-          <a:fillRef idx="0"/>
-          <a:effectRef idx="0"/>
+          <a:lnRef idx="0">
+            <a:scrgbClr r="0" g="0" b="0"/>
+          </a:lnRef>
+          <a:fillRef idx="0">
+            <a:scrgbClr r="0" g="0" b="0"/>
+          </a:fillRef>
+          <a:effectRef idx="0">
+            <a:scrgbClr r="0" g="0" b="0"/>
+          </a:effectRef>
           <a:fontRef idx="minor"/>
         </p:style>
         <p:txBody>
           <a:bodyPr lIns="68400" tIns="34200" rIns="68400" bIns="34200" anchor="t">
             <a:spAutoFit/>
           </a:bodyPr>
+          <a:lstStyle/>
           <a:p>
             <a:pPr>
               <a:lnSpc>
@@ -17194,15 +16861,22 @@
           </a:ln>
         </p:spPr>
         <p:style>
-          <a:lnRef idx="0"/>
-          <a:fillRef idx="0"/>
-          <a:effectRef idx="0"/>
+          <a:lnRef idx="0">
+            <a:scrgbClr r="0" g="0" b="0"/>
+          </a:lnRef>
+          <a:fillRef idx="0">
+            <a:scrgbClr r="0" g="0" b="0"/>
+          </a:fillRef>
+          <a:effectRef idx="0">
+            <a:scrgbClr r="0" g="0" b="0"/>
+          </a:effectRef>
           <a:fontRef idx="minor"/>
         </p:style>
         <p:txBody>
           <a:bodyPr lIns="68400" tIns="34200" rIns="68400" bIns="34200" anchor="t">
             <a:spAutoFit/>
           </a:bodyPr>
+          <a:lstStyle/>
           <a:p>
             <a:pPr>
               <a:lnSpc>
@@ -17360,15 +17034,22 @@
           </a:ln>
         </p:spPr>
         <p:style>
-          <a:lnRef idx="0"/>
-          <a:fillRef idx="0"/>
-          <a:effectRef idx="0"/>
+          <a:lnRef idx="0">
+            <a:scrgbClr r="0" g="0" b="0"/>
+          </a:lnRef>
+          <a:fillRef idx="0">
+            <a:scrgbClr r="0" g="0" b="0"/>
+          </a:fillRef>
+          <a:effectRef idx="0">
+            <a:scrgbClr r="0" g="0" b="0"/>
+          </a:effectRef>
           <a:fontRef idx="minor"/>
         </p:style>
         <p:txBody>
           <a:bodyPr tIns="91440" bIns="91440" anchor="t">
             <a:spAutoFit/>
           </a:bodyPr>
+          <a:lstStyle/>
           <a:p>
             <a:pPr>
               <a:lnSpc>
@@ -17543,26 +17224,22 @@
       </p:sp>
     </p:spTree>
   </p:cSld>
-  <mc:AlternateContent>
-    <mc:Choice Requires="p14">
-      <p:transition spd="slow" p14:dur="2000"/>
-    </mc:Choice>
-    <mc:Fallback>
-      <p:transition spd="slow"/>
-    </mc:Fallback>
-  </mc:AlternateContent>
+  <p:clrMapOvr>
+    <a:masterClrMapping/>
+  </p:clrMapOvr>
 </p:sld>
 </file>
 
 <file path=ppt/slides/slide8.xml><?xml version="1.0" encoding="utf-8"?>
-<p:sld xmlns:a="http://schemas.openxmlformats.org/drawingml/2006/main" xmlns:p="http://schemas.openxmlformats.org/presentationml/2006/main" xmlns:r="http://schemas.openxmlformats.org/officeDocument/2006/relationships" xmlns:p14="http://schemas.microsoft.com/office/powerpoint/2010/main" xmlns:p15="http://schemas.microsoft.com/office/powerpoint/2012/main" xmlns:mc="http://schemas.openxmlformats.org/markup-compatibility/2006">
+<p:sld xmlns:a="http://schemas.openxmlformats.org/drawingml/2006/main" xmlns:r="http://schemas.openxmlformats.org/officeDocument/2006/relationships" xmlns:p="http://schemas.openxmlformats.org/presentationml/2006/main">
   <p:cSld>
     <p:bg>
       <p:bgPr>
         <a:blipFill rotWithShape="0">
-          <a:blip r:embed="rId1"/>
+          <a:blip r:embed="rId2"/>
           <a:stretch/>
         </a:blipFill>
+        <a:effectLst/>
       </p:bgPr>
     </p:bg>
     <p:spTree>
@@ -17599,15 +17276,22 @@
           </a:ln>
         </p:spPr>
         <p:style>
-          <a:lnRef idx="0"/>
-          <a:fillRef idx="0"/>
-          <a:effectRef idx="0"/>
+          <a:lnRef idx="0">
+            <a:scrgbClr r="0" g="0" b="0"/>
+          </a:lnRef>
+          <a:fillRef idx="0">
+            <a:scrgbClr r="0" g="0" b="0"/>
+          </a:fillRef>
+          <a:effectRef idx="0">
+            <a:scrgbClr r="0" g="0" b="0"/>
+          </a:effectRef>
           <a:fontRef idx="minor"/>
         </p:style>
         <p:txBody>
           <a:bodyPr lIns="68400" tIns="34200" rIns="68400" bIns="34200" anchor="t">
             <a:spAutoFit/>
           </a:bodyPr>
+          <a:lstStyle/>
           <a:p>
             <a:pPr>
               <a:lnSpc>
@@ -17660,15 +17344,22 @@
           </a:ln>
         </p:spPr>
         <p:style>
-          <a:lnRef idx="0"/>
-          <a:fillRef idx="0"/>
-          <a:effectRef idx="0"/>
+          <a:lnRef idx="0">
+            <a:scrgbClr r="0" g="0" b="0"/>
+          </a:lnRef>
+          <a:fillRef idx="0">
+            <a:scrgbClr r="0" g="0" b="0"/>
+          </a:fillRef>
+          <a:effectRef idx="0">
+            <a:scrgbClr r="0" g="0" b="0"/>
+          </a:effectRef>
           <a:fontRef idx="minor"/>
         </p:style>
         <p:txBody>
           <a:bodyPr lIns="68400" tIns="34200" rIns="68400" bIns="34200" anchor="t">
             <a:spAutoFit/>
           </a:bodyPr>
+          <a:lstStyle/>
           <a:p>
             <a:pPr>
               <a:lnSpc>
@@ -17721,15 +17412,22 @@
           </a:ln>
         </p:spPr>
         <p:style>
-          <a:lnRef idx="0"/>
-          <a:fillRef idx="0"/>
-          <a:effectRef idx="0"/>
+          <a:lnRef idx="0">
+            <a:scrgbClr r="0" g="0" b="0"/>
+          </a:lnRef>
+          <a:fillRef idx="0">
+            <a:scrgbClr r="0" g="0" b="0"/>
+          </a:fillRef>
+          <a:effectRef idx="0">
+            <a:scrgbClr r="0" g="0" b="0"/>
+          </a:effectRef>
           <a:fontRef idx="minor"/>
         </p:style>
         <p:txBody>
           <a:bodyPr tIns="91440" bIns="91440" anchor="t">
             <a:spAutoFit/>
           </a:bodyPr>
+          <a:lstStyle/>
           <a:p>
             <a:pPr algn="ctr">
               <a:lnSpc>
@@ -17782,15 +17480,22 @@
           </a:ln>
         </p:spPr>
         <p:style>
-          <a:lnRef idx="0"/>
-          <a:fillRef idx="0"/>
-          <a:effectRef idx="0"/>
+          <a:lnRef idx="0">
+            <a:scrgbClr r="0" g="0" b="0"/>
+          </a:lnRef>
+          <a:fillRef idx="0">
+            <a:scrgbClr r="0" g="0" b="0"/>
+          </a:fillRef>
+          <a:effectRef idx="0">
+            <a:scrgbClr r="0" g="0" b="0"/>
+          </a:effectRef>
           <a:fontRef idx="minor"/>
         </p:style>
         <p:txBody>
           <a:bodyPr tIns="91440" bIns="91440" anchor="t">
             <a:spAutoFit/>
           </a:bodyPr>
+          <a:lstStyle/>
           <a:p>
             <a:pPr algn="ctr">
               <a:lnSpc>
@@ -17830,7 +17535,7 @@
           <p:nvPr/>
         </p:nvPicPr>
         <p:blipFill>
-          <a:blip r:embed="rId2"/>
+          <a:blip r:embed="rId3"/>
           <a:stretch/>
         </p:blipFill>
         <p:spPr>
@@ -17868,7 +17573,7 @@
             <p:nvPr/>
           </p:nvPicPr>
           <p:blipFill>
-            <a:blip r:embed="rId3"/>
+            <a:blip r:embed="rId4"/>
             <a:stretch/>
           </p:blipFill>
           <p:spPr>
@@ -17892,7 +17597,7 @@
             <p:nvPr/>
           </p:nvPicPr>
           <p:blipFill>
-            <a:blip r:embed="rId4"/>
+            <a:blip r:embed="rId5"/>
             <a:stretch/>
           </p:blipFill>
           <p:spPr>
@@ -17930,15 +17635,22 @@
           </a:ln>
         </p:spPr>
         <p:style>
-          <a:lnRef idx="0"/>
-          <a:fillRef idx="0"/>
-          <a:effectRef idx="0"/>
+          <a:lnRef idx="0">
+            <a:scrgbClr r="0" g="0" b="0"/>
+          </a:lnRef>
+          <a:fillRef idx="0">
+            <a:scrgbClr r="0" g="0" b="0"/>
+          </a:fillRef>
+          <a:effectRef idx="0">
+            <a:scrgbClr r="0" g="0" b="0"/>
+          </a:effectRef>
           <a:fontRef idx="minor"/>
         </p:style>
         <p:txBody>
           <a:bodyPr tIns="91440" bIns="91440" anchor="t">
             <a:spAutoFit/>
           </a:bodyPr>
+          <a:lstStyle/>
           <a:p>
             <a:pPr algn="ctr">
               <a:lnSpc>
@@ -17997,15 +17709,22 @@
           </a:ln>
         </p:spPr>
         <p:style>
-          <a:lnRef idx="0"/>
-          <a:fillRef idx="0"/>
-          <a:effectRef idx="0"/>
+          <a:lnRef idx="0">
+            <a:scrgbClr r="0" g="0" b="0"/>
+          </a:lnRef>
+          <a:fillRef idx="0">
+            <a:scrgbClr r="0" g="0" b="0"/>
+          </a:fillRef>
+          <a:effectRef idx="0">
+            <a:scrgbClr r="0" g="0" b="0"/>
+          </a:effectRef>
           <a:fontRef idx="minor"/>
         </p:style>
         <p:txBody>
           <a:bodyPr tIns="91440" bIns="91440" anchor="t">
             <a:spAutoFit/>
           </a:bodyPr>
+          <a:lstStyle/>
           <a:p>
             <a:pPr>
               <a:lnSpc>
@@ -18064,15 +17783,22 @@
           </a:ln>
         </p:spPr>
         <p:style>
-          <a:lnRef idx="0"/>
-          <a:fillRef idx="0"/>
-          <a:effectRef idx="0"/>
+          <a:lnRef idx="0">
+            <a:scrgbClr r="0" g="0" b="0"/>
+          </a:lnRef>
+          <a:fillRef idx="0">
+            <a:scrgbClr r="0" g="0" b="0"/>
+          </a:fillRef>
+          <a:effectRef idx="0">
+            <a:scrgbClr r="0" g="0" b="0"/>
+          </a:effectRef>
           <a:fontRef idx="minor"/>
         </p:style>
         <p:txBody>
           <a:bodyPr tIns="91440" bIns="91440" anchor="t">
             <a:spAutoFit/>
           </a:bodyPr>
+          <a:lstStyle/>
           <a:p>
             <a:pPr algn="ctr">
               <a:lnSpc>
@@ -18131,15 +17857,22 @@
           </a:ln>
         </p:spPr>
         <p:style>
-          <a:lnRef idx="0"/>
-          <a:fillRef idx="0"/>
-          <a:effectRef idx="0"/>
+          <a:lnRef idx="0">
+            <a:scrgbClr r="0" g="0" b="0"/>
+          </a:lnRef>
+          <a:fillRef idx="0">
+            <a:scrgbClr r="0" g="0" b="0"/>
+          </a:fillRef>
+          <a:effectRef idx="0">
+            <a:scrgbClr r="0" g="0" b="0"/>
+          </a:effectRef>
           <a:fontRef idx="minor"/>
         </p:style>
         <p:txBody>
           <a:bodyPr tIns="91440" bIns="91440" anchor="t">
             <a:spAutoFit/>
           </a:bodyPr>
+          <a:lstStyle/>
           <a:p>
             <a:pPr>
               <a:lnSpc>
@@ -18185,7 +17918,7 @@
           <p:nvPr/>
         </p:nvPicPr>
         <p:blipFill>
-          <a:blip r:embed="rId5"/>
+          <a:blip r:embed="rId6"/>
           <a:stretch/>
         </p:blipFill>
         <p:spPr>
@@ -18222,15 +17955,22 @@
           </a:ln>
         </p:spPr>
         <p:style>
-          <a:lnRef idx="0"/>
-          <a:fillRef idx="0"/>
-          <a:effectRef idx="0"/>
+          <a:lnRef idx="0">
+            <a:scrgbClr r="0" g="0" b="0"/>
+          </a:lnRef>
+          <a:fillRef idx="0">
+            <a:scrgbClr r="0" g="0" b="0"/>
+          </a:fillRef>
+          <a:effectRef idx="0">
+            <a:scrgbClr r="0" g="0" b="0"/>
+          </a:effectRef>
           <a:fontRef idx="minor"/>
         </p:style>
         <p:txBody>
           <a:bodyPr tIns="91440" bIns="91440" anchor="t">
             <a:spAutoFit/>
           </a:bodyPr>
+          <a:lstStyle/>
           <a:p>
             <a:pPr algn="ctr">
               <a:lnSpc>
@@ -18289,15 +18029,22 @@
           </a:ln>
         </p:spPr>
         <p:style>
-          <a:lnRef idx="0"/>
-          <a:fillRef idx="0"/>
-          <a:effectRef idx="0"/>
+          <a:lnRef idx="0">
+            <a:scrgbClr r="0" g="0" b="0"/>
+          </a:lnRef>
+          <a:fillRef idx="0">
+            <a:scrgbClr r="0" g="0" b="0"/>
+          </a:fillRef>
+          <a:effectRef idx="0">
+            <a:scrgbClr r="0" g="0" b="0"/>
+          </a:effectRef>
           <a:fontRef idx="minor"/>
         </p:style>
         <p:txBody>
           <a:bodyPr tIns="91440" bIns="91440" anchor="t">
             <a:spAutoFit/>
           </a:bodyPr>
+          <a:lstStyle/>
           <a:p>
             <a:pPr>
               <a:lnSpc>
@@ -18343,7 +18090,7 @@
           <p:nvPr/>
         </p:nvPicPr>
         <p:blipFill>
-          <a:blip r:embed="rId6"/>
+          <a:blip r:embed="rId7"/>
           <a:stretch/>
         </p:blipFill>
         <p:spPr>
@@ -18380,15 +18127,22 @@
           </a:ln>
         </p:spPr>
         <p:style>
-          <a:lnRef idx="0"/>
-          <a:fillRef idx="0"/>
-          <a:effectRef idx="0"/>
+          <a:lnRef idx="0">
+            <a:scrgbClr r="0" g="0" b="0"/>
+          </a:lnRef>
+          <a:fillRef idx="0">
+            <a:scrgbClr r="0" g="0" b="0"/>
+          </a:fillRef>
+          <a:effectRef idx="0">
+            <a:scrgbClr r="0" g="0" b="0"/>
+          </a:effectRef>
           <a:fontRef idx="minor"/>
         </p:style>
         <p:txBody>
           <a:bodyPr tIns="91440" bIns="91440" anchor="t">
             <a:spAutoFit/>
           </a:bodyPr>
+          <a:lstStyle/>
           <a:p>
             <a:pPr algn="ctr">
               <a:lnSpc>
@@ -18447,15 +18201,22 @@
           </a:ln>
         </p:spPr>
         <p:style>
-          <a:lnRef idx="0"/>
-          <a:fillRef idx="0"/>
-          <a:effectRef idx="0"/>
+          <a:lnRef idx="0">
+            <a:scrgbClr r="0" g="0" b="0"/>
+          </a:lnRef>
+          <a:fillRef idx="0">
+            <a:scrgbClr r="0" g="0" b="0"/>
+          </a:fillRef>
+          <a:effectRef idx="0">
+            <a:scrgbClr r="0" g="0" b="0"/>
+          </a:effectRef>
           <a:fontRef idx="minor"/>
         </p:style>
         <p:txBody>
           <a:bodyPr tIns="91440" bIns="91440" anchor="t">
             <a:spAutoFit/>
           </a:bodyPr>
+          <a:lstStyle/>
           <a:p>
             <a:pPr>
               <a:lnSpc>
@@ -18472,7 +18233,7 @@
               </a:tabLst>
             </a:pPr>
             <a:r>
-              <a:rPr lang="ru" sz="1400" b="0" u="none" strike="noStrike">
+              <a:rPr lang="ru" sz="1400" b="0" u="none" strike="noStrike" dirty="0">
                 <a:solidFill>
                   <a:srgbClr val="D6EDFF"/>
                 </a:solidFill>
@@ -18483,7 +18244,7 @@
               </a:rPr>
               <a:t>Безопасная контейнеризация сервисов</a:t>
             </a:r>
-            <a:endParaRPr lang="ru-RU" sz="1400" b="0" u="none" strike="noStrike">
+            <a:endParaRPr lang="ru-RU" sz="1400" b="0" u="none" strike="noStrike" dirty="0">
               <a:solidFill>
                 <a:srgbClr val="FFFFFF"/>
               </a:solidFill>
@@ -18496,26 +18257,22 @@
       </p:sp>
     </p:spTree>
   </p:cSld>
-  <mc:AlternateContent>
-    <mc:Choice Requires="p14">
-      <p:transition spd="slow" p14:dur="2000"/>
-    </mc:Choice>
-    <mc:Fallback>
-      <p:transition spd="slow"/>
-    </mc:Fallback>
-  </mc:AlternateContent>
+  <p:clrMapOvr>
+    <a:masterClrMapping/>
+  </p:clrMapOvr>
 </p:sld>
 </file>
 
 <file path=ppt/slides/slide9.xml><?xml version="1.0" encoding="utf-8"?>
-<p:sld xmlns:a="http://schemas.openxmlformats.org/drawingml/2006/main" xmlns:p="http://schemas.openxmlformats.org/presentationml/2006/main" xmlns:r="http://schemas.openxmlformats.org/officeDocument/2006/relationships" xmlns:p14="http://schemas.microsoft.com/office/powerpoint/2010/main" xmlns:p15="http://schemas.microsoft.com/office/powerpoint/2012/main" xmlns:mc="http://schemas.openxmlformats.org/markup-compatibility/2006">
+<p:sld xmlns:a="http://schemas.openxmlformats.org/drawingml/2006/main" xmlns:r="http://schemas.openxmlformats.org/officeDocument/2006/relationships" xmlns:p="http://schemas.openxmlformats.org/presentationml/2006/main">
   <p:cSld>
     <p:bg>
       <p:bgPr>
         <a:blipFill rotWithShape="0">
-          <a:blip r:embed="rId1"/>
+          <a:blip r:embed="rId2"/>
           <a:stretch/>
         </a:blipFill>
+        <a:effectLst/>
       </p:bgPr>
     </p:bg>
     <p:spTree>
@@ -18552,15 +18309,22 @@
           </a:ln>
         </p:spPr>
         <p:style>
-          <a:lnRef idx="0"/>
-          <a:fillRef idx="0"/>
-          <a:effectRef idx="0"/>
+          <a:lnRef idx="0">
+            <a:scrgbClr r="0" g="0" b="0"/>
+          </a:lnRef>
+          <a:fillRef idx="0">
+            <a:scrgbClr r="0" g="0" b="0"/>
+          </a:fillRef>
+          <a:effectRef idx="0">
+            <a:scrgbClr r="0" g="0" b="0"/>
+          </a:effectRef>
           <a:fontRef idx="minor"/>
         </p:style>
         <p:txBody>
           <a:bodyPr lIns="68400" tIns="34200" rIns="68400" bIns="34200" anchor="t">
             <a:spAutoFit/>
           </a:bodyPr>
+          <a:lstStyle/>
           <a:p>
             <a:pPr>
               <a:lnSpc>
@@ -18613,15 +18377,22 @@
           </a:ln>
         </p:spPr>
         <p:style>
-          <a:lnRef idx="0"/>
-          <a:fillRef idx="0"/>
-          <a:effectRef idx="0"/>
+          <a:lnRef idx="0">
+            <a:scrgbClr r="0" g="0" b="0"/>
+          </a:lnRef>
+          <a:fillRef idx="0">
+            <a:scrgbClr r="0" g="0" b="0"/>
+          </a:fillRef>
+          <a:effectRef idx="0">
+            <a:scrgbClr r="0" g="0" b="0"/>
+          </a:effectRef>
           <a:fontRef idx="minor"/>
         </p:style>
         <p:txBody>
           <a:bodyPr lIns="68400" tIns="34200" rIns="68400" bIns="34200" anchor="t">
             <a:spAutoFit/>
           </a:bodyPr>
+          <a:lstStyle/>
           <a:p>
             <a:pPr>
               <a:lnSpc>
@@ -18656,31 +18427,60 @@
       </p:sp>
       <p:graphicFrame>
         <p:nvGraphicFramePr>
-          <p:cNvPr id="144" name=""/>
+          <p:cNvPr id="144" name="Таблица 143"/>
           <p:cNvGraphicFramePr/>
           <p:nvPr/>
         </p:nvGraphicFramePr>
         <p:xfrm>
           <a:off x="122760" y="1281600"/>
-          <a:ext cx="4736880" cy="3296160"/>
+          <a:ext cx="4737240" cy="3529920"/>
         </p:xfrm>
         <a:graphic>
           <a:graphicData uri="http://schemas.openxmlformats.org/drawingml/2006/table">
             <a:tbl>
               <a:tblPr/>
               <a:tblGrid>
-                <a:gridCol w="788760"/>
-                <a:gridCol w="788760"/>
-                <a:gridCol w="788400"/>
-                <a:gridCol w="1223280"/>
-                <a:gridCol w="1148040"/>
+                <a:gridCol w="788760">
+                  <a:extLst>
+                    <a:ext uri="{9D8B030D-6E8A-4147-A177-3AD203B41FA5}">
+                      <a16:colId xmlns:a16="http://schemas.microsoft.com/office/drawing/2014/main" val="20000"/>
+                    </a:ext>
+                  </a:extLst>
+                </a:gridCol>
+                <a:gridCol w="788760">
+                  <a:extLst>
+                    <a:ext uri="{9D8B030D-6E8A-4147-A177-3AD203B41FA5}">
+                      <a16:colId xmlns:a16="http://schemas.microsoft.com/office/drawing/2014/main" val="20001"/>
+                    </a:ext>
+                  </a:extLst>
+                </a:gridCol>
+                <a:gridCol w="788400">
+                  <a:extLst>
+                    <a:ext uri="{9D8B030D-6E8A-4147-A177-3AD203B41FA5}">
+                      <a16:colId xmlns:a16="http://schemas.microsoft.com/office/drawing/2014/main" val="20002"/>
+                    </a:ext>
+                  </a:extLst>
+                </a:gridCol>
+                <a:gridCol w="1223280">
+                  <a:extLst>
+                    <a:ext uri="{9D8B030D-6E8A-4147-A177-3AD203B41FA5}">
+                      <a16:colId xmlns:a16="http://schemas.microsoft.com/office/drawing/2014/main" val="20003"/>
+                    </a:ext>
+                  </a:extLst>
+                </a:gridCol>
+                <a:gridCol w="1148040">
+                  <a:extLst>
+                    <a:ext uri="{9D8B030D-6E8A-4147-A177-3AD203B41FA5}">
+                      <a16:colId xmlns:a16="http://schemas.microsoft.com/office/drawing/2014/main" val="20004"/>
+                    </a:ext>
+                  </a:extLst>
+                </a:gridCol>
               </a:tblGrid>
               <a:tr h="346320">
                 <a:tc>
                   <a:txBody>
-                    <a:bodyPr lIns="36000" tIns="36000" rIns="36000" bIns="36000" anchor="t">
-                      <a:noAutofit/>
-                    </a:bodyPr>
+                    <a:bodyPr/>
+                    <a:lstStyle/>
                     <a:p>
                       <a:pPr algn="ctr"/>
                       <a:r>
@@ -18694,17 +18494,9 @@
                         </a:rPr>
                         <a:t>Этап</a:t>
                       </a:r>
-                      <a:endParaRPr lang="ru-RU" sz="1000" b="1" u="none" strike="noStrike">
-                        <a:solidFill>
-                          <a:srgbClr val="FFFFFF"/>
-                        </a:solidFill>
-                        <a:effectLst/>
-                        <a:uFillTx/>
-                        <a:latin typeface="Times New Roman"/>
-                      </a:endParaRPr>
                     </a:p>
                   </a:txBody>
-                  <a:tcPr anchor="t" marL="36000" marR="36000" marT="36000" marB="36000">
+                  <a:tcPr marL="36000" marR="36000" marT="36000" marB="36000">
                     <a:lnL w="7200">
                       <a:solidFill>
                         <a:srgbClr val="666666"/>
@@ -18736,9 +18528,8 @@
                 </a:tc>
                 <a:tc>
                   <a:txBody>
-                    <a:bodyPr lIns="36000" tIns="36000" rIns="36000" bIns="36000" anchor="t">
-                      <a:noAutofit/>
-                    </a:bodyPr>
+                    <a:bodyPr/>
+                    <a:lstStyle/>
                     <a:p>
                       <a:pPr algn="ctr"/>
                       <a:r>
@@ -18752,17 +18543,9 @@
                         </a:rPr>
                         <a:t>Недели</a:t>
                       </a:r>
-                      <a:endParaRPr lang="ru-RU" sz="1000" b="1" u="none" strike="noStrike">
-                        <a:solidFill>
-                          <a:srgbClr val="FFFFFF"/>
-                        </a:solidFill>
-                        <a:effectLst/>
-                        <a:uFillTx/>
-                        <a:latin typeface="Times New Roman"/>
-                      </a:endParaRPr>
                     </a:p>
                   </a:txBody>
-                  <a:tcPr anchor="t" marL="36000" marR="36000" marT="36000" marB="36000">
+                  <a:tcPr marL="36000" marR="36000" marT="36000" marB="36000">
                     <a:lnL w="7200">
                       <a:solidFill>
                         <a:srgbClr val="666666"/>
@@ -18794,9 +18577,8 @@
                 </a:tc>
                 <a:tc>
                   <a:txBody>
-                    <a:bodyPr lIns="36000" tIns="36000" rIns="36000" bIns="36000" anchor="t">
-                      <a:noAutofit/>
-                    </a:bodyPr>
+                    <a:bodyPr/>
+                    <a:lstStyle/>
                     <a:p>
                       <a:pPr algn="ctr"/>
                       <a:r>
@@ -18810,17 +18592,9 @@
                         </a:rPr>
                         <a:t>Статус</a:t>
                       </a:r>
-                      <a:endParaRPr lang="ru-RU" sz="1000" b="1" u="none" strike="noStrike">
-                        <a:solidFill>
-                          <a:srgbClr val="FFFFFF"/>
-                        </a:solidFill>
-                        <a:effectLst/>
-                        <a:uFillTx/>
-                        <a:latin typeface="Times New Roman"/>
-                      </a:endParaRPr>
                     </a:p>
                   </a:txBody>
-                  <a:tcPr anchor="t" marL="36000" marR="36000" marT="36000" marB="36000">
+                  <a:tcPr marL="36000" marR="36000" marT="36000" marB="36000">
                     <a:lnL w="7200">
                       <a:solidFill>
                         <a:srgbClr val="666666"/>
@@ -18852,9 +18626,8 @@
                 </a:tc>
                 <a:tc>
                   <a:txBody>
-                    <a:bodyPr lIns="36000" tIns="36000" rIns="36000" bIns="36000" anchor="t">
-                      <a:noAutofit/>
-                    </a:bodyPr>
+                    <a:bodyPr/>
+                    <a:lstStyle/>
                     <a:p>
                       <a:pPr algn="ctr"/>
                       <a:r>
@@ -18868,17 +18641,9 @@
                         </a:rPr>
                         <a:t>Содержание работ</a:t>
                       </a:r>
-                      <a:endParaRPr lang="ru-RU" sz="1000" b="1" u="none" strike="noStrike">
-                        <a:solidFill>
-                          <a:srgbClr val="FFFFFF"/>
-                        </a:solidFill>
-                        <a:effectLst/>
-                        <a:uFillTx/>
-                        <a:latin typeface="Times New Roman"/>
-                      </a:endParaRPr>
                     </a:p>
                   </a:txBody>
-                  <a:tcPr anchor="t" marL="36000" marR="36000" marT="36000" marB="36000">
+                  <a:tcPr marL="36000" marR="36000" marT="36000" marB="36000">
                     <a:lnL w="7200">
                       <a:solidFill>
                         <a:srgbClr val="666666"/>
@@ -18910,9 +18675,8 @@
                 </a:tc>
                 <a:tc>
                   <a:txBody>
-                    <a:bodyPr lIns="36000" tIns="36000" rIns="36000" bIns="36000" anchor="t">
-                      <a:noAutofit/>
-                    </a:bodyPr>
+                    <a:bodyPr/>
+                    <a:lstStyle/>
                     <a:p>
                       <a:pPr algn="ctr"/>
                       <a:r>
@@ -18926,17 +18690,9 @@
                         </a:rPr>
                         <a:t>Результат</a:t>
                       </a:r>
-                      <a:endParaRPr lang="ru-RU" sz="1000" b="1" u="none" strike="noStrike">
-                        <a:solidFill>
-                          <a:srgbClr val="FFFFFF"/>
-                        </a:solidFill>
-                        <a:effectLst/>
-                        <a:uFillTx/>
-                        <a:latin typeface="Times New Roman"/>
-                      </a:endParaRPr>
                     </a:p>
                   </a:txBody>
-                  <a:tcPr anchor="t" marL="36000" marR="36000" marT="36000" marB="36000">
+                  <a:tcPr marL="36000" marR="36000" marT="36000" marB="36000">
                     <a:lnL w="7200">
                       <a:solidFill>
                         <a:srgbClr val="666666"/>
@@ -18966,13 +18722,17 @@
                     </a:solidFill>
                   </a:tcPr>
                 </a:tc>
+                <a:extLst>
+                  <a:ext uri="{0D108BD9-81ED-4DB2-BD59-A6C34878D82A}">
+                    <a16:rowId xmlns:a16="http://schemas.microsoft.com/office/drawing/2014/main" val="10000"/>
+                  </a:ext>
+                </a:extLst>
               </a:tr>
               <a:tr h="0">
                 <a:tc>
                   <a:txBody>
-                    <a:bodyPr lIns="36000" tIns="36000" rIns="36000" bIns="36000" anchor="t">
-                      <a:noAutofit/>
-                    </a:bodyPr>
+                    <a:bodyPr/>
+                    <a:lstStyle/>
                     <a:p>
                       <a:pPr algn="ctr"/>
                       <a:r>
@@ -18986,17 +18746,9 @@
                         </a:rPr>
                         <a:t>Анализ и уточнение требований</a:t>
                       </a:r>
-                      <a:endParaRPr lang="ru-RU" sz="1000" b="0" u="none" strike="noStrike">
-                        <a:solidFill>
-                          <a:srgbClr val="000000"/>
-                        </a:solidFill>
-                        <a:effectLst/>
-                        <a:uFillTx/>
-                        <a:latin typeface="Times New Roman"/>
-                      </a:endParaRPr>
                     </a:p>
                   </a:txBody>
-                  <a:tcPr anchor="t" marL="36000" marR="36000" marT="36000" marB="36000">
+                  <a:tcPr marL="36000" marR="36000" marT="36000" marB="36000">
                     <a:lnL w="7200">
                       <a:solidFill>
                         <a:srgbClr val="666666"/>
@@ -19028,9 +18780,8 @@
                 </a:tc>
                 <a:tc>
                   <a:txBody>
-                    <a:bodyPr lIns="36000" tIns="36000" rIns="36000" bIns="36000" anchor="t">
-                      <a:noAutofit/>
-                    </a:bodyPr>
+                    <a:bodyPr/>
+                    <a:lstStyle/>
                     <a:p>
                       <a:pPr algn="ctr"/>
                       <a:r>
@@ -19044,17 +18795,9 @@
                         </a:rPr>
                         <a:t>1–5</a:t>
                       </a:r>
-                      <a:endParaRPr lang="ru-RU" sz="1000" b="0" u="none" strike="noStrike">
-                        <a:solidFill>
-                          <a:srgbClr val="000000"/>
-                        </a:solidFill>
-                        <a:effectLst/>
-                        <a:uFillTx/>
-                        <a:latin typeface="Times New Roman"/>
-                      </a:endParaRPr>
                     </a:p>
                   </a:txBody>
-                  <a:tcPr anchor="t" marL="36000" marR="36000" marT="36000" marB="36000">
+                  <a:tcPr marL="36000" marR="36000" marT="36000" marB="36000">
                     <a:lnL w="7200">
                       <a:solidFill>
                         <a:srgbClr val="666666"/>
@@ -19086,9 +18829,8 @@
                 </a:tc>
                 <a:tc>
                   <a:txBody>
-                    <a:bodyPr lIns="36000" tIns="36000" rIns="36000" bIns="36000" anchor="t">
-                      <a:noAutofit/>
-                    </a:bodyPr>
+                    <a:bodyPr/>
+                    <a:lstStyle/>
                     <a:p>
                       <a:pPr algn="ctr"/>
                       <a:r>
@@ -19102,17 +18844,9 @@
                         </a:rPr>
                         <a:t>Завершён</a:t>
                       </a:r>
-                      <a:endParaRPr lang="ru-RU" sz="1000" b="0" u="none" strike="noStrike">
-                        <a:solidFill>
-                          <a:srgbClr val="000000"/>
-                        </a:solidFill>
-                        <a:effectLst/>
-                        <a:uFillTx/>
-                        <a:latin typeface="Times New Roman"/>
-                      </a:endParaRPr>
                     </a:p>
                   </a:txBody>
-                  <a:tcPr anchor="t" marL="36000" marR="36000" marT="36000" marB="36000">
+                  <a:tcPr marL="36000" marR="36000" marT="36000" marB="36000">
                     <a:lnL w="7200">
                       <a:solidFill>
                         <a:srgbClr val="666666"/>
@@ -19144,9 +18878,8 @@
                 </a:tc>
                 <a:tc>
                   <a:txBody>
-                    <a:bodyPr lIns="36000" tIns="36000" rIns="36000" bIns="36000" anchor="t">
-                      <a:noAutofit/>
-                    </a:bodyPr>
+                    <a:bodyPr/>
+                    <a:lstStyle/>
                     <a:p>
                       <a:r>
                         <a:rPr lang="ru-RU" sz="1000" b="0" u="none" strike="noStrike">
@@ -19159,17 +18892,9 @@
                         </a:rPr>
                         <a:t>Cбор требований к безопасности, протоколы шифрования, требования к изоляции</a:t>
                       </a:r>
-                      <a:endParaRPr lang="ru-RU" sz="1000" b="0" u="none" strike="noStrike">
-                        <a:solidFill>
-                          <a:srgbClr val="000000"/>
-                        </a:solidFill>
-                        <a:effectLst/>
-                        <a:uFillTx/>
-                        <a:latin typeface="Times New Roman"/>
-                      </a:endParaRPr>
                     </a:p>
                   </a:txBody>
-                  <a:tcPr anchor="t" marL="36000" marR="36000" marT="36000" marB="36000">
+                  <a:tcPr marL="36000" marR="36000" marT="36000" marB="36000">
                     <a:lnL w="7200">
                       <a:solidFill>
                         <a:srgbClr val="666666"/>
@@ -19201,9 +18926,8 @@
                 </a:tc>
                 <a:tc>
                   <a:txBody>
-                    <a:bodyPr lIns="36000" tIns="36000" rIns="36000" bIns="36000" anchor="t">
-                      <a:noAutofit/>
-                    </a:bodyPr>
+                    <a:bodyPr/>
+                    <a:lstStyle/>
                     <a:p>
                       <a:pPr algn="ctr"/>
                       <a:r>
@@ -19217,17 +18941,9 @@
                         </a:rPr>
                         <a:t>ТЗ, критерии приёмки</a:t>
                       </a:r>
-                      <a:endParaRPr lang="ru-RU" sz="1000" b="0" u="none" strike="noStrike">
-                        <a:solidFill>
-                          <a:srgbClr val="000000"/>
-                        </a:solidFill>
-                        <a:effectLst/>
-                        <a:uFillTx/>
-                        <a:latin typeface="Times New Roman"/>
-                      </a:endParaRPr>
                     </a:p>
                   </a:txBody>
-                  <a:tcPr anchor="t" marL="36000" marR="36000" marT="36000" marB="36000">
+                  <a:tcPr marL="36000" marR="36000" marT="36000" marB="36000">
                     <a:lnL w="7200">
                       <a:solidFill>
                         <a:srgbClr val="666666"/>
@@ -19257,13 +18973,17 @@
                     </a:solidFill>
                   </a:tcPr>
                 </a:tc>
+                <a:extLst>
+                  <a:ext uri="{0D108BD9-81ED-4DB2-BD59-A6C34878D82A}">
+                    <a16:rowId xmlns:a16="http://schemas.microsoft.com/office/drawing/2014/main" val="10001"/>
+                  </a:ext>
+                </a:extLst>
               </a:tr>
               <a:tr h="0">
                 <a:tc>
                   <a:txBody>
-                    <a:bodyPr lIns="36000" tIns="36000" rIns="36000" bIns="36000" anchor="t">
-                      <a:noAutofit/>
-                    </a:bodyPr>
+                    <a:bodyPr/>
+                    <a:lstStyle/>
                     <a:p>
                       <a:pPr algn="ctr"/>
                       <a:r>
@@ -19277,17 +18997,9 @@
                         </a:rPr>
                         <a:t>Проектирование архитектуры</a:t>
                       </a:r>
-                      <a:endParaRPr lang="ru-RU" sz="1000" b="0" u="none" strike="noStrike">
-                        <a:solidFill>
-                          <a:srgbClr val="000000"/>
-                        </a:solidFill>
-                        <a:effectLst/>
-                        <a:uFillTx/>
-                        <a:latin typeface="Times New Roman"/>
-                      </a:endParaRPr>
                     </a:p>
                   </a:txBody>
-                  <a:tcPr anchor="t" marL="36000" marR="36000" marT="36000" marB="36000">
+                  <a:tcPr marL="36000" marR="36000" marT="36000" marB="36000">
                     <a:lnL w="7200">
                       <a:solidFill>
                         <a:srgbClr val="666666"/>
@@ -19319,9 +19031,8 @@
                 </a:tc>
                 <a:tc>
                   <a:txBody>
-                    <a:bodyPr lIns="36000" tIns="36000" rIns="36000" bIns="36000" anchor="t">
-                      <a:noAutofit/>
-                    </a:bodyPr>
+                    <a:bodyPr/>
+                    <a:lstStyle/>
                     <a:p>
                       <a:pPr algn="ctr"/>
                       <a:r>
@@ -19335,17 +19046,9 @@
                         </a:rPr>
                         <a:t>6–7</a:t>
                       </a:r>
-                      <a:endParaRPr lang="ru-RU" sz="1000" b="0" u="none" strike="noStrike">
-                        <a:solidFill>
-                          <a:srgbClr val="000000"/>
-                        </a:solidFill>
-                        <a:effectLst/>
-                        <a:uFillTx/>
-                        <a:latin typeface="Times New Roman"/>
-                      </a:endParaRPr>
                     </a:p>
                   </a:txBody>
-                  <a:tcPr anchor="t" marL="36000" marR="36000" marT="36000" marB="36000">
+                  <a:tcPr marL="36000" marR="36000" marT="36000" marB="36000">
                     <a:lnL w="7200">
                       <a:solidFill>
                         <a:srgbClr val="666666"/>
@@ -19377,9 +19080,8 @@
                 </a:tc>
                 <a:tc>
                   <a:txBody>
-                    <a:bodyPr lIns="36000" tIns="36000" rIns="36000" bIns="36000" anchor="t">
-                      <a:noAutofit/>
-                    </a:bodyPr>
+                    <a:bodyPr/>
+                    <a:lstStyle/>
                     <a:p>
                       <a:pPr algn="ctr"/>
                       <a:r>
@@ -19393,17 +19095,9 @@
                         </a:rPr>
                         <a:t> Текущий</a:t>
                       </a:r>
-                      <a:endParaRPr lang="ru-RU" sz="1000" b="0" u="none" strike="noStrike">
-                        <a:solidFill>
-                          <a:srgbClr val="000000"/>
-                        </a:solidFill>
-                        <a:effectLst/>
-                        <a:uFillTx/>
-                        <a:latin typeface="Times New Roman"/>
-                      </a:endParaRPr>
                     </a:p>
                   </a:txBody>
-                  <a:tcPr anchor="t" marL="36000" marR="36000" marT="36000" marB="36000">
+                  <a:tcPr marL="36000" marR="36000" marT="36000" marB="36000">
                     <a:lnL w="7200">
                       <a:solidFill>
                         <a:srgbClr val="666666"/>
@@ -19435,9 +19129,8 @@
                 </a:tc>
                 <a:tc>
                   <a:txBody>
-                    <a:bodyPr lIns="36000" tIns="36000" rIns="36000" bIns="36000" anchor="t">
-                      <a:noAutofit/>
-                    </a:bodyPr>
+                    <a:bodyPr/>
+                    <a:lstStyle/>
                     <a:p>
                       <a:r>
                         <a:rPr lang="ru-RU" sz="1000" b="0" u="none" strike="noStrike">
@@ -19450,17 +19143,9 @@
                         </a:rPr>
                         <a:t>Выбор стека, схема БД, API, план развёртывания</a:t>
                       </a:r>
-                      <a:endParaRPr lang="ru-RU" sz="1000" b="0" u="none" strike="noStrike">
-                        <a:solidFill>
-                          <a:srgbClr val="000000"/>
-                        </a:solidFill>
-                        <a:effectLst/>
-                        <a:uFillTx/>
-                        <a:latin typeface="Times New Roman"/>
-                      </a:endParaRPr>
                     </a:p>
                   </a:txBody>
-                  <a:tcPr anchor="t" marL="36000" marR="36000" marT="36000" marB="36000">
+                  <a:tcPr marL="36000" marR="36000" marT="36000" marB="36000">
                     <a:lnL w="7200">
                       <a:solidFill>
                         <a:srgbClr val="666666"/>
@@ -19492,9 +19177,8 @@
                 </a:tc>
                 <a:tc>
                   <a:txBody>
-                    <a:bodyPr lIns="36000" tIns="36000" rIns="36000" bIns="36000" anchor="t">
-                      <a:noAutofit/>
-                    </a:bodyPr>
+                    <a:bodyPr/>
+                    <a:lstStyle/>
                     <a:p>
                       <a:pPr algn="ctr"/>
                       <a:r>
@@ -19508,17 +19192,9 @@
                         </a:rPr>
                         <a:t>Архитектурная схема, API, Docker-план</a:t>
                       </a:r>
-                      <a:endParaRPr lang="ru-RU" sz="1000" b="0" u="none" strike="noStrike">
-                        <a:solidFill>
-                          <a:srgbClr val="000000"/>
-                        </a:solidFill>
-                        <a:effectLst/>
-                        <a:uFillTx/>
-                        <a:latin typeface="Times New Roman"/>
-                      </a:endParaRPr>
                     </a:p>
                   </a:txBody>
-                  <a:tcPr anchor="t" marL="36000" marR="36000" marT="36000" marB="36000">
+                  <a:tcPr marL="36000" marR="36000" marT="36000" marB="36000">
                     <a:lnL w="7200">
                       <a:solidFill>
                         <a:srgbClr val="666666"/>
@@ -19548,13 +19224,17 @@
                     </a:solidFill>
                   </a:tcPr>
                 </a:tc>
+                <a:extLst>
+                  <a:ext uri="{0D108BD9-81ED-4DB2-BD59-A6C34878D82A}">
+                    <a16:rowId xmlns:a16="http://schemas.microsoft.com/office/drawing/2014/main" val="10002"/>
+                  </a:ext>
+                </a:extLst>
               </a:tr>
               <a:tr h="0">
                 <a:tc>
                   <a:txBody>
-                    <a:bodyPr lIns="36000" tIns="36000" rIns="36000" bIns="36000" anchor="t">
-                      <a:noAutofit/>
-                    </a:bodyPr>
+                    <a:bodyPr/>
+                    <a:lstStyle/>
                     <a:p>
                       <a:pPr algn="ctr"/>
                       <a:r>
@@ -19568,17 +19248,9 @@
                         </a:rPr>
                         <a:t>Настройка серверной части</a:t>
                       </a:r>
-                      <a:endParaRPr lang="ru-RU" sz="1000" b="0" u="none" strike="noStrike">
-                        <a:solidFill>
-                          <a:srgbClr val="000000"/>
-                        </a:solidFill>
-                        <a:effectLst/>
-                        <a:uFillTx/>
-                        <a:latin typeface="Times New Roman"/>
-                      </a:endParaRPr>
                     </a:p>
                   </a:txBody>
-                  <a:tcPr anchor="t" marL="36000" marR="36000" marT="36000" marB="36000">
+                  <a:tcPr marL="36000" marR="36000" marT="36000" marB="36000">
                     <a:lnL w="7200">
                       <a:solidFill>
                         <a:srgbClr val="666666"/>
@@ -19610,9 +19282,8 @@
                 </a:tc>
                 <a:tc>
                   <a:txBody>
-                    <a:bodyPr lIns="36000" tIns="36000" rIns="36000" bIns="36000" anchor="t">
-                      <a:noAutofit/>
-                    </a:bodyPr>
+                    <a:bodyPr/>
+                    <a:lstStyle/>
                     <a:p>
                       <a:pPr algn="ctr"/>
                       <a:r>
@@ -19626,17 +19297,9 @@
                         </a:rPr>
                         <a:t>7–9</a:t>
                       </a:r>
-                      <a:endParaRPr lang="ru-RU" sz="1000" b="0" u="none" strike="noStrike">
-                        <a:solidFill>
-                          <a:srgbClr val="000000"/>
-                        </a:solidFill>
-                        <a:effectLst/>
-                        <a:uFillTx/>
-                        <a:latin typeface="Times New Roman"/>
-                      </a:endParaRPr>
                     </a:p>
                   </a:txBody>
-                  <a:tcPr anchor="t" marL="36000" marR="36000" marT="36000" marB="36000">
+                  <a:tcPr marL="36000" marR="36000" marT="36000" marB="36000">
                     <a:lnL w="7200">
                       <a:solidFill>
                         <a:srgbClr val="666666"/>
@@ -19668,9 +19331,8 @@
                 </a:tc>
                 <a:tc>
                   <a:txBody>
-                    <a:bodyPr lIns="36000" tIns="36000" rIns="36000" bIns="36000" anchor="t">
-                      <a:noAutofit/>
-                    </a:bodyPr>
+                    <a:bodyPr/>
+                    <a:lstStyle/>
                     <a:p>
                       <a:pPr algn="ctr"/>
                       <a:r>
@@ -19684,17 +19346,9 @@
                         </a:rPr>
                         <a:t> Запланирован</a:t>
                       </a:r>
-                      <a:endParaRPr lang="ru-RU" sz="1000" b="0" u="none" strike="noStrike">
-                        <a:solidFill>
-                          <a:srgbClr val="000000"/>
-                        </a:solidFill>
-                        <a:effectLst/>
-                        <a:uFillTx/>
-                        <a:latin typeface="Times New Roman"/>
-                      </a:endParaRPr>
                     </a:p>
                   </a:txBody>
-                  <a:tcPr anchor="t" marL="36000" marR="36000" marT="36000" marB="36000">
+                  <a:tcPr marL="36000" marR="36000" marT="36000" marB="36000">
                     <a:lnL w="7200">
                       <a:solidFill>
                         <a:srgbClr val="666666"/>
@@ -19726,9 +19380,8 @@
                 </a:tc>
                 <a:tc>
                   <a:txBody>
-                    <a:bodyPr lIns="36000" tIns="36000" rIns="36000" bIns="36000" anchor="t">
-                      <a:noAutofit/>
-                    </a:bodyPr>
+                    <a:bodyPr/>
+                    <a:lstStyle/>
                     <a:p>
                       <a:r>
                         <a:rPr lang="ru-RU" sz="1000" b="0" u="none" strike="noStrike">
@@ -19741,17 +19394,9 @@
                         </a:rPr>
                         <a:t>Развёртывание серверной части, интеграция с БД, аутентификация и права доступа</a:t>
                       </a:r>
-                      <a:endParaRPr lang="ru-RU" sz="1000" b="0" u="none" strike="noStrike">
-                        <a:solidFill>
-                          <a:srgbClr val="000000"/>
-                        </a:solidFill>
-                        <a:effectLst/>
-                        <a:uFillTx/>
-                        <a:latin typeface="Times New Roman"/>
-                      </a:endParaRPr>
                     </a:p>
                   </a:txBody>
-                  <a:tcPr anchor="t" marL="36000" marR="36000" marT="36000" marB="36000">
+                  <a:tcPr marL="36000" marR="36000" marT="36000" marB="36000">
                     <a:lnL w="7200">
                       <a:solidFill>
                         <a:srgbClr val="666666"/>
@@ -19783,9 +19428,8 @@
                 </a:tc>
                 <a:tc>
                   <a:txBody>
-                    <a:bodyPr lIns="36000" tIns="36000" rIns="36000" bIns="36000" anchor="t">
-                      <a:noAutofit/>
-                    </a:bodyPr>
+                    <a:bodyPr/>
+                    <a:lstStyle/>
                     <a:p>
                       <a:pPr algn="ctr"/>
                       <a:r>
@@ -19799,17 +19443,9 @@
                         </a:rPr>
                         <a:t>Работающий серверный контейнер в локальной сети</a:t>
                       </a:r>
-                      <a:endParaRPr lang="ru-RU" sz="1000" b="0" u="none" strike="noStrike">
-                        <a:solidFill>
-                          <a:srgbClr val="000000"/>
-                        </a:solidFill>
-                        <a:effectLst/>
-                        <a:uFillTx/>
-                        <a:latin typeface="Times New Roman"/>
-                      </a:endParaRPr>
                     </a:p>
                   </a:txBody>
-                  <a:tcPr anchor="t" marL="36000" marR="36000" marT="36000" marB="36000">
+                  <a:tcPr marL="36000" marR="36000" marT="36000" marB="36000">
                     <a:lnL w="7200">
                       <a:solidFill>
                         <a:srgbClr val="666666"/>
@@ -19839,13 +19475,17 @@
                     </a:solidFill>
                   </a:tcPr>
                 </a:tc>
+                <a:extLst>
+                  <a:ext uri="{0D108BD9-81ED-4DB2-BD59-A6C34878D82A}">
+                    <a16:rowId xmlns:a16="http://schemas.microsoft.com/office/drawing/2014/main" val="10003"/>
+                  </a:ext>
+                </a:extLst>
               </a:tr>
               <a:tr h="0">
                 <a:tc>
                   <a:txBody>
-                    <a:bodyPr lIns="36000" tIns="36000" rIns="36000" bIns="36000" anchor="t">
-                      <a:noAutofit/>
-                    </a:bodyPr>
+                    <a:bodyPr/>
+                    <a:lstStyle/>
                     <a:p>
                       <a:pPr algn="ctr"/>
                       <a:r>
@@ -19859,17 +19499,9 @@
                         </a:rPr>
                         <a:t>Разработка клиентского приложения</a:t>
                       </a:r>
-                      <a:endParaRPr lang="ru-RU" sz="1000" b="0" u="none" strike="noStrike">
-                        <a:solidFill>
-                          <a:srgbClr val="000000"/>
-                        </a:solidFill>
-                        <a:effectLst/>
-                        <a:uFillTx/>
-                        <a:latin typeface="Times New Roman"/>
-                      </a:endParaRPr>
                     </a:p>
                   </a:txBody>
-                  <a:tcPr anchor="t" marL="36000" marR="36000" marT="36000" marB="36000">
+                  <a:tcPr marL="36000" marR="36000" marT="36000" marB="36000">
                     <a:lnL w="7200">
                       <a:solidFill>
                         <a:srgbClr val="666666"/>
@@ -19901,9 +19533,8 @@
                 </a:tc>
                 <a:tc>
                   <a:txBody>
-                    <a:bodyPr lIns="36000" tIns="36000" rIns="36000" bIns="36000" anchor="t">
-                      <a:noAutofit/>
-                    </a:bodyPr>
+                    <a:bodyPr/>
+                    <a:lstStyle/>
                     <a:p>
                       <a:pPr algn="ctr"/>
                       <a:r>
@@ -19917,17 +19548,9 @@
                         </a:rPr>
                         <a:t>8–11</a:t>
                       </a:r>
-                      <a:endParaRPr lang="ru-RU" sz="1000" b="0" u="none" strike="noStrike">
-                        <a:solidFill>
-                          <a:srgbClr val="000000"/>
-                        </a:solidFill>
-                        <a:effectLst/>
-                        <a:uFillTx/>
-                        <a:latin typeface="Times New Roman"/>
-                      </a:endParaRPr>
                     </a:p>
                   </a:txBody>
-                  <a:tcPr anchor="t" marL="36000" marR="36000" marT="36000" marB="36000">
+                  <a:tcPr marL="36000" marR="36000" marT="36000" marB="36000">
                     <a:lnL w="7200">
                       <a:solidFill>
                         <a:srgbClr val="666666"/>
@@ -19959,9 +19582,8 @@
                 </a:tc>
                 <a:tc>
                   <a:txBody>
-                    <a:bodyPr lIns="36000" tIns="36000" rIns="36000" bIns="36000" anchor="t">
-                      <a:noAutofit/>
-                    </a:bodyPr>
+                    <a:bodyPr/>
+                    <a:lstStyle/>
                     <a:p>
                       <a:pPr algn="ctr"/>
                       <a:r>
@@ -19975,17 +19597,9 @@
                         </a:rPr>
                         <a:t> Запланирован</a:t>
                       </a:r>
-                      <a:endParaRPr lang="ru-RU" sz="1000" b="0" u="none" strike="noStrike">
-                        <a:solidFill>
-                          <a:srgbClr val="000000"/>
-                        </a:solidFill>
-                        <a:effectLst/>
-                        <a:uFillTx/>
-                        <a:latin typeface="Times New Roman"/>
-                      </a:endParaRPr>
                     </a:p>
                   </a:txBody>
-                  <a:tcPr anchor="t" marL="36000" marR="36000" marT="36000" marB="36000">
+                  <a:tcPr marL="36000" marR="36000" marT="36000" marB="36000">
                     <a:lnL w="7200">
                       <a:solidFill>
                         <a:srgbClr val="666666"/>
@@ -20017,9 +19631,8 @@
                 </a:tc>
                 <a:tc>
                   <a:txBody>
-                    <a:bodyPr lIns="36000" tIns="36000" rIns="36000" bIns="36000" anchor="t">
-                      <a:noAutofit/>
-                    </a:bodyPr>
+                    <a:bodyPr/>
+                    <a:lstStyle/>
                     <a:p>
                       <a:r>
                         <a:rPr lang="ru-RU" sz="1000" b="0" u="none" strike="noStrike">
@@ -20032,17 +19645,9 @@
                         </a:rPr>
                         <a:t>Интерфейс на Next.js: чат, контакты, отправка файлов, группы, оффлайн-режим</a:t>
                       </a:r>
-                      <a:endParaRPr lang="ru-RU" sz="1000" b="0" u="none" strike="noStrike">
-                        <a:solidFill>
-                          <a:srgbClr val="000000"/>
-                        </a:solidFill>
-                        <a:effectLst/>
-                        <a:uFillTx/>
-                        <a:latin typeface="Times New Roman"/>
-                      </a:endParaRPr>
                     </a:p>
                   </a:txBody>
-                  <a:tcPr anchor="t" marL="36000" marR="36000" marT="36000" marB="36000">
+                  <a:tcPr marL="36000" marR="36000" marT="36000" marB="36000">
                     <a:lnL w="7200">
                       <a:solidFill>
                         <a:srgbClr val="666666"/>
@@ -20074,9 +19679,8 @@
                 </a:tc>
                 <a:tc>
                   <a:txBody>
-                    <a:bodyPr lIns="36000" tIns="36000" rIns="36000" bIns="36000" anchor="t">
-                      <a:noAutofit/>
-                    </a:bodyPr>
+                    <a:bodyPr/>
+                    <a:lstStyle/>
                     <a:p>
                       <a:pPr algn="ctr"/>
                       <a:r>
@@ -20090,17 +19694,9 @@
                         </a:rPr>
                         <a:t>Клиентское приложение для работы внутри сети</a:t>
                       </a:r>
-                      <a:endParaRPr lang="ru-RU" sz="1000" b="0" u="none" strike="noStrike">
-                        <a:solidFill>
-                          <a:srgbClr val="000000"/>
-                        </a:solidFill>
-                        <a:effectLst/>
-                        <a:uFillTx/>
-                        <a:latin typeface="Times New Roman"/>
-                      </a:endParaRPr>
                     </a:p>
                   </a:txBody>
-                  <a:tcPr anchor="t" marL="36000" marR="36000" marT="36000" marB="36000">
+                  <a:tcPr marL="36000" marR="36000" marT="36000" marB="36000">
                     <a:lnL w="7200">
                       <a:solidFill>
                         <a:srgbClr val="666666"/>
@@ -20130,6 +19726,11 @@
                     </a:solidFill>
                   </a:tcPr>
                 </a:tc>
+                <a:extLst>
+                  <a:ext uri="{0D108BD9-81ED-4DB2-BD59-A6C34878D82A}">
+                    <a16:rowId xmlns:a16="http://schemas.microsoft.com/office/drawing/2014/main" val="10004"/>
+                  </a:ext>
+                </a:extLst>
               </a:tr>
             </a:tbl>
           </a:graphicData>
@@ -20137,31 +19738,60 @@
       </p:graphicFrame>
       <p:graphicFrame>
         <p:nvGraphicFramePr>
-          <p:cNvPr id="145" name=""/>
+          <p:cNvPr id="145" name="Таблица 144"/>
           <p:cNvGraphicFramePr/>
           <p:nvPr/>
         </p:nvGraphicFramePr>
         <p:xfrm>
           <a:off x="5109840" y="765720"/>
-          <a:ext cx="3359880" cy="1659240"/>
+          <a:ext cx="3359880" cy="4063320"/>
         </p:xfrm>
         <a:graphic>
           <a:graphicData uri="http://schemas.openxmlformats.org/drawingml/2006/table">
             <a:tbl>
               <a:tblPr/>
               <a:tblGrid>
-                <a:gridCol w="812880"/>
-                <a:gridCol w="377280"/>
-                <a:gridCol w="637920"/>
-                <a:gridCol w="812880"/>
-                <a:gridCol w="718920"/>
+                <a:gridCol w="812880">
+                  <a:extLst>
+                    <a:ext uri="{9D8B030D-6E8A-4147-A177-3AD203B41FA5}">
+                      <a16:colId xmlns:a16="http://schemas.microsoft.com/office/drawing/2014/main" val="20000"/>
+                    </a:ext>
+                  </a:extLst>
+                </a:gridCol>
+                <a:gridCol w="377280">
+                  <a:extLst>
+                    <a:ext uri="{9D8B030D-6E8A-4147-A177-3AD203B41FA5}">
+                      <a16:colId xmlns:a16="http://schemas.microsoft.com/office/drawing/2014/main" val="20001"/>
+                    </a:ext>
+                  </a:extLst>
+                </a:gridCol>
+                <a:gridCol w="637920">
+                  <a:extLst>
+                    <a:ext uri="{9D8B030D-6E8A-4147-A177-3AD203B41FA5}">
+                      <a16:colId xmlns:a16="http://schemas.microsoft.com/office/drawing/2014/main" val="20002"/>
+                    </a:ext>
+                  </a:extLst>
+                </a:gridCol>
+                <a:gridCol w="812880">
+                  <a:extLst>
+                    <a:ext uri="{9D8B030D-6E8A-4147-A177-3AD203B41FA5}">
+                      <a16:colId xmlns:a16="http://schemas.microsoft.com/office/drawing/2014/main" val="20003"/>
+                    </a:ext>
+                  </a:extLst>
+                </a:gridCol>
+                <a:gridCol w="718920">
+                  <a:extLst>
+                    <a:ext uri="{9D8B030D-6E8A-4147-A177-3AD203B41FA5}">
+                      <a16:colId xmlns:a16="http://schemas.microsoft.com/office/drawing/2014/main" val="20004"/>
+                    </a:ext>
+                  </a:extLst>
+                </a:gridCol>
               </a:tblGrid>
               <a:tr h="346320">
                 <a:tc>
                   <a:txBody>
-                    <a:bodyPr lIns="36000" tIns="36000" rIns="36000" bIns="36000" anchor="t">
-                      <a:noAutofit/>
-                    </a:bodyPr>
+                    <a:bodyPr/>
+                    <a:lstStyle/>
                     <a:p>
                       <a:pPr algn="ctr"/>
                       <a:r>
@@ -20175,17 +19805,9 @@
                         </a:rPr>
                         <a:t>Этап</a:t>
                       </a:r>
-                      <a:endParaRPr lang="ru-RU" sz="900" b="1" u="none" strike="noStrike">
-                        <a:solidFill>
-                          <a:srgbClr val="FFFFFF"/>
-                        </a:solidFill>
-                        <a:effectLst/>
-                        <a:uFillTx/>
-                        <a:latin typeface="Times New Roman"/>
-                      </a:endParaRPr>
                     </a:p>
                   </a:txBody>
-                  <a:tcPr anchor="t" marL="36000" marR="36000" marT="36000" marB="36000">
+                  <a:tcPr marL="36000" marR="36000" marT="36000" marB="36000">
                     <a:lnL w="7200">
                       <a:solidFill>
                         <a:srgbClr val="666666"/>
@@ -20217,9 +19839,8 @@
                 </a:tc>
                 <a:tc>
                   <a:txBody>
-                    <a:bodyPr lIns="36000" tIns="36000" rIns="36000" bIns="36000" anchor="t">
-                      <a:noAutofit/>
-                    </a:bodyPr>
+                    <a:bodyPr/>
+                    <a:lstStyle/>
                     <a:p>
                       <a:pPr algn="ctr"/>
                       <a:r>
@@ -20233,17 +19854,9 @@
                         </a:rPr>
                         <a:t>Недели</a:t>
                       </a:r>
-                      <a:endParaRPr lang="ru-RU" sz="900" b="1" u="none" strike="noStrike">
-                        <a:solidFill>
-                          <a:srgbClr val="FFFFFF"/>
-                        </a:solidFill>
-                        <a:effectLst/>
-                        <a:uFillTx/>
-                        <a:latin typeface="Times New Roman"/>
-                      </a:endParaRPr>
                     </a:p>
                   </a:txBody>
-                  <a:tcPr anchor="t" marL="36000" marR="36000" marT="36000" marB="36000">
+                  <a:tcPr marL="36000" marR="36000" marT="36000" marB="36000">
                     <a:lnL w="7200">
                       <a:solidFill>
                         <a:srgbClr val="666666"/>
@@ -20275,9 +19888,8 @@
                 </a:tc>
                 <a:tc>
                   <a:txBody>
-                    <a:bodyPr lIns="36000" tIns="36000" rIns="36000" bIns="36000" anchor="t">
-                      <a:noAutofit/>
-                    </a:bodyPr>
+                    <a:bodyPr/>
+                    <a:lstStyle/>
                     <a:p>
                       <a:pPr algn="ctr"/>
                       <a:r>
@@ -20291,17 +19903,9 @@
                         </a:rPr>
                         <a:t>Статус</a:t>
                       </a:r>
-                      <a:endParaRPr lang="ru-RU" sz="900" b="1" u="none" strike="noStrike">
-                        <a:solidFill>
-                          <a:srgbClr val="FFFFFF"/>
-                        </a:solidFill>
-                        <a:effectLst/>
-                        <a:uFillTx/>
-                        <a:latin typeface="Times New Roman"/>
-                      </a:endParaRPr>
                     </a:p>
                   </a:txBody>
-                  <a:tcPr anchor="t" marL="36000" marR="36000" marT="36000" marB="36000">
+                  <a:tcPr marL="36000" marR="36000" marT="36000" marB="36000">
                     <a:lnL w="7200">
                       <a:solidFill>
                         <a:srgbClr val="666666"/>
@@ -20333,9 +19937,8 @@
                 </a:tc>
                 <a:tc>
                   <a:txBody>
-                    <a:bodyPr lIns="36000" tIns="36000" rIns="36000" bIns="36000" anchor="t">
-                      <a:noAutofit/>
-                    </a:bodyPr>
+                    <a:bodyPr/>
+                    <a:lstStyle/>
                     <a:p>
                       <a:pPr algn="ctr"/>
                       <a:r>
@@ -20349,17 +19952,9 @@
                         </a:rPr>
                         <a:t>Содержание работ</a:t>
                       </a:r>
-                      <a:endParaRPr lang="ru-RU" sz="900" b="1" u="none" strike="noStrike">
-                        <a:solidFill>
-                          <a:srgbClr val="FFFFFF"/>
-                        </a:solidFill>
-                        <a:effectLst/>
-                        <a:uFillTx/>
-                        <a:latin typeface="Times New Roman"/>
-                      </a:endParaRPr>
                     </a:p>
                   </a:txBody>
-                  <a:tcPr anchor="t" marL="36000" marR="36000" marT="36000" marB="36000">
+                  <a:tcPr marL="36000" marR="36000" marT="36000" marB="36000">
                     <a:lnL w="7200">
                       <a:solidFill>
                         <a:srgbClr val="666666"/>
@@ -20391,9 +19986,8 @@
                 </a:tc>
                 <a:tc>
                   <a:txBody>
-                    <a:bodyPr lIns="36000" tIns="36000" rIns="36000" bIns="36000" anchor="t">
-                      <a:noAutofit/>
-                    </a:bodyPr>
+                    <a:bodyPr/>
+                    <a:lstStyle/>
                     <a:p>
                       <a:pPr algn="ctr"/>
                       <a:r>
@@ -20407,17 +20001,9 @@
                         </a:rPr>
                         <a:t>Результат</a:t>
                       </a:r>
-                      <a:endParaRPr lang="ru-RU" sz="900" b="1" u="none" strike="noStrike">
-                        <a:solidFill>
-                          <a:srgbClr val="FFFFFF"/>
-                        </a:solidFill>
-                        <a:effectLst/>
-                        <a:uFillTx/>
-                        <a:latin typeface="Times New Roman"/>
-                      </a:endParaRPr>
                     </a:p>
                   </a:txBody>
-                  <a:tcPr anchor="t" marL="36000" marR="36000" marT="36000" marB="36000">
+                  <a:tcPr marL="36000" marR="36000" marT="36000" marB="36000">
                     <a:lnL w="7200">
                       <a:solidFill>
                         <a:srgbClr val="666666"/>
@@ -20447,13 +20033,17 @@
                     </a:solidFill>
                   </a:tcPr>
                 </a:tc>
+                <a:extLst>
+                  <a:ext uri="{0D108BD9-81ED-4DB2-BD59-A6C34878D82A}">
+                    <a16:rowId xmlns:a16="http://schemas.microsoft.com/office/drawing/2014/main" val="10000"/>
+                  </a:ext>
+                </a:extLst>
               </a:tr>
               <a:tr h="0">
                 <a:tc>
                   <a:txBody>
-                    <a:bodyPr lIns="36000" tIns="36000" rIns="36000" bIns="36000" anchor="t">
-                      <a:noAutofit/>
-                    </a:bodyPr>
+                    <a:bodyPr/>
+                    <a:lstStyle/>
                     <a:p>
                       <a:pPr algn="ctr"/>
                       <a:r>
@@ -20467,17 +20057,9 @@
                         </a:rPr>
                         <a:t>Интеграция и шифрование</a:t>
                       </a:r>
-                      <a:endParaRPr lang="ru-RU" sz="900" b="0" u="none" strike="noStrike">
-                        <a:solidFill>
-                          <a:srgbClr val="000000"/>
-                        </a:solidFill>
-                        <a:effectLst/>
-                        <a:uFillTx/>
-                        <a:latin typeface="Times New Roman"/>
-                      </a:endParaRPr>
                     </a:p>
                   </a:txBody>
-                  <a:tcPr anchor="t" marL="36000" marR="36000" marT="36000" marB="36000">
+                  <a:tcPr marL="36000" marR="36000" marT="36000" marB="36000">
                     <a:lnL w="7200">
                       <a:solidFill>
                         <a:srgbClr val="666666"/>
@@ -20509,9 +20091,8 @@
                 </a:tc>
                 <a:tc>
                   <a:txBody>
-                    <a:bodyPr lIns="36000" tIns="36000" rIns="36000" bIns="36000" anchor="t">
-                      <a:noAutofit/>
-                    </a:bodyPr>
+                    <a:bodyPr/>
+                    <a:lstStyle/>
                     <a:p>
                       <a:pPr algn="ctr"/>
                       <a:r>
@@ -20525,17 +20106,9 @@
                         </a:rPr>
                         <a:t>11–12</a:t>
                       </a:r>
-                      <a:endParaRPr lang="ru-RU" sz="900" b="0" u="none" strike="noStrike">
-                        <a:solidFill>
-                          <a:srgbClr val="000000"/>
-                        </a:solidFill>
-                        <a:effectLst/>
-                        <a:uFillTx/>
-                        <a:latin typeface="Times New Roman"/>
-                      </a:endParaRPr>
                     </a:p>
                   </a:txBody>
-                  <a:tcPr anchor="t" marL="36000" marR="36000" marT="36000" marB="36000">
+                  <a:tcPr marL="36000" marR="36000" marT="36000" marB="36000">
                     <a:lnL w="7200">
                       <a:solidFill>
                         <a:srgbClr val="666666"/>
@@ -20567,9 +20140,8 @@
                 </a:tc>
                 <a:tc>
                   <a:txBody>
-                    <a:bodyPr lIns="36000" tIns="36000" rIns="36000" bIns="36000" anchor="t">
-                      <a:noAutofit/>
-                    </a:bodyPr>
+                    <a:bodyPr/>
+                    <a:lstStyle/>
                     <a:p>
                       <a:pPr algn="ctr"/>
                       <a:r>
@@ -20583,17 +20155,9 @@
                         </a:rPr>
                         <a:t> Запланирован</a:t>
                       </a:r>
-                      <a:endParaRPr lang="ru-RU" sz="900" b="0" u="none" strike="noStrike">
-                        <a:solidFill>
-                          <a:srgbClr val="000000"/>
-                        </a:solidFill>
-                        <a:effectLst/>
-                        <a:uFillTx/>
-                        <a:latin typeface="Times New Roman"/>
-                      </a:endParaRPr>
                     </a:p>
                   </a:txBody>
-                  <a:tcPr anchor="t" marL="36000" marR="36000" marT="36000" marB="36000">
+                  <a:tcPr marL="36000" marR="36000" marT="36000" marB="36000">
                     <a:lnL w="7200">
                       <a:solidFill>
                         <a:srgbClr val="666666"/>
@@ -20625,9 +20189,8 @@
                 </a:tc>
                 <a:tc>
                   <a:txBody>
-                    <a:bodyPr lIns="36000" tIns="36000" rIns="36000" bIns="36000" anchor="t">
-                      <a:noAutofit/>
-                    </a:bodyPr>
+                    <a:bodyPr/>
+                    <a:lstStyle/>
                     <a:p>
                       <a:r>
                         <a:rPr lang="ru-RU" sz="900" b="0" u="none" strike="noStrike">
@@ -20640,17 +20203,9 @@
                         </a:rPr>
                         <a:t>Связка клиента с сервером, базовое шифрование, передача файлов, групповые чаты</a:t>
                       </a:r>
-                      <a:endParaRPr lang="ru-RU" sz="900" b="0" u="none" strike="noStrike">
-                        <a:solidFill>
-                          <a:srgbClr val="000000"/>
-                        </a:solidFill>
-                        <a:effectLst/>
-                        <a:uFillTx/>
-                        <a:latin typeface="Times New Roman"/>
-                      </a:endParaRPr>
                     </a:p>
                   </a:txBody>
-                  <a:tcPr anchor="t" marL="36000" marR="36000" marT="36000" marB="36000">
+                  <a:tcPr marL="36000" marR="36000" marT="36000" marB="36000">
                     <a:lnL w="7200">
                       <a:solidFill>
                         <a:srgbClr val="666666"/>
@@ -20682,9 +20237,8 @@
                 </a:tc>
                 <a:tc>
                   <a:txBody>
-                    <a:bodyPr lIns="36000" tIns="36000" rIns="36000" bIns="36000" anchor="t">
-                      <a:noAutofit/>
-                    </a:bodyPr>
+                    <a:bodyPr/>
+                    <a:lstStyle/>
                     <a:p>
                       <a:pPr algn="ctr"/>
                       <a:r>
@@ -20698,17 +20252,9 @@
                         </a:rPr>
                         <a:t>Интегрированный прототип с шифрованием</a:t>
                       </a:r>
-                      <a:endParaRPr lang="ru-RU" sz="900" b="0" u="none" strike="noStrike">
-                        <a:solidFill>
-                          <a:srgbClr val="000000"/>
-                        </a:solidFill>
-                        <a:effectLst/>
-                        <a:uFillTx/>
-                        <a:latin typeface="Times New Roman"/>
-                      </a:endParaRPr>
                     </a:p>
                   </a:txBody>
-                  <a:tcPr anchor="t" marL="36000" marR="36000" marT="36000" marB="36000">
+                  <a:tcPr marL="36000" marR="36000" marT="36000" marB="36000">
                     <a:lnL w="7200">
                       <a:solidFill>
                         <a:srgbClr val="666666"/>
@@ -20738,13 +20284,17 @@
                     </a:solidFill>
                   </a:tcPr>
                 </a:tc>
+                <a:extLst>
+                  <a:ext uri="{0D108BD9-81ED-4DB2-BD59-A6C34878D82A}">
+                    <a16:rowId xmlns:a16="http://schemas.microsoft.com/office/drawing/2014/main" val="10001"/>
+                  </a:ext>
+                </a:extLst>
               </a:tr>
               <a:tr h="0">
                 <a:tc>
                   <a:txBody>
-                    <a:bodyPr lIns="36000" tIns="36000" rIns="36000" bIns="36000" anchor="t">
-                      <a:noAutofit/>
-                    </a:bodyPr>
+                    <a:bodyPr/>
+                    <a:lstStyle/>
                     <a:p>
                       <a:pPr algn="ctr"/>
                       <a:r>
@@ -20758,17 +20308,9 @@
                         </a:rPr>
                         <a:t>Тестирование и отладка</a:t>
                       </a:r>
-                      <a:endParaRPr lang="ru-RU" sz="900" b="0" u="none" strike="noStrike">
-                        <a:solidFill>
-                          <a:srgbClr val="000000"/>
-                        </a:solidFill>
-                        <a:effectLst/>
-                        <a:uFillTx/>
-                        <a:latin typeface="Times New Roman"/>
-                      </a:endParaRPr>
                     </a:p>
                   </a:txBody>
-                  <a:tcPr anchor="t" marL="36000" marR="36000" marT="36000" marB="36000">
+                  <a:tcPr marL="36000" marR="36000" marT="36000" marB="36000">
                     <a:lnL w="7200">
                       <a:solidFill>
                         <a:srgbClr val="666666"/>
@@ -20800,9 +20342,8 @@
                 </a:tc>
                 <a:tc>
                   <a:txBody>
-                    <a:bodyPr lIns="36000" tIns="36000" rIns="36000" bIns="36000" anchor="t">
-                      <a:noAutofit/>
-                    </a:bodyPr>
+                    <a:bodyPr/>
+                    <a:lstStyle/>
                     <a:p>
                       <a:pPr algn="ctr"/>
                       <a:r>
@@ -20816,17 +20357,9 @@
                         </a:rPr>
                         <a:t>12–14</a:t>
                       </a:r>
-                      <a:endParaRPr lang="ru-RU" sz="900" b="0" u="none" strike="noStrike">
-                        <a:solidFill>
-                          <a:srgbClr val="000000"/>
-                        </a:solidFill>
-                        <a:effectLst/>
-                        <a:uFillTx/>
-                        <a:latin typeface="Times New Roman"/>
-                      </a:endParaRPr>
                     </a:p>
                   </a:txBody>
-                  <a:tcPr anchor="t" marL="36000" marR="36000" marT="36000" marB="36000">
+                  <a:tcPr marL="36000" marR="36000" marT="36000" marB="36000">
                     <a:lnL w="7200">
                       <a:solidFill>
                         <a:srgbClr val="666666"/>
@@ -20858,9 +20391,8 @@
                 </a:tc>
                 <a:tc>
                   <a:txBody>
-                    <a:bodyPr lIns="36000" tIns="36000" rIns="36000" bIns="36000" anchor="t">
-                      <a:noAutofit/>
-                    </a:bodyPr>
+                    <a:bodyPr/>
+                    <a:lstStyle/>
                     <a:p>
                       <a:pPr algn="ctr"/>
                       <a:r>
@@ -20874,17 +20406,9 @@
                         </a:rPr>
                         <a:t> Запланирован</a:t>
                       </a:r>
-                      <a:endParaRPr lang="ru-RU" sz="900" b="0" u="none" strike="noStrike">
-                        <a:solidFill>
-                          <a:srgbClr val="000000"/>
-                        </a:solidFill>
-                        <a:effectLst/>
-                        <a:uFillTx/>
-                        <a:latin typeface="Times New Roman"/>
-                      </a:endParaRPr>
                     </a:p>
                   </a:txBody>
-                  <a:tcPr anchor="t" marL="36000" marR="36000" marT="36000" marB="36000">
+                  <a:tcPr marL="36000" marR="36000" marT="36000" marB="36000">
                     <a:lnL w="7200">
                       <a:solidFill>
                         <a:srgbClr val="666666"/>
@@ -20916,9 +20440,8 @@
                 </a:tc>
                 <a:tc>
                   <a:txBody>
-                    <a:bodyPr lIns="36000" tIns="36000" rIns="36000" bIns="36000" anchor="t">
-                      <a:noAutofit/>
-                    </a:bodyPr>
+                    <a:bodyPr/>
+                    <a:lstStyle/>
                     <a:p>
                       <a:r>
                         <a:rPr lang="ru-RU" sz="900" b="0" u="none" strike="noStrike">
@@ -20931,17 +20454,9 @@
                         </a:rPr>
                         <a:t>Функциональное тестирование, исправление багов</a:t>
                       </a:r>
-                      <a:endParaRPr lang="ru-RU" sz="900" b="0" u="none" strike="noStrike">
-                        <a:solidFill>
-                          <a:srgbClr val="000000"/>
-                        </a:solidFill>
-                        <a:effectLst/>
-                        <a:uFillTx/>
-                        <a:latin typeface="Times New Roman"/>
-                      </a:endParaRPr>
                     </a:p>
                   </a:txBody>
-                  <a:tcPr anchor="t" marL="36000" marR="36000" marT="36000" marB="36000">
+                  <a:tcPr marL="36000" marR="36000" marT="36000" marB="36000">
                     <a:lnL w="7200">
                       <a:solidFill>
                         <a:srgbClr val="666666"/>
@@ -20973,9 +20488,8 @@
                 </a:tc>
                 <a:tc>
                   <a:txBody>
-                    <a:bodyPr lIns="36000" tIns="36000" rIns="36000" bIns="36000" anchor="t">
-                      <a:noAutofit/>
-                    </a:bodyPr>
+                    <a:bodyPr/>
+                    <a:lstStyle/>
                     <a:p>
                       <a:pPr algn="ctr"/>
                       <a:r>
@@ -20989,17 +20503,9 @@
                         </a:rPr>
                         <a:t>Отчёт о тестировании, стабильный прототип</a:t>
                       </a:r>
-                      <a:endParaRPr lang="ru-RU" sz="900" b="0" u="none" strike="noStrike">
-                        <a:solidFill>
-                          <a:srgbClr val="000000"/>
-                        </a:solidFill>
-                        <a:effectLst/>
-                        <a:uFillTx/>
-                        <a:latin typeface="Times New Roman"/>
-                      </a:endParaRPr>
                     </a:p>
                   </a:txBody>
-                  <a:tcPr anchor="t" marL="36000" marR="36000" marT="36000" marB="36000">
+                  <a:tcPr marL="36000" marR="36000" marT="36000" marB="36000">
                     <a:lnL w="7200">
                       <a:solidFill>
                         <a:srgbClr val="666666"/>
@@ -21029,13 +20535,17 @@
                     </a:solidFill>
                   </a:tcPr>
                 </a:tc>
+                <a:extLst>
+                  <a:ext uri="{0D108BD9-81ED-4DB2-BD59-A6C34878D82A}">
+                    <a16:rowId xmlns:a16="http://schemas.microsoft.com/office/drawing/2014/main" val="10002"/>
+                  </a:ext>
+                </a:extLst>
               </a:tr>
               <a:tr h="0">
                 <a:tc>
                   <a:txBody>
-                    <a:bodyPr lIns="36000" tIns="36000" rIns="36000" bIns="36000" anchor="t">
-                      <a:noAutofit/>
-                    </a:bodyPr>
+                    <a:bodyPr/>
+                    <a:lstStyle/>
                     <a:p>
                       <a:pPr algn="ctr"/>
                       <a:r>
@@ -21049,17 +20559,9 @@
                         </a:rPr>
                         <a:t>Подготовка демонстрации</a:t>
                       </a:r>
-                      <a:endParaRPr lang="ru-RU" sz="900" b="0" u="none" strike="noStrike">
-                        <a:solidFill>
-                          <a:srgbClr val="000000"/>
-                        </a:solidFill>
-                        <a:effectLst/>
-                        <a:uFillTx/>
-                        <a:latin typeface="Times New Roman"/>
-                      </a:endParaRPr>
                     </a:p>
                   </a:txBody>
-                  <a:tcPr anchor="t" marL="36000" marR="36000" marT="36000" marB="36000">
+                  <a:tcPr marL="36000" marR="36000" marT="36000" marB="36000">
                     <a:lnL w="7200">
                       <a:solidFill>
                         <a:srgbClr val="666666"/>
@@ -21091,9 +20593,8 @@
                 </a:tc>
                 <a:tc>
                   <a:txBody>
-                    <a:bodyPr lIns="36000" tIns="36000" rIns="36000" bIns="36000" anchor="t">
-                      <a:noAutofit/>
-                    </a:bodyPr>
+                    <a:bodyPr/>
+                    <a:lstStyle/>
                     <a:p>
                       <a:pPr algn="ctr"/>
                       <a:r>
@@ -21107,17 +20608,9 @@
                         </a:rPr>
                         <a:t>15</a:t>
                       </a:r>
-                      <a:endParaRPr lang="ru-RU" sz="900" b="0" u="none" strike="noStrike">
-                        <a:solidFill>
-                          <a:srgbClr val="000000"/>
-                        </a:solidFill>
-                        <a:effectLst/>
-                        <a:uFillTx/>
-                        <a:latin typeface="Times New Roman"/>
-                      </a:endParaRPr>
                     </a:p>
                   </a:txBody>
-                  <a:tcPr anchor="t" marL="36000" marR="36000" marT="36000" marB="36000">
+                  <a:tcPr marL="36000" marR="36000" marT="36000" marB="36000">
                     <a:lnL w="7200">
                       <a:solidFill>
                         <a:srgbClr val="666666"/>
@@ -21149,9 +20642,8 @@
                 </a:tc>
                 <a:tc>
                   <a:txBody>
-                    <a:bodyPr lIns="36000" tIns="36000" rIns="36000" bIns="36000" anchor="t">
-                      <a:noAutofit/>
-                    </a:bodyPr>
+                    <a:bodyPr/>
+                    <a:lstStyle/>
                     <a:p>
                       <a:pPr algn="ctr"/>
                       <a:r>
@@ -21165,17 +20657,9 @@
                         </a:rPr>
                         <a:t> Запланирован</a:t>
                       </a:r>
-                      <a:endParaRPr lang="ru-RU" sz="900" b="0" u="none" strike="noStrike">
-                        <a:solidFill>
-                          <a:srgbClr val="000000"/>
-                        </a:solidFill>
-                        <a:effectLst/>
-                        <a:uFillTx/>
-                        <a:latin typeface="Times New Roman"/>
-                      </a:endParaRPr>
                     </a:p>
                   </a:txBody>
-                  <a:tcPr anchor="t" marL="36000" marR="36000" marT="36000" marB="36000">
+                  <a:tcPr marL="36000" marR="36000" marT="36000" marB="36000">
                     <a:lnL w="7200">
                       <a:solidFill>
                         <a:srgbClr val="666666"/>
@@ -21207,9 +20691,8 @@
                 </a:tc>
                 <a:tc>
                   <a:txBody>
-                    <a:bodyPr lIns="36000" tIns="36000" rIns="36000" bIns="36000" anchor="t">
-                      <a:noAutofit/>
-                    </a:bodyPr>
+                    <a:bodyPr/>
+                    <a:lstStyle/>
                     <a:p>
                       <a:r>
                         <a:rPr lang="ru-RU" sz="900" b="0" u="none" strike="noStrike">
@@ -21222,17 +20705,9 @@
                         </a:rPr>
                         <a:t>Развёртывание на изолированном стенде, сценарий демо, презентация</a:t>
                       </a:r>
-                      <a:endParaRPr lang="ru-RU" sz="900" b="0" u="none" strike="noStrike">
-                        <a:solidFill>
-                          <a:srgbClr val="000000"/>
-                        </a:solidFill>
-                        <a:effectLst/>
-                        <a:uFillTx/>
-                        <a:latin typeface="Times New Roman"/>
-                      </a:endParaRPr>
                     </a:p>
                   </a:txBody>
-                  <a:tcPr anchor="t" marL="36000" marR="36000" marT="36000" marB="36000">
+                  <a:tcPr marL="36000" marR="36000" marT="36000" marB="36000">
                     <a:lnL w="7200">
                       <a:solidFill>
                         <a:srgbClr val="666666"/>
@@ -21264,9 +20739,8 @@
                 </a:tc>
                 <a:tc>
                   <a:txBody>
-                    <a:bodyPr lIns="36000" tIns="36000" rIns="36000" bIns="36000" anchor="t">
-                      <a:noAutofit/>
-                    </a:bodyPr>
+                    <a:bodyPr/>
+                    <a:lstStyle/>
                     <a:p>
                       <a:pPr algn="ctr"/>
                       <a:r>
@@ -21280,17 +20754,9 @@
                         </a:rPr>
                         <a:t>Демо-стенд, презентация</a:t>
                       </a:r>
-                      <a:endParaRPr lang="ru-RU" sz="900" b="0" u="none" strike="noStrike">
-                        <a:solidFill>
-                          <a:srgbClr val="000000"/>
-                        </a:solidFill>
-                        <a:effectLst/>
-                        <a:uFillTx/>
-                        <a:latin typeface="Times New Roman"/>
-                      </a:endParaRPr>
                     </a:p>
                   </a:txBody>
-                  <a:tcPr anchor="t" marL="36000" marR="36000" marT="36000" marB="36000">
+                  <a:tcPr marL="36000" marR="36000" marT="36000" marB="36000">
                     <a:lnL w="7200">
                       <a:solidFill>
                         <a:srgbClr val="666666"/>
@@ -21320,13 +20786,17 @@
                     </a:solidFill>
                   </a:tcPr>
                 </a:tc>
+                <a:extLst>
+                  <a:ext uri="{0D108BD9-81ED-4DB2-BD59-A6C34878D82A}">
+                    <a16:rowId xmlns:a16="http://schemas.microsoft.com/office/drawing/2014/main" val="10003"/>
+                  </a:ext>
+                </a:extLst>
               </a:tr>
               <a:tr h="0">
                 <a:tc>
                   <a:txBody>
-                    <a:bodyPr lIns="36000" tIns="36000" rIns="36000" bIns="36000" anchor="t">
-                      <a:noAutofit/>
-                    </a:bodyPr>
+                    <a:bodyPr/>
+                    <a:lstStyle/>
                     <a:p>
                       <a:pPr algn="ctr"/>
                       <a:r>
@@ -21340,17 +20810,9 @@
                         </a:rPr>
                         <a:t>Защита прототипа</a:t>
                       </a:r>
-                      <a:endParaRPr lang="ru-RU" sz="900" b="0" u="none" strike="noStrike">
-                        <a:solidFill>
-                          <a:srgbClr val="000000"/>
-                        </a:solidFill>
-                        <a:effectLst/>
-                        <a:uFillTx/>
-                        <a:latin typeface="Times New Roman"/>
-                      </a:endParaRPr>
                     </a:p>
                   </a:txBody>
-                  <a:tcPr anchor="t" marL="36000" marR="36000" marT="36000" marB="36000">
+                  <a:tcPr marL="36000" marR="36000" marT="36000" marB="36000">
                     <a:lnL w="7200">
                       <a:solidFill>
                         <a:srgbClr val="666666"/>
@@ -21382,9 +20844,8 @@
                 </a:tc>
                 <a:tc>
                   <a:txBody>
-                    <a:bodyPr lIns="36000" tIns="36000" rIns="36000" bIns="36000" anchor="t">
-                      <a:noAutofit/>
-                    </a:bodyPr>
+                    <a:bodyPr/>
+                    <a:lstStyle/>
                     <a:p>
                       <a:pPr algn="ctr"/>
                       <a:r>
@@ -21398,17 +20859,9 @@
                         </a:rPr>
                         <a:t>16</a:t>
                       </a:r>
-                      <a:endParaRPr lang="ru-RU" sz="900" b="0" u="none" strike="noStrike">
-                        <a:solidFill>
-                          <a:srgbClr val="000000"/>
-                        </a:solidFill>
-                        <a:effectLst/>
-                        <a:uFillTx/>
-                        <a:latin typeface="Times New Roman"/>
-                      </a:endParaRPr>
                     </a:p>
                   </a:txBody>
-                  <a:tcPr anchor="t" marL="36000" marR="36000" marT="36000" marB="36000">
+                  <a:tcPr marL="36000" marR="36000" marT="36000" marB="36000">
                     <a:lnL w="7200">
                       <a:solidFill>
                         <a:srgbClr val="666666"/>
@@ -21440,9 +20893,8 @@
                 </a:tc>
                 <a:tc>
                   <a:txBody>
-                    <a:bodyPr lIns="36000" tIns="36000" rIns="36000" bIns="36000" anchor="t">
-                      <a:noAutofit/>
-                    </a:bodyPr>
+                    <a:bodyPr/>
+                    <a:lstStyle/>
                     <a:p>
                       <a:pPr algn="ctr"/>
                       <a:r>
@@ -21456,17 +20908,9 @@
                         </a:rPr>
                         <a:t> Запланирован</a:t>
                       </a:r>
-                      <a:endParaRPr lang="ru-RU" sz="900" b="0" u="none" strike="noStrike">
-                        <a:solidFill>
-                          <a:srgbClr val="000000"/>
-                        </a:solidFill>
-                        <a:effectLst/>
-                        <a:uFillTx/>
-                        <a:latin typeface="Times New Roman"/>
-                      </a:endParaRPr>
                     </a:p>
                   </a:txBody>
-                  <a:tcPr anchor="t" marL="36000" marR="36000" marT="36000" marB="36000">
+                  <a:tcPr marL="36000" marR="36000" marT="36000" marB="36000">
                     <a:lnL w="7200">
                       <a:solidFill>
                         <a:srgbClr val="666666"/>
@@ -21498,9 +20942,8 @@
                 </a:tc>
                 <a:tc>
                   <a:txBody>
-                    <a:bodyPr lIns="36000" tIns="36000" rIns="36000" bIns="36000" anchor="t">
-                      <a:noAutofit/>
-                    </a:bodyPr>
+                    <a:bodyPr/>
+                    <a:lstStyle/>
                     <a:p>
                       <a:r>
                         <a:rPr lang="ru-RU" sz="900" b="0" u="none" strike="noStrike">
@@ -21513,17 +20956,9 @@
                         </a:rPr>
                         <a:t>Презентация, сбор обратной связи</a:t>
                       </a:r>
-                      <a:endParaRPr lang="ru-RU" sz="900" b="0" u="none" strike="noStrike">
-                        <a:solidFill>
-                          <a:srgbClr val="000000"/>
-                        </a:solidFill>
-                        <a:effectLst/>
-                        <a:uFillTx/>
-                        <a:latin typeface="Times New Roman"/>
-                      </a:endParaRPr>
                     </a:p>
                   </a:txBody>
-                  <a:tcPr anchor="t" marL="36000" marR="36000" marT="36000" marB="36000">
+                  <a:tcPr marL="36000" marR="36000" marT="36000" marB="36000">
                     <a:lnL w="7200">
                       <a:solidFill>
                         <a:srgbClr val="666666"/>
@@ -21555,9 +20990,8 @@
                 </a:tc>
                 <a:tc>
                   <a:txBody>
-                    <a:bodyPr lIns="36000" tIns="36000" rIns="36000" bIns="36000" anchor="t">
-                      <a:noAutofit/>
-                    </a:bodyPr>
+                    <a:bodyPr/>
+                    <a:lstStyle/>
                     <a:p>
                       <a:pPr algn="ctr"/>
                       <a:r>
@@ -21571,17 +21005,9 @@
                         </a:rPr>
                         <a:t>Защита проекта, план развития</a:t>
                       </a:r>
-                      <a:endParaRPr lang="ru-RU" sz="900" b="0" u="none" strike="noStrike">
-                        <a:solidFill>
-                          <a:srgbClr val="000000"/>
-                        </a:solidFill>
-                        <a:effectLst/>
-                        <a:uFillTx/>
-                        <a:latin typeface="Times New Roman"/>
-                      </a:endParaRPr>
                     </a:p>
                   </a:txBody>
-                  <a:tcPr anchor="t" marL="36000" marR="36000" marT="36000" marB="36000">
+                  <a:tcPr marL="36000" marR="36000" marT="36000" marB="36000">
                     <a:lnL w="7200">
                       <a:solidFill>
                         <a:srgbClr val="666666"/>
@@ -21611,6 +21037,11 @@
                     </a:solidFill>
                   </a:tcPr>
                 </a:tc>
+                <a:extLst>
+                  <a:ext uri="{0D108BD9-81ED-4DB2-BD59-A6C34878D82A}">
+                    <a16:rowId xmlns:a16="http://schemas.microsoft.com/office/drawing/2014/main" val="10004"/>
+                  </a:ext>
+                </a:extLst>
               </a:tr>
             </a:tbl>
           </a:graphicData>
@@ -21618,19 +21049,14 @@
       </p:graphicFrame>
     </p:spTree>
   </p:cSld>
-  <mc:AlternateContent>
-    <mc:Choice Requires="p14">
-      <p:transition spd="slow" p14:dur="2000"/>
-    </mc:Choice>
-    <mc:Fallback>
-      <p:transition spd="slow"/>
-    </mc:Fallback>
-  </mc:AlternateContent>
+  <p:clrMapOvr>
+    <a:masterClrMapping/>
+  </p:clrMapOvr>
 </p:sld>
 </file>
 
 <file path=ppt/theme/theme1.xml><?xml version="1.0" encoding="utf-8"?>
-<a:theme xmlns:a="http://schemas.openxmlformats.org/drawingml/2006/main" xmlns:r="http://schemas.openxmlformats.org/officeDocument/2006/relationships" name="Simple Light">
+<a:theme xmlns:a="http://schemas.openxmlformats.org/drawingml/2006/main" name="Simple Light">
   <a:themeElements>
     <a:clrScheme name="Simple Light">
       <a:dk1>
@@ -21672,7 +21098,7 @@
     </a:clrScheme>
     <a:fontScheme name="Office">
       <a:majorFont>
-        <a:latin typeface="Arial" pitchFamily="0" charset="1"/>
+        <a:latin typeface="Arial"/>
         <a:ea typeface=""/>
         <a:cs typeface=""/>
         <a:font script="Jpan" typeface="ＭＳ Ｐゴシック"/>
@@ -21707,7 +21133,7 @@
         <a:font script="Geor" typeface="Sylfaen"/>
       </a:majorFont>
       <a:minorFont>
-        <a:latin typeface="Arial" pitchFamily="0" charset="1"/>
+        <a:latin typeface="Arial"/>
         <a:ea typeface=""/>
         <a:cs typeface=""/>
         <a:font script="Jpan" typeface="ＭＳ Ｐゴシック"/>
@@ -21766,7 +21192,7 @@
             </a:gs>
           </a:gsLst>
           <a:lin ang="16200000" scaled="1"/>
-          <a:tileRect l="0" t="0" r="0" b="0"/>
+          <a:tileRect/>
         </a:gradFill>
         <a:gradFill>
           <a:gsLst>
@@ -21784,7 +21210,7 @@
             </a:gs>
           </a:gsLst>
           <a:lin ang="16200000" scaled="0"/>
-          <a:tileRect l="0" t="0" r="0" b="0"/>
+          <a:tileRect/>
         </a:gradFill>
       </a:fillStyleLst>
       <a:lnStyleLst>
@@ -21835,7 +21261,7 @@
           <a:path path="circle">
             <a:fillToRect l="50000" t="-80000" r="50000" b="180000"/>
           </a:path>
-          <a:tileRect l="0" t="0" r="0" b="0"/>
+          <a:tileRect/>
         </a:gradFill>
         <a:gradFill>
           <a:gsLst>
@@ -21853,16 +21279,18 @@
           <a:path path="circle">
             <a:fillToRect l="50000" t="50000" r="50000" b="50000"/>
           </a:path>
-          <a:tileRect l="0" t="0" r="0" b="0"/>
+          <a:tileRect/>
         </a:gradFill>
       </a:bgFillStyleLst>
     </a:fmtScheme>
   </a:themeElements>
+  <a:objectDefaults/>
+  <a:extraClrSchemeLst/>
 </a:theme>
 </file>
 
 <file path=ppt/theme/theme2.xml><?xml version="1.0" encoding="utf-8"?>
-<a:theme xmlns:a="http://schemas.openxmlformats.org/drawingml/2006/main" xmlns:r="http://schemas.openxmlformats.org/officeDocument/2006/relationships" name="Тема Office">
+<a:theme xmlns:a="http://schemas.openxmlformats.org/drawingml/2006/main" name="Тема Office">
   <a:themeElements>
     <a:clrScheme name="Стандартная">
       <a:dk1>
@@ -21904,7 +21332,7 @@
     </a:clrScheme>
     <a:fontScheme name="Office">
       <a:majorFont>
-        <a:latin typeface="Arial" pitchFamily="0" charset="1"/>
+        <a:latin typeface="Arial"/>
         <a:ea typeface=""/>
         <a:cs typeface=""/>
         <a:font script="Jpan" typeface="ＭＳ Ｐゴシック"/>
@@ -21939,7 +21367,7 @@
         <a:font script="Geor" typeface="Sylfaen"/>
       </a:majorFont>
       <a:minorFont>
-        <a:latin typeface="Arial" pitchFamily="0" charset="1"/>
+        <a:latin typeface="Arial"/>
         <a:ea typeface=""/>
         <a:cs typeface=""/>
         <a:font script="Jpan" typeface="ＭＳ Ｐゴシック"/>
@@ -21998,7 +21426,7 @@
             </a:gs>
           </a:gsLst>
           <a:lin ang="16200000" scaled="1"/>
-          <a:tileRect l="0" t="0" r="0" b="0"/>
+          <a:tileRect/>
         </a:gradFill>
         <a:gradFill>
           <a:gsLst>
@@ -22016,7 +21444,7 @@
             </a:gs>
           </a:gsLst>
           <a:lin ang="16200000" scaled="0"/>
-          <a:tileRect l="0" t="0" r="0" b="0"/>
+          <a:tileRect/>
         </a:gradFill>
       </a:fillStyleLst>
       <a:lnStyleLst>
@@ -22067,7 +21495,7 @@
           <a:path path="circle">
             <a:fillToRect l="50000" t="-80000" r="50000" b="180000"/>
           </a:path>
-          <a:tileRect l="0" t="0" r="0" b="0"/>
+          <a:tileRect/>
         </a:gradFill>
         <a:gradFill>
           <a:gsLst>
@@ -22085,10 +21513,12 @@
           <a:path path="circle">
             <a:fillToRect l="50000" t="50000" r="50000" b="50000"/>
           </a:path>
-          <a:tileRect l="0" t="0" r="0" b="0"/>
+          <a:tileRect/>
         </a:gradFill>
       </a:bgFillStyleLst>
     </a:fmtScheme>
   </a:themeElements>
+  <a:objectDefaults/>
+  <a:extraClrSchemeLst/>
 </a:theme>
 </file>
--- a/Презентация_Шифр-Связь.pptx
+++ b/Презентация_Шифр-Связь.pptx
@@ -267,6 +267,15 @@
                 <a:latin typeface="Arial"/>
                 <a:ea typeface="Arial"/>
               </a:rPr>
+              <a:pPr indent="0" algn="r">
+                <a:lnSpc>
+                  <a:spcPct val="100000"/>
+                </a:lnSpc>
+                <a:buNone/>
+                <a:tabLst>
+                  <a:tab pos="0" algn="l"/>
+                </a:tabLst>
+              </a:pPr>
               <a:t>‹#›</a:t>
             </a:fld>
             <a:endParaRPr lang="ru-RU" sz="1000" b="0" u="none" strike="noStrike">
@@ -820,6 +829,15 @@
                 <a:latin typeface="Arial"/>
                 <a:ea typeface="Arial"/>
               </a:rPr>
+              <a:pPr indent="0" algn="r">
+                <a:lnSpc>
+                  <a:spcPct val="100000"/>
+                </a:lnSpc>
+                <a:buNone/>
+                <a:tabLst>
+                  <a:tab pos="0" algn="l"/>
+                </a:tabLst>
+              </a:pPr>
               <a:t>‹#›</a:t>
             </a:fld>
             <a:endParaRPr lang="ru-RU" sz="1000" b="0" u="none" strike="noStrike">
@@ -1265,6 +1283,15 @@
                 <a:latin typeface="Arial"/>
                 <a:ea typeface="Arial"/>
               </a:rPr>
+              <a:pPr indent="0" algn="r">
+                <a:lnSpc>
+                  <a:spcPct val="100000"/>
+                </a:lnSpc>
+                <a:buNone/>
+                <a:tabLst>
+                  <a:tab pos="0" algn="l"/>
+                </a:tabLst>
+              </a:pPr>
               <a:t>‹#›</a:t>
             </a:fld>
             <a:endParaRPr lang="ru-RU" sz="1000" b="0" u="none" strike="noStrike">
@@ -1494,6 +1521,15 @@
                 <a:latin typeface="Calibri"/>
                 <a:ea typeface="Calibri"/>
               </a:rPr>
+              <a:pPr indent="0" algn="r">
+                <a:lnSpc>
+                  <a:spcPct val="100000"/>
+                </a:lnSpc>
+                <a:buNone/>
+                <a:tabLst>
+                  <a:tab pos="0" algn="l"/>
+                </a:tabLst>
+              </a:pPr>
               <a:t>‹#›</a:t>
             </a:fld>
             <a:endParaRPr lang="ru-RU" sz="900" b="0" u="none" strike="noStrike">
@@ -2503,6 +2539,15 @@
                 <a:latin typeface="Calibri"/>
                 <a:ea typeface="Calibri"/>
               </a:rPr>
+              <a:pPr indent="0" algn="r">
+                <a:lnSpc>
+                  <a:spcPct val="100000"/>
+                </a:lnSpc>
+                <a:buNone/>
+                <a:tabLst>
+                  <a:tab pos="0" algn="l"/>
+                </a:tabLst>
+              </a:pPr>
               <a:t>‹#›</a:t>
             </a:fld>
             <a:endParaRPr lang="ru-RU" sz="900" b="0" u="none" strike="noStrike">
@@ -3122,6 +3167,15 @@
                 <a:latin typeface="Calibri"/>
                 <a:ea typeface="Calibri"/>
               </a:rPr>
+              <a:pPr indent="0" algn="r">
+                <a:lnSpc>
+                  <a:spcPct val="100000"/>
+                </a:lnSpc>
+                <a:buNone/>
+                <a:tabLst>
+                  <a:tab pos="0" algn="l"/>
+                </a:tabLst>
+              </a:pPr>
               <a:t>‹#›</a:t>
             </a:fld>
             <a:endParaRPr lang="ru-RU" sz="900" b="0" u="none" strike="noStrike">
@@ -3409,6 +3463,15 @@
                 <a:latin typeface="Calibri"/>
                 <a:ea typeface="Calibri"/>
               </a:rPr>
+              <a:pPr indent="0" algn="r">
+                <a:lnSpc>
+                  <a:spcPct val="100000"/>
+                </a:lnSpc>
+                <a:buNone/>
+                <a:tabLst>
+                  <a:tab pos="0" algn="l"/>
+                </a:tabLst>
+              </a:pPr>
               <a:t>‹#›</a:t>
             </a:fld>
             <a:endParaRPr lang="ru-RU" sz="900" b="0" u="none" strike="noStrike">
@@ -4028,6 +4091,15 @@
                 <a:latin typeface="Calibri"/>
                 <a:ea typeface="Calibri"/>
               </a:rPr>
+              <a:pPr indent="0" algn="r">
+                <a:lnSpc>
+                  <a:spcPct val="100000"/>
+                </a:lnSpc>
+                <a:buNone/>
+                <a:tabLst>
+                  <a:tab pos="0" algn="l"/>
+                </a:tabLst>
+              </a:pPr>
               <a:t>‹#›</a:t>
             </a:fld>
             <a:endParaRPr lang="ru-RU" sz="900" b="0" u="none" strike="noStrike">
@@ -4647,6 +4719,15 @@
                 <a:latin typeface="Calibri"/>
                 <a:ea typeface="Calibri"/>
               </a:rPr>
+              <a:pPr indent="0" algn="r">
+                <a:lnSpc>
+                  <a:spcPct val="100000"/>
+                </a:lnSpc>
+                <a:buNone/>
+                <a:tabLst>
+                  <a:tab pos="0" algn="l"/>
+                </a:tabLst>
+              </a:pPr>
               <a:t>‹#›</a:t>
             </a:fld>
             <a:endParaRPr lang="ru-RU" sz="900" b="0" u="none" strike="noStrike">
@@ -5598,6 +5679,15 @@
                 <a:latin typeface="Calibri"/>
                 <a:ea typeface="Calibri"/>
               </a:rPr>
+              <a:pPr indent="0" algn="r">
+                <a:lnSpc>
+                  <a:spcPct val="100000"/>
+                </a:lnSpc>
+                <a:buNone/>
+                <a:tabLst>
+                  <a:tab pos="0" algn="l"/>
+                </a:tabLst>
+              </a:pPr>
               <a:t>‹#›</a:t>
             </a:fld>
             <a:endParaRPr lang="ru-RU" sz="900" b="0" u="none" strike="noStrike">
@@ -7213,6 +7303,15 @@
                 <a:latin typeface="Calibri"/>
                 <a:ea typeface="Calibri"/>
               </a:rPr>
+              <a:pPr indent="0" algn="r">
+                <a:lnSpc>
+                  <a:spcPct val="100000"/>
+                </a:lnSpc>
+                <a:buNone/>
+                <a:tabLst>
+                  <a:tab pos="0" algn="l"/>
+                </a:tabLst>
+              </a:pPr>
               <a:t>‹#›</a:t>
             </a:fld>
             <a:endParaRPr lang="ru-RU" sz="900" b="0" u="none" strike="noStrike">
@@ -7732,6 +7831,15 @@
                 <a:latin typeface="Arial"/>
                 <a:ea typeface="Arial"/>
               </a:rPr>
+              <a:pPr indent="0" algn="r">
+                <a:lnSpc>
+                  <a:spcPct val="100000"/>
+                </a:lnSpc>
+                <a:buNone/>
+                <a:tabLst>
+                  <a:tab pos="0" algn="l"/>
+                </a:tabLst>
+              </a:pPr>
               <a:t>‹#›</a:t>
             </a:fld>
             <a:endParaRPr lang="ru-RU" sz="1000" b="0" u="none" strike="noStrike">
@@ -8019,6 +8127,15 @@
                 <a:latin typeface="Calibri"/>
                 <a:ea typeface="Calibri"/>
               </a:rPr>
+              <a:pPr indent="0" algn="r">
+                <a:lnSpc>
+                  <a:spcPct val="100000"/>
+                </a:lnSpc>
+                <a:buNone/>
+                <a:tabLst>
+                  <a:tab pos="0" algn="l"/>
+                </a:tabLst>
+              </a:pPr>
               <a:t>‹#›</a:t>
             </a:fld>
             <a:endParaRPr lang="ru-RU" sz="900" b="0" u="none" strike="noStrike">
@@ -8970,6 +9087,15 @@
                 <a:latin typeface="Calibri"/>
                 <a:ea typeface="Calibri"/>
               </a:rPr>
+              <a:pPr indent="0" algn="r">
+                <a:lnSpc>
+                  <a:spcPct val="100000"/>
+                </a:lnSpc>
+                <a:buNone/>
+                <a:tabLst>
+                  <a:tab pos="0" algn="l"/>
+                </a:tabLst>
+              </a:pPr>
               <a:t>‹#›</a:t>
             </a:fld>
             <a:endParaRPr lang="ru-RU" sz="900" b="0" u="none" strike="noStrike">
@@ -9635,6 +9761,15 @@
                 <a:latin typeface="Calibri"/>
                 <a:ea typeface="Calibri"/>
               </a:rPr>
+              <a:pPr indent="0" algn="r">
+                <a:lnSpc>
+                  <a:spcPct val="100000"/>
+                </a:lnSpc>
+                <a:buNone/>
+                <a:tabLst>
+                  <a:tab pos="0" algn="l"/>
+                </a:tabLst>
+              </a:pPr>
               <a:t>‹#›</a:t>
             </a:fld>
             <a:endParaRPr lang="ru-RU" sz="900" b="0" u="none" strike="noStrike">
@@ -9748,6 +9883,15 @@
                 <a:latin typeface="Arial"/>
                 <a:ea typeface="Arial"/>
               </a:rPr>
+              <a:pPr indent="0" algn="r">
+                <a:lnSpc>
+                  <a:spcPct val="100000"/>
+                </a:lnSpc>
+                <a:buNone/>
+                <a:tabLst>
+                  <a:tab pos="0" algn="l"/>
+                </a:tabLst>
+              </a:pPr>
               <a:t>‹#›</a:t>
             </a:fld>
             <a:endParaRPr lang="ru-RU" sz="1000" b="0" u="none" strike="noStrike">
@@ -9919,6 +10063,15 @@
                 <a:latin typeface="Arial"/>
                 <a:ea typeface="Arial"/>
               </a:rPr>
+              <a:pPr indent="0" algn="r">
+                <a:lnSpc>
+                  <a:spcPct val="100000"/>
+                </a:lnSpc>
+                <a:buNone/>
+                <a:tabLst>
+                  <a:tab pos="0" algn="l"/>
+                </a:tabLst>
+              </a:pPr>
               <a:t>‹#›</a:t>
             </a:fld>
             <a:endParaRPr lang="ru-RU" sz="1000" b="0" u="none" strike="noStrike">
@@ -10422,6 +10575,15 @@
                 <a:latin typeface="Arial"/>
                 <a:ea typeface="Arial"/>
               </a:rPr>
+              <a:pPr indent="0" algn="r">
+                <a:lnSpc>
+                  <a:spcPct val="100000"/>
+                </a:lnSpc>
+                <a:buNone/>
+                <a:tabLst>
+                  <a:tab pos="0" algn="l"/>
+                </a:tabLst>
+              </a:pPr>
               <a:t>‹#›</a:t>
             </a:fld>
             <a:endParaRPr lang="ru-RU" sz="1000" b="0" u="none" strike="noStrike">
@@ -11257,6 +11419,15 @@
                 <a:latin typeface="Arial"/>
                 <a:ea typeface="Arial"/>
               </a:rPr>
+              <a:pPr indent="0" algn="r">
+                <a:lnSpc>
+                  <a:spcPct val="100000"/>
+                </a:lnSpc>
+                <a:buNone/>
+                <a:tabLst>
+                  <a:tab pos="0" algn="l"/>
+                </a:tabLst>
+              </a:pPr>
               <a:t>‹#›</a:t>
             </a:fld>
             <a:endParaRPr lang="ru-RU" sz="1000" b="0" u="none" strike="noStrike">
@@ -11428,6 +11599,15 @@
                 <a:latin typeface="Arial"/>
                 <a:ea typeface="Arial"/>
               </a:rPr>
+              <a:pPr indent="0" algn="r">
+                <a:lnSpc>
+                  <a:spcPct val="100000"/>
+                </a:lnSpc>
+                <a:buNone/>
+                <a:tabLst>
+                  <a:tab pos="0" algn="l"/>
+                </a:tabLst>
+              </a:pPr>
               <a:t>‹#›</a:t>
             </a:fld>
             <a:endParaRPr lang="ru-RU" sz="1000" b="0" u="none" strike="noStrike">
@@ -11931,6 +12111,15 @@
                 <a:latin typeface="Arial"/>
                 <a:ea typeface="Arial"/>
               </a:rPr>
+              <a:pPr indent="0" algn="r">
+                <a:lnSpc>
+                  <a:spcPct val="100000"/>
+                </a:lnSpc>
+                <a:buNone/>
+                <a:tabLst>
+                  <a:tab pos="0" algn="l"/>
+                </a:tabLst>
+              </a:pPr>
               <a:t>‹#›</a:t>
             </a:fld>
             <a:endParaRPr lang="ru-RU" sz="1000" b="0" u="none" strike="noStrike">
@@ -12102,6 +12291,15 @@
                 <a:latin typeface="Arial"/>
                 <a:ea typeface="Arial"/>
               </a:rPr>
+              <a:pPr indent="0" algn="r">
+                <a:lnSpc>
+                  <a:spcPct val="100000"/>
+                </a:lnSpc>
+                <a:buNone/>
+                <a:tabLst>
+                  <a:tab pos="0" algn="l"/>
+                </a:tabLst>
+              </a:pPr>
               <a:t>‹#›</a:t>
             </a:fld>
             <a:endParaRPr lang="ru-RU" sz="1000" b="0" u="none" strike="noStrike">
@@ -13346,6 +13544,10 @@
               </a:rPr>
               <a:t>Волкова Е.А. </a:t>
             </a:r>
+            <a:r>
+              <a:rPr sz="1100"/>
+              <a:t/>
+            </a:r>
             <a:br>
               <a:rPr sz="1100"/>
             </a:br>
@@ -13611,7 +13813,7 @@
           <p:cNvPr id="4" name="TextBox 3">
             <a:extLst>
               <a:ext uri="{FF2B5EF4-FFF2-40B4-BE49-F238E27FC236}">
-                <a16:creationId xmlns:a16="http://schemas.microsoft.com/office/drawing/2014/main" id="{2F5F545D-ABCD-3E32-2E05-529BCB351209}"/>
+                <a16:creationId xmlns="" xmlns:a16="http://schemas.microsoft.com/office/drawing/2014/main" id="{2F5F545D-ABCD-3E32-2E05-529BCB351209}"/>
               </a:ext>
             </a:extLst>
           </p:cNvPr>
@@ -13620,8 +13822,8 @@
         </p:nvSpPr>
         <p:spPr>
           <a:xfrm>
-            <a:off x="360000" y="1261706"/>
-            <a:ext cx="7363313" cy="2862322"/>
+            <a:off x="353072" y="901488"/>
+            <a:ext cx="7363313" cy="3970318"/>
           </a:xfrm>
           <a:prstGeom prst="rect">
             <a:avLst/>
@@ -13666,8 +13868,24 @@
                 <a:effectLst/>
                 <a:latin typeface="Exo 2"/>
               </a:rPr>
-              <a:t>Лидер проекта</a:t>
-            </a:r>
+              <a:t>Лидер </a:t>
+            </a:r>
+            <a:r>
+              <a:rPr lang="ru-RU" b="1" i="0" dirty="0" smtClean="0">
+                <a:solidFill>
+                  <a:srgbClr val="EEF1FF"/>
+                </a:solidFill>
+                <a:effectLst/>
+                <a:latin typeface="Exo 2"/>
+              </a:rPr>
+              <a:t>проекта</a:t>
+            </a:r>
+          </a:p>
+          <a:p>
+            <a:pPr algn="l">
+              <a:buFont typeface="Arial" panose="020B0604020202020204" pitchFamily="34" charset="0"/>
+              <a:buChar char="•"/>
+            </a:pPr>
             <a:endParaRPr lang="ru-RU" b="0" i="0" dirty="0">
               <a:solidFill>
                 <a:srgbClr val="EEF1FF"/>
@@ -13748,8 +13966,29 @@
                 </a:solidFill>
                 <a:latin typeface="Exo 2"/>
               </a:rPr>
-              <a:t>UI )</a:t>
-            </a:r>
+              <a:t>UI </a:t>
+            </a:r>
+            <a:r>
+              <a:rPr lang="en-US" b="1" dirty="0" smtClean="0">
+                <a:solidFill>
+                  <a:srgbClr val="EEF1FF"/>
+                </a:solidFill>
+                <a:latin typeface="Exo 2"/>
+              </a:rPr>
+              <a:t>)</a:t>
+            </a:r>
+            <a:endParaRPr lang="ru-RU" b="1" dirty="0" smtClean="0">
+              <a:solidFill>
+                <a:srgbClr val="EEF1FF"/>
+              </a:solidFill>
+              <a:latin typeface="Exo 2"/>
+            </a:endParaRPr>
+          </a:p>
+          <a:p>
+            <a:pPr algn="l">
+              <a:buFont typeface="Arial" panose="020B0604020202020204" pitchFamily="34" charset="0"/>
+              <a:buChar char="•"/>
+            </a:pPr>
             <a:endParaRPr lang="ru-RU" b="0" i="0" dirty="0">
               <a:solidFill>
                 <a:srgbClr val="EEF1FF"/>
@@ -13791,8 +14030,24 @@
                 <a:effectLst/>
                 <a:latin typeface="Exo 2"/>
               </a:rPr>
-              <a:t>Ответственная за презентацию и дизайн</a:t>
-            </a:r>
+              <a:t>Ответственная за презентацию и </a:t>
+            </a:r>
+            <a:r>
+              <a:rPr lang="ru-RU" b="1" i="0" dirty="0" smtClean="0">
+                <a:solidFill>
+                  <a:srgbClr val="EEF1FF"/>
+                </a:solidFill>
+                <a:effectLst/>
+                <a:latin typeface="Exo 2"/>
+              </a:rPr>
+              <a:t>дизайн</a:t>
+            </a:r>
+          </a:p>
+          <a:p>
+            <a:pPr algn="l">
+              <a:buFont typeface="Arial" panose="020B0604020202020204" pitchFamily="34" charset="0"/>
+              <a:buChar char="•"/>
+            </a:pPr>
             <a:endParaRPr lang="ru-RU" b="0" i="0" dirty="0">
               <a:solidFill>
                 <a:srgbClr val="EEF1FF"/>
@@ -13864,8 +14119,24 @@
                 <a:effectLst/>
                 <a:latin typeface="Exo 2"/>
               </a:rPr>
-              <a:t>ответственный за серверную часть )</a:t>
-            </a:r>
+              <a:t>ответственный за серверную часть </a:t>
+            </a:r>
+            <a:r>
+              <a:rPr lang="ru-RU" b="1" i="0" dirty="0" smtClean="0">
+                <a:solidFill>
+                  <a:srgbClr val="EEF1FF"/>
+                </a:solidFill>
+                <a:effectLst/>
+                <a:latin typeface="Exo 2"/>
+              </a:rPr>
+              <a:t>)</a:t>
+            </a:r>
+          </a:p>
+          <a:p>
+            <a:pPr algn="l">
+              <a:buFont typeface="Arial" panose="020B0604020202020204" pitchFamily="34" charset="0"/>
+              <a:buChar char="•"/>
+            </a:pPr>
             <a:endParaRPr lang="ru-RU" b="0" i="0" dirty="0">
               <a:solidFill>
                 <a:srgbClr val="EEF1FF"/>
@@ -14068,7 +14339,7 @@
           </a:bodyPr>
           <a:lstStyle/>
           <a:p>
-            <a:pPr>
+            <a:pPr algn="just">
               <a:lnSpc>
                 <a:spcPct val="100000"/>
               </a:lnSpc>
@@ -14136,7 +14407,7 @@
           </a:bodyPr>
           <a:lstStyle/>
           <a:p>
-            <a:pPr>
+            <a:pPr algn="just">
               <a:lnSpc>
                 <a:spcPct val="100000"/>
               </a:lnSpc>
@@ -14166,7 +14437,19 @@
                 <a:latin typeface="Arial"/>
                 <a:ea typeface="Arial"/>
               </a:rPr>
-              <a:t> У диспетчеров на данный момент отсутствует безопасный, удобный и быстрый способ обменом информации</a:t>
+              <a:t> У диспетчеров на данный момент отсутствует безопасный, удобный и быстрый способ обменом </a:t>
+            </a:r>
+            <a:r>
+              <a:rPr lang="ru" sz="1800" b="0" u="none" strike="noStrike" dirty="0" smtClean="0">
+                <a:solidFill>
+                  <a:srgbClr val="D6EDFF"/>
+                </a:solidFill>
+                <a:effectLst/>
+                <a:uFillTx/>
+                <a:latin typeface="Arial"/>
+                <a:ea typeface="Arial"/>
+              </a:rPr>
+              <a:t>информации.</a:t>
             </a:r>
             <a:endParaRPr lang="ru-RU" sz="1800" b="0" u="none" strike="noStrike" dirty="0">
               <a:solidFill>
@@ -14216,7 +14499,7 @@
           </a:bodyPr>
           <a:lstStyle/>
           <a:p>
-            <a:pPr>
+            <a:pPr algn="just">
               <a:lnSpc>
                 <a:spcPct val="100000"/>
               </a:lnSpc>
@@ -14339,7 +14622,7 @@
               </a:tabLst>
             </a:pPr>
             <a:r>
-              <a:rPr lang="ru" sz="3000" b="1" u="none" strike="noStrike">
+              <a:rPr lang="ru" sz="3000" b="1" u="none" strike="noStrike" dirty="0">
                 <a:solidFill>
                   <a:srgbClr val="D6EDFF"/>
                 </a:solidFill>
@@ -14350,7 +14633,7 @@
               </a:rPr>
               <a:t>Текущая ситуация</a:t>
             </a:r>
-            <a:endParaRPr lang="ru-RU" sz="3000" b="0" u="none" strike="noStrike">
+            <a:endParaRPr lang="ru-RU" sz="3000" b="0" u="none" strike="noStrike" dirty="0">
               <a:solidFill>
                 <a:srgbClr val="FFFFFF"/>
               </a:solidFill>
@@ -14533,7 +14816,7 @@
         <p:spPr>
           <a:xfrm>
             <a:off x="4674960" y="1177920"/>
-            <a:ext cx="4314600" cy="3632400"/>
+            <a:ext cx="4254295" cy="3632400"/>
           </a:xfrm>
           <a:prstGeom prst="rect">
             <a:avLst/>
@@ -14556,12 +14839,12 @@
           <a:fontRef idx="minor"/>
         </p:style>
         <p:txBody>
-          <a:bodyPr tIns="91440" bIns="91440" anchor="t">
+          <a:bodyPr wrap="square" tIns="91440" bIns="91440" anchor="t">
             <a:spAutoFit/>
           </a:bodyPr>
           <a:lstStyle/>
           <a:p>
-            <a:pPr marL="457200" indent="-330120">
+            <a:pPr marL="457200" indent="-330120" algn="just">
               <a:lnSpc>
                 <a:spcPct val="100000"/>
               </a:lnSpc>
@@ -14593,7 +14876,7 @@
             </a:endParaRPr>
           </a:p>
           <a:p>
-            <a:pPr marL="457200" indent="-330120">
+            <a:pPr marL="457200" indent="-330120" algn="just">
               <a:lnSpc>
                 <a:spcPct val="100000"/>
               </a:lnSpc>
@@ -14625,7 +14908,7 @@
             </a:endParaRPr>
           </a:p>
           <a:p>
-            <a:pPr marL="457200" indent="-330120">
+            <a:pPr marL="457200" indent="-330120" algn="just">
               <a:lnSpc>
                 <a:spcPct val="100000"/>
               </a:lnSpc>
@@ -14657,7 +14940,7 @@
             </a:endParaRPr>
           </a:p>
           <a:p>
-            <a:pPr marL="457200" indent="-330120">
+            <a:pPr marL="457200" indent="-330120" algn="just">
               <a:lnSpc>
                 <a:spcPct val="100000"/>
               </a:lnSpc>
@@ -14689,7 +14972,7 @@
             </a:endParaRPr>
           </a:p>
           <a:p>
-            <a:pPr marL="457200" indent="-330120">
+            <a:pPr marL="457200" indent="-330120" algn="just">
               <a:lnSpc>
                 <a:spcPct val="100000"/>
               </a:lnSpc>
@@ -14721,7 +15004,7 @@
             </a:endParaRPr>
           </a:p>
           <a:p>
-            <a:pPr marL="457200" indent="-330120">
+            <a:pPr marL="457200" indent="-330120" algn="just">
               <a:lnSpc>
                 <a:spcPct val="100000"/>
               </a:lnSpc>
@@ -14942,14 +15225,14 @@
                 <a:gridCol w="2222640">
                   <a:extLst>
                     <a:ext uri="{9D8B030D-6E8A-4147-A177-3AD203B41FA5}">
-                      <a16:colId xmlns:a16="http://schemas.microsoft.com/office/drawing/2014/main" val="20000"/>
+                      <a16:colId xmlns="" xmlns:a16="http://schemas.microsoft.com/office/drawing/2014/main" val="20000"/>
                     </a:ext>
                   </a:extLst>
                 </a:gridCol>
                 <a:gridCol w="6188400">
                   <a:extLst>
                     <a:ext uri="{9D8B030D-6E8A-4147-A177-3AD203B41FA5}">
-                      <a16:colId xmlns:a16="http://schemas.microsoft.com/office/drawing/2014/main" val="20001"/>
+                      <a16:colId xmlns="" xmlns:a16="http://schemas.microsoft.com/office/drawing/2014/main" val="20001"/>
                     </a:ext>
                   </a:extLst>
                 </a:gridCol>
@@ -14975,7 +15258,7 @@
                         </a:tabLst>
                       </a:pPr>
                       <a:r>
-                        <a:rPr lang="ru" sz="1400" b="1" u="none" strike="noStrike">
+                        <a:rPr lang="ru" sz="1400" b="1" u="none" strike="noStrike" dirty="0">
                           <a:solidFill>
                             <a:srgbClr val="D6EDFF"/>
                           </a:solidFill>
@@ -14986,7 +15269,7 @@
                         </a:rPr>
                         <a:t>Nextcloud Talk</a:t>
                       </a:r>
-                      <a:endParaRPr lang="ru-RU" sz="1400" b="0" u="none" strike="noStrike">
+                      <a:endParaRPr lang="ru-RU" sz="1400" b="0" u="none" strike="noStrike" dirty="0">
                         <a:solidFill>
                           <a:srgbClr val="FFFFFF"/>
                         </a:solidFill>
@@ -15031,7 +15314,7 @@
                     <a:bodyPr/>
                     <a:lstStyle/>
                     <a:p>
-                      <a:pPr>
+                      <a:pPr algn="just">
                         <a:lnSpc>
                           <a:spcPct val="100000"/>
                         </a:lnSpc>
@@ -15040,7 +15323,7 @@
                         </a:tabLst>
                       </a:pPr>
                       <a:r>
-                        <a:rPr lang="ru" sz="1300" b="0" u="none" strike="noStrike">
+                        <a:rPr lang="ru" sz="1300" b="0" u="none" strike="noStrike" dirty="0">
                           <a:solidFill>
                             <a:srgbClr val="D6EDFF"/>
                           </a:solidFill>
@@ -15049,9 +15332,21 @@
                           <a:latin typeface="Arial"/>
                           <a:ea typeface="Arial"/>
                         </a:rPr>
-                        <a:t>Ориентирован на видеоконференции, избыточный функционал. Так же сам по себе слишком “тяжёлый”</a:t>
+                        <a:t>Ориентирован на видеоконференции, избыточный функционал. Так же сам по себе слишком “тяжёлый</a:t>
                       </a:r>
-                      <a:endParaRPr lang="ru-RU" sz="1300" b="0" u="none" strike="noStrike">
+                      <a:r>
+                        <a:rPr lang="ru" sz="1300" b="0" u="none" strike="noStrike" dirty="0" smtClean="0">
+                          <a:solidFill>
+                            <a:srgbClr val="D6EDFF"/>
+                          </a:solidFill>
+                          <a:effectLst/>
+                          <a:uFillTx/>
+                          <a:latin typeface="Arial"/>
+                          <a:ea typeface="Arial"/>
+                        </a:rPr>
+                        <a:t>”.</a:t>
+                      </a:r>
+                      <a:endParaRPr lang="ru-RU" sz="1300" b="0" u="none" strike="noStrike" dirty="0">
                         <a:solidFill>
                           <a:srgbClr val="FFFFFF"/>
                         </a:solidFill>
@@ -15093,7 +15388,7 @@
                 </a:tc>
                 <a:extLst>
                   <a:ext uri="{0D108BD9-81ED-4DB2-BD59-A6C34878D82A}">
-                    <a16:rowId xmlns:a16="http://schemas.microsoft.com/office/drawing/2014/main" val="10000"/>
+                    <a16:rowId xmlns="" xmlns:a16="http://schemas.microsoft.com/office/drawing/2014/main" val="10000"/>
                   </a:ext>
                 </a:extLst>
               </a:tr>
@@ -15168,7 +15463,7 @@
                     <a:bodyPr/>
                     <a:lstStyle/>
                     <a:p>
-                      <a:pPr>
+                      <a:pPr algn="just">
                         <a:lnSpc>
                           <a:spcPct val="100000"/>
                         </a:lnSpc>
@@ -15177,7 +15472,7 @@
                         </a:tabLst>
                       </a:pPr>
                       <a:r>
-                        <a:rPr lang="ru" sz="1300" b="0" u="none" strike="noStrike">
+                        <a:rPr lang="ru" sz="1300" b="0" u="none" strike="noStrike" dirty="0">
                           <a:solidFill>
                             <a:srgbClr val="D6EDFF"/>
                           </a:solidFill>
@@ -15186,9 +15481,33 @@
                           <a:latin typeface="Arial"/>
                           <a:ea typeface="Arial"/>
                         </a:rPr>
-                        <a:t>Требуют постоянного интернет подключения, что является риском, даже если сервера отечественные.</a:t>
+                        <a:t>Требуют постоянного </a:t>
                       </a:r>
-                      <a:endParaRPr lang="ru-RU" sz="1300" b="0" u="none" strike="noStrike">
+                      <a:r>
+                        <a:rPr lang="ru" sz="1300" b="0" u="none" strike="noStrike" dirty="0" smtClean="0">
+                          <a:solidFill>
+                            <a:srgbClr val="D6EDFF"/>
+                          </a:solidFill>
+                          <a:effectLst/>
+                          <a:uFillTx/>
+                          <a:latin typeface="Arial"/>
+                          <a:ea typeface="Arial"/>
+                        </a:rPr>
+                        <a:t>интернет-подключения</a:t>
+                      </a:r>
+                      <a:r>
+                        <a:rPr lang="ru" sz="1300" b="0" u="none" strike="noStrike" dirty="0">
+                          <a:solidFill>
+                            <a:srgbClr val="D6EDFF"/>
+                          </a:solidFill>
+                          <a:effectLst/>
+                          <a:uFillTx/>
+                          <a:latin typeface="Arial"/>
+                          <a:ea typeface="Arial"/>
+                        </a:rPr>
+                        <a:t>, что является риском, даже если сервера отечественные.</a:t>
+                      </a:r>
+                      <a:endParaRPr lang="ru-RU" sz="1300" b="0" u="none" strike="noStrike" dirty="0">
                         <a:solidFill>
                           <a:srgbClr val="FFFFFF"/>
                         </a:solidFill>
@@ -15230,7 +15549,7 @@
                 </a:tc>
                 <a:extLst>
                   <a:ext uri="{0D108BD9-81ED-4DB2-BD59-A6C34878D82A}">
-                    <a16:rowId xmlns:a16="http://schemas.microsoft.com/office/drawing/2014/main" val="10001"/>
+                    <a16:rowId xmlns="" xmlns:a16="http://schemas.microsoft.com/office/drawing/2014/main" val="10001"/>
                   </a:ext>
                 </a:extLst>
               </a:tr>
@@ -15305,7 +15624,7 @@
                     <a:bodyPr/>
                     <a:lstStyle/>
                     <a:p>
-                      <a:pPr>
+                      <a:pPr algn="just">
                         <a:lnSpc>
                           <a:spcPct val="100000"/>
                         </a:lnSpc>
@@ -15314,7 +15633,7 @@
                         </a:tabLst>
                       </a:pPr>
                       <a:r>
-                        <a:rPr lang="ru" sz="1300" b="0" u="none" strike="noStrike">
+                        <a:rPr lang="ru" sz="1300" b="0" u="none" strike="noStrike" dirty="0">
                           <a:solidFill>
                             <a:srgbClr val="D6EDFF"/>
                           </a:solidFill>
@@ -15323,9 +15642,81 @@
                           <a:latin typeface="Arial"/>
                           <a:ea typeface="Arial"/>
                         </a:rPr>
-                        <a:t>Устаревший как UX так и сам по себе, фрагментация и расхождения в функционале клиентов.</a:t>
+                        <a:t>Устаревший как </a:t>
                       </a:r>
-                      <a:endParaRPr lang="ru-RU" sz="1300" b="0" u="none" strike="noStrike">
+                      <a:r>
+                        <a:rPr lang="ru" sz="1300" b="0" u="none" strike="noStrike" dirty="0" smtClean="0">
+                          <a:solidFill>
+                            <a:srgbClr val="D6EDFF"/>
+                          </a:solidFill>
+                          <a:effectLst/>
+                          <a:uFillTx/>
+                          <a:latin typeface="Arial"/>
+                          <a:ea typeface="Arial"/>
+                        </a:rPr>
+                        <a:t>UX, </a:t>
+                      </a:r>
+                      <a:r>
+                        <a:rPr lang="ru" sz="1300" b="0" u="none" strike="noStrike" dirty="0">
+                          <a:solidFill>
+                            <a:srgbClr val="D6EDFF"/>
+                          </a:solidFill>
+                          <a:effectLst/>
+                          <a:uFillTx/>
+                          <a:latin typeface="Arial"/>
+                          <a:ea typeface="Arial"/>
+                        </a:rPr>
+                        <a:t>так и сам по </a:t>
+                      </a:r>
+                      <a:r>
+                        <a:rPr lang="ru" sz="1300" b="0" u="none" strike="noStrike" dirty="0" smtClean="0">
+                          <a:solidFill>
+                            <a:srgbClr val="D6EDFF"/>
+                          </a:solidFill>
+                          <a:effectLst/>
+                          <a:uFillTx/>
+                          <a:latin typeface="Arial"/>
+                          <a:ea typeface="Arial"/>
+                        </a:rPr>
+                        <a:t>себе. </a:t>
+                      </a:r>
+                      <a:r>
+                        <a:rPr lang="ru" sz="1300" b="0" u="none" strike="noStrike" dirty="0">
+                          <a:solidFill>
+                            <a:srgbClr val="D6EDFF"/>
+                          </a:solidFill>
+                          <a:effectLst/>
+                          <a:uFillTx/>
+                          <a:latin typeface="Arial"/>
+                          <a:ea typeface="Arial"/>
+                        </a:rPr>
+                        <a:t>Ф</a:t>
+                      </a:r>
+                      <a:r>
+                        <a:rPr lang="ru" sz="1300" b="0" u="none" strike="noStrike" dirty="0" smtClean="0">
+                          <a:solidFill>
+                            <a:srgbClr val="D6EDFF"/>
+                          </a:solidFill>
+                          <a:effectLst/>
+                          <a:uFillTx/>
+                          <a:latin typeface="Arial"/>
+                          <a:ea typeface="Arial"/>
+                        </a:rPr>
+                        <a:t>рагментация </a:t>
+                      </a:r>
+                      <a:r>
+                        <a:rPr lang="ru" sz="1300" b="0" u="none" strike="noStrike" dirty="0">
+                          <a:solidFill>
+                            <a:srgbClr val="D6EDFF"/>
+                          </a:solidFill>
+                          <a:effectLst/>
+                          <a:uFillTx/>
+                          <a:latin typeface="Arial"/>
+                          <a:ea typeface="Arial"/>
+                        </a:rPr>
+                        <a:t>и расхождения в функционале клиентов.</a:t>
+                      </a:r>
+                      <a:endParaRPr lang="ru-RU" sz="1300" b="0" u="none" strike="noStrike" dirty="0">
                         <a:solidFill>
                           <a:srgbClr val="FFFFFF"/>
                         </a:solidFill>
@@ -15367,7 +15758,7 @@
                 </a:tc>
                 <a:extLst>
                   <a:ext uri="{0D108BD9-81ED-4DB2-BD59-A6C34878D82A}">
-                    <a16:rowId xmlns:a16="http://schemas.microsoft.com/office/drawing/2014/main" val="10002"/>
+                    <a16:rowId xmlns="" xmlns:a16="http://schemas.microsoft.com/office/drawing/2014/main" val="10002"/>
                   </a:ext>
                 </a:extLst>
               </a:tr>
@@ -15442,7 +15833,7 @@
                     <a:bodyPr/>
                     <a:lstStyle/>
                     <a:p>
-                      <a:pPr>
+                      <a:pPr algn="just">
                         <a:lnSpc>
                           <a:spcPct val="100000"/>
                         </a:lnSpc>
@@ -15451,7 +15842,7 @@
                         </a:tabLst>
                       </a:pPr>
                       <a:r>
-                        <a:rPr lang="ru" sz="1300" b="0" u="none" strike="noStrike">
+                        <a:rPr lang="ru" sz="1300" b="0" u="none" strike="noStrike" dirty="0">
                           <a:solidFill>
                             <a:srgbClr val="D6EDFF"/>
                           </a:solidFill>
@@ -15460,9 +15851,105 @@
                           <a:latin typeface="Arial"/>
                           <a:ea typeface="Arial"/>
                         </a:rPr>
-                        <a:t>Самый близкий кандидат, однако данный продукт слишком ресурсозатраный для установки/поддержки и избыток ненужного для диспетчеров функционала. Так же требует интернет для проверки Enterprise лицензии.</a:t>
+                        <a:t>Самый близкий кандидат, однако данный продукт слишком </a:t>
                       </a:r>
-                      <a:endParaRPr lang="ru-RU" sz="1300" b="0" u="none" strike="noStrike">
+                      <a:r>
+                        <a:rPr lang="ru" sz="1300" b="0" u="none" strike="noStrike" dirty="0" smtClean="0">
+                          <a:solidFill>
+                            <a:srgbClr val="D6EDFF"/>
+                          </a:solidFill>
+                          <a:effectLst/>
+                          <a:uFillTx/>
+                          <a:latin typeface="Arial"/>
+                          <a:ea typeface="Arial"/>
+                        </a:rPr>
+                        <a:t>ресурсозатратный </a:t>
+                      </a:r>
+                      <a:r>
+                        <a:rPr lang="ru" sz="1300" b="0" u="none" strike="noStrike" dirty="0">
+                          <a:solidFill>
+                            <a:srgbClr val="D6EDFF"/>
+                          </a:solidFill>
+                          <a:effectLst/>
+                          <a:uFillTx/>
+                          <a:latin typeface="Arial"/>
+                          <a:ea typeface="Arial"/>
+                        </a:rPr>
+                        <a:t>для </a:t>
+                      </a:r>
+                      <a:r>
+                        <a:rPr lang="ru" sz="1300" b="0" u="none" strike="noStrike" dirty="0" smtClean="0">
+                          <a:solidFill>
+                            <a:srgbClr val="D6EDFF"/>
+                          </a:solidFill>
+                          <a:effectLst/>
+                          <a:uFillTx/>
+                          <a:latin typeface="Arial"/>
+                          <a:ea typeface="Arial"/>
+                        </a:rPr>
+                        <a:t>установки/поддержки. Содержит избыточно</a:t>
+                      </a:r>
+                      <a:r>
+                        <a:rPr lang="ru" sz="1300" b="0" u="none" strike="noStrike" baseline="0" dirty="0" smtClean="0">
+                          <a:solidFill>
+                            <a:srgbClr val="D6EDFF"/>
+                          </a:solidFill>
+                          <a:effectLst/>
+                          <a:uFillTx/>
+                          <a:latin typeface="Arial"/>
+                          <a:ea typeface="Arial"/>
+                        </a:rPr>
+                        <a:t> много</a:t>
+                      </a:r>
+                      <a:r>
+                        <a:rPr lang="ru" sz="1300" b="0" u="none" strike="noStrike" dirty="0" smtClean="0">
+                          <a:solidFill>
+                            <a:srgbClr val="D6EDFF"/>
+                          </a:solidFill>
+                          <a:effectLst/>
+                          <a:uFillTx/>
+                          <a:latin typeface="Arial"/>
+                          <a:ea typeface="Arial"/>
+                        </a:rPr>
+                        <a:t> </a:t>
+                      </a:r>
+                      <a:r>
+                        <a:rPr lang="ru" sz="1300" b="0" u="none" strike="noStrike" dirty="0">
+                          <a:solidFill>
+                            <a:srgbClr val="D6EDFF"/>
+                          </a:solidFill>
+                          <a:effectLst/>
+                          <a:uFillTx/>
+                          <a:latin typeface="Arial"/>
+                          <a:ea typeface="Arial"/>
+                        </a:rPr>
+                        <a:t>ненужного для диспетчеров функционала. Так же </a:t>
+                      </a:r>
+                      <a:r>
+                        <a:rPr lang="ru" sz="1300" b="0" u="none" strike="noStrike" dirty="0" smtClean="0">
+                          <a:solidFill>
+                            <a:srgbClr val="D6EDFF"/>
+                          </a:solidFill>
+                          <a:effectLst/>
+                          <a:uFillTx/>
+                          <a:latin typeface="Arial"/>
+                          <a:ea typeface="Arial"/>
+                        </a:rPr>
+                        <a:t>требуется </a:t>
+                      </a:r>
+                      <a:r>
+                        <a:rPr lang="ru" sz="1300" b="0" u="none" strike="noStrike" dirty="0">
+                          <a:solidFill>
+                            <a:srgbClr val="D6EDFF"/>
+                          </a:solidFill>
+                          <a:effectLst/>
+                          <a:uFillTx/>
+                          <a:latin typeface="Arial"/>
+                          <a:ea typeface="Arial"/>
+                        </a:rPr>
+                        <a:t>интернет для проверки Enterprise лицензии.</a:t>
+                      </a:r>
+                      <a:endParaRPr lang="ru-RU" sz="1300" b="0" u="none" strike="noStrike" dirty="0">
                         <a:solidFill>
                           <a:srgbClr val="FFFFFF"/>
                         </a:solidFill>
@@ -15504,7 +15991,7 @@
                 </a:tc>
                 <a:extLst>
                   <a:ext uri="{0D108BD9-81ED-4DB2-BD59-A6C34878D82A}">
-                    <a16:rowId xmlns:a16="http://schemas.microsoft.com/office/drawing/2014/main" val="10003"/>
+                    <a16:rowId xmlns="" xmlns:a16="http://schemas.microsoft.com/office/drawing/2014/main" val="10003"/>
                   </a:ext>
                 </a:extLst>
               </a:tr>
@@ -15579,7 +16066,7 @@
                     <a:bodyPr/>
                     <a:lstStyle/>
                     <a:p>
-                      <a:pPr>
+                      <a:pPr algn="just">
                         <a:lnSpc>
                           <a:spcPct val="100000"/>
                         </a:lnSpc>
@@ -15588,7 +16075,7 @@
                         </a:tabLst>
                       </a:pPr>
                       <a:r>
-                        <a:rPr lang="ru" sz="1300" b="0" u="none" strike="noStrike">
+                        <a:rPr lang="ru" sz="1300" b="0" u="none" strike="noStrike" dirty="0">
                           <a:solidFill>
                             <a:srgbClr val="D6EDFF"/>
                           </a:solidFill>
@@ -15599,7 +16086,7 @@
                         </a:rPr>
                         <a:t>По своей сути предназначены для открытого интернета и межорганизационного общения. Трудно поддерживать в оффлайне, а также ресурсоёмкий.</a:t>
                       </a:r>
-                      <a:endParaRPr lang="ru-RU" sz="1300" b="0" u="none" strike="noStrike">
+                      <a:endParaRPr lang="ru-RU" sz="1300" b="0" u="none" strike="noStrike" dirty="0">
                         <a:solidFill>
                           <a:srgbClr val="FFFFFF"/>
                         </a:solidFill>
@@ -15641,7 +16128,7 @@
                 </a:tc>
                 <a:extLst>
                   <a:ext uri="{0D108BD9-81ED-4DB2-BD59-A6C34878D82A}">
-                    <a16:rowId xmlns:a16="http://schemas.microsoft.com/office/drawing/2014/main" val="10004"/>
+                    <a16:rowId xmlns="" xmlns:a16="http://schemas.microsoft.com/office/drawing/2014/main" val="10004"/>
                   </a:ext>
                 </a:extLst>
               </a:tr>
@@ -15927,18 +16414,40 @@
               </a:tabLst>
             </a:pPr>
             <a:r>
-              <a:rPr lang="ru" sz="1500" b="0" u="none" strike="noStrike">
+              <a:rPr lang="ru" sz="1500" dirty="0">
                 <a:solidFill>
                   <a:srgbClr val="073763"/>
                 </a:solidFill>
-                <a:effectLst/>
-                <a:uFillTx/>
                 <a:latin typeface="Arial"/>
                 <a:ea typeface="Arial"/>
               </a:rPr>
-              <a:t>есть потребность</a:t>
-            </a:r>
-            <a:endParaRPr lang="ru-RU" sz="1500" b="0" u="none" strike="noStrike">
+              <a:t>Е</a:t>
+            </a:r>
+            <a:r>
+              <a:rPr lang="ru" sz="1500" b="0" u="none" strike="noStrike" dirty="0" smtClean="0">
+                <a:solidFill>
+                  <a:srgbClr val="073763"/>
+                </a:solidFill>
+                <a:effectLst/>
+                <a:uFillTx/>
+                <a:latin typeface="Arial"/>
+                <a:ea typeface="Arial"/>
+              </a:rPr>
+              <a:t>сть </a:t>
+            </a:r>
+            <a:r>
+              <a:rPr lang="ru" sz="1500" b="0" u="none" strike="noStrike" dirty="0">
+                <a:solidFill>
+                  <a:srgbClr val="073763"/>
+                </a:solidFill>
+                <a:effectLst/>
+                <a:uFillTx/>
+                <a:latin typeface="Arial"/>
+                <a:ea typeface="Arial"/>
+              </a:rPr>
+              <a:t>потребность</a:t>
+            </a:r>
+            <a:endParaRPr lang="ru-RU" sz="1500" b="0" u="none" strike="noStrike" dirty="0">
               <a:solidFill>
                 <a:srgbClr val="000000"/>
               </a:solidFill>
@@ -16002,18 +16511,40 @@
               </a:tabLst>
             </a:pPr>
             <a:r>
-              <a:rPr lang="ru" sz="1400" b="0" u="none" strike="noStrike">
+              <a:rPr lang="ru" sz="1400" dirty="0">
                 <a:solidFill>
                   <a:srgbClr val="073763"/>
                 </a:solidFill>
-                <a:effectLst/>
-                <a:uFillTx/>
                 <a:latin typeface="Arial"/>
                 <a:ea typeface="Arial"/>
               </a:rPr>
-              <a:t>но что-то ему мешает</a:t>
-            </a:r>
-            <a:endParaRPr lang="ru-RU" sz="1400" b="0" u="none" strike="noStrike">
+              <a:t>Н</a:t>
+            </a:r>
+            <a:r>
+              <a:rPr lang="ru" sz="1400" b="0" u="none" strike="noStrike" dirty="0" smtClean="0">
+                <a:solidFill>
+                  <a:srgbClr val="073763"/>
+                </a:solidFill>
+                <a:effectLst/>
+                <a:uFillTx/>
+                <a:latin typeface="Arial"/>
+                <a:ea typeface="Arial"/>
+              </a:rPr>
+              <a:t>о </a:t>
+            </a:r>
+            <a:r>
+              <a:rPr lang="ru" sz="1400" b="0" u="none" strike="noStrike" dirty="0">
+                <a:solidFill>
+                  <a:srgbClr val="073763"/>
+                </a:solidFill>
+                <a:effectLst/>
+                <a:uFillTx/>
+                <a:latin typeface="Arial"/>
+                <a:ea typeface="Arial"/>
+              </a:rPr>
+              <a:t>что-то ему мешает</a:t>
+            </a:r>
+            <a:endParaRPr lang="ru-RU" sz="1400" b="0" u="none" strike="noStrike" dirty="0">
               <a:solidFill>
                 <a:srgbClr val="000000"/>
               </a:solidFill>
@@ -16077,18 +16608,40 @@
               </a:tabLst>
             </a:pPr>
             <a:r>
-              <a:rPr lang="ru" sz="900" b="0" u="none" strike="noStrike">
+              <a:rPr lang="ru" sz="900" dirty="0" smtClean="0">
                 <a:solidFill>
                   <a:srgbClr val="073763"/>
                 </a:solidFill>
-                <a:effectLst/>
-                <a:uFillTx/>
                 <a:latin typeface="Arial"/>
                 <a:ea typeface="Arial"/>
               </a:rPr>
-              <a:t>а имеющиеся решения не подходят, потому что…</a:t>
-            </a:r>
-            <a:endParaRPr lang="ru-RU" sz="900" b="0" u="none" strike="noStrike">
+              <a:t>И</a:t>
+            </a:r>
+            <a:r>
+              <a:rPr lang="ru" sz="900" b="0" u="none" strike="noStrike" dirty="0" smtClean="0">
+                <a:solidFill>
+                  <a:srgbClr val="073763"/>
+                </a:solidFill>
+                <a:effectLst/>
+                <a:uFillTx/>
+                <a:latin typeface="Arial"/>
+                <a:ea typeface="Arial"/>
+              </a:rPr>
+              <a:t>меющиеся </a:t>
+            </a:r>
+            <a:r>
+              <a:rPr lang="ru" sz="900" b="0" u="none" strike="noStrike" dirty="0">
+                <a:solidFill>
+                  <a:srgbClr val="073763"/>
+                </a:solidFill>
+                <a:effectLst/>
+                <a:uFillTx/>
+                <a:latin typeface="Arial"/>
+                <a:ea typeface="Arial"/>
+              </a:rPr>
+              <a:t>решения не подходят, потому что…</a:t>
+            </a:r>
+            <a:endParaRPr lang="ru-RU" sz="900" b="0" u="none" strike="noStrike" dirty="0">
               <a:solidFill>
                 <a:srgbClr val="000000"/>
               </a:solidFill>
@@ -16152,7 +16705,7 @@
               </a:tabLst>
             </a:pPr>
             <a:r>
-              <a:rPr lang="ru" sz="1200" b="0" u="none" strike="noStrike">
+              <a:rPr lang="ru" sz="1200" b="0" u="none" strike="noStrike" dirty="0">
                 <a:solidFill>
                   <a:srgbClr val="073763"/>
                 </a:solidFill>
@@ -16161,9 +16714,21 @@
                 <a:latin typeface="Arial"/>
                 <a:ea typeface="Arial"/>
               </a:rPr>
-              <a:t>У диспетчеров</a:t>
-            </a:r>
-            <a:endParaRPr lang="ru-RU" sz="1200" b="0" u="none" strike="noStrike">
+              <a:t>У </a:t>
+            </a:r>
+            <a:r>
+              <a:rPr lang="ru" sz="1200" b="0" u="none" strike="noStrike" dirty="0" smtClean="0">
+                <a:solidFill>
+                  <a:srgbClr val="073763"/>
+                </a:solidFill>
+                <a:effectLst/>
+                <a:uFillTx/>
+                <a:latin typeface="Arial"/>
+                <a:ea typeface="Arial"/>
+              </a:rPr>
+              <a:t>диспетчеров.</a:t>
+            </a:r>
+            <a:endParaRPr lang="ru-RU" sz="1200" b="0" u="none" strike="noStrike" dirty="0">
               <a:solidFill>
                 <a:srgbClr val="000000"/>
               </a:solidFill>
@@ -16218,7 +16783,7 @@
           </a:bodyPr>
           <a:lstStyle/>
           <a:p>
-            <a:pPr>
+            <a:pPr algn="just">
               <a:lnSpc>
                 <a:spcPct val="100000"/>
               </a:lnSpc>
@@ -16227,7 +16792,7 @@
               </a:tabLst>
             </a:pPr>
             <a:r>
-              <a:rPr lang="ru" sz="1200" b="0" u="none" strike="noStrike">
+              <a:rPr lang="ru" sz="1200" b="0" u="none" strike="noStrike" dirty="0">
                 <a:solidFill>
                   <a:srgbClr val="073763"/>
                 </a:solidFill>
@@ -16236,9 +16801,21 @@
                 <a:latin typeface="Arial"/>
                 <a:ea typeface="Arial"/>
               </a:rPr>
-              <a:t>Есть потребность в быстром, безопасном и удобном обмене сообщениями и рабочими данными</a:t>
-            </a:r>
-            <a:endParaRPr lang="ru-RU" sz="1200" b="0" u="none" strike="noStrike">
+              <a:t>Есть потребность в быстром, безопасном и удобном обмене сообщениями и рабочими </a:t>
+            </a:r>
+            <a:r>
+              <a:rPr lang="ru" sz="1200" b="0" u="none" strike="noStrike" dirty="0" smtClean="0">
+                <a:solidFill>
+                  <a:srgbClr val="073763"/>
+                </a:solidFill>
+                <a:effectLst/>
+                <a:uFillTx/>
+                <a:latin typeface="Arial"/>
+                <a:ea typeface="Arial"/>
+              </a:rPr>
+              <a:t>данными.</a:t>
+            </a:r>
+            <a:endParaRPr lang="ru-RU" sz="1200" b="0" u="none" strike="noStrike" dirty="0">
               <a:solidFill>
                 <a:srgbClr val="000000"/>
               </a:solidFill>
@@ -16293,7 +16870,7 @@
           </a:bodyPr>
           <a:lstStyle/>
           <a:p>
-            <a:pPr>
+            <a:pPr algn="just">
               <a:lnSpc>
                 <a:spcPct val="100000"/>
               </a:lnSpc>
@@ -16302,18 +16879,52 @@
               </a:tabLst>
             </a:pPr>
             <a:r>
-              <a:rPr lang="ru" sz="1200" b="0" u="none" strike="noStrike">
+              <a:rPr lang="ru" sz="1200" dirty="0" smtClean="0">
                 <a:solidFill>
                   <a:srgbClr val="073763"/>
                 </a:solidFill>
-                <a:effectLst/>
-                <a:uFillTx/>
                 <a:latin typeface="Arial"/>
                 <a:ea typeface="Arial"/>
               </a:rPr>
-              <a:t>Им мешает отсутствие подходящего инструмента внутри корпоративной сети</a:t>
-            </a:r>
-            <a:endParaRPr lang="ru-RU" sz="1200" b="0" u="none" strike="noStrike">
+              <a:t>М</a:t>
+            </a:r>
+            <a:r>
+              <a:rPr lang="ru" sz="1200" b="0" u="none" strike="noStrike" dirty="0" smtClean="0">
+                <a:solidFill>
+                  <a:srgbClr val="073763"/>
+                </a:solidFill>
+                <a:effectLst/>
+                <a:uFillTx/>
+                <a:latin typeface="Arial"/>
+                <a:ea typeface="Arial"/>
+              </a:rPr>
+              <a:t>ешает </a:t>
+            </a:r>
+            <a:r>
+              <a:rPr lang="ru" sz="1200" b="0" u="none" strike="noStrike" dirty="0">
+                <a:solidFill>
+                  <a:srgbClr val="073763"/>
+                </a:solidFill>
+                <a:effectLst/>
+                <a:uFillTx/>
+                <a:latin typeface="Arial"/>
+                <a:ea typeface="Arial"/>
+              </a:rPr>
+              <a:t>отсутствие подходящего инструмента внутри корпоративной </a:t>
+            </a:r>
+            <a:r>
+              <a:rPr lang="ru" sz="1200" b="0" u="none" strike="noStrike" dirty="0" smtClean="0">
+                <a:solidFill>
+                  <a:srgbClr val="073763"/>
+                </a:solidFill>
+                <a:effectLst/>
+                <a:uFillTx/>
+                <a:latin typeface="Arial"/>
+                <a:ea typeface="Arial"/>
+              </a:rPr>
+              <a:t>сети.</a:t>
+            </a:r>
+            <a:endParaRPr lang="ru-RU" sz="1200" b="0" u="none" strike="noStrike" dirty="0">
               <a:solidFill>
                 <a:srgbClr val="000000"/>
               </a:solidFill>
@@ -16368,7 +16979,7 @@
           </a:bodyPr>
           <a:lstStyle/>
           <a:p>
-            <a:pPr>
+            <a:pPr algn="just">
               <a:lnSpc>
                 <a:spcPct val="100000"/>
               </a:lnSpc>
@@ -16377,7 +16988,7 @@
               </a:tabLst>
             </a:pPr>
             <a:r>
-              <a:rPr lang="ru" sz="1200" b="0" u="none" strike="noStrike">
+              <a:rPr lang="ru" sz="1200" b="0" u="none" strike="noStrike" dirty="0">
                 <a:solidFill>
                   <a:srgbClr val="073763"/>
                 </a:solidFill>
@@ -16388,7 +16999,7 @@
               </a:rPr>
               <a:t>Публичные мессенджеры не обеспечивают конфиденциальность, нарушают требования ИБ и не могут функционировать в закрытом контуре без подключения к интернету.</a:t>
             </a:r>
-            <a:endParaRPr lang="ru-RU" sz="1200" b="0" u="none" strike="noStrike">
+            <a:endParaRPr lang="ru-RU" sz="1200" b="0" u="none" strike="noStrike" dirty="0">
               <a:solidFill>
                 <a:srgbClr val="000000"/>
               </a:solidFill>
@@ -16538,7 +17149,7 @@
           </a:bodyPr>
           <a:lstStyle/>
           <a:p>
-            <a:pPr>
+            <a:pPr algn="just">
               <a:lnSpc>
                 <a:spcPct val="100000"/>
               </a:lnSpc>
@@ -16547,7 +17158,7 @@
               </a:tabLst>
             </a:pPr>
             <a:r>
-              <a:rPr lang="ru" sz="1800" b="1" u="none" strike="noStrike">
+              <a:rPr lang="ru" sz="1800" b="1" u="none" strike="noStrike" dirty="0">
                 <a:solidFill>
                   <a:srgbClr val="D6EDFF"/>
                 </a:solidFill>
@@ -16559,7 +17170,7 @@
               <a:t>Цель:</a:t>
             </a:r>
             <a:r>
-              <a:rPr lang="ru" sz="1800" b="0" u="none" strike="noStrike">
+              <a:rPr lang="ru" sz="1800" b="0" u="none" strike="noStrike" dirty="0">
                 <a:solidFill>
                   <a:srgbClr val="D6EDFF"/>
                 </a:solidFill>
@@ -16568,9 +17179,33 @@
                 <a:latin typeface="Arial"/>
                 <a:ea typeface="Arial"/>
               </a:rPr>
-              <a:t> Разработать систему корпоративного мессенджера «ШИФР-СВЯЗЬ» на базе self-hosted сервера для диспетчеров. Система должна обеспечить быстрый обмен текстовыми и мультимедийными данными в изолированной локальной сети без подключения к Интернет.</a:t>
-            </a:r>
-            <a:endParaRPr lang="ru-RU" sz="1800" b="0" u="none" strike="noStrike">
+              <a:t> Разработать систему корпоративного мессенджера «ШИФР-СВЯЗЬ» на базе self-hosted сервера для диспетчеров. Система должна обеспечить быстрый обмен текстовыми и мультимедийными данными в изолированной локальной сети без подключения к </a:t>
+            </a:r>
+            <a:r>
+              <a:rPr lang="ru" sz="1800" b="0" u="none" strike="noStrike" dirty="0" smtClean="0">
+                <a:solidFill>
+                  <a:srgbClr val="D6EDFF"/>
+                </a:solidFill>
+                <a:effectLst/>
+                <a:uFillTx/>
+                <a:latin typeface="Arial"/>
+                <a:ea typeface="Arial"/>
+              </a:rPr>
+              <a:t>сети Интернет</a:t>
+            </a:r>
+            <a:r>
+              <a:rPr lang="ru" sz="1800" b="0" u="none" strike="noStrike" dirty="0">
+                <a:solidFill>
+                  <a:srgbClr val="D6EDFF"/>
+                </a:solidFill>
+                <a:effectLst/>
+                <a:uFillTx/>
+                <a:latin typeface="Arial"/>
+                <a:ea typeface="Arial"/>
+              </a:rPr>
+              <a:t>.</a:t>
+            </a:r>
+            <a:endParaRPr lang="ru-RU" sz="1800" b="0" u="none" strike="noStrike" dirty="0">
               <a:solidFill>
                 <a:srgbClr val="FFFFFF"/>
               </a:solidFill>
@@ -16627,7 +17262,7 @@
               </a:tabLst>
             </a:pPr>
             <a:r>
-              <a:rPr lang="ru" sz="1800" b="1" u="none" strike="noStrike">
+              <a:rPr lang="ru" sz="1800" b="1" u="none" strike="noStrike" dirty="0">
                 <a:solidFill>
                   <a:srgbClr val="D6EDFF"/>
                 </a:solidFill>
@@ -16638,7 +17273,7 @@
               </a:rPr>
               <a:t>Задачи: </a:t>
             </a:r>
-            <a:endParaRPr lang="ru-RU" sz="1800" b="0" u="none" strike="noStrike">
+            <a:endParaRPr lang="ru-RU" sz="1800" b="0" u="none" strike="noStrike" dirty="0">
               <a:solidFill>
                 <a:srgbClr val="FFFFFF"/>
               </a:solidFill>
@@ -16648,7 +17283,7 @@
             </a:endParaRPr>
           </a:p>
           <a:p>
-            <a:pPr marL="457200">
+            <a:pPr marL="457200" algn="just">
               <a:lnSpc>
                 <a:spcPct val="100000"/>
               </a:lnSpc>
@@ -16657,7 +17292,7 @@
               </a:tabLst>
             </a:pPr>
             <a:r>
-              <a:rPr lang="ru" sz="1800" b="0" u="none" strike="noStrike">
+              <a:rPr lang="ru" sz="1800" b="0" u="none" strike="noStrike" dirty="0">
                 <a:solidFill>
                   <a:srgbClr val="D6EDFF"/>
                 </a:solidFill>
@@ -16668,7 +17303,7 @@
               </a:rPr>
               <a:t>1. Провести детальный сбор требований (UX/UI, функционал, протоколы шифрования, архитектура изоляции).</a:t>
             </a:r>
-            <a:endParaRPr lang="ru-RU" sz="1800" b="0" u="none" strike="noStrike">
+            <a:endParaRPr lang="ru-RU" sz="1800" b="0" u="none" strike="noStrike" dirty="0">
               <a:solidFill>
                 <a:srgbClr val="FFFFFF"/>
               </a:solidFill>
@@ -16678,7 +17313,7 @@
             </a:endParaRPr>
           </a:p>
           <a:p>
-            <a:pPr marL="457200">
+            <a:pPr marL="457200" algn="just">
               <a:lnSpc>
                 <a:spcPct val="100000"/>
               </a:lnSpc>
@@ -16687,7 +17322,7 @@
               </a:tabLst>
             </a:pPr>
             <a:r>
-              <a:rPr lang="ru" sz="1800" b="0" u="none" strike="noStrike">
+              <a:rPr lang="ru" sz="1800" b="0" u="none" strike="noStrike" dirty="0">
                 <a:solidFill>
                   <a:srgbClr val="D6EDFF"/>
                 </a:solidFill>
@@ -16696,9 +17331,21 @@
                 <a:latin typeface="Arial"/>
                 <a:ea typeface="Arial"/>
               </a:rPr>
-              <a:t>2. Спроектировать архитектуру self-hosted сервера, способного работать в полностью изолированной локальной сети без шлюзов в интернет</a:t>
-            </a:r>
-            <a:endParaRPr lang="ru-RU" sz="1800" b="0" u="none" strike="noStrike">
+              <a:t>2. Спроектировать архитектуру self-hosted сервера, способного работать в полностью изолированной локальной сети без шлюзов в </a:t>
+            </a:r>
+            <a:r>
+              <a:rPr lang="ru" sz="1800" b="0" u="none" strike="noStrike" dirty="0" smtClean="0">
+                <a:solidFill>
+                  <a:srgbClr val="D6EDFF"/>
+                </a:solidFill>
+                <a:effectLst/>
+                <a:uFillTx/>
+                <a:latin typeface="Arial"/>
+                <a:ea typeface="Arial"/>
+              </a:rPr>
+              <a:t>интернет.</a:t>
+            </a:r>
+            <a:endParaRPr lang="ru-RU" sz="1800" b="0" u="none" strike="noStrike" dirty="0">
               <a:solidFill>
                 <a:srgbClr val="FFFFFF"/>
               </a:solidFill>
@@ -16708,7 +17355,7 @@
             </a:endParaRPr>
           </a:p>
           <a:p>
-            <a:pPr marL="457200">
+            <a:pPr marL="457200" algn="just">
               <a:lnSpc>
                 <a:spcPct val="100000"/>
               </a:lnSpc>
@@ -16717,7 +17364,7 @@
               </a:tabLst>
             </a:pPr>
             <a:r>
-              <a:rPr lang="ru" sz="1800" b="0" u="none" strike="noStrike">
+              <a:rPr lang="ru" sz="1800" b="0" u="none" strike="noStrike" dirty="0">
                 <a:solidFill>
                   <a:srgbClr val="D6EDFF"/>
                 </a:solidFill>
@@ -16728,7 +17375,7 @@
               </a:rPr>
               <a:t>3. Разработать удобные для диспетчеров клиентские приложения для работы с внутренним сервером.</a:t>
             </a:r>
-            <a:endParaRPr lang="ru-RU" sz="1800" b="0" u="none" strike="noStrike">
+            <a:endParaRPr lang="ru-RU" sz="1800" b="0" u="none" strike="noStrike" dirty="0">
               <a:solidFill>
                 <a:srgbClr val="FFFFFF"/>
               </a:solidFill>
@@ -16887,7 +17534,7 @@
               </a:tabLst>
             </a:pPr>
             <a:r>
-              <a:rPr lang="ru" sz="1800" b="1" u="none" strike="noStrike">
+              <a:rPr lang="ru" sz="1800" b="1" u="none" strike="noStrike" dirty="0">
                 <a:solidFill>
                   <a:srgbClr val="D6EDFF"/>
                 </a:solidFill>
@@ -16898,7 +17545,7 @@
               </a:rPr>
               <a:t>Решение должно:</a:t>
             </a:r>
-            <a:endParaRPr lang="ru-RU" sz="1800" b="0" u="none" strike="noStrike">
+            <a:endParaRPr lang="ru-RU" sz="1800" b="0" u="none" strike="noStrike" dirty="0">
               <a:solidFill>
                 <a:srgbClr val="FFFFFF"/>
               </a:solidFill>
@@ -16908,7 +17555,7 @@
             </a:endParaRPr>
           </a:p>
           <a:p>
-            <a:pPr marL="457200" indent="-343080">
+            <a:pPr marL="457200" indent="-343080" algn="just">
               <a:lnSpc>
                 <a:spcPct val="100000"/>
               </a:lnSpc>
@@ -16922,7 +17569,7 @@
               </a:tabLst>
             </a:pPr>
             <a:r>
-              <a:rPr lang="ru" sz="1800" b="0" u="none" strike="noStrike">
+              <a:rPr lang="ru" sz="1800" b="0" u="none" strike="noStrike" dirty="0">
                 <a:solidFill>
                   <a:srgbClr val="D6EDFF"/>
                 </a:solidFill>
@@ -16931,9 +17578,21 @@
                 <a:latin typeface="Arial"/>
                 <a:ea typeface="Arial"/>
               </a:rPr>
-              <a:t>Работать полностью автономно без подключения к Интернету</a:t>
-            </a:r>
-            <a:endParaRPr lang="ru-RU" sz="1800" b="0" u="none" strike="noStrike">
+              <a:t>Работать полностью автономно без подключения к </a:t>
+            </a:r>
+            <a:r>
+              <a:rPr lang="ru" sz="1800" b="0" u="none" strike="noStrike" dirty="0" smtClean="0">
+                <a:solidFill>
+                  <a:srgbClr val="D6EDFF"/>
+                </a:solidFill>
+                <a:effectLst/>
+                <a:uFillTx/>
+                <a:latin typeface="Arial"/>
+                <a:ea typeface="Arial"/>
+              </a:rPr>
+              <a:t>Интернету.</a:t>
+            </a:r>
+            <a:endParaRPr lang="ru-RU" sz="1800" b="0" u="none" strike="noStrike" dirty="0">
               <a:solidFill>
                 <a:srgbClr val="FFFFFF"/>
               </a:solidFill>
@@ -16943,7 +17602,7 @@
             </a:endParaRPr>
           </a:p>
           <a:p>
-            <a:pPr marL="457200" indent="-343080">
+            <a:pPr marL="457200" indent="-343080" algn="just">
               <a:lnSpc>
                 <a:spcPct val="100000"/>
               </a:lnSpc>
@@ -16957,7 +17616,7 @@
               </a:tabLst>
             </a:pPr>
             <a:r>
-              <a:rPr lang="ru" sz="1800" b="0" u="none" strike="noStrike">
+              <a:rPr lang="ru" sz="1800" b="0" u="none" strike="noStrike" dirty="0">
                 <a:solidFill>
                   <a:srgbClr val="D6EDFF"/>
                 </a:solidFill>
@@ -16966,9 +17625,21 @@
                 <a:latin typeface="Arial"/>
                 <a:ea typeface="Arial"/>
               </a:rPr>
-              <a:t>Быть удобным для пользователей и специализированным под задачи диспетчеров</a:t>
-            </a:r>
-            <a:endParaRPr lang="ru-RU" sz="1800" b="0" u="none" strike="noStrike">
+              <a:t>Быть удобным для пользователей и специализированным под задачи </a:t>
+            </a:r>
+            <a:r>
+              <a:rPr lang="ru" sz="1800" b="0" u="none" strike="noStrike" dirty="0" smtClean="0">
+                <a:solidFill>
+                  <a:srgbClr val="D6EDFF"/>
+                </a:solidFill>
+                <a:effectLst/>
+                <a:uFillTx/>
+                <a:latin typeface="Arial"/>
+                <a:ea typeface="Arial"/>
+              </a:rPr>
+              <a:t>диспетчеров.</a:t>
+            </a:r>
+            <a:endParaRPr lang="ru-RU" sz="1800" b="0" u="none" strike="noStrike" dirty="0">
               <a:solidFill>
                 <a:srgbClr val="FFFFFF"/>
               </a:solidFill>
@@ -16978,7 +17649,7 @@
             </a:endParaRPr>
           </a:p>
           <a:p>
-            <a:pPr marL="457200" indent="-343080">
+            <a:pPr marL="457200" indent="-343080" algn="just">
               <a:lnSpc>
                 <a:spcPct val="100000"/>
               </a:lnSpc>
@@ -16992,7 +17663,7 @@
               </a:tabLst>
             </a:pPr>
             <a:r>
-              <a:rPr lang="ru" sz="1800" b="0" u="none" strike="noStrike">
+              <a:rPr lang="ru" sz="1800" b="0" u="none" strike="noStrike" dirty="0">
                 <a:solidFill>
                   <a:srgbClr val="D6EDFF"/>
                 </a:solidFill>
@@ -17001,9 +17672,21 @@
                 <a:latin typeface="Arial"/>
                 <a:ea typeface="Arial"/>
               </a:rPr>
-              <a:t>Достаточно безопасным для использования внутри компании</a:t>
-            </a:r>
-            <a:endParaRPr lang="ru-RU" sz="1800" b="0" u="none" strike="noStrike">
+              <a:t>Достаточно безопасным для использования внутри </a:t>
+            </a:r>
+            <a:r>
+              <a:rPr lang="ru" sz="1800" b="0" u="none" strike="noStrike" dirty="0" smtClean="0">
+                <a:solidFill>
+                  <a:srgbClr val="D6EDFF"/>
+                </a:solidFill>
+                <a:effectLst/>
+                <a:uFillTx/>
+                <a:latin typeface="Arial"/>
+                <a:ea typeface="Arial"/>
+              </a:rPr>
+              <a:t>компании.</a:t>
+            </a:r>
+            <a:endParaRPr lang="ru-RU" sz="1800" b="0" u="none" strike="noStrike" dirty="0">
               <a:solidFill>
                 <a:srgbClr val="FFFFFF"/>
               </a:solidFill>
@@ -17060,7 +17743,7 @@
               </a:tabLst>
             </a:pPr>
             <a:r>
-              <a:rPr lang="ru" sz="1800" b="1" u="none" strike="noStrike">
+              <a:rPr lang="ru" sz="1800" b="1" u="none" strike="noStrike" dirty="0">
                 <a:solidFill>
                   <a:srgbClr val="D6EDFF"/>
                 </a:solidFill>
@@ -17071,7 +17754,7 @@
               </a:rPr>
               <a:t>Решение должно выполнять функции: </a:t>
             </a:r>
-            <a:endParaRPr lang="ru-RU" sz="1800" b="0" u="none" strike="noStrike">
+            <a:endParaRPr lang="ru-RU" sz="1800" b="0" u="none" strike="noStrike" dirty="0">
               <a:solidFill>
                 <a:srgbClr val="FFFFFF"/>
               </a:solidFill>
@@ -17081,7 +17764,7 @@
             </a:endParaRPr>
           </a:p>
           <a:p>
-            <a:pPr marL="457200" indent="-343080">
+            <a:pPr marL="457200" indent="-343080" algn="just">
               <a:lnSpc>
                 <a:spcPct val="100000"/>
               </a:lnSpc>
@@ -17095,7 +17778,7 @@
               </a:tabLst>
             </a:pPr>
             <a:r>
-              <a:rPr lang="ru" sz="1800" b="0" u="none" strike="noStrike">
+              <a:rPr lang="ru" sz="1800" b="0" u="none" strike="noStrike" dirty="0">
                 <a:solidFill>
                   <a:srgbClr val="D6EDFF"/>
                 </a:solidFill>
@@ -17104,9 +17787,21 @@
                 <a:latin typeface="Arial"/>
                 <a:ea typeface="Arial"/>
               </a:rPr>
-              <a:t>Быстрый обмен сообщениями (текстовые + файлы)</a:t>
-            </a:r>
-            <a:endParaRPr lang="ru-RU" sz="1800" b="0" u="none" strike="noStrike">
+              <a:t>Быстрый обмен сообщениями (текстовые + </a:t>
+            </a:r>
+            <a:r>
+              <a:rPr lang="ru" sz="1800" b="0" u="none" strike="noStrike" dirty="0" smtClean="0">
+                <a:solidFill>
+                  <a:srgbClr val="D6EDFF"/>
+                </a:solidFill>
+                <a:effectLst/>
+                <a:uFillTx/>
+                <a:latin typeface="Arial"/>
+                <a:ea typeface="Arial"/>
+              </a:rPr>
+              <a:t>файлы).</a:t>
+            </a:r>
+            <a:endParaRPr lang="ru-RU" sz="1800" b="0" u="none" strike="noStrike" dirty="0">
               <a:solidFill>
                 <a:srgbClr val="FFFFFF"/>
               </a:solidFill>
@@ -17116,7 +17811,7 @@
             </a:endParaRPr>
           </a:p>
           <a:p>
-            <a:pPr marL="457200" indent="-343080">
+            <a:pPr marL="457200" indent="-343080" algn="just">
               <a:lnSpc>
                 <a:spcPct val="100000"/>
               </a:lnSpc>
@@ -17130,7 +17825,7 @@
               </a:tabLst>
             </a:pPr>
             <a:r>
-              <a:rPr lang="ru" sz="1800" b="0" u="none" strike="noStrike">
+              <a:rPr lang="ru" sz="1800" b="0" u="none" strike="noStrike" dirty="0">
                 <a:solidFill>
                   <a:srgbClr val="D6EDFF"/>
                 </a:solidFill>
@@ -17139,9 +17834,21 @@
                 <a:latin typeface="Arial"/>
                 <a:ea typeface="Arial"/>
               </a:rPr>
-              <a:t>Организация различных групп, с разными привилегиями для пользователей</a:t>
-            </a:r>
-            <a:endParaRPr lang="ru-RU" sz="1800" b="0" u="none" strike="noStrike">
+              <a:t>Организация различных групп, с разными привилегиями для </a:t>
+            </a:r>
+            <a:r>
+              <a:rPr lang="ru" sz="1800" b="0" u="none" strike="noStrike" dirty="0" smtClean="0">
+                <a:solidFill>
+                  <a:srgbClr val="D6EDFF"/>
+                </a:solidFill>
+                <a:effectLst/>
+                <a:uFillTx/>
+                <a:latin typeface="Arial"/>
+                <a:ea typeface="Arial"/>
+              </a:rPr>
+              <a:t>пользователей.</a:t>
+            </a:r>
+            <a:endParaRPr lang="ru-RU" sz="1800" b="0" u="none" strike="noStrike" dirty="0">
               <a:solidFill>
                 <a:srgbClr val="FFFFFF"/>
               </a:solidFill>
@@ -17151,7 +17858,7 @@
             </a:endParaRPr>
           </a:p>
           <a:p>
-            <a:pPr marL="457200" indent="-343080">
+            <a:pPr marL="457200" indent="-343080" algn="just">
               <a:lnSpc>
                 <a:spcPct val="100000"/>
               </a:lnSpc>
@@ -17165,7 +17872,7 @@
               </a:tabLst>
             </a:pPr>
             <a:r>
-              <a:rPr lang="ru" sz="1800" b="0" u="none" strike="noStrike">
+              <a:rPr lang="ru" sz="1800" b="0" u="none" strike="noStrike" dirty="0" smtClean="0">
                 <a:solidFill>
                   <a:srgbClr val="D6EDFF"/>
                 </a:solidFill>
@@ -17174,9 +17881,9 @@
                 <a:latin typeface="Arial"/>
                 <a:ea typeface="Arial"/>
               </a:rPr>
-              <a:t>Шифрования сообщений</a:t>
-            </a:r>
-            <a:endParaRPr lang="ru-RU" sz="1800" b="0" u="none" strike="noStrike">
+              <a:t>Шифрование сообщений.</a:t>
+            </a:r>
+            <a:endParaRPr lang="ru-RU" sz="1800" b="0" u="none" strike="noStrike" dirty="0">
               <a:solidFill>
                 <a:srgbClr val="FFFFFF"/>
               </a:solidFill>
@@ -17186,7 +17893,7 @@
             </a:endParaRPr>
           </a:p>
           <a:p>
-            <a:pPr marL="457200" indent="-343080">
+            <a:pPr marL="457200" indent="-343080" algn="just">
               <a:lnSpc>
                 <a:spcPct val="100000"/>
               </a:lnSpc>
@@ -17200,7 +17907,7 @@
               </a:tabLst>
             </a:pPr>
             <a:r>
-              <a:rPr lang="ru" sz="1800" b="0" u="none" strike="noStrike">
+              <a:rPr lang="ru" sz="1800" b="0" u="none" strike="noStrike" dirty="0" smtClean="0">
                 <a:solidFill>
                   <a:srgbClr val="D6EDFF"/>
                 </a:solidFill>
@@ -17209,9 +17916,33 @@
                 <a:latin typeface="Arial"/>
                 <a:ea typeface="Arial"/>
               </a:rPr>
-              <a:t>Быстрого отправления частых сообщений</a:t>
-            </a:r>
-            <a:endParaRPr lang="ru-RU" sz="1800" b="0" u="none" strike="noStrike">
+              <a:t>Быстрое отправление </a:t>
+            </a:r>
+            <a:r>
+              <a:rPr lang="ru" sz="1800" b="0" u="none" strike="noStrike" dirty="0">
+                <a:solidFill>
+                  <a:srgbClr val="D6EDFF"/>
+                </a:solidFill>
+                <a:effectLst/>
+                <a:uFillTx/>
+                <a:latin typeface="Arial"/>
+                <a:ea typeface="Arial"/>
+              </a:rPr>
+              <a:t>частых </a:t>
+            </a:r>
+            <a:r>
+              <a:rPr lang="ru" sz="1800" b="0" u="none" strike="noStrike" dirty="0" smtClean="0">
+                <a:solidFill>
+                  <a:srgbClr val="D6EDFF"/>
+                </a:solidFill>
+                <a:effectLst/>
+                <a:uFillTx/>
+                <a:latin typeface="Arial"/>
+                <a:ea typeface="Arial"/>
+              </a:rPr>
+              <a:t>сообщений.</a:t>
+            </a:r>
+            <a:endParaRPr lang="ru-RU" sz="1800" b="0" u="none" strike="noStrike" dirty="0">
               <a:solidFill>
                 <a:srgbClr val="FFFFFF"/>
               </a:solidFill>
@@ -17540,7 +18271,7 @@
         </p:blipFill>
         <p:spPr>
           <a:xfrm>
-            <a:off x="152280" y="1931400"/>
+            <a:off x="290825" y="2132291"/>
             <a:ext cx="571320" cy="571320"/>
           </a:xfrm>
           <a:prstGeom prst="rect">
@@ -17560,8 +18291,8 @@
         </p:nvGrpSpPr>
         <p:grpSpPr>
           <a:xfrm>
-            <a:off x="-170280" y="2381400"/>
-            <a:ext cx="1839960" cy="1034640"/>
+            <a:off x="-163352" y="2810891"/>
+            <a:ext cx="1534953" cy="895200"/>
             <a:chOff x="-170280" y="2381400"/>
             <a:chExt cx="1839960" cy="1034640"/>
           </a:xfrm>
@@ -17573,7 +18304,7 @@
             <p:nvPr/>
           </p:nvPicPr>
           <p:blipFill>
-            <a:blip r:embed="rId4"/>
+            <a:blip r:embed="rId4" cstate="print"/>
             <a:stretch/>
           </p:blipFill>
           <p:spPr>
@@ -17597,7 +18328,7 @@
             <p:nvPr/>
           </p:nvPicPr>
           <p:blipFill>
-            <a:blip r:embed="rId5"/>
+            <a:blip r:embed="rId5" cstate="print"/>
             <a:stretch/>
           </p:blipFill>
           <p:spPr>
@@ -17623,7 +18354,7 @@
         </p:nvSpPr>
         <p:spPr>
           <a:xfrm>
-            <a:off x="360000" y="1779120"/>
+            <a:off x="360000" y="1758338"/>
             <a:ext cx="3814560" cy="461520"/>
           </a:xfrm>
           <a:prstGeom prst="rect">
@@ -17667,7 +18398,7 @@
               </a:tabLst>
             </a:pPr>
             <a:r>
-              <a:rPr lang="ru" sz="1800" b="1" u="none" strike="noStrike">
+              <a:rPr lang="ru" sz="1800" b="1" u="none" strike="noStrike" dirty="0">
                 <a:solidFill>
                   <a:srgbClr val="D6EDFF"/>
                 </a:solidFill>
@@ -17678,7 +18409,7 @@
               </a:rPr>
               <a:t>InspIRCd</a:t>
             </a:r>
-            <a:endParaRPr lang="ru-RU" sz="1800" b="0" u="none" strike="noStrike">
+            <a:endParaRPr lang="ru-RU" sz="1800" b="0" u="none" strike="noStrike" dirty="0">
               <a:solidFill>
                 <a:srgbClr val="FFFFFF"/>
               </a:solidFill>
@@ -17697,8 +18428,8 @@
         </p:nvSpPr>
         <p:spPr>
           <a:xfrm>
-            <a:off x="723960" y="2010240"/>
-            <a:ext cx="3450600" cy="647640"/>
+            <a:off x="1219199" y="2079512"/>
+            <a:ext cx="2944092" cy="680186"/>
           </a:xfrm>
           <a:prstGeom prst="rect">
             <a:avLst/>
@@ -17721,7 +18452,7 @@
           <a:fontRef idx="minor"/>
         </p:style>
         <p:txBody>
-          <a:bodyPr tIns="91440" bIns="91440" anchor="t">
+          <a:bodyPr wrap="square" tIns="91440" bIns="91440" anchor="t">
             <a:spAutoFit/>
           </a:bodyPr>
           <a:lstStyle/>
@@ -17741,7 +18472,7 @@
               </a:tabLst>
             </a:pPr>
             <a:r>
-              <a:rPr lang="ru" sz="1400" b="0" u="none" strike="noStrike">
+              <a:rPr lang="ru" sz="1400" b="0" u="none" strike="noStrike" dirty="0">
                 <a:solidFill>
                   <a:srgbClr val="D6EDFF"/>
                 </a:solidFill>
@@ -17750,9 +18481,21 @@
                 <a:latin typeface="Arial"/>
                 <a:ea typeface="Arial"/>
               </a:rPr>
-              <a:t>Модульный, легкий, современный IRC-сервер</a:t>
-            </a:r>
-            <a:endParaRPr lang="ru-RU" sz="1400" b="0" u="none" strike="noStrike">
+              <a:t>Модульный, легкий, современный </a:t>
+            </a:r>
+            <a:r>
+              <a:rPr lang="ru" sz="1400" b="0" u="none" strike="noStrike" dirty="0" smtClean="0">
+                <a:solidFill>
+                  <a:srgbClr val="D6EDFF"/>
+                </a:solidFill>
+                <a:effectLst/>
+                <a:uFillTx/>
+                <a:latin typeface="Arial"/>
+                <a:ea typeface="Arial"/>
+              </a:rPr>
+              <a:t>IRC-сервер.</a:t>
+            </a:r>
+            <a:endParaRPr lang="ru-RU" sz="1400" b="0" u="none" strike="noStrike" dirty="0">
               <a:solidFill>
                 <a:srgbClr val="FFFFFF"/>
               </a:solidFill>
@@ -17771,7 +18514,7 @@
         </p:nvSpPr>
         <p:spPr>
           <a:xfrm>
-            <a:off x="360000" y="2459520"/>
+            <a:off x="401563" y="2688119"/>
             <a:ext cx="3814560" cy="461520"/>
           </a:xfrm>
           <a:prstGeom prst="rect">
@@ -17815,7 +18558,7 @@
               </a:tabLst>
             </a:pPr>
             <a:r>
-              <a:rPr lang="ru" sz="1800" b="1" u="none" strike="noStrike">
+              <a:rPr lang="ru" sz="1800" b="1" u="none" strike="noStrike" dirty="0">
                 <a:solidFill>
                   <a:srgbClr val="D6EDFF"/>
                 </a:solidFill>
@@ -17826,7 +18569,7 @@
               </a:rPr>
               <a:t>SQLite</a:t>
             </a:r>
-            <a:endParaRPr lang="ru-RU" sz="1800" b="0" u="none" strike="noStrike">
+            <a:endParaRPr lang="ru-RU" sz="1800" b="0" u="none" strike="noStrike" dirty="0">
               <a:solidFill>
                 <a:srgbClr val="FFFFFF"/>
               </a:solidFill>
@@ -17845,8 +18588,8 @@
         </p:nvSpPr>
         <p:spPr>
           <a:xfrm>
-            <a:off x="1280880" y="2690280"/>
-            <a:ext cx="2893680" cy="647640"/>
+            <a:off x="1190823" y="3043571"/>
+            <a:ext cx="2951685" cy="680186"/>
           </a:xfrm>
           <a:prstGeom prst="rect">
             <a:avLst/>
@@ -17869,7 +18612,7 @@
           <a:fontRef idx="minor"/>
         </p:style>
         <p:txBody>
-          <a:bodyPr tIns="91440" bIns="91440" anchor="t">
+          <a:bodyPr wrap="square" tIns="91440" bIns="91440" anchor="t">
             <a:spAutoFit/>
           </a:bodyPr>
           <a:lstStyle/>
@@ -17889,7 +18632,7 @@
               </a:tabLst>
             </a:pPr>
             <a:r>
-              <a:rPr lang="ru" sz="1400" b="0" u="none" strike="noStrike">
+              <a:rPr lang="ru" sz="1400" b="0" u="none" strike="noStrike" dirty="0">
                 <a:solidFill>
                   <a:srgbClr val="D6EDFF"/>
                 </a:solidFill>
@@ -17898,9 +18641,21 @@
                 <a:latin typeface="Arial"/>
                 <a:ea typeface="Arial"/>
               </a:rPr>
-              <a:t>Надёжное и лёгкое решение для  DB</a:t>
-            </a:r>
-            <a:endParaRPr lang="ru-RU" sz="1400" b="0" u="none" strike="noStrike">
+              <a:t>Надёжное и лёгкое решение для  </a:t>
+            </a:r>
+            <a:r>
+              <a:rPr lang="ru" sz="1400" b="0" u="none" strike="noStrike" dirty="0" smtClean="0">
+                <a:solidFill>
+                  <a:srgbClr val="D6EDFF"/>
+                </a:solidFill>
+                <a:effectLst/>
+                <a:uFillTx/>
+                <a:latin typeface="Arial"/>
+                <a:ea typeface="Arial"/>
+              </a:rPr>
+              <a:t>DB.</a:t>
+            </a:r>
+            <a:endParaRPr lang="ru-RU" sz="1400" b="0" u="none" strike="noStrike" dirty="0">
               <a:solidFill>
                 <a:srgbClr val="FFFFFF"/>
               </a:solidFill>
@@ -17923,7 +18678,7 @@
         </p:blipFill>
         <p:spPr>
           <a:xfrm>
-            <a:off x="4208760" y="1854000"/>
+            <a:off x="4458142" y="1895563"/>
             <a:ext cx="726120" cy="726120"/>
           </a:xfrm>
           <a:prstGeom prst="rect">
@@ -18017,8 +18772,8 @@
         </p:nvSpPr>
         <p:spPr>
           <a:xfrm>
-            <a:off x="4935960" y="2008800"/>
-            <a:ext cx="3450600" cy="647640"/>
+            <a:off x="5237018" y="2078073"/>
+            <a:ext cx="3149542" cy="680186"/>
           </a:xfrm>
           <a:prstGeom prst="rect">
             <a:avLst/>
@@ -18041,7 +18796,7 @@
           <a:fontRef idx="minor"/>
         </p:style>
         <p:txBody>
-          <a:bodyPr tIns="91440" bIns="91440" anchor="t">
+          <a:bodyPr wrap="square" tIns="91440" bIns="91440" anchor="t">
             <a:spAutoFit/>
           </a:bodyPr>
           <a:lstStyle/>
@@ -18061,7 +18816,7 @@
               </a:tabLst>
             </a:pPr>
             <a:r>
-              <a:rPr lang="ru" sz="1400" b="0" u="none" strike="noStrike">
+              <a:rPr lang="ru" sz="1400" b="0" u="none" strike="noStrike" dirty="0">
                 <a:solidFill>
                   <a:srgbClr val="D6EDFF"/>
                 </a:solidFill>
@@ -18070,9 +18825,21 @@
                 <a:latin typeface="Arial"/>
                 <a:ea typeface="Arial"/>
               </a:rPr>
-              <a:t>Современный интерфейс с server-side рендерингом</a:t>
-            </a:r>
-            <a:endParaRPr lang="ru-RU" sz="1400" b="0" u="none" strike="noStrike">
+              <a:t>Современный интерфейс с server-side </a:t>
+            </a:r>
+            <a:r>
+              <a:rPr lang="ru" sz="1400" b="0" u="none" strike="noStrike" dirty="0" smtClean="0">
+                <a:solidFill>
+                  <a:srgbClr val="D6EDFF"/>
+                </a:solidFill>
+                <a:effectLst/>
+                <a:uFillTx/>
+                <a:latin typeface="Arial"/>
+                <a:ea typeface="Arial"/>
+              </a:rPr>
+              <a:t>рендерингом.</a:t>
+            </a:r>
+            <a:endParaRPr lang="ru-RU" sz="1400" b="0" u="none" strike="noStrike" dirty="0">
               <a:solidFill>
                 <a:srgbClr val="FFFFFF"/>
               </a:solidFill>
@@ -18090,12 +18857,12 @@
           <p:nvPr/>
         </p:nvPicPr>
         <p:blipFill>
-          <a:blip r:embed="rId7"/>
+          <a:blip r:embed="rId7" cstate="print"/>
           <a:stretch/>
         </p:blipFill>
         <p:spPr>
           <a:xfrm>
-            <a:off x="152280" y="3459600"/>
+            <a:off x="353171" y="4020709"/>
             <a:ext cx="584640" cy="461520"/>
           </a:xfrm>
           <a:prstGeom prst="rect">
@@ -18115,7 +18882,7 @@
         </p:nvSpPr>
         <p:spPr>
           <a:xfrm>
-            <a:off x="360000" y="3195360"/>
+            <a:off x="436201" y="3576360"/>
             <a:ext cx="3814560" cy="461520"/>
           </a:xfrm>
           <a:prstGeom prst="rect">
@@ -18159,7 +18926,7 @@
               </a:tabLst>
             </a:pPr>
             <a:r>
-              <a:rPr lang="ru" sz="1800" b="1" u="none" strike="noStrike">
+              <a:rPr lang="ru" sz="1800" b="1" u="none" strike="noStrike" dirty="0">
                 <a:solidFill>
                   <a:srgbClr val="D6EDFF"/>
                 </a:solidFill>
@@ -18170,7 +18937,7 @@
               </a:rPr>
               <a:t>Docker</a:t>
             </a:r>
-            <a:endParaRPr lang="ru-RU" sz="1800" b="0" u="none" strike="noStrike">
+            <a:endParaRPr lang="ru-RU" sz="1800" b="0" u="none" strike="noStrike" dirty="0">
               <a:solidFill>
                 <a:srgbClr val="FFFFFF"/>
               </a:solidFill>
@@ -18189,8 +18956,8 @@
         </p:nvSpPr>
         <p:spPr>
           <a:xfrm>
-            <a:off x="723960" y="3426480"/>
-            <a:ext cx="3450600" cy="399960"/>
+            <a:off x="1198418" y="3862899"/>
+            <a:ext cx="3027218" cy="680186"/>
           </a:xfrm>
           <a:prstGeom prst="rect">
             <a:avLst/>
@@ -18213,7 +18980,7 @@
           <a:fontRef idx="minor"/>
         </p:style>
         <p:txBody>
-          <a:bodyPr tIns="91440" bIns="91440" anchor="t">
+          <a:bodyPr wrap="square" tIns="91440" bIns="91440" anchor="t">
             <a:spAutoFit/>
           </a:bodyPr>
           <a:lstStyle/>
@@ -18242,7 +19009,19 @@
                 <a:latin typeface="Arial"/>
                 <a:ea typeface="Arial"/>
               </a:rPr>
-              <a:t>Безопасная контейнеризация сервисов</a:t>
+              <a:t>Безопасная контейнеризация </a:t>
+            </a:r>
+            <a:r>
+              <a:rPr lang="ru" sz="1400" b="0" u="none" strike="noStrike" dirty="0" smtClean="0">
+                <a:solidFill>
+                  <a:srgbClr val="D6EDFF"/>
+                </a:solidFill>
+                <a:effectLst/>
+                <a:uFillTx/>
+                <a:latin typeface="Arial"/>
+                <a:ea typeface="Arial"/>
+              </a:rPr>
+              <a:t>сервисов.</a:t>
             </a:r>
             <a:endParaRPr lang="ru-RU" sz="1400" b="0" u="none" strike="noStrike" dirty="0">
               <a:solidFill>
@@ -18443,35 +19222,35 @@
                 <a:gridCol w="788760">
                   <a:extLst>
                     <a:ext uri="{9D8B030D-6E8A-4147-A177-3AD203B41FA5}">
-                      <a16:colId xmlns:a16="http://schemas.microsoft.com/office/drawing/2014/main" val="20000"/>
+                      <a16:colId xmlns="" xmlns:a16="http://schemas.microsoft.com/office/drawing/2014/main" val="20000"/>
                     </a:ext>
                   </a:extLst>
                 </a:gridCol>
                 <a:gridCol w="788760">
                   <a:extLst>
                     <a:ext uri="{9D8B030D-6E8A-4147-A177-3AD203B41FA5}">
-                      <a16:colId xmlns:a16="http://schemas.microsoft.com/office/drawing/2014/main" val="20001"/>
+                      <a16:colId xmlns="" xmlns:a16="http://schemas.microsoft.com/office/drawing/2014/main" val="20001"/>
                     </a:ext>
                   </a:extLst>
                 </a:gridCol>
                 <a:gridCol w="788400">
                   <a:extLst>
                     <a:ext uri="{9D8B030D-6E8A-4147-A177-3AD203B41FA5}">
-                      <a16:colId xmlns:a16="http://schemas.microsoft.com/office/drawing/2014/main" val="20002"/>
+                      <a16:colId xmlns="" xmlns:a16="http://schemas.microsoft.com/office/drawing/2014/main" val="20002"/>
                     </a:ext>
                   </a:extLst>
                 </a:gridCol>
                 <a:gridCol w="1223280">
                   <a:extLst>
                     <a:ext uri="{9D8B030D-6E8A-4147-A177-3AD203B41FA5}">
-                      <a16:colId xmlns:a16="http://schemas.microsoft.com/office/drawing/2014/main" val="20003"/>
+                      <a16:colId xmlns="" xmlns:a16="http://schemas.microsoft.com/office/drawing/2014/main" val="20003"/>
                     </a:ext>
                   </a:extLst>
                 </a:gridCol>
                 <a:gridCol w="1148040">
                   <a:extLst>
                     <a:ext uri="{9D8B030D-6E8A-4147-A177-3AD203B41FA5}">
-                      <a16:colId xmlns:a16="http://schemas.microsoft.com/office/drawing/2014/main" val="20004"/>
+                      <a16:colId xmlns="" xmlns:a16="http://schemas.microsoft.com/office/drawing/2014/main" val="20004"/>
                     </a:ext>
                   </a:extLst>
                 </a:gridCol>
@@ -18484,7 +19263,7 @@
                     <a:p>
                       <a:pPr algn="ctr"/>
                       <a:r>
-                        <a:rPr lang="ru-RU" sz="1000" b="1" u="none" strike="noStrike">
+                        <a:rPr lang="ru-RU" sz="1000" b="1" u="none" strike="noStrike" dirty="0">
                           <a:solidFill>
                             <a:srgbClr val="FFFFFF"/>
                           </a:solidFill>
@@ -18724,7 +19503,7 @@
                 </a:tc>
                 <a:extLst>
                   <a:ext uri="{0D108BD9-81ED-4DB2-BD59-A6C34878D82A}">
-                    <a16:rowId xmlns:a16="http://schemas.microsoft.com/office/drawing/2014/main" val="10000"/>
+                    <a16:rowId xmlns="" xmlns:a16="http://schemas.microsoft.com/office/drawing/2014/main" val="10000"/>
                   </a:ext>
                 </a:extLst>
               </a:tr>
@@ -18975,7 +19754,7 @@
                 </a:tc>
                 <a:extLst>
                   <a:ext uri="{0D108BD9-81ED-4DB2-BD59-A6C34878D82A}">
-                    <a16:rowId xmlns:a16="http://schemas.microsoft.com/office/drawing/2014/main" val="10001"/>
+                    <a16:rowId xmlns="" xmlns:a16="http://schemas.microsoft.com/office/drawing/2014/main" val="10001"/>
                   </a:ext>
                 </a:extLst>
               </a:tr>
@@ -19085,7 +19864,7 @@
                     <a:p>
                       <a:pPr algn="ctr"/>
                       <a:r>
-                        <a:rPr lang="ru-RU" sz="1000" b="0" u="none" strike="noStrike">
+                        <a:rPr lang="ru-RU" sz="1000" b="0" u="none" strike="noStrike" dirty="0">
                           <a:solidFill>
                             <a:srgbClr val="000000"/>
                           </a:solidFill>
@@ -19226,7 +20005,7 @@
                 </a:tc>
                 <a:extLst>
                   <a:ext uri="{0D108BD9-81ED-4DB2-BD59-A6C34878D82A}">
-                    <a16:rowId xmlns:a16="http://schemas.microsoft.com/office/drawing/2014/main" val="10002"/>
+                    <a16:rowId xmlns="" xmlns:a16="http://schemas.microsoft.com/office/drawing/2014/main" val="10002"/>
                   </a:ext>
                 </a:extLst>
               </a:tr>
@@ -19477,7 +20256,7 @@
                 </a:tc>
                 <a:extLst>
                   <a:ext uri="{0D108BD9-81ED-4DB2-BD59-A6C34878D82A}">
-                    <a16:rowId xmlns:a16="http://schemas.microsoft.com/office/drawing/2014/main" val="10003"/>
+                    <a16:rowId xmlns="" xmlns:a16="http://schemas.microsoft.com/office/drawing/2014/main" val="10003"/>
                   </a:ext>
                 </a:extLst>
               </a:tr>
@@ -19728,7 +20507,7 @@
                 </a:tc>
                 <a:extLst>
                   <a:ext uri="{0D108BD9-81ED-4DB2-BD59-A6C34878D82A}">
-                    <a16:rowId xmlns:a16="http://schemas.microsoft.com/office/drawing/2014/main" val="10004"/>
+                    <a16:rowId xmlns="" xmlns:a16="http://schemas.microsoft.com/office/drawing/2014/main" val="10004"/>
                   </a:ext>
                 </a:extLst>
               </a:tr>
@@ -19754,35 +20533,35 @@
                 <a:gridCol w="812880">
                   <a:extLst>
                     <a:ext uri="{9D8B030D-6E8A-4147-A177-3AD203B41FA5}">
-                      <a16:colId xmlns:a16="http://schemas.microsoft.com/office/drawing/2014/main" val="20000"/>
+                      <a16:colId xmlns="" xmlns:a16="http://schemas.microsoft.com/office/drawing/2014/main" val="20000"/>
                     </a:ext>
                   </a:extLst>
                 </a:gridCol>
                 <a:gridCol w="377280">
                   <a:extLst>
                     <a:ext uri="{9D8B030D-6E8A-4147-A177-3AD203B41FA5}">
-                      <a16:colId xmlns:a16="http://schemas.microsoft.com/office/drawing/2014/main" val="20001"/>
+                      <a16:colId xmlns="" xmlns:a16="http://schemas.microsoft.com/office/drawing/2014/main" val="20001"/>
                     </a:ext>
                   </a:extLst>
                 </a:gridCol>
                 <a:gridCol w="637920">
                   <a:extLst>
                     <a:ext uri="{9D8B030D-6E8A-4147-A177-3AD203B41FA5}">
-                      <a16:colId xmlns:a16="http://schemas.microsoft.com/office/drawing/2014/main" val="20002"/>
+                      <a16:colId xmlns="" xmlns:a16="http://schemas.microsoft.com/office/drawing/2014/main" val="20002"/>
                     </a:ext>
                   </a:extLst>
                 </a:gridCol>
                 <a:gridCol w="812880">
                   <a:extLst>
                     <a:ext uri="{9D8B030D-6E8A-4147-A177-3AD203B41FA5}">
-                      <a16:colId xmlns:a16="http://schemas.microsoft.com/office/drawing/2014/main" val="20003"/>
+                      <a16:colId xmlns="" xmlns:a16="http://schemas.microsoft.com/office/drawing/2014/main" val="20003"/>
                     </a:ext>
                   </a:extLst>
                 </a:gridCol>
                 <a:gridCol w="718920">
                   <a:extLst>
                     <a:ext uri="{9D8B030D-6E8A-4147-A177-3AD203B41FA5}">
-                      <a16:colId xmlns:a16="http://schemas.microsoft.com/office/drawing/2014/main" val="20004"/>
+                      <a16:colId xmlns="" xmlns:a16="http://schemas.microsoft.com/office/drawing/2014/main" val="20004"/>
                     </a:ext>
                   </a:extLst>
                 </a:gridCol>
@@ -20035,7 +20814,7 @@
                 </a:tc>
                 <a:extLst>
                   <a:ext uri="{0D108BD9-81ED-4DB2-BD59-A6C34878D82A}">
-                    <a16:rowId xmlns:a16="http://schemas.microsoft.com/office/drawing/2014/main" val="10000"/>
+                    <a16:rowId xmlns="" xmlns:a16="http://schemas.microsoft.com/office/drawing/2014/main" val="10000"/>
                   </a:ext>
                 </a:extLst>
               </a:tr>
@@ -20286,7 +21065,7 @@
                 </a:tc>
                 <a:extLst>
                   <a:ext uri="{0D108BD9-81ED-4DB2-BD59-A6C34878D82A}">
-                    <a16:rowId xmlns:a16="http://schemas.microsoft.com/office/drawing/2014/main" val="10001"/>
+                    <a16:rowId xmlns="" xmlns:a16="http://schemas.microsoft.com/office/drawing/2014/main" val="10001"/>
                   </a:ext>
                 </a:extLst>
               </a:tr>
@@ -20537,7 +21316,7 @@
                 </a:tc>
                 <a:extLst>
                   <a:ext uri="{0D108BD9-81ED-4DB2-BD59-A6C34878D82A}">
-                    <a16:rowId xmlns:a16="http://schemas.microsoft.com/office/drawing/2014/main" val="10002"/>
+                    <a16:rowId xmlns="" xmlns:a16="http://schemas.microsoft.com/office/drawing/2014/main" val="10002"/>
                   </a:ext>
                 </a:extLst>
               </a:tr>
@@ -20788,7 +21567,7 @@
                 </a:tc>
                 <a:extLst>
                   <a:ext uri="{0D108BD9-81ED-4DB2-BD59-A6C34878D82A}">
-                    <a16:rowId xmlns:a16="http://schemas.microsoft.com/office/drawing/2014/main" val="10003"/>
+                    <a16:rowId xmlns="" xmlns:a16="http://schemas.microsoft.com/office/drawing/2014/main" val="10003"/>
                   </a:ext>
                 </a:extLst>
               </a:tr>
@@ -21039,7 +21818,7 @@
                 </a:tc>
                 <a:extLst>
                   <a:ext uri="{0D108BD9-81ED-4DB2-BD59-A6C34878D82A}">
-                    <a16:rowId xmlns:a16="http://schemas.microsoft.com/office/drawing/2014/main" val="10004"/>
+                    <a16:rowId xmlns="" xmlns:a16="http://schemas.microsoft.com/office/drawing/2014/main" val="10004"/>
                   </a:ext>
                 </a:extLst>
               </a:tr>
